--- a/Arquitectura de Sistemas Computacionales/Clases/Clase 1 - Introduccion a arquitecturas cloud/Presentacion.pptx
+++ b/Arquitectura de Sistemas Computacionales/Clases/Clase 1 - Introduccion a arquitecturas cloud/Presentacion.pptx
@@ -3377,7 +3377,7 @@
                 </a:solidFill>
                 <a:latin typeface="Calibri"/>
               </a:rPr>
-              <a:t> · Teoría breve · Taller PI · Quiz/cierre.</a:t>
+              <a:t> · Teoría breve · Taller PI · cierre.</a:t>
             </a:r>
           </a:p>
           <a:p>
@@ -4542,7 +4542,7 @@
                 </a:solidFill>
                 <a:latin typeface="Calibri"/>
               </a:rPr>
-              <a:t> Quiz corto / revisión de evidencias.</a:t>
+              <a:t> Revisión de evidencias del PI.</a:t>
             </a:r>
           </a:p>
           <a:p>

--- a/Arquitectura de Sistemas Computacionales/Clases/Clase 1 - Introduccion a arquitecturas cloud/Presentacion.pptx
+++ b/Arquitectura de Sistemas Computacionales/Clases/Clase 1 - Introduccion a arquitecturas cloud/Presentacion.pptx
@@ -3850,7 +3850,7 @@
                 </a:solidFill>
                 <a:latin typeface="Calibri"/>
               </a:rPr>
-              <a:t>Subir evidencias al paquete CloudLite (Drive/repo) y a ExamLab domingo 23:59.</a:t>
+              <a:t>Subir evidencias al paquete CloudLite (Drive/repo) y a ExamLab (https://examlab.lovable.app/) domingo 23:59.</a:t>
             </a:r>
           </a:p>
         </p:txBody>

--- a/Arquitectura de Sistemas Computacionales/Clases/Clase 1 - Introduccion a arquitecturas cloud/Presentacion.pptx
+++ b/Arquitectura de Sistemas Computacionales/Clases/Clase 1 - Introduccion a arquitecturas cloud/Presentacion.pptx
@@ -6847,7 +6847,7 @@
                 </a:solidFill>
                 <a:latin typeface="Calibri"/>
               </a:rPr>
-              <a:t> Formen equipo de 2–3 (o individual autorizado).</a:t>
+              <a:t> Paso 1: conforme el equipo de 2 o 3 integrantes y registre en la ficha del PI el nombre del equipo mas un rol unico por integrante (responsable de diagramas, responsable de informe, responsable de laboratorio), verificando que ningun integrante tenga dos roles y que el nombre del equipo quede escrito igual en la ficha y en la pregunta 1 del taller de ExamLab.</a:t>
             </a:r>
           </a:p>
           <a:p>
@@ -6881,7 +6881,7 @@
                 </a:solidFill>
                 <a:latin typeface="Calibri"/>
               </a:rPr>
-              <a:t> Elijan dominio concreto (no «red social genérica»).</a:t>
+              <a:t> Paso 2: elija un dominio concreto entre AgendaU, BiblioLite, InventarioLab, TurnosClinica o EventosCampus (o uno propio del mismo tamano) y escriba el problema en exactamente 3 frases: quien sufre el problema, como se resuelve hoy sin CloudLite y una cifra medible del dolor (por ejemplo 40 correos por semana para cuadrar 12 asesorias), verificando que en ninguna de las 3 frases aparezca una expresion generica como app de la universidad o red social; el resultado queda en la seccion 1 Dominio y problema del informe del PI.</a:t>
             </a:r>
           </a:p>
           <a:p>
@@ -6915,7 +6915,7 @@
                 </a:solidFill>
                 <a:latin typeface="Calibri"/>
               </a:rPr>
-              <a:t> Escriban: problema (2–3 frases), 3–5 capacidades, 2–3 actores.</a:t>
+              <a:t> Paso 3: liste exactamente 4 capacidades con la forma verbo mas objeto de negocio (reservar cita, publicar cupo, cancelar reserva, notificar recordatorio), 3 actores humanos con lo que espera cada uno y 3 elementos de fuera de alcance, verificando que ninguna capacidad nombre tecnologia (nada de usar PostgreSQL ni desplegar en Docker) y que las 4 capacidades se lean como frases del negocio; queda en la seccion 1 del informe y se pega tal cual en la pregunta 1 de ExamLab.</a:t>
             </a:r>
           </a:p>
           <a:p>
@@ -6949,25 +6949,7 @@
                 </a:solidFill>
                 <a:latin typeface="Calibri"/>
               </a:rPr>
-              <a:t> En Excalidraw o draw.io: diagrama </a:t>
-            </a:r>
-            <a:r>
-              <a:rPr sz="1600" b="1" i="0">
-                <a:solidFill>
-                  <a:srgbClr val="333333"/>
-                </a:solidFill>
-                <a:latin typeface="Calibri"/>
-              </a:rPr>
-              <a:t>C4 Context</a:t>
-            </a:r>
-            <a:r>
-              <a:rPr sz="1600" b="0" i="0">
-                <a:solidFill>
-                  <a:srgbClr val="333333"/>
-                </a:solidFill>
-                <a:latin typeface="Calibri"/>
-              </a:rPr>
-              <a:t> (CloudLite + actores + sistemas externos).</a:t>
+              <a:t> Paso 4: escriba en la pregunta de tipo diagrama de ExamLab el C4 Context en Mermaid con exactamente 1 System para CloudLite, 2 Person, 2 System_Ext y 5 relaciones etiquetadas con verbo de negocio y protocolo, verificando al renderizar dentro de la plataforma que no aparezca ninguna caja interna (ni base de datos ni API ni worker, eso es Clase 4) y que cada flecha se lea en voz alta como una frase completa.</a:t>
             </a:r>
           </a:p>
           <a:p>
@@ -7001,25 +6983,7 @@
                 </a:solidFill>
                 <a:latin typeface="Calibri"/>
               </a:rPr>
-              <a:t> Entrega en </a:t>
-            </a:r>
-            <a:r>
-              <a:rPr sz="1600" b="1" i="0">
-                <a:solidFill>
-                  <a:srgbClr val="333333"/>
-                </a:solidFill>
-                <a:latin typeface="Calibri"/>
-              </a:rPr>
-              <a:t>ExamLab</a:t>
-            </a:r>
-            <a:r>
-              <a:rPr sz="1600" b="0" i="0">
-                <a:solidFill>
-                  <a:srgbClr val="333333"/>
-                </a:solidFill>
-                <a:latin typeface="Calibri"/>
-              </a:rPr>
-              <a:t> (Talleres): Doc/enlace con ficha + PNG del diagrama (domingo 23:59).</a:t>
+              <a:t> Paso 5: resuelva la tabla comparativa de 4 filas nube frente a on-premise, cierre con el veredicto de 2 frases que sera la entrada del ADR-001 de la Clase 2, y suba a ExamLab (modulo Talleres) las 5 preguntas resueltas antes del domingo 23:59, verificando que la ficha, el diagrama renderizado y el veredicto usen exactamente los mismos nombres de actores y de sistemas externos.</a:t>
             </a:r>
           </a:p>
         </p:txBody>

--- a/Arquitectura de Sistemas Computacionales/Clases/Clase 1 - Introduccion a arquitecturas cloud/Presentacion.pptx
+++ b/Arquitectura de Sistemas Computacionales/Clases/Clase 1 - Introduccion a arquitecturas cloud/Presentacion.pptx
@@ -4517,7 +4517,7 @@
                 </a:solidFill>
                 <a:latin typeface="Calibri"/>
               </a:rPr>
-              <a:t> Taller guiado PI (demo en vivo + trabajo de equipo).</a:t>
+              <a:t> Taller guiado PI (demo en vivo + avance individual).</a:t>
             </a:r>
           </a:p>
           <a:p>
@@ -5168,7 +5168,23 @@
                 </a:solidFill>
                 <a:latin typeface="Calibri"/>
               </a:rPr>
-              <a:t>–   Equipos 2–3 · todos deben poder explicar el artefacto.</a:t>
+              <a:t>–   Ficha de 6 bloques: DOMINIO · PROBLEMA · CAPACIDADES · ACTORES · SISTEMAS EXTERNOS · FUERA DE ALCANCE.</a:t>
+            </a:r>
+          </a:p>
+          <a:p>
+            <a:pPr>
+              <a:spcAft>
+                <a:spcPts val="800"/>
+              </a:spcAft>
+            </a:pPr>
+            <a:r>
+              <a:rPr sz="1600" b="0" i="0">
+                <a:solidFill>
+                  <a:srgbClr val="333333"/>
+                </a:solidFill>
+                <a:latin typeface="Calibri"/>
+              </a:rPr>
+              <a:t>–   Actividad individual: cada estudiante define su propio dominio CloudLite.</a:t>
             </a:r>
           </a:p>
         </p:txBody>
@@ -5776,7 +5792,7 @@
                 </a:solidFill>
                 <a:latin typeface="Calibri"/>
               </a:rPr>
-              <a:t>–   Sin AWS/GCP/Oracle: draw.io, Play with Docker, GitHub Actions.</a:t>
+              <a:t>–   Sin AWS/GCP/Oracle: draw.io, LabEx Docker Playground, GitHub Actions.</a:t>
             </a:r>
           </a:p>
         </p:txBody>
@@ -6847,7 +6863,7 @@
                 </a:solidFill>
                 <a:latin typeface="Calibri"/>
               </a:rPr>
-              <a:t> Paso 1: conforme el equipo de 2 o 3 integrantes y registre en la ficha del PI el nombre del equipo mas un rol unico por integrante (responsable de diagramas, responsable de informe, responsable de laboratorio), verificando que ningun integrante tenga dos roles y que el nombre del equipo quede escrito igual en la ficha y en la pregunta 1 del taller de ExamLab.</a:t>
+              <a:t> Paso 1: elija un dominio concreto entre AgendaU, BiblioLite, InventarioLab, TurnosClinica o EventosCampus (o uno propio del mismo tamano) y escriba el problema en exactamente 3 frases: quien sufre el problema, como se resuelve hoy sin CloudLite y una cifra medible del dolor (por ejemplo 40 correos por semana para cuadrar 12 asesorias), verificando que en ninguna de las 3 frases aparezca una expresion generica como app de la universidad o red social; el resultado queda en la seccion 1 Dominio y problema del informe del PI.</a:t>
             </a:r>
           </a:p>
           <a:p>
@@ -6881,7 +6897,7 @@
                 </a:solidFill>
                 <a:latin typeface="Calibri"/>
               </a:rPr>
-              <a:t> Paso 2: elija un dominio concreto entre AgendaU, BiblioLite, InventarioLab, TurnosClinica o EventosCampus (o uno propio del mismo tamano) y escriba el problema en exactamente 3 frases: quien sufre el problema, como se resuelve hoy sin CloudLite y una cifra medible del dolor (por ejemplo 40 correos por semana para cuadrar 12 asesorias), verificando que en ninguna de las 3 frases aparezca una expresion generica como app de la universidad o red social; el resultado queda en la seccion 1 Dominio y problema del informe del PI.</a:t>
+              <a:t> Paso 2: liste exactamente 4 capacidades con la forma verbo mas objeto de negocio (reservar cita, publicar cupo, cancelar reserva, notificar recordatorio), 3 actores humanos con lo que espera cada uno, 2 o 3 sistemas externos con los que CloudLite intercambia informacion (por ejemplo proveedor de identidad, correo transaccional o pasarela de pagos) y 3 elementos de fuera de alcance, verificando que ninguna capacidad nombre tecnologia (nada de usar PostgreSQL ni desplegar en Docker) y que las 4 capacidades se lean como frases del negocio; queda en la seccion 1 del informe y se pega tal cual en la pregunta 1 de ExamLab.</a:t>
             </a:r>
           </a:p>
           <a:p>
@@ -6915,7 +6931,7 @@
                 </a:solidFill>
                 <a:latin typeface="Calibri"/>
               </a:rPr>
-              <a:t> Paso 3: liste exactamente 4 capacidades con la forma verbo mas objeto de negocio (reservar cita, publicar cupo, cancelar reserva, notificar recordatorio), 3 actores humanos con lo que espera cada uno y 3 elementos de fuera de alcance, verificando que ninguna capacidad nombre tecnologia (nada de usar PostgreSQL ni desplegar en Docker) y que las 4 capacidades se lean como frases del negocio; queda en la seccion 1 del informe y se pega tal cual en la pregunta 1 de ExamLab.</a:t>
+              <a:t> Paso 3: escriba en la pregunta de tipo diagrama de ExamLab el C4 Context en Mermaid con exactamente 1 System para CloudLite, 2 Person, 2 System_Ext y 5 relaciones etiquetadas con verbo de negocio y protocolo, verificando al renderizar dentro de la plataforma que no aparezca ninguna caja interna (ni base de datos ni API ni worker, eso es Clase 4) y que cada flecha se lea en voz alta como una frase completa.</a:t>
             </a:r>
           </a:p>
           <a:p>
@@ -6949,41 +6965,7 @@
                 </a:solidFill>
                 <a:latin typeface="Calibri"/>
               </a:rPr>
-              <a:t> Paso 4: escriba en la pregunta de tipo diagrama de ExamLab el C4 Context en Mermaid con exactamente 1 System para CloudLite, 2 Person, 2 System_Ext y 5 relaciones etiquetadas con verbo de negocio y protocolo, verificando al renderizar dentro de la plataforma que no aparezca ninguna caja interna (ni base de datos ni API ni worker, eso es Clase 4) y que cada flecha se lea en voz alta como una frase completa.</a:t>
-            </a:r>
-          </a:p>
-          <a:p>
-            <a:pPr>
-              <a:spcAft>
-                <a:spcPts val="800"/>
-              </a:spcAft>
-            </a:pPr>
-            <a:r>
-              <a:rPr sz="1600" b="0" i="0">
-                <a:solidFill>
-                  <a:srgbClr val="333333"/>
-                </a:solidFill>
-                <a:latin typeface="Calibri"/>
-              </a:rPr>
-              <a:t>–   </a:t>
-            </a:r>
-            <a:r>
-              <a:rPr sz="1600" b="1" i="0">
-                <a:solidFill>
-                  <a:srgbClr val="333333"/>
-                </a:solidFill>
-                <a:latin typeface="Calibri"/>
-              </a:rPr>
-              <a:t>5.</a:t>
-            </a:r>
-            <a:r>
-              <a:rPr sz="1600" b="0" i="0">
-                <a:solidFill>
-                  <a:srgbClr val="333333"/>
-                </a:solidFill>
-                <a:latin typeface="Calibri"/>
-              </a:rPr>
-              <a:t> Paso 5: resuelva la tabla comparativa de 4 filas nube frente a on-premise, cierre con el veredicto de 2 frases que sera la entrada del ADR-001 de la Clase 2, y suba a ExamLab (modulo Talleres) las 5 preguntas resueltas antes del domingo 23:59, verificando que la ficha, el diagrama renderizado y el veredicto usen exactamente los mismos nombres de actores y de sistemas externos.</a:t>
+              <a:t> Paso 4: resuelva la tabla comparativa de 4 filas nube frente a on-premise, cierre con el veredicto de 2 frases que sera la entrada del ADR-001 de la Clase 2, y suba a ExamLab (modulo Talleres) las 5 preguntas resueltas antes del domingo 23:59, verificando que la ficha, el diagrama renderizado y el veredicto usen exactamente los mismos nombres de actores y de sistemas externos.</a:t>
             </a:r>
           </a:p>
         </p:txBody>

--- a/Arquitectura de Sistemas Computacionales/Clases/Clase 1 - Introduccion a arquitecturas cloud/Presentacion.pptx
+++ b/Arquitectura de Sistemas Computacionales/Clases/Clase 1 - Introduccion a arquitecturas cloud/Presentacion.pptx
@@ -3850,7 +3850,7 @@
                 </a:solidFill>
                 <a:latin typeface="Calibri"/>
               </a:rPr>
-              <a:t>Subir evidencias al paquete CloudLite (Drive/repo) y a ExamLab (https://examlab.lovable.app/) domingo 23:59.</a:t>
+              <a:t>Subir evidencias al paquete CloudLite (Drive/repo) y a ExamLab (https://uniaj.examlab.workers.dev/) domingo 23:59.</a:t>
             </a:r>
           </a:p>
         </p:txBody>

--- a/Arquitectura de Sistemas Computacionales/Clases/Clase 1 - Introduccion a arquitecturas cloud/Presentacion.pptx
+++ b/Arquitectura de Sistemas Computacionales/Clases/Clase 1 - Introduccion a arquitecturas cloud/Presentacion.pptx
@@ -16,6 +16,8 @@
     <p:sldId id="264" r:id="rId15"/>
     <p:sldId id="265" r:id="rId16"/>
     <p:sldId id="266" r:id="rId17"/>
+    <p:sldId id="267" r:id="rId18"/>
+    <p:sldId id="268" r:id="rId19"/>
   </p:sldIdLst>
   <p:sldSz cx="12191695" cy="6858000" type="screen4x3"/>
   <p:notesSz cx="6858000" cy="9144000"/>
@@ -3468,7 +3470,7 @@
         <p:spPr>
           <a:xfrm>
             <a:off x="0" y="0"/>
-            <a:ext cx="12191695" cy="960120"/>
+            <a:ext cx="12191695" cy="1170432"/>
           </a:xfrm>
           <a:prstGeom prst="rect">
             <a:avLst/>
@@ -3510,7 +3512,7 @@
         </p:nvSpPr>
         <p:spPr>
           <a:xfrm>
-            <a:off x="0" y="960120"/>
+            <a:off x="0" y="1170432"/>
             <a:ext cx="12191695" cy="41148"/>
           </a:xfrm>
           <a:prstGeom prst="rect">
@@ -3554,7 +3556,7 @@
         <p:spPr>
           <a:xfrm>
             <a:off x="457200" y="164592"/>
-            <a:ext cx="11277295" cy="502920"/>
+            <a:ext cx="11277295" cy="384048"/>
           </a:xfrm>
           <a:prstGeom prst="rect">
             <a:avLst/>
@@ -3574,20 +3576,225 @@
                 </a:solidFill>
                 <a:latin typeface="Calibri"/>
               </a:rPr>
-              <a:t>Para continuar (PI)</a:t>
-            </a:r>
-          </a:p>
-        </p:txBody>
-      </p:sp>
-      <p:sp>
-        <p:nvSpPr>
-          <p:cNvPr id="5" name="Rounded Rectangle 4"/>
+              <a:t>Del boceto a ExamLab (diagrama)</a:t>
+            </a:r>
+          </a:p>
+        </p:txBody>
+      </p:sp>
+      <p:sp>
+        <p:nvSpPr>
+          <p:cNvPr id="5" name="TextBox 4"/>
+          <p:cNvSpPr txBox="1"/>
+          <p:nvPr/>
+        </p:nvSpPr>
+        <p:spPr>
+          <a:xfrm>
+            <a:off x="457200" y="566928"/>
+            <a:ext cx="11277295" cy="411480"/>
+          </a:xfrm>
+          <a:prstGeom prst="rect">
+            <a:avLst/>
+          </a:prstGeom>
+          <a:noFill/>
+        </p:spPr>
+        <p:txBody>
+          <a:bodyPr wrap="square">
+            <a:spAutoFit/>
+          </a:bodyPr>
+          <a:lstStyle/>
+          <a:p>
+            <a:r>
+              <a:rPr sz="1400" b="0" i="0">
+                <a:solidFill>
+                  <a:srgbClr val="B8D8EE"/>
+                </a:solidFill>
+                <a:latin typeface="Calibri"/>
+              </a:rPr>
+              <a:t>El diagrama se entrega como código Mermaid dentro de ExamLab, no como imagen</a:t>
+            </a:r>
+          </a:p>
+        </p:txBody>
+      </p:sp>
+      <p:sp>
+        <p:nvSpPr>
+          <p:cNvPr id="6" name="Rounded Rectangle 5"/>
           <p:cNvSpPr/>
           <p:nvPr/>
         </p:nvSpPr>
         <p:spPr>
           <a:xfrm>
-            <a:off x="457200" y="1261872"/>
+            <a:off x="457200" y="1659636"/>
+            <a:ext cx="11277295" cy="1051560"/>
+          </a:xfrm>
+          <a:prstGeom prst="roundRect">
+            <a:avLst>
+              <a:gd name="adj" fmla="val 12000"/>
+            </a:avLst>
+          </a:prstGeom>
+          <a:solidFill>
+            <a:srgbClr val="F2F2F2"/>
+          </a:solidFill>
+          <a:ln>
+            <a:noFill/>
+          </a:ln>
+        </p:spPr>
+        <p:style>
+          <a:lnRef idx="1">
+            <a:schemeClr val="accent1"/>
+          </a:lnRef>
+          <a:fillRef idx="3">
+            <a:schemeClr val="accent1"/>
+          </a:fillRef>
+          <a:effectRef idx="2">
+            <a:schemeClr val="accent1"/>
+          </a:effectRef>
+          <a:fontRef idx="minor">
+            <a:schemeClr val="lt1"/>
+          </a:fontRef>
+        </p:style>
+        <p:txBody>
+          <a:bodyPr rtlCol="0" anchor="ctr"/>
+          <a:lstStyle/>
+          <a:p>
+            <a:pPr algn="ctr"/>
+          </a:p>
+        </p:txBody>
+      </p:sp>
+      <p:sp>
+        <p:nvSpPr>
+          <p:cNvPr id="7" name="Rounded Rectangle 6"/>
+          <p:cNvSpPr/>
+          <p:nvPr/>
+        </p:nvSpPr>
+        <p:spPr>
+          <a:xfrm>
+            <a:off x="594360" y="1965960"/>
+            <a:ext cx="438912" cy="438912"/>
+          </a:xfrm>
+          <a:prstGeom prst="roundRect">
+            <a:avLst>
+              <a:gd name="adj" fmla="val 12000"/>
+            </a:avLst>
+          </a:prstGeom>
+          <a:solidFill>
+            <a:srgbClr val="095292"/>
+          </a:solidFill>
+          <a:ln>
+            <a:noFill/>
+          </a:ln>
+        </p:spPr>
+        <p:style>
+          <a:lnRef idx="1">
+            <a:schemeClr val="accent1"/>
+          </a:lnRef>
+          <a:fillRef idx="3">
+            <a:schemeClr val="accent1"/>
+          </a:fillRef>
+          <a:effectRef idx="2">
+            <a:schemeClr val="accent1"/>
+          </a:effectRef>
+          <a:fontRef idx="minor">
+            <a:schemeClr val="lt1"/>
+          </a:fontRef>
+        </p:style>
+        <p:txBody>
+          <a:bodyPr rtlCol="0" anchor="ctr"/>
+          <a:lstStyle/>
+          <a:p>
+            <a:pPr algn="ctr"/>
+          </a:p>
+        </p:txBody>
+      </p:sp>
+      <p:sp>
+        <p:nvSpPr>
+          <p:cNvPr id="8" name="TextBox 7"/>
+          <p:cNvSpPr txBox="1"/>
+          <p:nvPr/>
+        </p:nvSpPr>
+        <p:spPr>
+          <a:xfrm>
+            <a:off x="594360" y="1965960"/>
+            <a:ext cx="438912" cy="438912"/>
+          </a:xfrm>
+          <a:prstGeom prst="rect">
+            <a:avLst/>
+          </a:prstGeom>
+          <a:noFill/>
+        </p:spPr>
+        <p:txBody>
+          <a:bodyPr wrap="square" anchor="ctr"/>
+          <a:lstStyle/>
+          <a:p>
+            <a:pPr algn="ctr"/>
+            <a:r>
+              <a:rPr sz="1600" b="1" i="0">
+                <a:solidFill>
+                  <a:srgbClr val="FFFFFF"/>
+                </a:solidFill>
+                <a:latin typeface="Calibri"/>
+              </a:rPr>
+              <a:t>1</a:t>
+            </a:r>
+          </a:p>
+        </p:txBody>
+      </p:sp>
+      <p:sp>
+        <p:nvSpPr>
+          <p:cNvPr id="9" name="TextBox 8"/>
+          <p:cNvSpPr txBox="1"/>
+          <p:nvPr/>
+        </p:nvSpPr>
+        <p:spPr>
+          <a:xfrm>
+            <a:off x="1188720" y="1751076"/>
+            <a:ext cx="10271455" cy="886968"/>
+          </a:xfrm>
+          <a:prstGeom prst="rect">
+            <a:avLst/>
+          </a:prstGeom>
+          <a:noFill/>
+        </p:spPr>
+        <p:txBody>
+          <a:bodyPr wrap="square" anchor="ctr"/>
+          <a:lstStyle/>
+          <a:p>
+            <a:r>
+              <a:rPr sz="1500" b="1" i="0">
+                <a:solidFill>
+                  <a:srgbClr val="095292"/>
+                </a:solidFill>
+                <a:latin typeface="Calibri"/>
+              </a:rPr>
+              <a:t>Disena visual</a:t>
+            </a:r>
+          </a:p>
+          <a:p>
+            <a:pPr>
+              <a:spcBef>
+                <a:spcPts val="200"/>
+              </a:spcBef>
+            </a:pPr>
+            <a:r>
+              <a:rPr sz="1300" b="0" i="0">
+                <a:solidFill>
+                  <a:srgbClr val="333333"/>
+                </a:solidFill>
+                <a:latin typeface="Calibri"/>
+              </a:rPr>
+              <a:t>Dibuja el diagrama como quieras en Excalidraw o draw.io: es mas rapido arrastrar cajas que escribir codigo, y ahi es donde piensas el modelo.</a:t>
+            </a:r>
+          </a:p>
+        </p:txBody>
+      </p:sp>
+      <p:sp>
+        <p:nvSpPr>
+          <p:cNvPr id="10" name="Rounded Rectangle 9"/>
+          <p:cNvSpPr/>
+          <p:nvPr/>
+        </p:nvSpPr>
+        <p:spPr>
+          <a:xfrm>
+            <a:off x="457200" y="2802636"/>
             <a:ext cx="11277295" cy="1051560"/>
           </a:xfrm>
           <a:prstGeom prst="roundRect">
@@ -3626,20 +3833,22 @@
       </p:sp>
       <p:sp>
         <p:nvSpPr>
-          <p:cNvPr id="6" name="Rectangle 5"/>
+          <p:cNvPr id="11" name="Rounded Rectangle 10"/>
           <p:cNvSpPr/>
           <p:nvPr/>
         </p:nvSpPr>
         <p:spPr>
           <a:xfrm>
-            <a:off x="457200" y="1261872"/>
-            <a:ext cx="128016" cy="1051560"/>
-          </a:xfrm>
-          <a:prstGeom prst="rect">
-            <a:avLst/>
+            <a:off x="594360" y="3108960"/>
+            <a:ext cx="438912" cy="438912"/>
+          </a:xfrm>
+          <a:prstGeom prst="roundRect">
+            <a:avLst>
+              <a:gd name="adj" fmla="val 12000"/>
+            </a:avLst>
           </a:prstGeom>
           <a:solidFill>
-            <a:srgbClr val="269CCB"/>
+            <a:srgbClr val="095292"/>
           </a:solidFill>
           <a:ln>
             <a:noFill/>
@@ -3669,14 +3878,14 @@
       </p:sp>
       <p:sp>
         <p:nvSpPr>
-          <p:cNvPr id="7" name="TextBox 6"/>
+          <p:cNvPr id="12" name="TextBox 11"/>
           <p:cNvSpPr txBox="1"/>
           <p:nvPr/>
         </p:nvSpPr>
         <p:spPr>
           <a:xfrm>
-            <a:off x="777240" y="1399031"/>
-            <a:ext cx="10774375" cy="822959"/>
+            <a:off x="594360" y="3108960"/>
+            <a:ext cx="438912" cy="438912"/>
           </a:xfrm>
           <a:prstGeom prst="rect">
             <a:avLst/>
@@ -3684,48 +3893,79 @@
           <a:noFill/>
         </p:spPr>
         <p:txBody>
-          <a:bodyPr wrap="square">
-            <a:spAutoFit/>
-          </a:bodyPr>
-          <a:lstStyle/>
-          <a:p>
-            <a:r>
-              <a:rPr sz="1200" b="1" i="0">
-                <a:solidFill>
-                  <a:srgbClr val="269CCB"/>
-                </a:solidFill>
-                <a:latin typeface="Calibri"/>
-              </a:rPr>
-              <a:t>Info</a:t>
+          <a:bodyPr wrap="square" anchor="ctr"/>
+          <a:lstStyle/>
+          <a:p>
+            <a:pPr algn="ctr"/>
+            <a:r>
+              <a:rPr sz="1600" b="1" i="0">
+                <a:solidFill>
+                  <a:srgbClr val="FFFFFF"/>
+                </a:solidFill>
+                <a:latin typeface="Calibri"/>
+              </a:rPr>
+              <a:t>2</a:t>
+            </a:r>
+          </a:p>
+        </p:txBody>
+      </p:sp>
+      <p:sp>
+        <p:nvSpPr>
+          <p:cNvPr id="13" name="TextBox 12"/>
+          <p:cNvSpPr txBox="1"/>
+          <p:nvPr/>
+        </p:nvSpPr>
+        <p:spPr>
+          <a:xfrm>
+            <a:off x="1188720" y="2894076"/>
+            <a:ext cx="10271455" cy="886968"/>
+          </a:xfrm>
+          <a:prstGeom prst="rect">
+            <a:avLst/>
+          </a:prstGeom>
+          <a:noFill/>
+        </p:spPr>
+        <p:txBody>
+          <a:bodyPr wrap="square" anchor="ctr"/>
+          <a:lstStyle/>
+          <a:p>
+            <a:r>
+              <a:rPr sz="1500" b="1" i="0">
+                <a:solidFill>
+                  <a:srgbClr val="095292"/>
+                </a:solidFill>
+                <a:latin typeface="Calibri"/>
+              </a:rPr>
+              <a:t>Traduce con IA</a:t>
             </a:r>
           </a:p>
           <a:p>
             <a:pPr>
               <a:spcBef>
-                <a:spcPts val="400"/>
+                <a:spcPts val="200"/>
               </a:spcBef>
             </a:pPr>
             <a:r>
-              <a:rPr sz="1400" b="0" i="0">
+              <a:rPr sz="1300" b="0" i="0">
                 <a:solidFill>
                   <a:srgbClr val="333333"/>
                 </a:solidFill>
                 <a:latin typeface="Calibri"/>
               </a:rPr>
-              <a:t>Entregable: Ficha PI: dominio, capacidades, actores y boceto C4 Context (Excalidraw/draw.io)</a:t>
-            </a:r>
-          </a:p>
-        </p:txBody>
-      </p:sp>
-      <p:sp>
-        <p:nvSpPr>
-          <p:cNvPr id="8" name="Rounded Rectangle 7"/>
+              <a:t>Copia o describe tu boceto a una IA y pidele el codigo Mermaid: «convierte este diagrama a Mermaid usando C4Context». Revisa el resultado: la IA acierta la sintaxis, no tu modelo.</a:t>
+            </a:r>
+          </a:p>
+        </p:txBody>
+      </p:sp>
+      <p:sp>
+        <p:nvSpPr>
+          <p:cNvPr id="14" name="Rounded Rectangle 13"/>
           <p:cNvSpPr/>
           <p:nvPr/>
         </p:nvSpPr>
         <p:spPr>
           <a:xfrm>
-            <a:off x="457200" y="2478024"/>
+            <a:off x="457200" y="3945636"/>
             <a:ext cx="11277295" cy="1051560"/>
           </a:xfrm>
           <a:prstGeom prst="roundRect">
@@ -3734,7 +3974,7 @@
             </a:avLst>
           </a:prstGeom>
           <a:solidFill>
-            <a:srgbClr val="FFF8E1"/>
+            <a:srgbClr val="F2F2F2"/>
           </a:solidFill>
           <a:ln>
             <a:noFill/>
@@ -3764,20 +4004,22 @@
       </p:sp>
       <p:sp>
         <p:nvSpPr>
-          <p:cNvPr id="9" name="Rectangle 8"/>
+          <p:cNvPr id="15" name="Rounded Rectangle 14"/>
           <p:cNvSpPr/>
           <p:nvPr/>
         </p:nvSpPr>
         <p:spPr>
           <a:xfrm>
-            <a:off x="457200" y="2478024"/>
-            <a:ext cx="128016" cy="1051560"/>
-          </a:xfrm>
-          <a:prstGeom prst="rect">
-            <a:avLst/>
+            <a:off x="594360" y="4251960"/>
+            <a:ext cx="438912" cy="438912"/>
+          </a:xfrm>
+          <a:prstGeom prst="roundRect">
+            <a:avLst>
+              <a:gd name="adj" fmla="val 12000"/>
+            </a:avLst>
           </a:prstGeom>
           <a:solidFill>
-            <a:srgbClr val="FFD000"/>
+            <a:srgbClr val="095292"/>
           </a:solidFill>
           <a:ln>
             <a:noFill/>
@@ -3807,14 +4049,14 @@
       </p:sp>
       <p:sp>
         <p:nvSpPr>
-          <p:cNvPr id="10" name="TextBox 9"/>
+          <p:cNvPr id="16" name="TextBox 15"/>
           <p:cNvSpPr txBox="1"/>
           <p:nvPr/>
         </p:nvSpPr>
         <p:spPr>
           <a:xfrm>
-            <a:off x="777240" y="2615184"/>
-            <a:ext cx="10774375" cy="822959"/>
+            <a:off x="594360" y="4251960"/>
+            <a:ext cx="438912" cy="438912"/>
           </a:xfrm>
           <a:prstGeom prst="rect">
             <a:avLst/>
@@ -3822,48 +4064,79 @@
           <a:noFill/>
         </p:spPr>
         <p:txBody>
-          <a:bodyPr wrap="square">
-            <a:spAutoFit/>
-          </a:bodyPr>
-          <a:lstStyle/>
-          <a:p>
-            <a:r>
-              <a:rPr sz="1200" b="1" i="0">
-                <a:solidFill>
-                  <a:srgbClr val="FFD000"/>
-                </a:solidFill>
-                <a:latin typeface="Calibri"/>
-              </a:rPr>
-              <a:t>Aclaración</a:t>
+          <a:bodyPr wrap="square" anchor="ctr"/>
+          <a:lstStyle/>
+          <a:p>
+            <a:pPr algn="ctr"/>
+            <a:r>
+              <a:rPr sz="1600" b="1" i="0">
+                <a:solidFill>
+                  <a:srgbClr val="FFFFFF"/>
+                </a:solidFill>
+                <a:latin typeface="Calibri"/>
+              </a:rPr>
+              <a:t>3</a:t>
+            </a:r>
+          </a:p>
+        </p:txBody>
+      </p:sp>
+      <p:sp>
+        <p:nvSpPr>
+          <p:cNvPr id="17" name="TextBox 16"/>
+          <p:cNvSpPr txBox="1"/>
+          <p:nvPr/>
+        </p:nvSpPr>
+        <p:spPr>
+          <a:xfrm>
+            <a:off x="1188720" y="4037076"/>
+            <a:ext cx="10271455" cy="886968"/>
+          </a:xfrm>
+          <a:prstGeom prst="rect">
+            <a:avLst/>
+          </a:prstGeom>
+          <a:noFill/>
+        </p:spPr>
+        <p:txBody>
+          <a:bodyPr wrap="square" anchor="ctr"/>
+          <a:lstStyle/>
+          <a:p>
+            <a:r>
+              <a:rPr sz="1500" b="1" i="0">
+                <a:solidFill>
+                  <a:srgbClr val="095292"/>
+                </a:solidFill>
+                <a:latin typeface="Calibri"/>
+              </a:rPr>
+              <a:t>Pega y renderiza en ExamLab</a:t>
             </a:r>
           </a:p>
           <a:p>
             <a:pPr>
               <a:spcBef>
-                <a:spcPts val="400"/>
+                <a:spcPts val="200"/>
               </a:spcBef>
             </a:pPr>
             <a:r>
-              <a:rPr sz="1400" b="0" i="0">
+              <a:rPr sz="1300" b="0" i="0">
                 <a:solidFill>
                   <a:srgbClr val="333333"/>
                 </a:solidFill>
                 <a:latin typeface="Calibri"/>
               </a:rPr>
-              <a:t>Subir evidencias al paquete CloudLite (Drive/repo) y a ExamLab (https://uniaj.examlab.workers.dev/) domingo 23:59.</a:t>
-            </a:r>
-          </a:p>
-        </p:txBody>
-      </p:sp>
-      <p:sp>
-        <p:nvSpPr>
-          <p:cNvPr id="11" name="Rounded Rectangle 10"/>
+              <a:t>Pega ese codigo en la caja de texto de la pregunta y mira como lo dibuja la plataforma. Si no renderiza, corrige ahi mismo: lo que se califica es el diagrama renderizado dentro de ExamLab.</a:t>
+            </a:r>
+          </a:p>
+        </p:txBody>
+      </p:sp>
+      <p:sp>
+        <p:nvSpPr>
+          <p:cNvPr id="18" name="Rounded Rectangle 17"/>
           <p:cNvSpPr/>
           <p:nvPr/>
         </p:nvSpPr>
         <p:spPr>
           <a:xfrm>
-            <a:off x="457200" y="3694176"/>
+            <a:off x="457200" y="5088636"/>
             <a:ext cx="11277295" cy="1051560"/>
           </a:xfrm>
           <a:prstGeom prst="roundRect">
@@ -3872,7 +4145,7 @@
             </a:avLst>
           </a:prstGeom>
           <a:solidFill>
-            <a:srgbClr val="FBE4E4"/>
+            <a:srgbClr val="E8F4FA"/>
           </a:solidFill>
           <a:ln>
             <a:noFill/>
@@ -3902,20 +4175,22 @@
       </p:sp>
       <p:sp>
         <p:nvSpPr>
-          <p:cNvPr id="12" name="Rectangle 11"/>
+          <p:cNvPr id="19" name="Rounded Rectangle 18"/>
           <p:cNvSpPr/>
           <p:nvPr/>
         </p:nvSpPr>
         <p:spPr>
           <a:xfrm>
-            <a:off x="457200" y="3694176"/>
-            <a:ext cx="128016" cy="1051560"/>
-          </a:xfrm>
-          <a:prstGeom prst="rect">
-            <a:avLst/>
+            <a:off x="594360" y="5394960"/>
+            <a:ext cx="438912" cy="438912"/>
+          </a:xfrm>
+          <a:prstGeom prst="roundRect">
+            <a:avLst>
+              <a:gd name="adj" fmla="val 12000"/>
+            </a:avLst>
           </a:prstGeom>
           <a:solidFill>
-            <a:srgbClr val="A02030"/>
+            <a:srgbClr val="095292"/>
           </a:solidFill>
           <a:ln>
             <a:noFill/>
@@ -3945,14 +4220,14 @@
       </p:sp>
       <p:sp>
         <p:nvSpPr>
-          <p:cNvPr id="13" name="TextBox 12"/>
+          <p:cNvPr id="20" name="TextBox 19"/>
           <p:cNvSpPr txBox="1"/>
           <p:nvPr/>
         </p:nvSpPr>
         <p:spPr>
           <a:xfrm>
-            <a:off x="777240" y="3831336"/>
-            <a:ext cx="10774375" cy="822959"/>
+            <a:off x="594360" y="5394960"/>
+            <a:ext cx="438912" cy="438912"/>
           </a:xfrm>
           <a:prstGeom prst="rect">
             <a:avLst/>
@@ -3960,42 +4235,73 @@
           <a:noFill/>
         </p:spPr>
         <p:txBody>
-          <a:bodyPr wrap="square">
-            <a:spAutoFit/>
-          </a:bodyPr>
-          <a:lstStyle/>
-          <a:p>
-            <a:r>
-              <a:rPr sz="1200" b="1" i="0">
-                <a:solidFill>
-                  <a:srgbClr val="A02030"/>
-                </a:solidFill>
-                <a:latin typeface="Calibri"/>
-              </a:rPr>
-              <a:t>Atención</a:t>
+          <a:bodyPr wrap="square" anchor="ctr"/>
+          <a:lstStyle/>
+          <a:p>
+            <a:pPr algn="ctr"/>
+            <a:r>
+              <a:rPr sz="1600" b="1" i="0">
+                <a:solidFill>
+                  <a:srgbClr val="FFFFFF"/>
+                </a:solidFill>
+                <a:latin typeface="Calibri"/>
+              </a:rPr>
+              <a:t>4</a:t>
+            </a:r>
+          </a:p>
+        </p:txBody>
+      </p:sp>
+      <p:sp>
+        <p:nvSpPr>
+          <p:cNvPr id="21" name="TextBox 20"/>
+          <p:cNvSpPr txBox="1"/>
+          <p:nvPr/>
+        </p:nvSpPr>
+        <p:spPr>
+          <a:xfrm>
+            <a:off x="1188720" y="5180076"/>
+            <a:ext cx="10271455" cy="886968"/>
+          </a:xfrm>
+          <a:prstGeom prst="rect">
+            <a:avLst/>
+          </a:prstGeom>
+          <a:noFill/>
+        </p:spPr>
+        <p:txBody>
+          <a:bodyPr wrap="square" anchor="ctr"/>
+          <a:lstStyle/>
+          <a:p>
+            <a:r>
+              <a:rPr sz="1500" b="1" i="0">
+                <a:solidFill>
+                  <a:srgbClr val="095292"/>
+                </a:solidFill>
+                <a:latin typeface="Calibri"/>
+              </a:rPr>
+              <a:t>Guarda el PNG para tu PI</a:t>
             </a:r>
           </a:p>
           <a:p>
             <a:pPr>
               <a:spcBef>
-                <a:spcPts val="400"/>
+                <a:spcPts val="200"/>
               </a:spcBef>
             </a:pPr>
             <a:r>
-              <a:rPr sz="1400" b="0" i="0">
+              <a:rPr sz="1300" b="0" i="0">
                 <a:solidFill>
                   <a:srgbClr val="333333"/>
                 </a:solidFill>
                 <a:latin typeface="Calibri"/>
               </a:rPr>
-              <a:t>Sin cloud de pago ni instalaciones obligatorias de hipervisores/Docker Desktop.</a:t>
-            </a:r>
-          </a:p>
-        </p:txBody>
-      </p:sp>
-      <p:sp>
-        <p:nvSpPr>
-          <p:cNvPr id="14" name="TextBox 13"/>
+              <a:t>Exporta tambien la imagen a la carpeta de tu Proyecto Integrador. Esa copia es para tu informe; no reemplaza la respuesta en la plataforma.</a:t>
+            </a:r>
+          </a:p>
+        </p:txBody>
+      </p:sp>
+      <p:sp>
+        <p:nvSpPr>
+          <p:cNvPr id="22" name="TextBox 21"/>
           <p:cNvSpPr txBox="1"/>
           <p:nvPr/>
         </p:nvSpPr>
@@ -4063,6 +4369,932 @@
         <p:spPr>
           <a:xfrm>
             <a:off x="0" y="0"/>
+            <a:ext cx="12191695" cy="960120"/>
+          </a:xfrm>
+          <a:prstGeom prst="rect">
+            <a:avLst/>
+          </a:prstGeom>
+          <a:solidFill>
+            <a:srgbClr val="095292"/>
+          </a:solidFill>
+          <a:ln>
+            <a:noFill/>
+          </a:ln>
+        </p:spPr>
+        <p:style>
+          <a:lnRef idx="1">
+            <a:schemeClr val="accent1"/>
+          </a:lnRef>
+          <a:fillRef idx="3">
+            <a:schemeClr val="accent1"/>
+          </a:fillRef>
+          <a:effectRef idx="2">
+            <a:schemeClr val="accent1"/>
+          </a:effectRef>
+          <a:fontRef idx="minor">
+            <a:schemeClr val="lt1"/>
+          </a:fontRef>
+        </p:style>
+        <p:txBody>
+          <a:bodyPr rtlCol="0" anchor="ctr"/>
+          <a:lstStyle/>
+          <a:p>
+            <a:pPr algn="ctr"/>
+          </a:p>
+        </p:txBody>
+      </p:sp>
+      <p:sp>
+        <p:nvSpPr>
+          <p:cNvPr id="3" name="Rectangle 2"/>
+          <p:cNvSpPr/>
+          <p:nvPr/>
+        </p:nvSpPr>
+        <p:spPr>
+          <a:xfrm>
+            <a:off x="0" y="960120"/>
+            <a:ext cx="12191695" cy="41148"/>
+          </a:xfrm>
+          <a:prstGeom prst="rect">
+            <a:avLst/>
+          </a:prstGeom>
+          <a:solidFill>
+            <a:srgbClr val="FFD000"/>
+          </a:solidFill>
+          <a:ln>
+            <a:noFill/>
+          </a:ln>
+        </p:spPr>
+        <p:style>
+          <a:lnRef idx="1">
+            <a:schemeClr val="accent1"/>
+          </a:lnRef>
+          <a:fillRef idx="3">
+            <a:schemeClr val="accent1"/>
+          </a:fillRef>
+          <a:effectRef idx="2">
+            <a:schemeClr val="accent1"/>
+          </a:effectRef>
+          <a:fontRef idx="minor">
+            <a:schemeClr val="lt1"/>
+          </a:fontRef>
+        </p:style>
+        <p:txBody>
+          <a:bodyPr rtlCol="0" anchor="ctr"/>
+          <a:lstStyle/>
+          <a:p>
+            <a:pPr algn="ctr"/>
+          </a:p>
+        </p:txBody>
+      </p:sp>
+      <p:sp>
+        <p:nvSpPr>
+          <p:cNvPr id="4" name="TextBox 3"/>
+          <p:cNvSpPr txBox="1"/>
+          <p:nvPr/>
+        </p:nvSpPr>
+        <p:spPr>
+          <a:xfrm>
+            <a:off x="457200" y="164592"/>
+            <a:ext cx="11277295" cy="502920"/>
+          </a:xfrm>
+          <a:prstGeom prst="rect">
+            <a:avLst/>
+          </a:prstGeom>
+          <a:noFill/>
+        </p:spPr>
+        <p:txBody>
+          <a:bodyPr wrap="square">
+            <a:spAutoFit/>
+          </a:bodyPr>
+          <a:lstStyle/>
+          <a:p>
+            <a:r>
+              <a:rPr sz="2600" b="1" i="0">
+                <a:solidFill>
+                  <a:srgbClr val="FFFFFF"/>
+                </a:solidFill>
+                <a:latin typeface="Calibri"/>
+              </a:rPr>
+              <a:t>Taller PI (paso a paso)</a:t>
+            </a:r>
+          </a:p>
+        </p:txBody>
+      </p:sp>
+      <p:sp>
+        <p:nvSpPr>
+          <p:cNvPr id="5" name="TextBox 4"/>
+          <p:cNvSpPr txBox="1"/>
+          <p:nvPr/>
+        </p:nvSpPr>
+        <p:spPr>
+          <a:xfrm>
+            <a:off x="457200" y="1170432"/>
+            <a:ext cx="11277295" cy="5230368"/>
+          </a:xfrm>
+          <a:prstGeom prst="rect">
+            <a:avLst/>
+          </a:prstGeom>
+          <a:noFill/>
+        </p:spPr>
+        <p:txBody>
+          <a:bodyPr wrap="square">
+            <a:spAutoFit/>
+          </a:bodyPr>
+          <a:lstStyle/>
+          <a:p>
+            <a:pPr>
+              <a:spcAft>
+                <a:spcPts val="800"/>
+              </a:spcAft>
+            </a:pPr>
+            <a:r>
+              <a:rPr sz="1600" b="1" i="0">
+                <a:solidFill>
+                  <a:srgbClr val="333333"/>
+                </a:solidFill>
+                <a:latin typeface="Calibri"/>
+              </a:rPr>
+              <a:t>1.</a:t>
+            </a:r>
+            <a:r>
+              <a:rPr sz="1600" b="0" i="0">
+                <a:solidFill>
+                  <a:srgbClr val="333333"/>
+                </a:solidFill>
+                <a:latin typeface="Calibri"/>
+              </a:rPr>
+              <a:t> Paso 1: elija un dominio concreto entre AgendaU, BiblioLite, InventarioLab, TurnosClinica o EventosCampus (o uno propio del mismo tamano) y escriba el problema en exactamente 3 frases: quien sufre el problema, como se resuelve hoy sin CloudLite y una cifra medible del dolor (por ejemplo 40 correos por semana para cuadrar 12 asesorias), verificando que en ninguna de las 3 frases aparezca una expresion generica como app de la universidad o red social; el resultado queda en la seccion 1 Dominio y problema del informe del PI.</a:t>
+            </a:r>
+          </a:p>
+          <a:p>
+            <a:pPr>
+              <a:spcAft>
+                <a:spcPts val="800"/>
+              </a:spcAft>
+            </a:pPr>
+            <a:r>
+              <a:rPr sz="1600" b="0" i="0">
+                <a:solidFill>
+                  <a:srgbClr val="333333"/>
+                </a:solidFill>
+                <a:latin typeface="Calibri"/>
+              </a:rPr>
+              <a:t>–   </a:t>
+            </a:r>
+            <a:r>
+              <a:rPr sz="1600" b="1" i="0">
+                <a:solidFill>
+                  <a:srgbClr val="333333"/>
+                </a:solidFill>
+                <a:latin typeface="Calibri"/>
+              </a:rPr>
+              <a:t>2.</a:t>
+            </a:r>
+            <a:r>
+              <a:rPr sz="1600" b="0" i="0">
+                <a:solidFill>
+                  <a:srgbClr val="333333"/>
+                </a:solidFill>
+                <a:latin typeface="Calibri"/>
+              </a:rPr>
+              <a:t> Paso 2: liste exactamente 4 capacidades con la forma verbo mas objeto de negocio (reservar cita, publicar cupo, cancelar reserva, notificar recordatorio), 3 actores humanos con lo que espera cada uno, 2 o 3 sistemas externos con los que CloudLite intercambia informacion (por ejemplo proveedor de identidad, correo transaccional o pasarela de pagos) y 3 elementos de fuera de alcance, verificando que ninguna capacidad nombre tecnologia (nada de usar PostgreSQL ni desplegar en Docker) y que las 4 capacidades se lean como frases del negocio; queda en la seccion 1 del informe y se pega tal cual en la pregunta 1 de ExamLab.</a:t>
+            </a:r>
+          </a:p>
+          <a:p>
+            <a:pPr>
+              <a:spcAft>
+                <a:spcPts val="800"/>
+              </a:spcAft>
+            </a:pPr>
+            <a:r>
+              <a:rPr sz="1600" b="0" i="0">
+                <a:solidFill>
+                  <a:srgbClr val="333333"/>
+                </a:solidFill>
+                <a:latin typeface="Calibri"/>
+              </a:rPr>
+              <a:t>–   </a:t>
+            </a:r>
+            <a:r>
+              <a:rPr sz="1600" b="1" i="0">
+                <a:solidFill>
+                  <a:srgbClr val="333333"/>
+                </a:solidFill>
+                <a:latin typeface="Calibri"/>
+              </a:rPr>
+              <a:t>3.</a:t>
+            </a:r>
+            <a:r>
+              <a:rPr sz="1600" b="0" i="0">
+                <a:solidFill>
+                  <a:srgbClr val="333333"/>
+                </a:solidFill>
+                <a:latin typeface="Calibri"/>
+              </a:rPr>
+              <a:t> Paso 3: dibuje primero el boceto del C4 Context en Excalidraw o draw.io, que es donde se piensa el modelo, y despues pidale a una IA que lo traduzca a Mermaid («convierte este diagrama a Mermaid usando C4Context»); pegue ese codigo en la pregunta de tipo diagrama de ExamLab y verifique que renderice ahi mismo, con exactamente 1 System para CloudLite, 2 Person, 2 System_Ext y 5 relaciones etiquetadas con verbo de negocio y protocolo, verificando en el diagrama ya renderizado que no aparezca ninguna caja interna (ni base de datos ni API ni worker, eso es Clase 4) y que cada flecha se lea en voz alta como una frase completa.</a:t>
+            </a:r>
+          </a:p>
+          <a:p>
+            <a:pPr>
+              <a:spcAft>
+                <a:spcPts val="800"/>
+              </a:spcAft>
+            </a:pPr>
+            <a:r>
+              <a:rPr sz="1600" b="0" i="0">
+                <a:solidFill>
+                  <a:srgbClr val="333333"/>
+                </a:solidFill>
+                <a:latin typeface="Calibri"/>
+              </a:rPr>
+              <a:t>–   </a:t>
+            </a:r>
+            <a:r>
+              <a:rPr sz="1600" b="1" i="0">
+                <a:solidFill>
+                  <a:srgbClr val="333333"/>
+                </a:solidFill>
+                <a:latin typeface="Calibri"/>
+              </a:rPr>
+              <a:t>4.</a:t>
+            </a:r>
+            <a:r>
+              <a:rPr sz="1600" b="0" i="0">
+                <a:solidFill>
+                  <a:srgbClr val="333333"/>
+                </a:solidFill>
+                <a:latin typeface="Calibri"/>
+              </a:rPr>
+              <a:t> Paso 4: resuelva la tabla comparativa de 4 filas nube frente a on-premise, cierre con el veredicto de 2 frases que sera la entrada del ADR-001 de la Clase 2, y suba a ExamLab (modulo Talleres) las 5 preguntas resueltas antes del domingo 23:59, verificando que la ficha, el diagrama renderizado y el veredicto usen exactamente los mismos nombres de actores y de sistemas externos.</a:t>
+            </a:r>
+          </a:p>
+        </p:txBody>
+      </p:sp>
+      <p:sp>
+        <p:nvSpPr>
+          <p:cNvPr id="6" name="TextBox 5"/>
+          <p:cNvSpPr txBox="1"/>
+          <p:nvPr/>
+        </p:nvSpPr>
+        <p:spPr>
+          <a:xfrm>
+            <a:off x="11185855" y="6473952"/>
+            <a:ext cx="640080" cy="274320"/>
+          </a:xfrm>
+          <a:prstGeom prst="rect">
+            <a:avLst/>
+          </a:prstGeom>
+          <a:noFill/>
+        </p:spPr>
+        <p:txBody>
+          <a:bodyPr wrap="square">
+            <a:spAutoFit/>
+          </a:bodyPr>
+          <a:lstStyle/>
+          <a:p>
+            <a:pPr algn="r"/>
+            <a:r>
+              <a:rPr sz="1100" b="0" i="0">
+                <a:solidFill>
+                  <a:srgbClr val="666666"/>
+                </a:solidFill>
+                <a:latin typeface="Calibri"/>
+              </a:rPr>
+              <a:t>11</a:t>
+            </a:r>
+          </a:p>
+        </p:txBody>
+      </p:sp>
+    </p:spTree>
+  </p:cSld>
+  <p:clrMapOvr>
+    <a:masterClrMapping/>
+  </p:clrMapOvr>
+</p:sld>
+</file>
+
+<file path=ppt/slides/slide12.xml><?xml version="1.0" encoding="utf-8"?>
+<p:sld xmlns:a="http://schemas.openxmlformats.org/drawingml/2006/main" xmlns:p="http://schemas.openxmlformats.org/presentationml/2006/main" xmlns:r="http://schemas.openxmlformats.org/officeDocument/2006/relationships">
+  <p:cSld>
+    <p:bg>
+      <p:bgPr>
+        <a:solidFill>
+          <a:srgbClr val="FFFFFF"/>
+        </a:solidFill>
+        <a:effectLst/>
+      </p:bgPr>
+    </p:bg>
+    <p:spTree>
+      <p:nvGrpSpPr>
+        <p:cNvPr id="1" name=""/>
+        <p:cNvGrpSpPr/>
+        <p:nvPr/>
+      </p:nvGrpSpPr>
+      <p:grpSpPr/>
+      <p:sp>
+        <p:nvSpPr>
+          <p:cNvPr id="2" name="Rectangle 1"/>
+          <p:cNvSpPr/>
+          <p:nvPr/>
+        </p:nvSpPr>
+        <p:spPr>
+          <a:xfrm>
+            <a:off x="0" y="0"/>
+            <a:ext cx="12191695" cy="960120"/>
+          </a:xfrm>
+          <a:prstGeom prst="rect">
+            <a:avLst/>
+          </a:prstGeom>
+          <a:solidFill>
+            <a:srgbClr val="095292"/>
+          </a:solidFill>
+          <a:ln>
+            <a:noFill/>
+          </a:ln>
+        </p:spPr>
+        <p:style>
+          <a:lnRef idx="1">
+            <a:schemeClr val="accent1"/>
+          </a:lnRef>
+          <a:fillRef idx="3">
+            <a:schemeClr val="accent1"/>
+          </a:fillRef>
+          <a:effectRef idx="2">
+            <a:schemeClr val="accent1"/>
+          </a:effectRef>
+          <a:fontRef idx="minor">
+            <a:schemeClr val="lt1"/>
+          </a:fontRef>
+        </p:style>
+        <p:txBody>
+          <a:bodyPr rtlCol="0" anchor="ctr"/>
+          <a:lstStyle/>
+          <a:p>
+            <a:pPr algn="ctr"/>
+          </a:p>
+        </p:txBody>
+      </p:sp>
+      <p:sp>
+        <p:nvSpPr>
+          <p:cNvPr id="3" name="Rectangle 2"/>
+          <p:cNvSpPr/>
+          <p:nvPr/>
+        </p:nvSpPr>
+        <p:spPr>
+          <a:xfrm>
+            <a:off x="0" y="960120"/>
+            <a:ext cx="12191695" cy="41148"/>
+          </a:xfrm>
+          <a:prstGeom prst="rect">
+            <a:avLst/>
+          </a:prstGeom>
+          <a:solidFill>
+            <a:srgbClr val="FFD000"/>
+          </a:solidFill>
+          <a:ln>
+            <a:noFill/>
+          </a:ln>
+        </p:spPr>
+        <p:style>
+          <a:lnRef idx="1">
+            <a:schemeClr val="accent1"/>
+          </a:lnRef>
+          <a:fillRef idx="3">
+            <a:schemeClr val="accent1"/>
+          </a:fillRef>
+          <a:effectRef idx="2">
+            <a:schemeClr val="accent1"/>
+          </a:effectRef>
+          <a:fontRef idx="minor">
+            <a:schemeClr val="lt1"/>
+          </a:fontRef>
+        </p:style>
+        <p:txBody>
+          <a:bodyPr rtlCol="0" anchor="ctr"/>
+          <a:lstStyle/>
+          <a:p>
+            <a:pPr algn="ctr"/>
+          </a:p>
+        </p:txBody>
+      </p:sp>
+      <p:sp>
+        <p:nvSpPr>
+          <p:cNvPr id="4" name="TextBox 3"/>
+          <p:cNvSpPr txBox="1"/>
+          <p:nvPr/>
+        </p:nvSpPr>
+        <p:spPr>
+          <a:xfrm>
+            <a:off x="457200" y="164592"/>
+            <a:ext cx="11277295" cy="502920"/>
+          </a:xfrm>
+          <a:prstGeom prst="rect">
+            <a:avLst/>
+          </a:prstGeom>
+          <a:noFill/>
+        </p:spPr>
+        <p:txBody>
+          <a:bodyPr wrap="square">
+            <a:spAutoFit/>
+          </a:bodyPr>
+          <a:lstStyle/>
+          <a:p>
+            <a:r>
+              <a:rPr sz="2600" b="1" i="0">
+                <a:solidFill>
+                  <a:srgbClr val="FFFFFF"/>
+                </a:solidFill>
+                <a:latin typeface="Calibri"/>
+              </a:rPr>
+              <a:t>Para continuar (PI)</a:t>
+            </a:r>
+          </a:p>
+        </p:txBody>
+      </p:sp>
+      <p:sp>
+        <p:nvSpPr>
+          <p:cNvPr id="5" name="Rounded Rectangle 4"/>
+          <p:cNvSpPr/>
+          <p:nvPr/>
+        </p:nvSpPr>
+        <p:spPr>
+          <a:xfrm>
+            <a:off x="457200" y="1261872"/>
+            <a:ext cx="11277295" cy="1051560"/>
+          </a:xfrm>
+          <a:prstGeom prst="roundRect">
+            <a:avLst>
+              <a:gd name="adj" fmla="val 12000"/>
+            </a:avLst>
+          </a:prstGeom>
+          <a:solidFill>
+            <a:srgbClr val="E8F4FA"/>
+          </a:solidFill>
+          <a:ln>
+            <a:noFill/>
+          </a:ln>
+        </p:spPr>
+        <p:style>
+          <a:lnRef idx="1">
+            <a:schemeClr val="accent1"/>
+          </a:lnRef>
+          <a:fillRef idx="3">
+            <a:schemeClr val="accent1"/>
+          </a:fillRef>
+          <a:effectRef idx="2">
+            <a:schemeClr val="accent1"/>
+          </a:effectRef>
+          <a:fontRef idx="minor">
+            <a:schemeClr val="lt1"/>
+          </a:fontRef>
+        </p:style>
+        <p:txBody>
+          <a:bodyPr rtlCol="0" anchor="ctr"/>
+          <a:lstStyle/>
+          <a:p>
+            <a:pPr algn="ctr"/>
+          </a:p>
+        </p:txBody>
+      </p:sp>
+      <p:sp>
+        <p:nvSpPr>
+          <p:cNvPr id="6" name="Rectangle 5"/>
+          <p:cNvSpPr/>
+          <p:nvPr/>
+        </p:nvSpPr>
+        <p:spPr>
+          <a:xfrm>
+            <a:off x="457200" y="1261872"/>
+            <a:ext cx="128016" cy="1051560"/>
+          </a:xfrm>
+          <a:prstGeom prst="rect">
+            <a:avLst/>
+          </a:prstGeom>
+          <a:solidFill>
+            <a:srgbClr val="269CCB"/>
+          </a:solidFill>
+          <a:ln>
+            <a:noFill/>
+          </a:ln>
+        </p:spPr>
+        <p:style>
+          <a:lnRef idx="1">
+            <a:schemeClr val="accent1"/>
+          </a:lnRef>
+          <a:fillRef idx="3">
+            <a:schemeClr val="accent1"/>
+          </a:fillRef>
+          <a:effectRef idx="2">
+            <a:schemeClr val="accent1"/>
+          </a:effectRef>
+          <a:fontRef idx="minor">
+            <a:schemeClr val="lt1"/>
+          </a:fontRef>
+        </p:style>
+        <p:txBody>
+          <a:bodyPr rtlCol="0" anchor="ctr"/>
+          <a:lstStyle/>
+          <a:p>
+            <a:pPr algn="ctr"/>
+          </a:p>
+        </p:txBody>
+      </p:sp>
+      <p:sp>
+        <p:nvSpPr>
+          <p:cNvPr id="7" name="TextBox 6"/>
+          <p:cNvSpPr txBox="1"/>
+          <p:nvPr/>
+        </p:nvSpPr>
+        <p:spPr>
+          <a:xfrm>
+            <a:off x="777240" y="1399031"/>
+            <a:ext cx="10774375" cy="822959"/>
+          </a:xfrm>
+          <a:prstGeom prst="rect">
+            <a:avLst/>
+          </a:prstGeom>
+          <a:noFill/>
+        </p:spPr>
+        <p:txBody>
+          <a:bodyPr wrap="square">
+            <a:spAutoFit/>
+          </a:bodyPr>
+          <a:lstStyle/>
+          <a:p>
+            <a:r>
+              <a:rPr sz="1200" b="1" i="0">
+                <a:solidFill>
+                  <a:srgbClr val="269CCB"/>
+                </a:solidFill>
+                <a:latin typeface="Calibri"/>
+              </a:rPr>
+              <a:t>Info</a:t>
+            </a:r>
+          </a:p>
+          <a:p>
+            <a:pPr>
+              <a:spcBef>
+                <a:spcPts val="400"/>
+              </a:spcBef>
+            </a:pPr>
+            <a:r>
+              <a:rPr sz="1400" b="0" i="0">
+                <a:solidFill>
+                  <a:srgbClr val="333333"/>
+                </a:solidFill>
+                <a:latin typeface="Calibri"/>
+              </a:rPr>
+              <a:t>Entregable: Ficha PI de 6 bloques + C4 Context en Mermaid renderizado en ExamLab (boceto previo en Excalidraw/draw.io)</a:t>
+            </a:r>
+          </a:p>
+        </p:txBody>
+      </p:sp>
+      <p:sp>
+        <p:nvSpPr>
+          <p:cNvPr id="8" name="Rounded Rectangle 7"/>
+          <p:cNvSpPr/>
+          <p:nvPr/>
+        </p:nvSpPr>
+        <p:spPr>
+          <a:xfrm>
+            <a:off x="457200" y="2478024"/>
+            <a:ext cx="11277295" cy="1051560"/>
+          </a:xfrm>
+          <a:prstGeom prst="roundRect">
+            <a:avLst>
+              <a:gd name="adj" fmla="val 12000"/>
+            </a:avLst>
+          </a:prstGeom>
+          <a:solidFill>
+            <a:srgbClr val="FFF8E1"/>
+          </a:solidFill>
+          <a:ln>
+            <a:noFill/>
+          </a:ln>
+        </p:spPr>
+        <p:style>
+          <a:lnRef idx="1">
+            <a:schemeClr val="accent1"/>
+          </a:lnRef>
+          <a:fillRef idx="3">
+            <a:schemeClr val="accent1"/>
+          </a:fillRef>
+          <a:effectRef idx="2">
+            <a:schemeClr val="accent1"/>
+          </a:effectRef>
+          <a:fontRef idx="minor">
+            <a:schemeClr val="lt1"/>
+          </a:fontRef>
+        </p:style>
+        <p:txBody>
+          <a:bodyPr rtlCol="0" anchor="ctr"/>
+          <a:lstStyle/>
+          <a:p>
+            <a:pPr algn="ctr"/>
+          </a:p>
+        </p:txBody>
+      </p:sp>
+      <p:sp>
+        <p:nvSpPr>
+          <p:cNvPr id="9" name="Rectangle 8"/>
+          <p:cNvSpPr/>
+          <p:nvPr/>
+        </p:nvSpPr>
+        <p:spPr>
+          <a:xfrm>
+            <a:off x="457200" y="2478024"/>
+            <a:ext cx="128016" cy="1051560"/>
+          </a:xfrm>
+          <a:prstGeom prst="rect">
+            <a:avLst/>
+          </a:prstGeom>
+          <a:solidFill>
+            <a:srgbClr val="FFD000"/>
+          </a:solidFill>
+          <a:ln>
+            <a:noFill/>
+          </a:ln>
+        </p:spPr>
+        <p:style>
+          <a:lnRef idx="1">
+            <a:schemeClr val="accent1"/>
+          </a:lnRef>
+          <a:fillRef idx="3">
+            <a:schemeClr val="accent1"/>
+          </a:fillRef>
+          <a:effectRef idx="2">
+            <a:schemeClr val="accent1"/>
+          </a:effectRef>
+          <a:fontRef idx="minor">
+            <a:schemeClr val="lt1"/>
+          </a:fontRef>
+        </p:style>
+        <p:txBody>
+          <a:bodyPr rtlCol="0" anchor="ctr"/>
+          <a:lstStyle/>
+          <a:p>
+            <a:pPr algn="ctr"/>
+          </a:p>
+        </p:txBody>
+      </p:sp>
+      <p:sp>
+        <p:nvSpPr>
+          <p:cNvPr id="10" name="TextBox 9"/>
+          <p:cNvSpPr txBox="1"/>
+          <p:nvPr/>
+        </p:nvSpPr>
+        <p:spPr>
+          <a:xfrm>
+            <a:off x="777240" y="2615184"/>
+            <a:ext cx="10774375" cy="822959"/>
+          </a:xfrm>
+          <a:prstGeom prst="rect">
+            <a:avLst/>
+          </a:prstGeom>
+          <a:noFill/>
+        </p:spPr>
+        <p:txBody>
+          <a:bodyPr wrap="square">
+            <a:spAutoFit/>
+          </a:bodyPr>
+          <a:lstStyle/>
+          <a:p>
+            <a:r>
+              <a:rPr sz="1200" b="1" i="0">
+                <a:solidFill>
+                  <a:srgbClr val="FFD000"/>
+                </a:solidFill>
+                <a:latin typeface="Calibri"/>
+              </a:rPr>
+              <a:t>Aclaración</a:t>
+            </a:r>
+          </a:p>
+          <a:p>
+            <a:pPr>
+              <a:spcBef>
+                <a:spcPts val="400"/>
+              </a:spcBef>
+            </a:pPr>
+            <a:r>
+              <a:rPr sz="1400" b="0" i="0">
+                <a:solidFill>
+                  <a:srgbClr val="333333"/>
+                </a:solidFill>
+                <a:latin typeface="Calibri"/>
+              </a:rPr>
+              <a:t>Subir evidencias al paquete CloudLite (Drive/repo) y a ExamLab (https://uniaj.examlab.workers.dev/) domingo 23:59.</a:t>
+            </a:r>
+          </a:p>
+        </p:txBody>
+      </p:sp>
+      <p:sp>
+        <p:nvSpPr>
+          <p:cNvPr id="11" name="Rounded Rectangle 10"/>
+          <p:cNvSpPr/>
+          <p:nvPr/>
+        </p:nvSpPr>
+        <p:spPr>
+          <a:xfrm>
+            <a:off x="457200" y="3694176"/>
+            <a:ext cx="11277295" cy="1051560"/>
+          </a:xfrm>
+          <a:prstGeom prst="roundRect">
+            <a:avLst>
+              <a:gd name="adj" fmla="val 12000"/>
+            </a:avLst>
+          </a:prstGeom>
+          <a:solidFill>
+            <a:srgbClr val="FBE4E4"/>
+          </a:solidFill>
+          <a:ln>
+            <a:noFill/>
+          </a:ln>
+        </p:spPr>
+        <p:style>
+          <a:lnRef idx="1">
+            <a:schemeClr val="accent1"/>
+          </a:lnRef>
+          <a:fillRef idx="3">
+            <a:schemeClr val="accent1"/>
+          </a:fillRef>
+          <a:effectRef idx="2">
+            <a:schemeClr val="accent1"/>
+          </a:effectRef>
+          <a:fontRef idx="minor">
+            <a:schemeClr val="lt1"/>
+          </a:fontRef>
+        </p:style>
+        <p:txBody>
+          <a:bodyPr rtlCol="0" anchor="ctr"/>
+          <a:lstStyle/>
+          <a:p>
+            <a:pPr algn="ctr"/>
+          </a:p>
+        </p:txBody>
+      </p:sp>
+      <p:sp>
+        <p:nvSpPr>
+          <p:cNvPr id="12" name="Rectangle 11"/>
+          <p:cNvSpPr/>
+          <p:nvPr/>
+        </p:nvSpPr>
+        <p:spPr>
+          <a:xfrm>
+            <a:off x="457200" y="3694176"/>
+            <a:ext cx="128016" cy="1051560"/>
+          </a:xfrm>
+          <a:prstGeom prst="rect">
+            <a:avLst/>
+          </a:prstGeom>
+          <a:solidFill>
+            <a:srgbClr val="A02030"/>
+          </a:solidFill>
+          <a:ln>
+            <a:noFill/>
+          </a:ln>
+        </p:spPr>
+        <p:style>
+          <a:lnRef idx="1">
+            <a:schemeClr val="accent1"/>
+          </a:lnRef>
+          <a:fillRef idx="3">
+            <a:schemeClr val="accent1"/>
+          </a:fillRef>
+          <a:effectRef idx="2">
+            <a:schemeClr val="accent1"/>
+          </a:effectRef>
+          <a:fontRef idx="minor">
+            <a:schemeClr val="lt1"/>
+          </a:fontRef>
+        </p:style>
+        <p:txBody>
+          <a:bodyPr rtlCol="0" anchor="ctr"/>
+          <a:lstStyle/>
+          <a:p>
+            <a:pPr algn="ctr"/>
+          </a:p>
+        </p:txBody>
+      </p:sp>
+      <p:sp>
+        <p:nvSpPr>
+          <p:cNvPr id="13" name="TextBox 12"/>
+          <p:cNvSpPr txBox="1"/>
+          <p:nvPr/>
+        </p:nvSpPr>
+        <p:spPr>
+          <a:xfrm>
+            <a:off x="777240" y="3831336"/>
+            <a:ext cx="10774375" cy="822959"/>
+          </a:xfrm>
+          <a:prstGeom prst="rect">
+            <a:avLst/>
+          </a:prstGeom>
+          <a:noFill/>
+        </p:spPr>
+        <p:txBody>
+          <a:bodyPr wrap="square">
+            <a:spAutoFit/>
+          </a:bodyPr>
+          <a:lstStyle/>
+          <a:p>
+            <a:r>
+              <a:rPr sz="1200" b="1" i="0">
+                <a:solidFill>
+                  <a:srgbClr val="A02030"/>
+                </a:solidFill>
+                <a:latin typeface="Calibri"/>
+              </a:rPr>
+              <a:t>Atención</a:t>
+            </a:r>
+          </a:p>
+          <a:p>
+            <a:pPr>
+              <a:spcBef>
+                <a:spcPts val="400"/>
+              </a:spcBef>
+            </a:pPr>
+            <a:r>
+              <a:rPr sz="1400" b="0" i="0">
+                <a:solidFill>
+                  <a:srgbClr val="333333"/>
+                </a:solidFill>
+                <a:latin typeface="Calibri"/>
+              </a:rPr>
+              <a:t>Sin cloud de pago ni instalaciones obligatorias de hipervisores/Docker Desktop.</a:t>
+            </a:r>
+          </a:p>
+        </p:txBody>
+      </p:sp>
+      <p:sp>
+        <p:nvSpPr>
+          <p:cNvPr id="14" name="TextBox 13"/>
+          <p:cNvSpPr txBox="1"/>
+          <p:nvPr/>
+        </p:nvSpPr>
+        <p:spPr>
+          <a:xfrm>
+            <a:off x="11185855" y="6473952"/>
+            <a:ext cx="640080" cy="274320"/>
+          </a:xfrm>
+          <a:prstGeom prst="rect">
+            <a:avLst/>
+          </a:prstGeom>
+          <a:noFill/>
+        </p:spPr>
+        <p:txBody>
+          <a:bodyPr wrap="square">
+            <a:spAutoFit/>
+          </a:bodyPr>
+          <a:lstStyle/>
+          <a:p>
+            <a:pPr algn="r"/>
+            <a:r>
+              <a:rPr sz="1100" b="0" i="0">
+                <a:solidFill>
+                  <a:srgbClr val="666666"/>
+                </a:solidFill>
+                <a:latin typeface="Calibri"/>
+              </a:rPr>
+              <a:t>12</a:t>
+            </a:r>
+          </a:p>
+        </p:txBody>
+      </p:sp>
+    </p:spTree>
+  </p:cSld>
+  <p:clrMapOvr>
+    <a:masterClrMapping/>
+  </p:clrMapOvr>
+</p:sld>
+</file>
+
+<file path=ppt/slides/slide13.xml><?xml version="1.0" encoding="utf-8"?>
+<p:sld xmlns:a="http://schemas.openxmlformats.org/drawingml/2006/main" xmlns:p="http://schemas.openxmlformats.org/presentationml/2006/main" xmlns:r="http://schemas.openxmlformats.org/officeDocument/2006/relationships">
+  <p:cSld>
+    <p:bg>
+      <p:bgPr>
+        <a:solidFill>
+          <a:srgbClr val="FFFFFF"/>
+        </a:solidFill>
+        <a:effectLst/>
+      </p:bgPr>
+    </p:bg>
+    <p:spTree>
+      <p:nvGrpSpPr>
+        <p:cNvPr id="1" name=""/>
+        <p:cNvGrpSpPr/>
+        <p:nvPr/>
+      </p:nvGrpSpPr>
+      <p:grpSpPr/>
+      <p:sp>
+        <p:nvSpPr>
+          <p:cNvPr id="2" name="Rectangle 1"/>
+          <p:cNvSpPr/>
+          <p:nvPr/>
+        </p:nvSpPr>
+        <p:spPr>
+          <a:xfrm>
+            <a:off x="0" y="0"/>
             <a:ext cx="12191695" cy="164592"/>
           </a:xfrm>
           <a:prstGeom prst="rect">
@@ -4204,7 +5436,7 @@
                 </a:solidFill>
                 <a:latin typeface="Calibri"/>
               </a:rPr>
-              <a:t>Evidencia: Ficha PI: dominio, capacidades, actores y boceto C4 Context (Excalidraw/draw.io)</a:t>
+              <a:t>Evidencia: Ficha PI de 6 bloques + C4 Context en Mermaid renderizado en ExamLab (boceto previo en Excalidraw/draw.io)</a:t>
             </a:r>
           </a:p>
           <a:p>
@@ -5093,7 +6325,7 @@
                 </a:solidFill>
                 <a:latin typeface="Calibri"/>
               </a:rPr>
-              <a:t> Ficha PI: dominio, capacidades, actores y boceto C4 Context (Excalidraw/draw.io)</a:t>
+              <a:t> Ficha PI de 6 bloques + C4 Context en Mermaid renderizado en ExamLab (boceto previo en Excalidraw/draw.io)</a:t>
             </a:r>
           </a:p>
           <a:p>
@@ -6709,7 +7941,7 @@
         <p:spPr>
           <a:xfrm>
             <a:off x="0" y="0"/>
-            <a:ext cx="12191695" cy="960120"/>
+            <a:ext cx="12191695" cy="1170432"/>
           </a:xfrm>
           <a:prstGeom prst="rect">
             <a:avLst/>
@@ -6751,7 +7983,7 @@
         </p:nvSpPr>
         <p:spPr>
           <a:xfrm>
-            <a:off x="0" y="960120"/>
+            <a:off x="0" y="1170432"/>
             <a:ext cx="12191695" cy="41148"/>
           </a:xfrm>
           <a:prstGeom prst="rect">
@@ -6795,7 +8027,7 @@
         <p:spPr>
           <a:xfrm>
             <a:off x="457200" y="164592"/>
-            <a:ext cx="11277295" cy="502920"/>
+            <a:ext cx="11277295" cy="384048"/>
           </a:xfrm>
           <a:prstGeom prst="rect">
             <a:avLst/>
@@ -6815,7 +8047,7 @@
                 </a:solidFill>
                 <a:latin typeface="Calibri"/>
               </a:rPr>
-              <a:t>Taller PI (paso a paso)</a:t>
+              <a:t>Herramientas de hoy</a:t>
             </a:r>
           </a:p>
         </p:txBody>
@@ -6828,8 +8060,8 @@
         </p:nvSpPr>
         <p:spPr>
           <a:xfrm>
-            <a:off x="457200" y="1170432"/>
-            <a:ext cx="11277295" cy="5230368"/>
+            <a:off x="457200" y="566928"/>
+            <a:ext cx="11277295" cy="411480"/>
           </a:xfrm>
           <a:prstGeom prst="rect">
             <a:avLst/>
@@ -6842,137 +8074,1041 @@
           </a:bodyPr>
           <a:lstStyle/>
           <a:p>
-            <a:pPr>
-              <a:spcAft>
-                <a:spcPts val="800"/>
-              </a:spcAft>
+            <a:r>
+              <a:rPr sz="1400" b="0" i="0">
+                <a:solidFill>
+                  <a:srgbClr val="B8D8EE"/>
+                </a:solidFill>
+                <a:latin typeface="Calibri"/>
+              </a:rPr>
+              <a:t>Gratis · navegador o free tier · sin cuenta de pago</a:t>
+            </a:r>
+          </a:p>
+        </p:txBody>
+      </p:sp>
+      <p:sp>
+        <p:nvSpPr>
+          <p:cNvPr id="6" name="Rounded Rectangle 5"/>
+          <p:cNvSpPr/>
+          <p:nvPr/>
+        </p:nvSpPr>
+        <p:spPr>
+          <a:xfrm>
+            <a:off x="457200" y="1591056"/>
+            <a:ext cx="3624986" cy="2299716"/>
+          </a:xfrm>
+          <a:prstGeom prst="roundRect">
+            <a:avLst>
+              <a:gd name="adj" fmla="val 12000"/>
+            </a:avLst>
+          </a:prstGeom>
+          <a:solidFill>
+            <a:srgbClr val="F2F2F2"/>
+          </a:solidFill>
+          <a:ln>
+            <a:noFill/>
+          </a:ln>
+        </p:spPr>
+        <p:style>
+          <a:lnRef idx="1">
+            <a:schemeClr val="accent1"/>
+          </a:lnRef>
+          <a:fillRef idx="3">
+            <a:schemeClr val="accent1"/>
+          </a:fillRef>
+          <a:effectRef idx="2">
+            <a:schemeClr val="accent1"/>
+          </a:effectRef>
+          <a:fontRef idx="minor">
+            <a:schemeClr val="lt1"/>
+          </a:fontRef>
+        </p:style>
+        <p:txBody>
+          <a:bodyPr rtlCol="0" anchor="ctr"/>
+          <a:lstStyle/>
+          <a:p>
+            <a:pPr algn="ctr"/>
+          </a:p>
+        </p:txBody>
+      </p:sp>
+      <p:sp>
+        <p:nvSpPr>
+          <p:cNvPr id="7" name="Rectangle 6"/>
+          <p:cNvSpPr/>
+          <p:nvPr/>
+        </p:nvSpPr>
+        <p:spPr>
+          <a:xfrm>
+            <a:off x="457200" y="1591056"/>
+            <a:ext cx="3624986" cy="64008"/>
+          </a:xfrm>
+          <a:prstGeom prst="rect">
+            <a:avLst/>
+          </a:prstGeom>
+          <a:solidFill>
+            <a:srgbClr val="095292"/>
+          </a:solidFill>
+          <a:ln>
+            <a:noFill/>
+          </a:ln>
+        </p:spPr>
+        <p:style>
+          <a:lnRef idx="1">
+            <a:schemeClr val="accent1"/>
+          </a:lnRef>
+          <a:fillRef idx="3">
+            <a:schemeClr val="accent1"/>
+          </a:fillRef>
+          <a:effectRef idx="2">
+            <a:schemeClr val="accent1"/>
+          </a:effectRef>
+          <a:fontRef idx="minor">
+            <a:schemeClr val="lt1"/>
+          </a:fontRef>
+        </p:style>
+        <p:txBody>
+          <a:bodyPr rtlCol="0" anchor="ctr"/>
+          <a:lstStyle/>
+          <a:p>
+            <a:pPr algn="ctr"/>
+          </a:p>
+        </p:txBody>
+      </p:sp>
+      <p:sp>
+        <p:nvSpPr>
+          <p:cNvPr id="8" name="Rectangle 7"/>
+          <p:cNvSpPr/>
+          <p:nvPr/>
+        </p:nvSpPr>
+        <p:spPr>
+          <a:xfrm>
+            <a:off x="457200" y="1655064"/>
+            <a:ext cx="3624986" cy="27432"/>
+          </a:xfrm>
+          <a:prstGeom prst="rect">
+            <a:avLst/>
+          </a:prstGeom>
+          <a:solidFill>
+            <a:srgbClr val="FFD000"/>
+          </a:solidFill>
+          <a:ln>
+            <a:noFill/>
+          </a:ln>
+        </p:spPr>
+        <p:style>
+          <a:lnRef idx="1">
+            <a:schemeClr val="accent1"/>
+          </a:lnRef>
+          <a:fillRef idx="3">
+            <a:schemeClr val="accent1"/>
+          </a:fillRef>
+          <a:effectRef idx="2">
+            <a:schemeClr val="accent1"/>
+          </a:effectRef>
+          <a:fontRef idx="minor">
+            <a:schemeClr val="lt1"/>
+          </a:fontRef>
+        </p:style>
+        <p:txBody>
+          <a:bodyPr rtlCol="0" anchor="ctr"/>
+          <a:lstStyle/>
+          <a:p>
+            <a:pPr algn="ctr"/>
+          </a:p>
+        </p:txBody>
+      </p:sp>
+      <p:pic>
+        <p:nvPicPr>
+          <p:cNvPr id="9" name="Picture 8" descr="padlet.png"/>
+          <p:cNvPicPr>
+            <a:picLocks noChangeAspect="1"/>
+          </p:cNvPicPr>
+          <p:nvPr/>
+        </p:nvPicPr>
+        <p:blipFill>
+          <a:blip r:embed="rId2"/>
+          <a:stretch>
+            <a:fillRect/>
+          </a:stretch>
+        </p:blipFill>
+        <p:spPr>
+          <a:xfrm>
+            <a:off x="1659331" y="1847087"/>
+            <a:ext cx="1220724" cy="1220724"/>
+          </a:xfrm>
+          <a:prstGeom prst="rect">
+            <a:avLst/>
+          </a:prstGeom>
+        </p:spPr>
+      </p:pic>
+      <p:sp>
+        <p:nvSpPr>
+          <p:cNvPr id="10" name="TextBox 9"/>
+          <p:cNvSpPr txBox="1"/>
+          <p:nvPr/>
+        </p:nvSpPr>
+        <p:spPr>
+          <a:xfrm>
+            <a:off x="530352" y="3159251"/>
+            <a:ext cx="3478682" cy="621792"/>
+          </a:xfrm>
+          <a:prstGeom prst="rect">
+            <a:avLst/>
+          </a:prstGeom>
+          <a:noFill/>
+        </p:spPr>
+        <p:txBody>
+          <a:bodyPr wrap="square" anchor="t"/>
+          <a:lstStyle/>
+          <a:p>
+            <a:pPr algn="ctr"/>
+            <a:r>
+              <a:rPr sz="1300" b="1" i="0">
+                <a:solidFill>
+                  <a:srgbClr val="095292"/>
+                </a:solidFill>
+                <a:latin typeface="Calibri"/>
+              </a:rPr>
+              <a:t>Padlet</a:t>
+            </a:r>
+          </a:p>
+          <a:p>
+            <a:pPr algn="ctr">
+              <a:spcBef>
+                <a:spcPts val="200"/>
+              </a:spcBef>
             </a:pPr>
             <a:r>
-              <a:rPr sz="1600" b="1" i="0">
-                <a:solidFill>
-                  <a:srgbClr val="333333"/>
-                </a:solidFill>
-                <a:latin typeface="Calibri"/>
-              </a:rPr>
-              <a:t>1.</a:t>
-            </a:r>
-            <a:r>
-              <a:rPr sz="1600" b="0" i="0">
-                <a:solidFill>
-                  <a:srgbClr val="333333"/>
-                </a:solidFill>
-                <a:latin typeface="Calibri"/>
-              </a:rPr>
-              <a:t> Paso 1: elija un dominio concreto entre AgendaU, BiblioLite, InventarioLab, TurnosClinica o EventosCampus (o uno propio del mismo tamano) y escriba el problema en exactamente 3 frases: quien sufre el problema, como se resuelve hoy sin CloudLite y una cifra medible del dolor (por ejemplo 40 correos por semana para cuadrar 12 asesorias), verificando que en ninguna de las 3 frases aparezca una expresion generica como app de la universidad o red social; el resultado queda en la seccion 1 Dominio y problema del informe del PI.</a:t>
-            </a:r>
-          </a:p>
-          <a:p>
-            <a:pPr>
-              <a:spcAft>
-                <a:spcPts val="800"/>
-              </a:spcAft>
+              <a:rPr sz="1000" b="0" i="0">
+                <a:solidFill>
+                  <a:srgbClr val="666666"/>
+                </a:solidFill>
+                <a:latin typeface="Calibri"/>
+              </a:rPr>
+              <a:t>Rompehielos</a:t>
+            </a:r>
+          </a:p>
+        </p:txBody>
+      </p:sp>
+      <p:sp>
+        <p:nvSpPr>
+          <p:cNvPr id="11" name="Rounded Rectangle 10"/>
+          <p:cNvSpPr/>
+          <p:nvPr/>
+        </p:nvSpPr>
+        <p:spPr>
+          <a:xfrm>
+            <a:off x="4283354" y="1591056"/>
+            <a:ext cx="3624986" cy="2299716"/>
+          </a:xfrm>
+          <a:prstGeom prst="roundRect">
+            <a:avLst>
+              <a:gd name="adj" fmla="val 12000"/>
+            </a:avLst>
+          </a:prstGeom>
+          <a:solidFill>
+            <a:srgbClr val="F2F2F2"/>
+          </a:solidFill>
+          <a:ln>
+            <a:noFill/>
+          </a:ln>
+        </p:spPr>
+        <p:style>
+          <a:lnRef idx="1">
+            <a:schemeClr val="accent1"/>
+          </a:lnRef>
+          <a:fillRef idx="3">
+            <a:schemeClr val="accent1"/>
+          </a:fillRef>
+          <a:effectRef idx="2">
+            <a:schemeClr val="accent1"/>
+          </a:effectRef>
+          <a:fontRef idx="minor">
+            <a:schemeClr val="lt1"/>
+          </a:fontRef>
+        </p:style>
+        <p:txBody>
+          <a:bodyPr rtlCol="0" anchor="ctr"/>
+          <a:lstStyle/>
+          <a:p>
+            <a:pPr algn="ctr"/>
+          </a:p>
+        </p:txBody>
+      </p:sp>
+      <p:sp>
+        <p:nvSpPr>
+          <p:cNvPr id="12" name="Rectangle 11"/>
+          <p:cNvSpPr/>
+          <p:nvPr/>
+        </p:nvSpPr>
+        <p:spPr>
+          <a:xfrm>
+            <a:off x="4283354" y="1591056"/>
+            <a:ext cx="3624986" cy="64008"/>
+          </a:xfrm>
+          <a:prstGeom prst="rect">
+            <a:avLst/>
+          </a:prstGeom>
+          <a:solidFill>
+            <a:srgbClr val="095292"/>
+          </a:solidFill>
+          <a:ln>
+            <a:noFill/>
+          </a:ln>
+        </p:spPr>
+        <p:style>
+          <a:lnRef idx="1">
+            <a:schemeClr val="accent1"/>
+          </a:lnRef>
+          <a:fillRef idx="3">
+            <a:schemeClr val="accent1"/>
+          </a:fillRef>
+          <a:effectRef idx="2">
+            <a:schemeClr val="accent1"/>
+          </a:effectRef>
+          <a:fontRef idx="minor">
+            <a:schemeClr val="lt1"/>
+          </a:fontRef>
+        </p:style>
+        <p:txBody>
+          <a:bodyPr rtlCol="0" anchor="ctr"/>
+          <a:lstStyle/>
+          <a:p>
+            <a:pPr algn="ctr"/>
+          </a:p>
+        </p:txBody>
+      </p:sp>
+      <p:sp>
+        <p:nvSpPr>
+          <p:cNvPr id="13" name="Rectangle 12"/>
+          <p:cNvSpPr/>
+          <p:nvPr/>
+        </p:nvSpPr>
+        <p:spPr>
+          <a:xfrm>
+            <a:off x="4283354" y="1655064"/>
+            <a:ext cx="3624986" cy="27432"/>
+          </a:xfrm>
+          <a:prstGeom prst="rect">
+            <a:avLst/>
+          </a:prstGeom>
+          <a:solidFill>
+            <a:srgbClr val="FFD000"/>
+          </a:solidFill>
+          <a:ln>
+            <a:noFill/>
+          </a:ln>
+        </p:spPr>
+        <p:style>
+          <a:lnRef idx="1">
+            <a:schemeClr val="accent1"/>
+          </a:lnRef>
+          <a:fillRef idx="3">
+            <a:schemeClr val="accent1"/>
+          </a:fillRef>
+          <a:effectRef idx="2">
+            <a:schemeClr val="accent1"/>
+          </a:effectRef>
+          <a:fontRef idx="minor">
+            <a:schemeClr val="lt1"/>
+          </a:fontRef>
+        </p:style>
+        <p:txBody>
+          <a:bodyPr rtlCol="0" anchor="ctr"/>
+          <a:lstStyle/>
+          <a:p>
+            <a:pPr algn="ctr"/>
+          </a:p>
+        </p:txBody>
+      </p:sp>
+      <p:pic>
+        <p:nvPicPr>
+          <p:cNvPr id="14" name="Picture 13" descr="excalidraw.png"/>
+          <p:cNvPicPr>
+            <a:picLocks noChangeAspect="1"/>
+          </p:cNvPicPr>
+          <p:nvPr/>
+        </p:nvPicPr>
+        <p:blipFill>
+          <a:blip r:embed="rId3"/>
+          <a:stretch>
+            <a:fillRect/>
+          </a:stretch>
+        </p:blipFill>
+        <p:spPr>
+          <a:xfrm>
+            <a:off x="5485485" y="1847087"/>
+            <a:ext cx="1220724" cy="1220724"/>
+          </a:xfrm>
+          <a:prstGeom prst="rect">
+            <a:avLst/>
+          </a:prstGeom>
+        </p:spPr>
+      </p:pic>
+      <p:sp>
+        <p:nvSpPr>
+          <p:cNvPr id="15" name="TextBox 14"/>
+          <p:cNvSpPr txBox="1"/>
+          <p:nvPr/>
+        </p:nvSpPr>
+        <p:spPr>
+          <a:xfrm>
+            <a:off x="4356506" y="3159251"/>
+            <a:ext cx="3478682" cy="621792"/>
+          </a:xfrm>
+          <a:prstGeom prst="rect">
+            <a:avLst/>
+          </a:prstGeom>
+          <a:noFill/>
+        </p:spPr>
+        <p:txBody>
+          <a:bodyPr wrap="square" anchor="t"/>
+          <a:lstStyle/>
+          <a:p>
+            <a:pPr algn="ctr"/>
+            <a:r>
+              <a:rPr sz="1300" b="1" i="0">
+                <a:solidFill>
+                  <a:srgbClr val="095292"/>
+                </a:solidFill>
+                <a:latin typeface="Calibri"/>
+              </a:rPr>
+              <a:t>Excalidraw</a:t>
+            </a:r>
+          </a:p>
+          <a:p>
+            <a:pPr algn="ctr">
+              <a:spcBef>
+                <a:spcPts val="200"/>
+              </a:spcBef>
             </a:pPr>
             <a:r>
-              <a:rPr sz="1600" b="0" i="0">
-                <a:solidFill>
-                  <a:srgbClr val="333333"/>
-                </a:solidFill>
-                <a:latin typeface="Calibri"/>
-              </a:rPr>
-              <a:t>–   </a:t>
-            </a:r>
-            <a:r>
-              <a:rPr sz="1600" b="1" i="0">
-                <a:solidFill>
-                  <a:srgbClr val="333333"/>
-                </a:solidFill>
-                <a:latin typeface="Calibri"/>
-              </a:rPr>
-              <a:t>2.</a:t>
-            </a:r>
-            <a:r>
-              <a:rPr sz="1600" b="0" i="0">
-                <a:solidFill>
-                  <a:srgbClr val="333333"/>
-                </a:solidFill>
-                <a:latin typeface="Calibri"/>
-              </a:rPr>
-              <a:t> Paso 2: liste exactamente 4 capacidades con la forma verbo mas objeto de negocio (reservar cita, publicar cupo, cancelar reserva, notificar recordatorio), 3 actores humanos con lo que espera cada uno, 2 o 3 sistemas externos con los que CloudLite intercambia informacion (por ejemplo proveedor de identidad, correo transaccional o pasarela de pagos) y 3 elementos de fuera de alcance, verificando que ninguna capacidad nombre tecnologia (nada de usar PostgreSQL ni desplegar en Docker) y que las 4 capacidades se lean como frases del negocio; queda en la seccion 1 del informe y se pega tal cual en la pregunta 1 de ExamLab.</a:t>
-            </a:r>
-          </a:p>
-          <a:p>
-            <a:pPr>
-              <a:spcAft>
-                <a:spcPts val="800"/>
-              </a:spcAft>
+              <a:rPr sz="1000" b="0" i="0">
+                <a:solidFill>
+                  <a:srgbClr val="666666"/>
+                </a:solidFill>
+                <a:latin typeface="Calibri"/>
+              </a:rPr>
+              <a:t>Boceto rapido</a:t>
+            </a:r>
+          </a:p>
+        </p:txBody>
+      </p:sp>
+      <p:sp>
+        <p:nvSpPr>
+          <p:cNvPr id="16" name="Rounded Rectangle 15"/>
+          <p:cNvSpPr/>
+          <p:nvPr/>
+        </p:nvSpPr>
+        <p:spPr>
+          <a:xfrm>
+            <a:off x="8109508" y="1591056"/>
+            <a:ext cx="3624986" cy="2299716"/>
+          </a:xfrm>
+          <a:prstGeom prst="roundRect">
+            <a:avLst>
+              <a:gd name="adj" fmla="val 12000"/>
+            </a:avLst>
+          </a:prstGeom>
+          <a:solidFill>
+            <a:srgbClr val="F2F2F2"/>
+          </a:solidFill>
+          <a:ln>
+            <a:noFill/>
+          </a:ln>
+        </p:spPr>
+        <p:style>
+          <a:lnRef idx="1">
+            <a:schemeClr val="accent1"/>
+          </a:lnRef>
+          <a:fillRef idx="3">
+            <a:schemeClr val="accent1"/>
+          </a:fillRef>
+          <a:effectRef idx="2">
+            <a:schemeClr val="accent1"/>
+          </a:effectRef>
+          <a:fontRef idx="minor">
+            <a:schemeClr val="lt1"/>
+          </a:fontRef>
+        </p:style>
+        <p:txBody>
+          <a:bodyPr rtlCol="0" anchor="ctr"/>
+          <a:lstStyle/>
+          <a:p>
+            <a:pPr algn="ctr"/>
+          </a:p>
+        </p:txBody>
+      </p:sp>
+      <p:sp>
+        <p:nvSpPr>
+          <p:cNvPr id="17" name="Rectangle 16"/>
+          <p:cNvSpPr/>
+          <p:nvPr/>
+        </p:nvSpPr>
+        <p:spPr>
+          <a:xfrm>
+            <a:off x="8109508" y="1591056"/>
+            <a:ext cx="3624986" cy="64008"/>
+          </a:xfrm>
+          <a:prstGeom prst="rect">
+            <a:avLst/>
+          </a:prstGeom>
+          <a:solidFill>
+            <a:srgbClr val="095292"/>
+          </a:solidFill>
+          <a:ln>
+            <a:noFill/>
+          </a:ln>
+        </p:spPr>
+        <p:style>
+          <a:lnRef idx="1">
+            <a:schemeClr val="accent1"/>
+          </a:lnRef>
+          <a:fillRef idx="3">
+            <a:schemeClr val="accent1"/>
+          </a:fillRef>
+          <a:effectRef idx="2">
+            <a:schemeClr val="accent1"/>
+          </a:effectRef>
+          <a:fontRef idx="minor">
+            <a:schemeClr val="lt1"/>
+          </a:fontRef>
+        </p:style>
+        <p:txBody>
+          <a:bodyPr rtlCol="0" anchor="ctr"/>
+          <a:lstStyle/>
+          <a:p>
+            <a:pPr algn="ctr"/>
+          </a:p>
+        </p:txBody>
+      </p:sp>
+      <p:sp>
+        <p:nvSpPr>
+          <p:cNvPr id="18" name="Rectangle 17"/>
+          <p:cNvSpPr/>
+          <p:nvPr/>
+        </p:nvSpPr>
+        <p:spPr>
+          <a:xfrm>
+            <a:off x="8109508" y="1655064"/>
+            <a:ext cx="3624986" cy="27432"/>
+          </a:xfrm>
+          <a:prstGeom prst="rect">
+            <a:avLst/>
+          </a:prstGeom>
+          <a:solidFill>
+            <a:srgbClr val="FFD000"/>
+          </a:solidFill>
+          <a:ln>
+            <a:noFill/>
+          </a:ln>
+        </p:spPr>
+        <p:style>
+          <a:lnRef idx="1">
+            <a:schemeClr val="accent1"/>
+          </a:lnRef>
+          <a:fillRef idx="3">
+            <a:schemeClr val="accent1"/>
+          </a:fillRef>
+          <a:effectRef idx="2">
+            <a:schemeClr val="accent1"/>
+          </a:effectRef>
+          <a:fontRef idx="minor">
+            <a:schemeClr val="lt1"/>
+          </a:fontRef>
+        </p:style>
+        <p:txBody>
+          <a:bodyPr rtlCol="0" anchor="ctr"/>
+          <a:lstStyle/>
+          <a:p>
+            <a:pPr algn="ctr"/>
+          </a:p>
+        </p:txBody>
+      </p:sp>
+      <p:pic>
+        <p:nvPicPr>
+          <p:cNvPr id="19" name="Picture 18" descr="drawio.png"/>
+          <p:cNvPicPr>
+            <a:picLocks noChangeAspect="1"/>
+          </p:cNvPicPr>
+          <p:nvPr/>
+        </p:nvPicPr>
+        <p:blipFill>
+          <a:blip r:embed="rId4"/>
+          <a:stretch>
+            <a:fillRect/>
+          </a:stretch>
+        </p:blipFill>
+        <p:spPr>
+          <a:xfrm>
+            <a:off x="9311640" y="1847087"/>
+            <a:ext cx="1220724" cy="1220724"/>
+          </a:xfrm>
+          <a:prstGeom prst="rect">
+            <a:avLst/>
+          </a:prstGeom>
+        </p:spPr>
+      </p:pic>
+      <p:sp>
+        <p:nvSpPr>
+          <p:cNvPr id="20" name="TextBox 19"/>
+          <p:cNvSpPr txBox="1"/>
+          <p:nvPr/>
+        </p:nvSpPr>
+        <p:spPr>
+          <a:xfrm>
+            <a:off x="8182660" y="3159251"/>
+            <a:ext cx="3478682" cy="621792"/>
+          </a:xfrm>
+          <a:prstGeom prst="rect">
+            <a:avLst/>
+          </a:prstGeom>
+          <a:noFill/>
+        </p:spPr>
+        <p:txBody>
+          <a:bodyPr wrap="square" anchor="t"/>
+          <a:lstStyle/>
+          <a:p>
+            <a:pPr algn="ctr"/>
+            <a:r>
+              <a:rPr sz="1300" b="1" i="0">
+                <a:solidFill>
+                  <a:srgbClr val="095292"/>
+                </a:solidFill>
+                <a:latin typeface="Calibri"/>
+              </a:rPr>
+              <a:t>draw.io</a:t>
+            </a:r>
+          </a:p>
+          <a:p>
+            <a:pPr algn="ctr">
+              <a:spcBef>
+                <a:spcPts val="200"/>
+              </a:spcBef>
             </a:pPr>
             <a:r>
-              <a:rPr sz="1600" b="0" i="0">
-                <a:solidFill>
-                  <a:srgbClr val="333333"/>
-                </a:solidFill>
-                <a:latin typeface="Calibri"/>
-              </a:rPr>
-              <a:t>–   </a:t>
-            </a:r>
-            <a:r>
-              <a:rPr sz="1600" b="1" i="0">
-                <a:solidFill>
-                  <a:srgbClr val="333333"/>
-                </a:solidFill>
-                <a:latin typeface="Calibri"/>
-              </a:rPr>
-              <a:t>3.</a:t>
-            </a:r>
-            <a:r>
-              <a:rPr sz="1600" b="0" i="0">
-                <a:solidFill>
-                  <a:srgbClr val="333333"/>
-                </a:solidFill>
-                <a:latin typeface="Calibri"/>
-              </a:rPr>
-              <a:t> Paso 3: escriba en la pregunta de tipo diagrama de ExamLab el C4 Context en Mermaid con exactamente 1 System para CloudLite, 2 Person, 2 System_Ext y 5 relaciones etiquetadas con verbo de negocio y protocolo, verificando al renderizar dentro de la plataforma que no aparezca ninguna caja interna (ni base de datos ni API ni worker, eso es Clase 4) y que cada flecha se lea en voz alta como una frase completa.</a:t>
-            </a:r>
-          </a:p>
-          <a:p>
-            <a:pPr>
-              <a:spcAft>
-                <a:spcPts val="800"/>
-              </a:spcAft>
+              <a:rPr sz="1000" b="0" i="0">
+                <a:solidFill>
+                  <a:srgbClr val="666666"/>
+                </a:solidFill>
+                <a:latin typeface="Calibri"/>
+              </a:rPr>
+              <a:t>C4 Context</a:t>
+            </a:r>
+          </a:p>
+        </p:txBody>
+      </p:sp>
+      <p:sp>
+        <p:nvSpPr>
+          <p:cNvPr id="21" name="Rounded Rectangle 20"/>
+          <p:cNvSpPr/>
+          <p:nvPr/>
+        </p:nvSpPr>
+        <p:spPr>
+          <a:xfrm>
+            <a:off x="2370277" y="4055364"/>
+            <a:ext cx="3624986" cy="2299716"/>
+          </a:xfrm>
+          <a:prstGeom prst="roundRect">
+            <a:avLst>
+              <a:gd name="adj" fmla="val 12000"/>
+            </a:avLst>
+          </a:prstGeom>
+          <a:solidFill>
+            <a:srgbClr val="F2F2F2"/>
+          </a:solidFill>
+          <a:ln>
+            <a:noFill/>
+          </a:ln>
+        </p:spPr>
+        <p:style>
+          <a:lnRef idx="1">
+            <a:schemeClr val="accent1"/>
+          </a:lnRef>
+          <a:fillRef idx="3">
+            <a:schemeClr val="accent1"/>
+          </a:fillRef>
+          <a:effectRef idx="2">
+            <a:schemeClr val="accent1"/>
+          </a:effectRef>
+          <a:fontRef idx="minor">
+            <a:schemeClr val="lt1"/>
+          </a:fontRef>
+        </p:style>
+        <p:txBody>
+          <a:bodyPr rtlCol="0" anchor="ctr"/>
+          <a:lstStyle/>
+          <a:p>
+            <a:pPr algn="ctr"/>
+          </a:p>
+        </p:txBody>
+      </p:sp>
+      <p:sp>
+        <p:nvSpPr>
+          <p:cNvPr id="22" name="Rectangle 21"/>
+          <p:cNvSpPr/>
+          <p:nvPr/>
+        </p:nvSpPr>
+        <p:spPr>
+          <a:xfrm>
+            <a:off x="2370277" y="4055364"/>
+            <a:ext cx="3624986" cy="64008"/>
+          </a:xfrm>
+          <a:prstGeom prst="rect">
+            <a:avLst/>
+          </a:prstGeom>
+          <a:solidFill>
+            <a:srgbClr val="095292"/>
+          </a:solidFill>
+          <a:ln>
+            <a:noFill/>
+          </a:ln>
+        </p:spPr>
+        <p:style>
+          <a:lnRef idx="1">
+            <a:schemeClr val="accent1"/>
+          </a:lnRef>
+          <a:fillRef idx="3">
+            <a:schemeClr val="accent1"/>
+          </a:fillRef>
+          <a:effectRef idx="2">
+            <a:schemeClr val="accent1"/>
+          </a:effectRef>
+          <a:fontRef idx="minor">
+            <a:schemeClr val="lt1"/>
+          </a:fontRef>
+        </p:style>
+        <p:txBody>
+          <a:bodyPr rtlCol="0" anchor="ctr"/>
+          <a:lstStyle/>
+          <a:p>
+            <a:pPr algn="ctr"/>
+          </a:p>
+        </p:txBody>
+      </p:sp>
+      <p:sp>
+        <p:nvSpPr>
+          <p:cNvPr id="23" name="Rectangle 22"/>
+          <p:cNvSpPr/>
+          <p:nvPr/>
+        </p:nvSpPr>
+        <p:spPr>
+          <a:xfrm>
+            <a:off x="2370277" y="4119372"/>
+            <a:ext cx="3624986" cy="27432"/>
+          </a:xfrm>
+          <a:prstGeom prst="rect">
+            <a:avLst/>
+          </a:prstGeom>
+          <a:solidFill>
+            <a:srgbClr val="FFD000"/>
+          </a:solidFill>
+          <a:ln>
+            <a:noFill/>
+          </a:ln>
+        </p:spPr>
+        <p:style>
+          <a:lnRef idx="1">
+            <a:schemeClr val="accent1"/>
+          </a:lnRef>
+          <a:fillRef idx="3">
+            <a:schemeClr val="accent1"/>
+          </a:fillRef>
+          <a:effectRef idx="2">
+            <a:schemeClr val="accent1"/>
+          </a:effectRef>
+          <a:fontRef idx="minor">
+            <a:schemeClr val="lt1"/>
+          </a:fontRef>
+        </p:style>
+        <p:txBody>
+          <a:bodyPr rtlCol="0" anchor="ctr"/>
+          <a:lstStyle/>
+          <a:p>
+            <a:pPr algn="ctr"/>
+          </a:p>
+        </p:txBody>
+      </p:sp>
+      <p:pic>
+        <p:nvPicPr>
+          <p:cNvPr id="24" name="Picture 23" descr="mermaid.png"/>
+          <p:cNvPicPr>
+            <a:picLocks noChangeAspect="1"/>
+          </p:cNvPicPr>
+          <p:nvPr/>
+        </p:nvPicPr>
+        <p:blipFill>
+          <a:blip r:embed="rId5"/>
+          <a:stretch>
+            <a:fillRect/>
+          </a:stretch>
+        </p:blipFill>
+        <p:spPr>
+          <a:xfrm>
+            <a:off x="3572408" y="4311396"/>
+            <a:ext cx="1220724" cy="1220724"/>
+          </a:xfrm>
+          <a:prstGeom prst="rect">
+            <a:avLst/>
+          </a:prstGeom>
+        </p:spPr>
+      </p:pic>
+      <p:sp>
+        <p:nvSpPr>
+          <p:cNvPr id="25" name="TextBox 24"/>
+          <p:cNvSpPr txBox="1"/>
+          <p:nvPr/>
+        </p:nvSpPr>
+        <p:spPr>
+          <a:xfrm>
+            <a:off x="2443429" y="5623560"/>
+            <a:ext cx="3478682" cy="621792"/>
+          </a:xfrm>
+          <a:prstGeom prst="rect">
+            <a:avLst/>
+          </a:prstGeom>
+          <a:noFill/>
+        </p:spPr>
+        <p:txBody>
+          <a:bodyPr wrap="square" anchor="t"/>
+          <a:lstStyle/>
+          <a:p>
+            <a:pPr algn="ctr"/>
+            <a:r>
+              <a:rPr sz="1300" b="1" i="0">
+                <a:solidFill>
+                  <a:srgbClr val="095292"/>
+                </a:solidFill>
+                <a:latin typeface="Calibri"/>
+              </a:rPr>
+              <a:t>Mermaid</a:t>
+            </a:r>
+          </a:p>
+          <a:p>
+            <a:pPr algn="ctr">
+              <a:spcBef>
+                <a:spcPts val="200"/>
+              </a:spcBef>
             </a:pPr>
             <a:r>
-              <a:rPr sz="1600" b="0" i="0">
-                <a:solidFill>
-                  <a:srgbClr val="333333"/>
-                </a:solidFill>
-                <a:latin typeface="Calibri"/>
-              </a:rPr>
-              <a:t>–   </a:t>
-            </a:r>
-            <a:r>
-              <a:rPr sz="1600" b="1" i="0">
-                <a:solidFill>
-                  <a:srgbClr val="333333"/>
-                </a:solidFill>
-                <a:latin typeface="Calibri"/>
-              </a:rPr>
-              <a:t>4.</a:t>
-            </a:r>
-            <a:r>
-              <a:rPr sz="1600" b="0" i="0">
-                <a:solidFill>
-                  <a:srgbClr val="333333"/>
-                </a:solidFill>
-                <a:latin typeface="Calibri"/>
-              </a:rPr>
-              <a:t> Paso 4: resuelva la tabla comparativa de 4 filas nube frente a on-premise, cierre con el veredicto de 2 frases que sera la entrada del ADR-001 de la Clase 2, y suba a ExamLab (modulo Talleres) las 5 preguntas resueltas antes del domingo 23:59, verificando que la ficha, el diagrama renderizado y el veredicto usen exactamente los mismos nombres de actores y de sistemas externos.</a:t>
-            </a:r>
-          </a:p>
-        </p:txBody>
-      </p:sp>
-      <p:sp>
-        <p:nvSpPr>
-          <p:cNvPr id="6" name="TextBox 5"/>
+              <a:rPr sz="1000" b="0" i="0">
+                <a:solidFill>
+                  <a:srgbClr val="666666"/>
+                </a:solidFill>
+                <a:latin typeface="Calibri"/>
+              </a:rPr>
+              <a:t>Codigo del diagrama</a:t>
+            </a:r>
+          </a:p>
+        </p:txBody>
+      </p:sp>
+      <p:sp>
+        <p:nvSpPr>
+          <p:cNvPr id="26" name="Rounded Rectangle 25"/>
+          <p:cNvSpPr/>
+          <p:nvPr/>
+        </p:nvSpPr>
+        <p:spPr>
+          <a:xfrm>
+            <a:off x="6196431" y="4055364"/>
+            <a:ext cx="3624986" cy="2299716"/>
+          </a:xfrm>
+          <a:prstGeom prst="roundRect">
+            <a:avLst>
+              <a:gd name="adj" fmla="val 12000"/>
+            </a:avLst>
+          </a:prstGeom>
+          <a:solidFill>
+            <a:srgbClr val="F2F2F2"/>
+          </a:solidFill>
+          <a:ln>
+            <a:noFill/>
+          </a:ln>
+        </p:spPr>
+        <p:style>
+          <a:lnRef idx="1">
+            <a:schemeClr val="accent1"/>
+          </a:lnRef>
+          <a:fillRef idx="3">
+            <a:schemeClr val="accent1"/>
+          </a:fillRef>
+          <a:effectRef idx="2">
+            <a:schemeClr val="accent1"/>
+          </a:effectRef>
+          <a:fontRef idx="minor">
+            <a:schemeClr val="lt1"/>
+          </a:fontRef>
+        </p:style>
+        <p:txBody>
+          <a:bodyPr rtlCol="0" anchor="ctr"/>
+          <a:lstStyle/>
+          <a:p>
+            <a:pPr algn="ctr"/>
+          </a:p>
+        </p:txBody>
+      </p:sp>
+      <p:sp>
+        <p:nvSpPr>
+          <p:cNvPr id="27" name="Rectangle 26"/>
+          <p:cNvSpPr/>
+          <p:nvPr/>
+        </p:nvSpPr>
+        <p:spPr>
+          <a:xfrm>
+            <a:off x="6196431" y="4055364"/>
+            <a:ext cx="3624986" cy="64008"/>
+          </a:xfrm>
+          <a:prstGeom prst="rect">
+            <a:avLst/>
+          </a:prstGeom>
+          <a:solidFill>
+            <a:srgbClr val="095292"/>
+          </a:solidFill>
+          <a:ln>
+            <a:noFill/>
+          </a:ln>
+        </p:spPr>
+        <p:style>
+          <a:lnRef idx="1">
+            <a:schemeClr val="accent1"/>
+          </a:lnRef>
+          <a:fillRef idx="3">
+            <a:schemeClr val="accent1"/>
+          </a:fillRef>
+          <a:effectRef idx="2">
+            <a:schemeClr val="accent1"/>
+          </a:effectRef>
+          <a:fontRef idx="minor">
+            <a:schemeClr val="lt1"/>
+          </a:fontRef>
+        </p:style>
+        <p:txBody>
+          <a:bodyPr rtlCol="0" anchor="ctr"/>
+          <a:lstStyle/>
+          <a:p>
+            <a:pPr algn="ctr"/>
+          </a:p>
+        </p:txBody>
+      </p:sp>
+      <p:sp>
+        <p:nvSpPr>
+          <p:cNvPr id="28" name="Rectangle 27"/>
+          <p:cNvSpPr/>
+          <p:nvPr/>
+        </p:nvSpPr>
+        <p:spPr>
+          <a:xfrm>
+            <a:off x="6196431" y="4119372"/>
+            <a:ext cx="3624986" cy="27432"/>
+          </a:xfrm>
+          <a:prstGeom prst="rect">
+            <a:avLst/>
+          </a:prstGeom>
+          <a:solidFill>
+            <a:srgbClr val="FFD000"/>
+          </a:solidFill>
+          <a:ln>
+            <a:noFill/>
+          </a:ln>
+        </p:spPr>
+        <p:style>
+          <a:lnRef idx="1">
+            <a:schemeClr val="accent1"/>
+          </a:lnRef>
+          <a:fillRef idx="3">
+            <a:schemeClr val="accent1"/>
+          </a:fillRef>
+          <a:effectRef idx="2">
+            <a:schemeClr val="accent1"/>
+          </a:effectRef>
+          <a:fontRef idx="minor">
+            <a:schemeClr val="lt1"/>
+          </a:fontRef>
+        </p:style>
+        <p:txBody>
+          <a:bodyPr rtlCol="0" anchor="ctr"/>
+          <a:lstStyle/>
+          <a:p>
+            <a:pPr algn="ctr"/>
+          </a:p>
+        </p:txBody>
+      </p:sp>
+      <p:pic>
+        <p:nvPicPr>
+          <p:cNvPr id="29" name="Picture 28" descr="examlab.png"/>
+          <p:cNvPicPr>
+            <a:picLocks noChangeAspect="1"/>
+          </p:cNvPicPr>
+          <p:nvPr/>
+        </p:nvPicPr>
+        <p:blipFill>
+          <a:blip r:embed="rId6"/>
+          <a:stretch>
+            <a:fillRect/>
+          </a:stretch>
+        </p:blipFill>
+        <p:spPr>
+          <a:xfrm>
+            <a:off x="7398562" y="4311396"/>
+            <a:ext cx="1220724" cy="1220724"/>
+          </a:xfrm>
+          <a:prstGeom prst="rect">
+            <a:avLst/>
+          </a:prstGeom>
+        </p:spPr>
+      </p:pic>
+      <p:sp>
+        <p:nvSpPr>
+          <p:cNvPr id="30" name="TextBox 29"/>
+          <p:cNvSpPr txBox="1"/>
+          <p:nvPr/>
+        </p:nvSpPr>
+        <p:spPr>
+          <a:xfrm>
+            <a:off x="6269583" y="5623560"/>
+            <a:ext cx="3478682" cy="621792"/>
+          </a:xfrm>
+          <a:prstGeom prst="rect">
+            <a:avLst/>
+          </a:prstGeom>
+          <a:noFill/>
+        </p:spPr>
+        <p:txBody>
+          <a:bodyPr wrap="square" anchor="t"/>
+          <a:lstStyle/>
+          <a:p>
+            <a:pPr algn="ctr"/>
+            <a:r>
+              <a:rPr sz="1300" b="1" i="0">
+                <a:solidFill>
+                  <a:srgbClr val="095292"/>
+                </a:solidFill>
+                <a:latin typeface="Calibri"/>
+              </a:rPr>
+              <a:t>ExamLab</a:t>
+            </a:r>
+          </a:p>
+          <a:p>
+            <a:pPr algn="ctr">
+              <a:spcBef>
+                <a:spcPts val="200"/>
+              </a:spcBef>
+            </a:pPr>
+            <a:r>
+              <a:rPr sz="1000" b="0" i="0">
+                <a:solidFill>
+                  <a:srgbClr val="666666"/>
+                </a:solidFill>
+                <a:latin typeface="Calibri"/>
+              </a:rPr>
+              <a:t>Donde se entrega</a:t>
+            </a:r>
+          </a:p>
+        </p:txBody>
+      </p:sp>
+      <p:sp>
+        <p:nvSpPr>
+          <p:cNvPr id="31" name="TextBox 30"/>
           <p:cNvSpPr txBox="1"/>
           <p:nvPr/>
         </p:nvSpPr>

--- a/Arquitectura de Sistemas Computacionales/Clases/Clase 1 - Introduccion a arquitecturas cloud/Presentacion.pptx
+++ b/Arquitectura de Sistemas Computacionales/Clases/Clase 1 - Introduccion a arquitecturas cloud/Presentacion.pptx
@@ -8919,7 +8919,7 @@
                 </a:solidFill>
                 <a:latin typeface="Calibri"/>
               </a:rPr>
-              <a:t>–   Sin AWS/GCP/Oracle: draw.io, LabEx Docker Playground, GitHub Actions.</a:t>
+              <a:t>–   Sin AWS/GCP/Oracle: draw.io, Killercoda, GitHub Actions.</a:t>
             </a:r>
           </a:p>
         </p:txBody>

--- a/Arquitectura de Sistemas Computacionales/Clases/Clase 1 - Introduccion a arquitecturas cloud/Presentacion.pptx
+++ b/Arquitectura de Sistemas Computacionales/Clases/Clase 1 - Introduccion a arquitecturas cloud/Presentacion.pptx
@@ -18,7 +18,6 @@
     <p:sldId id="266" r:id="rId17"/>
     <p:sldId id="267" r:id="rId18"/>
     <p:sldId id="268" r:id="rId19"/>
-    <p:sldId id="269" r:id="rId20"/>
   </p:sldIdLst>
   <p:sldSz cx="12191695" cy="6858000" type="screen4x3"/>
   <p:notesSz cx="6858000" cy="9144000"/>
@@ -3577,7 +3576,7 @@
                 </a:solidFill>
                 <a:latin typeface="Calibri"/>
               </a:rPr>
-              <a:t>Herramientas de hoy</a:t>
+              <a:t>Del boceto a ExamLab (diagrama)</a:t>
             </a:r>
           </a:p>
         </p:txBody>
@@ -3611,7 +3610,7 @@
                 </a:solidFill>
                 <a:latin typeface="Calibri"/>
               </a:rPr>
-              <a:t>Gratis · navegador o free tier · sin cuenta de pago</a:t>
+              <a:t>El diagrama se entrega como código Mermaid dentro de ExamLab, no como imagen</a:t>
             </a:r>
           </a:p>
         </p:txBody>
@@ -3624,8 +3623,8 @@
         </p:nvSpPr>
         <p:spPr>
           <a:xfrm>
-            <a:off x="457200" y="1591056"/>
-            <a:ext cx="3624986" cy="2299716"/>
+            <a:off x="457200" y="1659636"/>
+            <a:ext cx="11277295" cy="1051560"/>
           </a:xfrm>
           <a:prstGeom prst="roundRect">
             <a:avLst>
@@ -3663,17 +3662,19 @@
       </p:sp>
       <p:sp>
         <p:nvSpPr>
-          <p:cNvPr id="7" name="Rectangle 6"/>
+          <p:cNvPr id="7" name="Rounded Rectangle 6"/>
           <p:cNvSpPr/>
           <p:nvPr/>
         </p:nvSpPr>
         <p:spPr>
           <a:xfrm>
-            <a:off x="457200" y="1591056"/>
-            <a:ext cx="3624986" cy="64008"/>
-          </a:xfrm>
-          <a:prstGeom prst="rect">
-            <a:avLst/>
+            <a:off x="594360" y="1965960"/>
+            <a:ext cx="438912" cy="438912"/>
+          </a:xfrm>
+          <a:prstGeom prst="roundRect">
+            <a:avLst>
+              <a:gd name="adj" fmla="val 12000"/>
+            </a:avLst>
           </a:prstGeom>
           <a:solidFill>
             <a:srgbClr val="095292"/>
@@ -3706,20 +3707,103 @@
       </p:sp>
       <p:sp>
         <p:nvSpPr>
-          <p:cNvPr id="8" name="Rectangle 7"/>
+          <p:cNvPr id="8" name="TextBox 7"/>
+          <p:cNvSpPr txBox="1"/>
+          <p:nvPr/>
+        </p:nvSpPr>
+        <p:spPr>
+          <a:xfrm>
+            <a:off x="594360" y="1965960"/>
+            <a:ext cx="438912" cy="438912"/>
+          </a:xfrm>
+          <a:prstGeom prst="rect">
+            <a:avLst/>
+          </a:prstGeom>
+          <a:noFill/>
+        </p:spPr>
+        <p:txBody>
+          <a:bodyPr wrap="square" anchor="ctr"/>
+          <a:lstStyle/>
+          <a:p>
+            <a:pPr algn="ctr"/>
+            <a:r>
+              <a:rPr sz="1600" b="1" i="0">
+                <a:solidFill>
+                  <a:srgbClr val="FFFFFF"/>
+                </a:solidFill>
+                <a:latin typeface="Calibri"/>
+              </a:rPr>
+              <a:t>1</a:t>
+            </a:r>
+          </a:p>
+        </p:txBody>
+      </p:sp>
+      <p:sp>
+        <p:nvSpPr>
+          <p:cNvPr id="9" name="TextBox 8"/>
+          <p:cNvSpPr txBox="1"/>
+          <p:nvPr/>
+        </p:nvSpPr>
+        <p:spPr>
+          <a:xfrm>
+            <a:off x="1188720" y="1751076"/>
+            <a:ext cx="10271455" cy="886968"/>
+          </a:xfrm>
+          <a:prstGeom prst="rect">
+            <a:avLst/>
+          </a:prstGeom>
+          <a:noFill/>
+        </p:spPr>
+        <p:txBody>
+          <a:bodyPr wrap="square" anchor="ctr"/>
+          <a:lstStyle/>
+          <a:p>
+            <a:r>
+              <a:rPr sz="1500" b="1" i="0">
+                <a:solidFill>
+                  <a:srgbClr val="095292"/>
+                </a:solidFill>
+                <a:latin typeface="Calibri"/>
+              </a:rPr>
+              <a:t>Disena visual</a:t>
+            </a:r>
+          </a:p>
+          <a:p>
+            <a:pPr>
+              <a:spcBef>
+                <a:spcPts val="200"/>
+              </a:spcBef>
+            </a:pPr>
+            <a:r>
+              <a:rPr sz="1300" b="0" i="0">
+                <a:solidFill>
+                  <a:srgbClr val="333333"/>
+                </a:solidFill>
+                <a:latin typeface="Calibri"/>
+              </a:rPr>
+              <a:t>Dibuja el diagrama como quieras en Excalidraw o draw.io: es mas rapido arrastrar cajas que escribir codigo, y ahi es donde piensas el modelo.</a:t>
+            </a:r>
+          </a:p>
+        </p:txBody>
+      </p:sp>
+      <p:sp>
+        <p:nvSpPr>
+          <p:cNvPr id="10" name="Rounded Rectangle 9"/>
           <p:cNvSpPr/>
           <p:nvPr/>
         </p:nvSpPr>
         <p:spPr>
           <a:xfrm>
-            <a:off x="457200" y="1655064"/>
-            <a:ext cx="3624986" cy="27432"/>
-          </a:xfrm>
-          <a:prstGeom prst="rect">
-            <a:avLst/>
+            <a:off x="457200" y="2802636"/>
+            <a:ext cx="11277295" cy="1051560"/>
+          </a:xfrm>
+          <a:prstGeom prst="roundRect">
+            <a:avLst>
+              <a:gd name="adj" fmla="val 12000"/>
+            </a:avLst>
           </a:prstGeom>
           <a:solidFill>
-            <a:srgbClr val="FFD000"/>
+            <a:srgbClr val="E8F4FA"/>
           </a:solidFill>
           <a:ln>
             <a:noFill/>
@@ -3747,40 +3831,61 @@
           </a:p>
         </p:txBody>
       </p:sp>
-      <p:pic>
-        <p:nvPicPr>
-          <p:cNvPr id="9" name="Picture 8" descr="padlet.png"/>
-          <p:cNvPicPr>
-            <a:picLocks noChangeAspect="1"/>
-          </p:cNvPicPr>
-          <p:nvPr/>
-        </p:nvPicPr>
-        <p:blipFill>
-          <a:blip r:embed="rId2"/>
-          <a:stretch>
-            <a:fillRect/>
-          </a:stretch>
-        </p:blipFill>
-        <p:spPr>
-          <a:xfrm>
-            <a:off x="1659331" y="1847087"/>
-            <a:ext cx="1220724" cy="1220724"/>
-          </a:xfrm>
-          <a:prstGeom prst="rect">
-            <a:avLst/>
-          </a:prstGeom>
-        </p:spPr>
-      </p:pic>
-      <p:sp>
-        <p:nvSpPr>
-          <p:cNvPr id="10" name="TextBox 9"/>
+      <p:sp>
+        <p:nvSpPr>
+          <p:cNvPr id="11" name="Rounded Rectangle 10"/>
+          <p:cNvSpPr/>
+          <p:nvPr/>
+        </p:nvSpPr>
+        <p:spPr>
+          <a:xfrm>
+            <a:off x="594360" y="3108960"/>
+            <a:ext cx="438912" cy="438912"/>
+          </a:xfrm>
+          <a:prstGeom prst="roundRect">
+            <a:avLst>
+              <a:gd name="adj" fmla="val 12000"/>
+            </a:avLst>
+          </a:prstGeom>
+          <a:solidFill>
+            <a:srgbClr val="095292"/>
+          </a:solidFill>
+          <a:ln>
+            <a:noFill/>
+          </a:ln>
+        </p:spPr>
+        <p:style>
+          <a:lnRef idx="1">
+            <a:schemeClr val="accent1"/>
+          </a:lnRef>
+          <a:fillRef idx="3">
+            <a:schemeClr val="accent1"/>
+          </a:fillRef>
+          <a:effectRef idx="2">
+            <a:schemeClr val="accent1"/>
+          </a:effectRef>
+          <a:fontRef idx="minor">
+            <a:schemeClr val="lt1"/>
+          </a:fontRef>
+        </p:style>
+        <p:txBody>
+          <a:bodyPr rtlCol="0" anchor="ctr"/>
+          <a:lstStyle/>
+          <a:p>
+            <a:pPr algn="ctr"/>
+          </a:p>
+        </p:txBody>
+      </p:sp>
+      <p:sp>
+        <p:nvSpPr>
+          <p:cNvPr id="12" name="TextBox 11"/>
           <p:cNvSpPr txBox="1"/>
           <p:nvPr/>
         </p:nvSpPr>
         <p:spPr>
           <a:xfrm>
-            <a:off x="530352" y="3159251"/>
-            <a:ext cx="3478682" cy="621792"/>
+            <a:off x="594360" y="3108960"/>
+            <a:ext cx="438912" cy="438912"/>
           </a:xfrm>
           <a:prstGeom prst="rect">
             <a:avLst/>
@@ -3788,48 +3893,80 @@
           <a:noFill/>
         </p:spPr>
         <p:txBody>
-          <a:bodyPr wrap="square" anchor="t"/>
+          <a:bodyPr wrap="square" anchor="ctr"/>
           <a:lstStyle/>
           <a:p>
             <a:pPr algn="ctr"/>
             <a:r>
-              <a:rPr sz="1300" b="1" i="0">
+              <a:rPr sz="1600" b="1" i="0">
+                <a:solidFill>
+                  <a:srgbClr val="FFFFFF"/>
+                </a:solidFill>
+                <a:latin typeface="Calibri"/>
+              </a:rPr>
+              <a:t>2</a:t>
+            </a:r>
+          </a:p>
+        </p:txBody>
+      </p:sp>
+      <p:sp>
+        <p:nvSpPr>
+          <p:cNvPr id="13" name="TextBox 12"/>
+          <p:cNvSpPr txBox="1"/>
+          <p:nvPr/>
+        </p:nvSpPr>
+        <p:spPr>
+          <a:xfrm>
+            <a:off x="1188720" y="2894076"/>
+            <a:ext cx="10271455" cy="886968"/>
+          </a:xfrm>
+          <a:prstGeom prst="rect">
+            <a:avLst/>
+          </a:prstGeom>
+          <a:noFill/>
+        </p:spPr>
+        <p:txBody>
+          <a:bodyPr wrap="square" anchor="ctr"/>
+          <a:lstStyle/>
+          <a:p>
+            <a:r>
+              <a:rPr sz="1500" b="1" i="0">
                 <a:solidFill>
                   <a:srgbClr val="095292"/>
                 </a:solidFill>
                 <a:latin typeface="Calibri"/>
               </a:rPr>
-              <a:t>Padlet</a:t>
-            </a:r>
-          </a:p>
-          <a:p>
-            <a:pPr algn="ctr">
+              <a:t>Traduce con IA</a:t>
+            </a:r>
+          </a:p>
+          <a:p>
+            <a:pPr>
               <a:spcBef>
                 <a:spcPts val="200"/>
               </a:spcBef>
             </a:pPr>
             <a:r>
-              <a:rPr sz="1000" b="0" i="0">
-                <a:solidFill>
-                  <a:srgbClr val="666666"/>
-                </a:solidFill>
-                <a:latin typeface="Calibri"/>
-              </a:rPr>
-              <a:t>Rompehielos</a:t>
-            </a:r>
-          </a:p>
-        </p:txBody>
-      </p:sp>
-      <p:sp>
-        <p:nvSpPr>
-          <p:cNvPr id="11" name="Rounded Rectangle 10"/>
+              <a:rPr sz="1300" b="0" i="0">
+                <a:solidFill>
+                  <a:srgbClr val="333333"/>
+                </a:solidFill>
+                <a:latin typeface="Calibri"/>
+              </a:rPr>
+              <a:t>Copia o describe tu boceto a una IA y pidele el codigo Mermaid: «convierte este diagrama a Mermaid usando C4Context». Revisa el resultado: la IA acierta la sintaxis, no tu modelo.</a:t>
+            </a:r>
+          </a:p>
+        </p:txBody>
+      </p:sp>
+      <p:sp>
+        <p:nvSpPr>
+          <p:cNvPr id="14" name="Rounded Rectangle 13"/>
           <p:cNvSpPr/>
           <p:nvPr/>
         </p:nvSpPr>
         <p:spPr>
           <a:xfrm>
-            <a:off x="4283354" y="1591056"/>
-            <a:ext cx="3624986" cy="2299716"/>
+            <a:off x="457200" y="3945636"/>
+            <a:ext cx="11277295" cy="1051560"/>
           </a:xfrm>
           <a:prstGeom prst="roundRect">
             <a:avLst>
@@ -3867,17 +4004,19 @@
       </p:sp>
       <p:sp>
         <p:nvSpPr>
-          <p:cNvPr id="12" name="Rectangle 11"/>
+          <p:cNvPr id="15" name="Rounded Rectangle 14"/>
           <p:cNvSpPr/>
           <p:nvPr/>
         </p:nvSpPr>
         <p:spPr>
           <a:xfrm>
-            <a:off x="4283354" y="1591056"/>
-            <a:ext cx="3624986" cy="64008"/>
-          </a:xfrm>
-          <a:prstGeom prst="rect">
-            <a:avLst/>
+            <a:off x="594360" y="4251960"/>
+            <a:ext cx="438912" cy="438912"/>
+          </a:xfrm>
+          <a:prstGeom prst="roundRect">
+            <a:avLst>
+              <a:gd name="adj" fmla="val 12000"/>
+            </a:avLst>
           </a:prstGeom>
           <a:solidFill>
             <a:srgbClr val="095292"/>
@@ -3910,20 +4049,103 @@
       </p:sp>
       <p:sp>
         <p:nvSpPr>
-          <p:cNvPr id="13" name="Rectangle 12"/>
+          <p:cNvPr id="16" name="TextBox 15"/>
+          <p:cNvSpPr txBox="1"/>
+          <p:nvPr/>
+        </p:nvSpPr>
+        <p:spPr>
+          <a:xfrm>
+            <a:off x="594360" y="4251960"/>
+            <a:ext cx="438912" cy="438912"/>
+          </a:xfrm>
+          <a:prstGeom prst="rect">
+            <a:avLst/>
+          </a:prstGeom>
+          <a:noFill/>
+        </p:spPr>
+        <p:txBody>
+          <a:bodyPr wrap="square" anchor="ctr"/>
+          <a:lstStyle/>
+          <a:p>
+            <a:pPr algn="ctr"/>
+            <a:r>
+              <a:rPr sz="1600" b="1" i="0">
+                <a:solidFill>
+                  <a:srgbClr val="FFFFFF"/>
+                </a:solidFill>
+                <a:latin typeface="Calibri"/>
+              </a:rPr>
+              <a:t>3</a:t>
+            </a:r>
+          </a:p>
+        </p:txBody>
+      </p:sp>
+      <p:sp>
+        <p:nvSpPr>
+          <p:cNvPr id="17" name="TextBox 16"/>
+          <p:cNvSpPr txBox="1"/>
+          <p:nvPr/>
+        </p:nvSpPr>
+        <p:spPr>
+          <a:xfrm>
+            <a:off x="1188720" y="4037076"/>
+            <a:ext cx="10271455" cy="886968"/>
+          </a:xfrm>
+          <a:prstGeom prst="rect">
+            <a:avLst/>
+          </a:prstGeom>
+          <a:noFill/>
+        </p:spPr>
+        <p:txBody>
+          <a:bodyPr wrap="square" anchor="ctr"/>
+          <a:lstStyle/>
+          <a:p>
+            <a:r>
+              <a:rPr sz="1500" b="1" i="0">
+                <a:solidFill>
+                  <a:srgbClr val="095292"/>
+                </a:solidFill>
+                <a:latin typeface="Calibri"/>
+              </a:rPr>
+              <a:t>Pega y renderiza en ExamLab</a:t>
+            </a:r>
+          </a:p>
+          <a:p>
+            <a:pPr>
+              <a:spcBef>
+                <a:spcPts val="200"/>
+              </a:spcBef>
+            </a:pPr>
+            <a:r>
+              <a:rPr sz="1300" b="0" i="0">
+                <a:solidFill>
+                  <a:srgbClr val="333333"/>
+                </a:solidFill>
+                <a:latin typeface="Calibri"/>
+              </a:rPr>
+              <a:t>Pega ese codigo en la caja de texto de la pregunta y mira como lo dibuja la plataforma. Si no renderiza, corrige ahi mismo: lo que se califica es el diagrama renderizado dentro de ExamLab.</a:t>
+            </a:r>
+          </a:p>
+        </p:txBody>
+      </p:sp>
+      <p:sp>
+        <p:nvSpPr>
+          <p:cNvPr id="18" name="Rounded Rectangle 17"/>
           <p:cNvSpPr/>
           <p:nvPr/>
         </p:nvSpPr>
         <p:spPr>
           <a:xfrm>
-            <a:off x="4283354" y="1655064"/>
-            <a:ext cx="3624986" cy="27432"/>
-          </a:xfrm>
-          <a:prstGeom prst="rect">
-            <a:avLst/>
+            <a:off x="457200" y="5088636"/>
+            <a:ext cx="11277295" cy="1051560"/>
+          </a:xfrm>
+          <a:prstGeom prst="roundRect">
+            <a:avLst>
+              <a:gd name="adj" fmla="val 12000"/>
+            </a:avLst>
           </a:prstGeom>
           <a:solidFill>
-            <a:srgbClr val="FFD000"/>
+            <a:srgbClr val="E8F4FA"/>
           </a:solidFill>
           <a:ln>
             <a:noFill/>
@@ -3951,137 +4173,21 @@
           </a:p>
         </p:txBody>
       </p:sp>
-      <p:pic>
-        <p:nvPicPr>
-          <p:cNvPr id="14" name="Picture 13" descr="excalidraw.png"/>
-          <p:cNvPicPr>
-            <a:picLocks noChangeAspect="1"/>
-          </p:cNvPicPr>
-          <p:nvPr/>
-        </p:nvPicPr>
-        <p:blipFill>
-          <a:blip r:embed="rId3"/>
-          <a:stretch>
-            <a:fillRect/>
-          </a:stretch>
-        </p:blipFill>
-        <p:spPr>
-          <a:xfrm>
-            <a:off x="5485485" y="1847087"/>
-            <a:ext cx="1220724" cy="1220724"/>
-          </a:xfrm>
-          <a:prstGeom prst="rect">
-            <a:avLst/>
-          </a:prstGeom>
-        </p:spPr>
-      </p:pic>
-      <p:sp>
-        <p:nvSpPr>
-          <p:cNvPr id="15" name="TextBox 14"/>
-          <p:cNvSpPr txBox="1"/>
-          <p:nvPr/>
-        </p:nvSpPr>
-        <p:spPr>
-          <a:xfrm>
-            <a:off x="4356506" y="3159251"/>
-            <a:ext cx="3478682" cy="621792"/>
-          </a:xfrm>
-          <a:prstGeom prst="rect">
-            <a:avLst/>
-          </a:prstGeom>
-          <a:noFill/>
-        </p:spPr>
-        <p:txBody>
-          <a:bodyPr wrap="square" anchor="t"/>
-          <a:lstStyle/>
-          <a:p>
-            <a:pPr algn="ctr"/>
-            <a:r>
-              <a:rPr sz="1300" b="1" i="0">
-                <a:solidFill>
-                  <a:srgbClr val="095292"/>
-                </a:solidFill>
-                <a:latin typeface="Calibri"/>
-              </a:rPr>
-              <a:t>Excalidraw</a:t>
-            </a:r>
-          </a:p>
-          <a:p>
-            <a:pPr algn="ctr">
-              <a:spcBef>
-                <a:spcPts val="200"/>
-              </a:spcBef>
-            </a:pPr>
-            <a:r>
-              <a:rPr sz="1000" b="0" i="0">
-                <a:solidFill>
-                  <a:srgbClr val="666666"/>
-                </a:solidFill>
-                <a:latin typeface="Calibri"/>
-              </a:rPr>
-              <a:t>Boceto rapido</a:t>
-            </a:r>
-          </a:p>
-        </p:txBody>
-      </p:sp>
-      <p:sp>
-        <p:nvSpPr>
-          <p:cNvPr id="16" name="Rounded Rectangle 15"/>
+      <p:sp>
+        <p:nvSpPr>
+          <p:cNvPr id="19" name="Rounded Rectangle 18"/>
           <p:cNvSpPr/>
           <p:nvPr/>
         </p:nvSpPr>
         <p:spPr>
           <a:xfrm>
-            <a:off x="8109508" y="1591056"/>
-            <a:ext cx="3624986" cy="2299716"/>
+            <a:off x="594360" y="5394960"/>
+            <a:ext cx="438912" cy="438912"/>
           </a:xfrm>
           <a:prstGeom prst="roundRect">
             <a:avLst>
               <a:gd name="adj" fmla="val 12000"/>
             </a:avLst>
-          </a:prstGeom>
-          <a:solidFill>
-            <a:srgbClr val="F2F2F2"/>
-          </a:solidFill>
-          <a:ln>
-            <a:noFill/>
-          </a:ln>
-        </p:spPr>
-        <p:style>
-          <a:lnRef idx="1">
-            <a:schemeClr val="accent1"/>
-          </a:lnRef>
-          <a:fillRef idx="3">
-            <a:schemeClr val="accent1"/>
-          </a:fillRef>
-          <a:effectRef idx="2">
-            <a:schemeClr val="accent1"/>
-          </a:effectRef>
-          <a:fontRef idx="minor">
-            <a:schemeClr val="lt1"/>
-          </a:fontRef>
-        </p:style>
-        <p:txBody>
-          <a:bodyPr rtlCol="0" anchor="ctr"/>
-          <a:lstStyle/>
-          <a:p>
-            <a:pPr algn="ctr"/>
-          </a:p>
-        </p:txBody>
-      </p:sp>
-      <p:sp>
-        <p:nvSpPr>
-          <p:cNvPr id="17" name="Rectangle 16"/>
-          <p:cNvSpPr/>
-          <p:nvPr/>
-        </p:nvSpPr>
-        <p:spPr>
-          <a:xfrm>
-            <a:off x="8109508" y="1591056"/>
-            <a:ext cx="3624986" cy="64008"/>
-          </a:xfrm>
-          <a:prstGeom prst="rect">
-            <a:avLst/>
           </a:prstGeom>
           <a:solidFill>
             <a:srgbClr val="095292"/>
@@ -4114,81 +4220,14 @@
       </p:sp>
       <p:sp>
         <p:nvSpPr>
-          <p:cNvPr id="18" name="Rectangle 17"/>
-          <p:cNvSpPr/>
-          <p:nvPr/>
-        </p:nvSpPr>
-        <p:spPr>
-          <a:xfrm>
-            <a:off x="8109508" y="1655064"/>
-            <a:ext cx="3624986" cy="27432"/>
-          </a:xfrm>
-          <a:prstGeom prst="rect">
-            <a:avLst/>
-          </a:prstGeom>
-          <a:solidFill>
-            <a:srgbClr val="FFD000"/>
-          </a:solidFill>
-          <a:ln>
-            <a:noFill/>
-          </a:ln>
-        </p:spPr>
-        <p:style>
-          <a:lnRef idx="1">
-            <a:schemeClr val="accent1"/>
-          </a:lnRef>
-          <a:fillRef idx="3">
-            <a:schemeClr val="accent1"/>
-          </a:fillRef>
-          <a:effectRef idx="2">
-            <a:schemeClr val="accent1"/>
-          </a:effectRef>
-          <a:fontRef idx="minor">
-            <a:schemeClr val="lt1"/>
-          </a:fontRef>
-        </p:style>
-        <p:txBody>
-          <a:bodyPr rtlCol="0" anchor="ctr"/>
-          <a:lstStyle/>
-          <a:p>
-            <a:pPr algn="ctr"/>
-          </a:p>
-        </p:txBody>
-      </p:sp>
-      <p:pic>
-        <p:nvPicPr>
-          <p:cNvPr id="19" name="Picture 18" descr="drawio.png"/>
-          <p:cNvPicPr>
-            <a:picLocks noChangeAspect="1"/>
-          </p:cNvPicPr>
-          <p:nvPr/>
-        </p:nvPicPr>
-        <p:blipFill>
-          <a:blip r:embed="rId4"/>
-          <a:stretch>
-            <a:fillRect/>
-          </a:stretch>
-        </p:blipFill>
-        <p:spPr>
-          <a:xfrm>
-            <a:off x="9311640" y="1847087"/>
-            <a:ext cx="1220724" cy="1220724"/>
-          </a:xfrm>
-          <a:prstGeom prst="rect">
-            <a:avLst/>
-          </a:prstGeom>
-        </p:spPr>
-      </p:pic>
-      <p:sp>
-        <p:nvSpPr>
           <p:cNvPr id="20" name="TextBox 19"/>
           <p:cNvSpPr txBox="1"/>
           <p:nvPr/>
         </p:nvSpPr>
         <p:spPr>
           <a:xfrm>
-            <a:off x="8182660" y="3159251"/>
-            <a:ext cx="3478682" cy="621792"/>
+            <a:off x="594360" y="5394960"/>
+            <a:ext cx="438912" cy="438912"/>
           </a:xfrm>
           <a:prstGeom prst="rect">
             <a:avLst/>
@@ -4196,449 +4235,73 @@
           <a:noFill/>
         </p:spPr>
         <p:txBody>
-          <a:bodyPr wrap="square" anchor="t"/>
+          <a:bodyPr wrap="square" anchor="ctr"/>
           <a:lstStyle/>
           <a:p>
             <a:pPr algn="ctr"/>
             <a:r>
-              <a:rPr sz="1300" b="1" i="0">
+              <a:rPr sz="1600" b="1" i="0">
+                <a:solidFill>
+                  <a:srgbClr val="FFFFFF"/>
+                </a:solidFill>
+                <a:latin typeface="Calibri"/>
+              </a:rPr>
+              <a:t>4</a:t>
+            </a:r>
+          </a:p>
+        </p:txBody>
+      </p:sp>
+      <p:sp>
+        <p:nvSpPr>
+          <p:cNvPr id="21" name="TextBox 20"/>
+          <p:cNvSpPr txBox="1"/>
+          <p:nvPr/>
+        </p:nvSpPr>
+        <p:spPr>
+          <a:xfrm>
+            <a:off x="1188720" y="5180076"/>
+            <a:ext cx="10271455" cy="886968"/>
+          </a:xfrm>
+          <a:prstGeom prst="rect">
+            <a:avLst/>
+          </a:prstGeom>
+          <a:noFill/>
+        </p:spPr>
+        <p:txBody>
+          <a:bodyPr wrap="square" anchor="ctr"/>
+          <a:lstStyle/>
+          <a:p>
+            <a:r>
+              <a:rPr sz="1500" b="1" i="0">
                 <a:solidFill>
                   <a:srgbClr val="095292"/>
                 </a:solidFill>
                 <a:latin typeface="Calibri"/>
               </a:rPr>
-              <a:t>draw.io</a:t>
-            </a:r>
-          </a:p>
-          <a:p>
-            <a:pPr algn="ctr">
+              <a:t>Guarda el PNG para tu PI</a:t>
+            </a:r>
+          </a:p>
+          <a:p>
+            <a:pPr>
               <a:spcBef>
                 <a:spcPts val="200"/>
               </a:spcBef>
             </a:pPr>
             <a:r>
-              <a:rPr sz="1000" b="0" i="0">
-                <a:solidFill>
-                  <a:srgbClr val="666666"/>
-                </a:solidFill>
-                <a:latin typeface="Calibri"/>
-              </a:rPr>
-              <a:t>C4 Context</a:t>
-            </a:r>
-          </a:p>
-        </p:txBody>
-      </p:sp>
-      <p:sp>
-        <p:nvSpPr>
-          <p:cNvPr id="21" name="Rounded Rectangle 20"/>
-          <p:cNvSpPr/>
-          <p:nvPr/>
-        </p:nvSpPr>
-        <p:spPr>
-          <a:xfrm>
-            <a:off x="2370277" y="4055364"/>
-            <a:ext cx="3624986" cy="2299716"/>
-          </a:xfrm>
-          <a:prstGeom prst="roundRect">
-            <a:avLst>
-              <a:gd name="adj" fmla="val 12000"/>
-            </a:avLst>
-          </a:prstGeom>
-          <a:solidFill>
-            <a:srgbClr val="F2F2F2"/>
-          </a:solidFill>
-          <a:ln>
-            <a:noFill/>
-          </a:ln>
-        </p:spPr>
-        <p:style>
-          <a:lnRef idx="1">
-            <a:schemeClr val="accent1"/>
-          </a:lnRef>
-          <a:fillRef idx="3">
-            <a:schemeClr val="accent1"/>
-          </a:fillRef>
-          <a:effectRef idx="2">
-            <a:schemeClr val="accent1"/>
-          </a:effectRef>
-          <a:fontRef idx="minor">
-            <a:schemeClr val="lt1"/>
-          </a:fontRef>
-        </p:style>
-        <p:txBody>
-          <a:bodyPr rtlCol="0" anchor="ctr"/>
-          <a:lstStyle/>
-          <a:p>
-            <a:pPr algn="ctr"/>
-          </a:p>
-        </p:txBody>
-      </p:sp>
-      <p:sp>
-        <p:nvSpPr>
-          <p:cNvPr id="22" name="Rectangle 21"/>
-          <p:cNvSpPr/>
-          <p:nvPr/>
-        </p:nvSpPr>
-        <p:spPr>
-          <a:xfrm>
-            <a:off x="2370277" y="4055364"/>
-            <a:ext cx="3624986" cy="64008"/>
-          </a:xfrm>
-          <a:prstGeom prst="rect">
-            <a:avLst/>
-          </a:prstGeom>
-          <a:solidFill>
-            <a:srgbClr val="095292"/>
-          </a:solidFill>
-          <a:ln>
-            <a:noFill/>
-          </a:ln>
-        </p:spPr>
-        <p:style>
-          <a:lnRef idx="1">
-            <a:schemeClr val="accent1"/>
-          </a:lnRef>
-          <a:fillRef idx="3">
-            <a:schemeClr val="accent1"/>
-          </a:fillRef>
-          <a:effectRef idx="2">
-            <a:schemeClr val="accent1"/>
-          </a:effectRef>
-          <a:fontRef idx="minor">
-            <a:schemeClr val="lt1"/>
-          </a:fontRef>
-        </p:style>
-        <p:txBody>
-          <a:bodyPr rtlCol="0" anchor="ctr"/>
-          <a:lstStyle/>
-          <a:p>
-            <a:pPr algn="ctr"/>
-          </a:p>
-        </p:txBody>
-      </p:sp>
-      <p:sp>
-        <p:nvSpPr>
-          <p:cNvPr id="23" name="Rectangle 22"/>
-          <p:cNvSpPr/>
-          <p:nvPr/>
-        </p:nvSpPr>
-        <p:spPr>
-          <a:xfrm>
-            <a:off x="2370277" y="4119372"/>
-            <a:ext cx="3624986" cy="27432"/>
-          </a:xfrm>
-          <a:prstGeom prst="rect">
-            <a:avLst/>
-          </a:prstGeom>
-          <a:solidFill>
-            <a:srgbClr val="FFD000"/>
-          </a:solidFill>
-          <a:ln>
-            <a:noFill/>
-          </a:ln>
-        </p:spPr>
-        <p:style>
-          <a:lnRef idx="1">
-            <a:schemeClr val="accent1"/>
-          </a:lnRef>
-          <a:fillRef idx="3">
-            <a:schemeClr val="accent1"/>
-          </a:fillRef>
-          <a:effectRef idx="2">
-            <a:schemeClr val="accent1"/>
-          </a:effectRef>
-          <a:fontRef idx="minor">
-            <a:schemeClr val="lt1"/>
-          </a:fontRef>
-        </p:style>
-        <p:txBody>
-          <a:bodyPr rtlCol="0" anchor="ctr"/>
-          <a:lstStyle/>
-          <a:p>
-            <a:pPr algn="ctr"/>
-          </a:p>
-        </p:txBody>
-      </p:sp>
-      <p:pic>
-        <p:nvPicPr>
-          <p:cNvPr id="24" name="Picture 23" descr="mermaid.png"/>
-          <p:cNvPicPr>
-            <a:picLocks noChangeAspect="1"/>
-          </p:cNvPicPr>
-          <p:nvPr/>
-        </p:nvPicPr>
-        <p:blipFill>
-          <a:blip r:embed="rId5"/>
-          <a:stretch>
-            <a:fillRect/>
-          </a:stretch>
-        </p:blipFill>
-        <p:spPr>
-          <a:xfrm>
-            <a:off x="3572408" y="4311396"/>
-            <a:ext cx="1220724" cy="1220724"/>
-          </a:xfrm>
-          <a:prstGeom prst="rect">
-            <a:avLst/>
-          </a:prstGeom>
-        </p:spPr>
-      </p:pic>
-      <p:sp>
-        <p:nvSpPr>
-          <p:cNvPr id="25" name="TextBox 24"/>
-          <p:cNvSpPr txBox="1"/>
-          <p:nvPr/>
-        </p:nvSpPr>
-        <p:spPr>
-          <a:xfrm>
-            <a:off x="2443429" y="5623560"/>
-            <a:ext cx="3478682" cy="621792"/>
-          </a:xfrm>
-          <a:prstGeom prst="rect">
-            <a:avLst/>
-          </a:prstGeom>
-          <a:noFill/>
-        </p:spPr>
-        <p:txBody>
-          <a:bodyPr wrap="square" anchor="t"/>
-          <a:lstStyle/>
-          <a:p>
-            <a:pPr algn="ctr"/>
-            <a:r>
-              <a:rPr sz="1300" b="1" i="0">
-                <a:solidFill>
-                  <a:srgbClr val="095292"/>
-                </a:solidFill>
-                <a:latin typeface="Calibri"/>
-              </a:rPr>
-              <a:t>Mermaid</a:t>
-            </a:r>
-          </a:p>
-          <a:p>
-            <a:pPr algn="ctr">
-              <a:spcBef>
-                <a:spcPts val="200"/>
-              </a:spcBef>
-            </a:pPr>
-            <a:r>
-              <a:rPr sz="1000" b="0" i="0">
-                <a:solidFill>
-                  <a:srgbClr val="666666"/>
-                </a:solidFill>
-                <a:latin typeface="Calibri"/>
-              </a:rPr>
-              <a:t>Codigo del diagrama</a:t>
-            </a:r>
-          </a:p>
-        </p:txBody>
-      </p:sp>
-      <p:sp>
-        <p:nvSpPr>
-          <p:cNvPr id="26" name="Rounded Rectangle 25"/>
-          <p:cNvSpPr/>
-          <p:nvPr/>
-        </p:nvSpPr>
-        <p:spPr>
-          <a:xfrm>
-            <a:off x="6196431" y="4055364"/>
-            <a:ext cx="3624986" cy="2299716"/>
-          </a:xfrm>
-          <a:prstGeom prst="roundRect">
-            <a:avLst>
-              <a:gd name="adj" fmla="val 12000"/>
-            </a:avLst>
-          </a:prstGeom>
-          <a:solidFill>
-            <a:srgbClr val="F2F2F2"/>
-          </a:solidFill>
-          <a:ln>
-            <a:noFill/>
-          </a:ln>
-        </p:spPr>
-        <p:style>
-          <a:lnRef idx="1">
-            <a:schemeClr val="accent1"/>
-          </a:lnRef>
-          <a:fillRef idx="3">
-            <a:schemeClr val="accent1"/>
-          </a:fillRef>
-          <a:effectRef idx="2">
-            <a:schemeClr val="accent1"/>
-          </a:effectRef>
-          <a:fontRef idx="minor">
-            <a:schemeClr val="lt1"/>
-          </a:fontRef>
-        </p:style>
-        <p:txBody>
-          <a:bodyPr rtlCol="0" anchor="ctr"/>
-          <a:lstStyle/>
-          <a:p>
-            <a:pPr algn="ctr"/>
-          </a:p>
-        </p:txBody>
-      </p:sp>
-      <p:sp>
-        <p:nvSpPr>
-          <p:cNvPr id="27" name="Rectangle 26"/>
-          <p:cNvSpPr/>
-          <p:nvPr/>
-        </p:nvSpPr>
-        <p:spPr>
-          <a:xfrm>
-            <a:off x="6196431" y="4055364"/>
-            <a:ext cx="3624986" cy="64008"/>
-          </a:xfrm>
-          <a:prstGeom prst="rect">
-            <a:avLst/>
-          </a:prstGeom>
-          <a:solidFill>
-            <a:srgbClr val="095292"/>
-          </a:solidFill>
-          <a:ln>
-            <a:noFill/>
-          </a:ln>
-        </p:spPr>
-        <p:style>
-          <a:lnRef idx="1">
-            <a:schemeClr val="accent1"/>
-          </a:lnRef>
-          <a:fillRef idx="3">
-            <a:schemeClr val="accent1"/>
-          </a:fillRef>
-          <a:effectRef idx="2">
-            <a:schemeClr val="accent1"/>
-          </a:effectRef>
-          <a:fontRef idx="minor">
-            <a:schemeClr val="lt1"/>
-          </a:fontRef>
-        </p:style>
-        <p:txBody>
-          <a:bodyPr rtlCol="0" anchor="ctr"/>
-          <a:lstStyle/>
-          <a:p>
-            <a:pPr algn="ctr"/>
-          </a:p>
-        </p:txBody>
-      </p:sp>
-      <p:sp>
-        <p:nvSpPr>
-          <p:cNvPr id="28" name="Rectangle 27"/>
-          <p:cNvSpPr/>
-          <p:nvPr/>
-        </p:nvSpPr>
-        <p:spPr>
-          <a:xfrm>
-            <a:off x="6196431" y="4119372"/>
-            <a:ext cx="3624986" cy="27432"/>
-          </a:xfrm>
-          <a:prstGeom prst="rect">
-            <a:avLst/>
-          </a:prstGeom>
-          <a:solidFill>
-            <a:srgbClr val="FFD000"/>
-          </a:solidFill>
-          <a:ln>
-            <a:noFill/>
-          </a:ln>
-        </p:spPr>
-        <p:style>
-          <a:lnRef idx="1">
-            <a:schemeClr val="accent1"/>
-          </a:lnRef>
-          <a:fillRef idx="3">
-            <a:schemeClr val="accent1"/>
-          </a:fillRef>
-          <a:effectRef idx="2">
-            <a:schemeClr val="accent1"/>
-          </a:effectRef>
-          <a:fontRef idx="minor">
-            <a:schemeClr val="lt1"/>
-          </a:fontRef>
-        </p:style>
-        <p:txBody>
-          <a:bodyPr rtlCol="0" anchor="ctr"/>
-          <a:lstStyle/>
-          <a:p>
-            <a:pPr algn="ctr"/>
-          </a:p>
-        </p:txBody>
-      </p:sp>
-      <p:pic>
-        <p:nvPicPr>
-          <p:cNvPr id="29" name="Picture 28" descr="examlab.png"/>
-          <p:cNvPicPr>
-            <a:picLocks noChangeAspect="1"/>
-          </p:cNvPicPr>
-          <p:nvPr/>
-        </p:nvPicPr>
-        <p:blipFill>
-          <a:blip r:embed="rId6"/>
-          <a:stretch>
-            <a:fillRect/>
-          </a:stretch>
-        </p:blipFill>
-        <p:spPr>
-          <a:xfrm>
-            <a:off x="7398562" y="4311396"/>
-            <a:ext cx="1220724" cy="1220724"/>
-          </a:xfrm>
-          <a:prstGeom prst="rect">
-            <a:avLst/>
-          </a:prstGeom>
-        </p:spPr>
-      </p:pic>
-      <p:sp>
-        <p:nvSpPr>
-          <p:cNvPr id="30" name="TextBox 29"/>
-          <p:cNvSpPr txBox="1"/>
-          <p:nvPr/>
-        </p:nvSpPr>
-        <p:spPr>
-          <a:xfrm>
-            <a:off x="6269583" y="5623560"/>
-            <a:ext cx="3478682" cy="621792"/>
-          </a:xfrm>
-          <a:prstGeom prst="rect">
-            <a:avLst/>
-          </a:prstGeom>
-          <a:noFill/>
-        </p:spPr>
-        <p:txBody>
-          <a:bodyPr wrap="square" anchor="t"/>
-          <a:lstStyle/>
-          <a:p>
-            <a:pPr algn="ctr"/>
-            <a:r>
-              <a:rPr sz="1300" b="1" i="0">
-                <a:solidFill>
-                  <a:srgbClr val="095292"/>
-                </a:solidFill>
-                <a:latin typeface="Calibri"/>
-              </a:rPr>
-              <a:t>ExamLab</a:t>
-            </a:r>
-          </a:p>
-          <a:p>
-            <a:pPr algn="ctr">
-              <a:spcBef>
-                <a:spcPts val="200"/>
-              </a:spcBef>
-            </a:pPr>
-            <a:r>
-              <a:rPr sz="1000" b="0" i="0">
-                <a:solidFill>
-                  <a:srgbClr val="666666"/>
-                </a:solidFill>
-                <a:latin typeface="Calibri"/>
-              </a:rPr>
-              <a:t>Donde se entrega</a:t>
-            </a:r>
-          </a:p>
-        </p:txBody>
-      </p:sp>
-      <p:sp>
-        <p:nvSpPr>
-          <p:cNvPr id="31" name="TextBox 30"/>
+              <a:rPr sz="1300" b="0" i="0">
+                <a:solidFill>
+                  <a:srgbClr val="333333"/>
+                </a:solidFill>
+                <a:latin typeface="Calibri"/>
+              </a:rPr>
+              <a:t>Exporta tambien la imagen a la carpeta de tu Proyecto Integrador. Esa copia es para tu informe; no reemplaza la respuesta en la plataforma.</a:t>
+            </a:r>
+          </a:p>
+        </p:txBody>
+      </p:sp>
+      <p:sp>
+        <p:nvSpPr>
+          <p:cNvPr id="22" name="TextBox 21"/>
           <p:cNvSpPr txBox="1"/>
           <p:nvPr/>
         </p:nvSpPr>
@@ -4706,7 +4369,7 @@
         <p:spPr>
           <a:xfrm>
             <a:off x="0" y="0"/>
-            <a:ext cx="12191695" cy="1170432"/>
+            <a:ext cx="12191695" cy="960120"/>
           </a:xfrm>
           <a:prstGeom prst="rect">
             <a:avLst/>
@@ -4748,7 +4411,7 @@
         </p:nvSpPr>
         <p:spPr>
           <a:xfrm>
-            <a:off x="0" y="1170432"/>
+            <a:off x="0" y="960120"/>
             <a:ext cx="12191695" cy="41148"/>
           </a:xfrm>
           <a:prstGeom prst="rect">
@@ -4792,7 +4455,7 @@
         <p:spPr>
           <a:xfrm>
             <a:off x="457200" y="164592"/>
-            <a:ext cx="11277295" cy="384048"/>
+            <a:ext cx="11277295" cy="502920"/>
           </a:xfrm>
           <a:prstGeom prst="rect">
             <a:avLst/>
@@ -4812,7 +4475,7 @@
                 </a:solidFill>
                 <a:latin typeface="Calibri"/>
               </a:rPr>
-              <a:t>Del boceto a ExamLab (diagrama)</a:t>
+              <a:t>Taller PI (paso a paso)</a:t>
             </a:r>
           </a:p>
         </p:txBody>
@@ -4825,8 +4488,8 @@
         </p:nvSpPr>
         <p:spPr>
           <a:xfrm>
-            <a:off x="457200" y="566928"/>
-            <a:ext cx="11277295" cy="411480"/>
+            <a:off x="457200" y="1170432"/>
+            <a:ext cx="11277295" cy="5230368"/>
           </a:xfrm>
           <a:prstGeom prst="rect">
             <a:avLst/>
@@ -4839,705 +4502,137 @@
           </a:bodyPr>
           <a:lstStyle/>
           <a:p>
-            <a:r>
-              <a:rPr sz="1400" b="0" i="0">
-                <a:solidFill>
-                  <a:srgbClr val="B8D8EE"/>
-                </a:solidFill>
-                <a:latin typeface="Calibri"/>
-              </a:rPr>
-              <a:t>El diagrama se entrega como código Mermaid dentro de ExamLab, no como imagen</a:t>
-            </a:r>
-          </a:p>
-        </p:txBody>
-      </p:sp>
-      <p:sp>
-        <p:nvSpPr>
-          <p:cNvPr id="6" name="Rounded Rectangle 5"/>
-          <p:cNvSpPr/>
-          <p:nvPr/>
-        </p:nvSpPr>
-        <p:spPr>
-          <a:xfrm>
-            <a:off x="457200" y="1659636"/>
-            <a:ext cx="11277295" cy="1051560"/>
-          </a:xfrm>
-          <a:prstGeom prst="roundRect">
-            <a:avLst>
-              <a:gd name="adj" fmla="val 12000"/>
-            </a:avLst>
-          </a:prstGeom>
-          <a:solidFill>
-            <a:srgbClr val="F2F2F2"/>
-          </a:solidFill>
-          <a:ln>
-            <a:noFill/>
-          </a:ln>
-        </p:spPr>
-        <p:style>
-          <a:lnRef idx="1">
-            <a:schemeClr val="accent1"/>
-          </a:lnRef>
-          <a:fillRef idx="3">
-            <a:schemeClr val="accent1"/>
-          </a:fillRef>
-          <a:effectRef idx="2">
-            <a:schemeClr val="accent1"/>
-          </a:effectRef>
-          <a:fontRef idx="minor">
-            <a:schemeClr val="lt1"/>
-          </a:fontRef>
-        </p:style>
-        <p:txBody>
-          <a:bodyPr rtlCol="0" anchor="ctr"/>
-          <a:lstStyle/>
-          <a:p>
-            <a:pPr algn="ctr"/>
-          </a:p>
-        </p:txBody>
-      </p:sp>
-      <p:sp>
-        <p:nvSpPr>
-          <p:cNvPr id="7" name="Rounded Rectangle 6"/>
-          <p:cNvSpPr/>
-          <p:nvPr/>
-        </p:nvSpPr>
-        <p:spPr>
-          <a:xfrm>
-            <a:off x="594360" y="1965960"/>
-            <a:ext cx="438912" cy="438912"/>
-          </a:xfrm>
-          <a:prstGeom prst="roundRect">
-            <a:avLst>
-              <a:gd name="adj" fmla="val 12000"/>
-            </a:avLst>
-          </a:prstGeom>
-          <a:solidFill>
-            <a:srgbClr val="095292"/>
-          </a:solidFill>
-          <a:ln>
-            <a:noFill/>
-          </a:ln>
-        </p:spPr>
-        <p:style>
-          <a:lnRef idx="1">
-            <a:schemeClr val="accent1"/>
-          </a:lnRef>
-          <a:fillRef idx="3">
-            <a:schemeClr val="accent1"/>
-          </a:fillRef>
-          <a:effectRef idx="2">
-            <a:schemeClr val="accent1"/>
-          </a:effectRef>
-          <a:fontRef idx="minor">
-            <a:schemeClr val="lt1"/>
-          </a:fontRef>
-        </p:style>
-        <p:txBody>
-          <a:bodyPr rtlCol="0" anchor="ctr"/>
-          <a:lstStyle/>
-          <a:p>
-            <a:pPr algn="ctr"/>
-          </a:p>
-        </p:txBody>
-      </p:sp>
-      <p:sp>
-        <p:nvSpPr>
-          <p:cNvPr id="8" name="TextBox 7"/>
-          <p:cNvSpPr txBox="1"/>
-          <p:nvPr/>
-        </p:nvSpPr>
-        <p:spPr>
-          <a:xfrm>
-            <a:off x="594360" y="1965960"/>
-            <a:ext cx="438912" cy="438912"/>
-          </a:xfrm>
-          <a:prstGeom prst="rect">
-            <a:avLst/>
-          </a:prstGeom>
-          <a:noFill/>
-        </p:spPr>
-        <p:txBody>
-          <a:bodyPr wrap="square" anchor="ctr"/>
-          <a:lstStyle/>
-          <a:p>
-            <a:pPr algn="ctr"/>
+            <a:pPr>
+              <a:spcAft>
+                <a:spcPts val="800"/>
+              </a:spcAft>
+            </a:pPr>
             <a:r>
               <a:rPr sz="1600" b="1" i="0">
                 <a:solidFill>
-                  <a:srgbClr val="FFFFFF"/>
-                </a:solidFill>
-                <a:latin typeface="Calibri"/>
-              </a:rPr>
-              <a:t>1</a:t>
-            </a:r>
-          </a:p>
-        </p:txBody>
-      </p:sp>
-      <p:sp>
-        <p:nvSpPr>
-          <p:cNvPr id="9" name="TextBox 8"/>
-          <p:cNvSpPr txBox="1"/>
-          <p:nvPr/>
-        </p:nvSpPr>
-        <p:spPr>
-          <a:xfrm>
-            <a:off x="1188720" y="1751076"/>
-            <a:ext cx="10271455" cy="886968"/>
-          </a:xfrm>
-          <a:prstGeom prst="rect">
-            <a:avLst/>
-          </a:prstGeom>
-          <a:noFill/>
-        </p:spPr>
-        <p:txBody>
-          <a:bodyPr wrap="square" anchor="ctr"/>
-          <a:lstStyle/>
-          <a:p>
-            <a:r>
-              <a:rPr sz="1500" b="1" i="0">
-                <a:solidFill>
-                  <a:srgbClr val="095292"/>
-                </a:solidFill>
-                <a:latin typeface="Calibri"/>
-              </a:rPr>
-              <a:t>Disena visual</a:t>
+                  <a:srgbClr val="333333"/>
+                </a:solidFill>
+                <a:latin typeface="Calibri"/>
+              </a:rPr>
+              <a:t>1.</a:t>
+            </a:r>
+            <a:r>
+              <a:rPr sz="1600" b="0" i="0">
+                <a:solidFill>
+                  <a:srgbClr val="333333"/>
+                </a:solidFill>
+                <a:latin typeface="Calibri"/>
+              </a:rPr>
+              <a:t> Paso 1: elija un dominio concreto entre AgendaU, BiblioLite, InventarioLab, TurnosClinica o EventosCampus (o uno propio del mismo tamano) y escriba en la pregunta 1 el problema en 2 o 3 frases, diciendo QUIEN lo sufre con un rol concreto y COMO se mide con una cifra, aunque sea estimada; verifique que su enunciado no sirva igual para cualquier otro sistema, porque entonces el dominio todavia es generico.</a:t>
             </a:r>
           </a:p>
           <a:p>
             <a:pPr>
-              <a:spcBef>
-                <a:spcPts val="200"/>
-              </a:spcBef>
+              <a:spcAft>
+                <a:spcPts val="800"/>
+              </a:spcAft>
             </a:pPr>
             <a:r>
-              <a:rPr sz="1300" b="0" i="0">
+              <a:rPr sz="1600" b="0" i="0">
                 <a:solidFill>
                   <a:srgbClr val="333333"/>
                 </a:solidFill>
                 <a:latin typeface="Calibri"/>
               </a:rPr>
-              <a:t>Dibuja el diagrama como quieras en Excalidraw o draw.io: es mas rapido arrastrar cajas que escribir codigo, y ahi es donde piensas el modelo.</a:t>
-            </a:r>
-          </a:p>
-        </p:txBody>
-      </p:sp>
-      <p:sp>
-        <p:nvSpPr>
-          <p:cNvPr id="10" name="Rounded Rectangle 9"/>
-          <p:cNvSpPr/>
-          <p:nvPr/>
-        </p:nvSpPr>
-        <p:spPr>
-          <a:xfrm>
-            <a:off x="457200" y="2802636"/>
-            <a:ext cx="11277295" cy="1051560"/>
-          </a:xfrm>
-          <a:prstGeom prst="roundRect">
-            <a:avLst>
-              <a:gd name="adj" fmla="val 12000"/>
-            </a:avLst>
-          </a:prstGeom>
-          <a:solidFill>
-            <a:srgbClr val="E8F4FA"/>
-          </a:solidFill>
-          <a:ln>
-            <a:noFill/>
-          </a:ln>
-        </p:spPr>
-        <p:style>
-          <a:lnRef idx="1">
-            <a:schemeClr val="accent1"/>
-          </a:lnRef>
-          <a:fillRef idx="3">
-            <a:schemeClr val="accent1"/>
-          </a:fillRef>
-          <a:effectRef idx="2">
-            <a:schemeClr val="accent1"/>
-          </a:effectRef>
-          <a:fontRef idx="minor">
-            <a:schemeClr val="lt1"/>
-          </a:fontRef>
-        </p:style>
-        <p:txBody>
-          <a:bodyPr rtlCol="0" anchor="ctr"/>
-          <a:lstStyle/>
-          <a:p>
-            <a:pPr algn="ctr"/>
-          </a:p>
-        </p:txBody>
-      </p:sp>
-      <p:sp>
-        <p:nvSpPr>
-          <p:cNvPr id="11" name="Rounded Rectangle 10"/>
-          <p:cNvSpPr/>
-          <p:nvPr/>
-        </p:nvSpPr>
-        <p:spPr>
-          <a:xfrm>
-            <a:off x="594360" y="3108960"/>
-            <a:ext cx="438912" cy="438912"/>
-          </a:xfrm>
-          <a:prstGeom prst="roundRect">
-            <a:avLst>
-              <a:gd name="adj" fmla="val 12000"/>
-            </a:avLst>
-          </a:prstGeom>
-          <a:solidFill>
-            <a:srgbClr val="095292"/>
-          </a:solidFill>
-          <a:ln>
-            <a:noFill/>
-          </a:ln>
-        </p:spPr>
-        <p:style>
-          <a:lnRef idx="1">
-            <a:schemeClr val="accent1"/>
-          </a:lnRef>
-          <a:fillRef idx="3">
-            <a:schemeClr val="accent1"/>
-          </a:fillRef>
-          <a:effectRef idx="2">
-            <a:schemeClr val="accent1"/>
-          </a:effectRef>
-          <a:fontRef idx="minor">
-            <a:schemeClr val="lt1"/>
-          </a:fontRef>
-        </p:style>
-        <p:txBody>
-          <a:bodyPr rtlCol="0" anchor="ctr"/>
-          <a:lstStyle/>
-          <a:p>
-            <a:pPr algn="ctr"/>
-          </a:p>
-        </p:txBody>
-      </p:sp>
-      <p:sp>
-        <p:nvSpPr>
-          <p:cNvPr id="12" name="TextBox 11"/>
-          <p:cNvSpPr txBox="1"/>
-          <p:nvPr/>
-        </p:nvSpPr>
-        <p:spPr>
-          <a:xfrm>
-            <a:off x="594360" y="3108960"/>
-            <a:ext cx="438912" cy="438912"/>
-          </a:xfrm>
-          <a:prstGeom prst="rect">
-            <a:avLst/>
-          </a:prstGeom>
-          <a:noFill/>
-        </p:spPr>
-        <p:txBody>
-          <a:bodyPr wrap="square" anchor="ctr"/>
-          <a:lstStyle/>
-          <a:p>
-            <a:pPr algn="ctr"/>
+              <a:t>–   </a:t>
+            </a:r>
             <a:r>
               <a:rPr sz="1600" b="1" i="0">
                 <a:solidFill>
-                  <a:srgbClr val="FFFFFF"/>
-                </a:solidFill>
-                <a:latin typeface="Calibri"/>
-              </a:rPr>
-              <a:t>2</a:t>
-            </a:r>
-          </a:p>
-        </p:txBody>
-      </p:sp>
-      <p:sp>
-        <p:nvSpPr>
-          <p:cNvPr id="13" name="TextBox 12"/>
-          <p:cNvSpPr txBox="1"/>
-          <p:nvPr/>
-        </p:nvSpPr>
-        <p:spPr>
-          <a:xfrm>
-            <a:off x="1188720" y="2894076"/>
-            <a:ext cx="10271455" cy="886968"/>
-          </a:xfrm>
-          <a:prstGeom prst="rect">
-            <a:avLst/>
-          </a:prstGeom>
-          <a:noFill/>
-        </p:spPr>
-        <p:txBody>
-          <a:bodyPr wrap="square" anchor="ctr"/>
-          <a:lstStyle/>
-          <a:p>
-            <a:r>
-              <a:rPr sz="1500" b="1" i="0">
-                <a:solidFill>
-                  <a:srgbClr val="095292"/>
-                </a:solidFill>
-                <a:latin typeface="Calibri"/>
-              </a:rPr>
-              <a:t>Traduce con IA</a:t>
+                  <a:srgbClr val="333333"/>
+                </a:solidFill>
+                <a:latin typeface="Calibri"/>
+              </a:rPr>
+              <a:t>2.</a:t>
+            </a:r>
+            <a:r>
+              <a:rPr sz="1600" b="0" i="0">
+                <a:solidFill>
+                  <a:srgbClr val="333333"/>
+                </a:solidFill>
+                <a:latin typeface="Calibri"/>
+              </a:rPr>
+              <a:t> Paso 2: complete en la pregunta 2 la ficha de cinco bloques (DOMINIO, PROBLEMA, ACTORES, CAPACIDADES, FUERA DE ALCANCE) con 3 a 5 capacidades en la forma verbo mas objeto de negocio, 2 a 3 actores con lo que espera cada uno, los sistemas externos dentro del bloque ACTORES, y lo que el sistema no hara este semestre; verifique que ninguna capacidad nombre tecnologia.</a:t>
             </a:r>
           </a:p>
           <a:p>
             <a:pPr>
-              <a:spcBef>
-                <a:spcPts val="200"/>
-              </a:spcBef>
+              <a:spcAft>
+                <a:spcPts val="800"/>
+              </a:spcAft>
             </a:pPr>
             <a:r>
-              <a:rPr sz="1300" b="0" i="0">
+              <a:rPr sz="1600" b="0" i="0">
                 <a:solidFill>
                   <a:srgbClr val="333333"/>
                 </a:solidFill>
                 <a:latin typeface="Calibri"/>
               </a:rPr>
-              <a:t>Copia o describe tu boceto a una IA y pidele el codigo Mermaid: «convierte este diagrama a Mermaid usando C4Context». Revisa el resultado: la IA acierta la sintaxis, no tu modelo.</a:t>
-            </a:r>
-          </a:p>
-        </p:txBody>
-      </p:sp>
-      <p:sp>
-        <p:nvSpPr>
-          <p:cNvPr id="14" name="Rounded Rectangle 13"/>
-          <p:cNvSpPr/>
-          <p:nvPr/>
-        </p:nvSpPr>
-        <p:spPr>
-          <a:xfrm>
-            <a:off x="457200" y="3945636"/>
-            <a:ext cx="11277295" cy="1051560"/>
-          </a:xfrm>
-          <a:prstGeom prst="roundRect">
-            <a:avLst>
-              <a:gd name="adj" fmla="val 12000"/>
-            </a:avLst>
-          </a:prstGeom>
-          <a:solidFill>
-            <a:srgbClr val="F2F2F2"/>
-          </a:solidFill>
-          <a:ln>
-            <a:noFill/>
-          </a:ln>
-        </p:spPr>
-        <p:style>
-          <a:lnRef idx="1">
-            <a:schemeClr val="accent1"/>
-          </a:lnRef>
-          <a:fillRef idx="3">
-            <a:schemeClr val="accent1"/>
-          </a:fillRef>
-          <a:effectRef idx="2">
-            <a:schemeClr val="accent1"/>
-          </a:effectRef>
-          <a:fontRef idx="minor">
-            <a:schemeClr val="lt1"/>
-          </a:fontRef>
-        </p:style>
-        <p:txBody>
-          <a:bodyPr rtlCol="0" anchor="ctr"/>
-          <a:lstStyle/>
-          <a:p>
-            <a:pPr algn="ctr"/>
-          </a:p>
-        </p:txBody>
-      </p:sp>
-      <p:sp>
-        <p:nvSpPr>
-          <p:cNvPr id="15" name="Rounded Rectangle 14"/>
-          <p:cNvSpPr/>
-          <p:nvPr/>
-        </p:nvSpPr>
-        <p:spPr>
-          <a:xfrm>
-            <a:off x="594360" y="4251960"/>
-            <a:ext cx="438912" cy="438912"/>
-          </a:xfrm>
-          <a:prstGeom prst="roundRect">
-            <a:avLst>
-              <a:gd name="adj" fmla="val 12000"/>
-            </a:avLst>
-          </a:prstGeom>
-          <a:solidFill>
-            <a:srgbClr val="095292"/>
-          </a:solidFill>
-          <a:ln>
-            <a:noFill/>
-          </a:ln>
-        </p:spPr>
-        <p:style>
-          <a:lnRef idx="1">
-            <a:schemeClr val="accent1"/>
-          </a:lnRef>
-          <a:fillRef idx="3">
-            <a:schemeClr val="accent1"/>
-          </a:fillRef>
-          <a:effectRef idx="2">
-            <a:schemeClr val="accent1"/>
-          </a:effectRef>
-          <a:fontRef idx="minor">
-            <a:schemeClr val="lt1"/>
-          </a:fontRef>
-        </p:style>
-        <p:txBody>
-          <a:bodyPr rtlCol="0" anchor="ctr"/>
-          <a:lstStyle/>
-          <a:p>
-            <a:pPr algn="ctr"/>
-          </a:p>
-        </p:txBody>
-      </p:sp>
-      <p:sp>
-        <p:nvSpPr>
-          <p:cNvPr id="16" name="TextBox 15"/>
-          <p:cNvSpPr txBox="1"/>
-          <p:nvPr/>
-        </p:nvSpPr>
-        <p:spPr>
-          <a:xfrm>
-            <a:off x="594360" y="4251960"/>
-            <a:ext cx="438912" cy="438912"/>
-          </a:xfrm>
-          <a:prstGeom prst="rect">
-            <a:avLst/>
-          </a:prstGeom>
-          <a:noFill/>
-        </p:spPr>
-        <p:txBody>
-          <a:bodyPr wrap="square" anchor="ctr"/>
-          <a:lstStyle/>
-          <a:p>
-            <a:pPr algn="ctr"/>
+              <a:t>–   </a:t>
+            </a:r>
             <a:r>
               <a:rPr sz="1600" b="1" i="0">
                 <a:solidFill>
-                  <a:srgbClr val="FFFFFF"/>
-                </a:solidFill>
-                <a:latin typeface="Calibri"/>
-              </a:rPr>
-              <a:t>3</a:t>
-            </a:r>
-          </a:p>
-        </p:txBody>
-      </p:sp>
-      <p:sp>
-        <p:nvSpPr>
-          <p:cNvPr id="17" name="TextBox 16"/>
-          <p:cNvSpPr txBox="1"/>
-          <p:nvPr/>
-        </p:nvSpPr>
-        <p:spPr>
-          <a:xfrm>
-            <a:off x="1188720" y="4037076"/>
-            <a:ext cx="10271455" cy="886968"/>
-          </a:xfrm>
-          <a:prstGeom prst="rect">
-            <a:avLst/>
-          </a:prstGeom>
-          <a:noFill/>
-        </p:spPr>
-        <p:txBody>
-          <a:bodyPr wrap="square" anchor="ctr"/>
-          <a:lstStyle/>
-          <a:p>
-            <a:r>
-              <a:rPr sz="1500" b="1" i="0">
-                <a:solidFill>
-                  <a:srgbClr val="095292"/>
-                </a:solidFill>
-                <a:latin typeface="Calibri"/>
-              </a:rPr>
-              <a:t>Pega y renderiza en ExamLab</a:t>
+                  <a:srgbClr val="333333"/>
+                </a:solidFill>
+                <a:latin typeface="Calibri"/>
+              </a:rPr>
+              <a:t>3.</a:t>
+            </a:r>
+            <a:r>
+              <a:rPr sz="1600" b="0" i="0">
+                <a:solidFill>
+                  <a:srgbClr val="333333"/>
+                </a:solidFill>
+                <a:latin typeface="Calibri"/>
+              </a:rPr>
+              <a:t> Paso 3: dibuje primero el boceto del C4 Context en Excalidraw o draw.io, que es donde se piensa el modelo, y despues pidale a una IA que lo traduzca a Mermaid («convierta este diagrama a Mermaid usando C4Context»); peguelo en la pregunta 3 y verifique en el diagrama ya renderizado que el sistema sea UNA sola caja, que no aparezca ninguna caja interna (eso es la pregunta 9) y que cada flecha lleve verbo y protocolo.</a:t>
             </a:r>
           </a:p>
           <a:p>
             <a:pPr>
-              <a:spcBef>
-                <a:spcPts val="200"/>
-              </a:spcBef>
+              <a:spcAft>
+                <a:spcPts val="800"/>
+              </a:spcAft>
             </a:pPr>
             <a:r>
-              <a:rPr sz="1300" b="0" i="0">
+              <a:rPr sz="1600" b="0" i="0">
                 <a:solidFill>
                   <a:srgbClr val="333333"/>
                 </a:solidFill>
                 <a:latin typeface="Calibri"/>
               </a:rPr>
-              <a:t>Pega ese codigo en la caja de texto de la pregunta y mira como lo dibuja la plataforma. Si no renderiza, corrige ahi mismo: lo que se califica es el diagrama renderizado dentro de ExamLab.</a:t>
-            </a:r>
-          </a:p>
-        </p:txBody>
-      </p:sp>
-      <p:sp>
-        <p:nvSpPr>
-          <p:cNvPr id="18" name="Rounded Rectangle 17"/>
-          <p:cNvSpPr/>
-          <p:nvPr/>
-        </p:nvSpPr>
-        <p:spPr>
-          <a:xfrm>
-            <a:off x="457200" y="5088636"/>
-            <a:ext cx="11277295" cy="1051560"/>
-          </a:xfrm>
-          <a:prstGeom prst="roundRect">
-            <a:avLst>
-              <a:gd name="adj" fmla="val 12000"/>
-            </a:avLst>
-          </a:prstGeom>
-          <a:solidFill>
-            <a:srgbClr val="E8F4FA"/>
-          </a:solidFill>
-          <a:ln>
-            <a:noFill/>
-          </a:ln>
-        </p:spPr>
-        <p:style>
-          <a:lnRef idx="1">
-            <a:schemeClr val="accent1"/>
-          </a:lnRef>
-          <a:fillRef idx="3">
-            <a:schemeClr val="accent1"/>
-          </a:fillRef>
-          <a:effectRef idx="2">
-            <a:schemeClr val="accent1"/>
-          </a:effectRef>
-          <a:fontRef idx="minor">
-            <a:schemeClr val="lt1"/>
-          </a:fontRef>
-        </p:style>
-        <p:txBody>
-          <a:bodyPr rtlCol="0" anchor="ctr"/>
-          <a:lstStyle/>
-          <a:p>
-            <a:pPr algn="ctr"/>
-          </a:p>
-        </p:txBody>
-      </p:sp>
-      <p:sp>
-        <p:nvSpPr>
-          <p:cNvPr id="19" name="Rounded Rectangle 18"/>
-          <p:cNvSpPr/>
-          <p:nvPr/>
-        </p:nvSpPr>
-        <p:spPr>
-          <a:xfrm>
-            <a:off x="594360" y="5394960"/>
-            <a:ext cx="438912" cy="438912"/>
-          </a:xfrm>
-          <a:prstGeom prst="roundRect">
-            <a:avLst>
-              <a:gd name="adj" fmla="val 12000"/>
-            </a:avLst>
-          </a:prstGeom>
-          <a:solidFill>
-            <a:srgbClr val="095292"/>
-          </a:solidFill>
-          <a:ln>
-            <a:noFill/>
-          </a:ln>
-        </p:spPr>
-        <p:style>
-          <a:lnRef idx="1">
-            <a:schemeClr val="accent1"/>
-          </a:lnRef>
-          <a:fillRef idx="3">
-            <a:schemeClr val="accent1"/>
-          </a:fillRef>
-          <a:effectRef idx="2">
-            <a:schemeClr val="accent1"/>
-          </a:effectRef>
-          <a:fontRef idx="minor">
-            <a:schemeClr val="lt1"/>
-          </a:fontRef>
-        </p:style>
-        <p:txBody>
-          <a:bodyPr rtlCol="0" anchor="ctr"/>
-          <a:lstStyle/>
-          <a:p>
-            <a:pPr algn="ctr"/>
-          </a:p>
-        </p:txBody>
-      </p:sp>
-      <p:sp>
-        <p:nvSpPr>
-          <p:cNvPr id="20" name="TextBox 19"/>
-          <p:cNvSpPr txBox="1"/>
-          <p:nvPr/>
-        </p:nvSpPr>
-        <p:spPr>
-          <a:xfrm>
-            <a:off x="594360" y="5394960"/>
-            <a:ext cx="438912" cy="438912"/>
-          </a:xfrm>
-          <a:prstGeom prst="rect">
-            <a:avLst/>
-          </a:prstGeom>
-          <a:noFill/>
-        </p:spPr>
-        <p:txBody>
-          <a:bodyPr wrap="square" anchor="ctr"/>
-          <a:lstStyle/>
-          <a:p>
-            <a:pPr algn="ctr"/>
+              <a:t>–   </a:t>
+            </a:r>
             <a:r>
               <a:rPr sz="1600" b="1" i="0">
                 <a:solidFill>
-                  <a:srgbClr val="FFFFFF"/>
-                </a:solidFill>
-                <a:latin typeface="Calibri"/>
-              </a:rPr>
-              <a:t>4</a:t>
-            </a:r>
-          </a:p>
-        </p:txBody>
-      </p:sp>
-      <p:sp>
-        <p:nvSpPr>
-          <p:cNvPr id="21" name="TextBox 20"/>
-          <p:cNvSpPr txBox="1"/>
-          <p:nvPr/>
-        </p:nvSpPr>
-        <p:spPr>
-          <a:xfrm>
-            <a:off x="1188720" y="5180076"/>
-            <a:ext cx="10271455" cy="886968"/>
-          </a:xfrm>
-          <a:prstGeom prst="rect">
-            <a:avLst/>
-          </a:prstGeom>
-          <a:noFill/>
-        </p:spPr>
-        <p:txBody>
-          <a:bodyPr wrap="square" anchor="ctr"/>
-          <a:lstStyle/>
-          <a:p>
-            <a:r>
-              <a:rPr sz="1500" b="1" i="0">
-                <a:solidFill>
-                  <a:srgbClr val="095292"/>
-                </a:solidFill>
-                <a:latin typeface="Calibri"/>
-              </a:rPr>
-              <a:t>Guarda el PNG para tu PI</a:t>
-            </a:r>
-          </a:p>
-          <a:p>
-            <a:pPr>
-              <a:spcBef>
-                <a:spcPts val="200"/>
-              </a:spcBef>
-            </a:pPr>
-            <a:r>
-              <a:rPr sz="1300" b="0" i="0">
-                <a:solidFill>
                   <a:srgbClr val="333333"/>
                 </a:solidFill>
                 <a:latin typeface="Calibri"/>
               </a:rPr>
-              <a:t>Exporta tambien la imagen a la carpeta de tu Proyecto Integrador. Esa copia es para tu informe; no reemplaza la respuesta en la plataforma.</a:t>
-            </a:r>
-          </a:p>
-        </p:txBody>
-      </p:sp>
-      <p:sp>
-        <p:nvSpPr>
-          <p:cNvPr id="22" name="TextBox 21"/>
+              <a:t>4.</a:t>
+            </a:r>
+            <a:r>
+              <a:rPr sz="1600" b="0" i="0">
+                <a:solidFill>
+                  <a:srgbClr val="333333"/>
+                </a:solidFill>
+                <a:latin typeface="Calibri"/>
+              </a:rPr>
+              <a:t> Paso 4: antes de cerrar la sesion, revise que los nombres de actores y de sistemas externos sean EXACTAMENTE los mismos en la ficha y en el diagrama; si no coinciden, no son el mismo sistema, y las preguntas 9 a 11 de esta actividad reutilizan esos nombres. Las preguntas 4 a 11 se resuelven en las Clases 2, 3 y 4: la actividad se entrega completa al cierre del Corte 1, no hoy.</a:t>
+            </a:r>
+          </a:p>
+        </p:txBody>
+      </p:sp>
+      <p:sp>
+        <p:nvSpPr>
+          <p:cNvPr id="6" name="TextBox 5"/>
           <p:cNvSpPr txBox="1"/>
           <p:nvPr/>
         </p:nvSpPr>
@@ -5711,21 +4806,109 @@
                 </a:solidFill>
                 <a:latin typeface="Calibri"/>
               </a:rPr>
-              <a:t>Taller PI (paso a paso)</a:t>
-            </a:r>
-          </a:p>
-        </p:txBody>
-      </p:sp>
-      <p:sp>
-        <p:nvSpPr>
-          <p:cNvPr id="5" name="TextBox 4"/>
+              <a:t>Para continuar (PI)</a:t>
+            </a:r>
+          </a:p>
+        </p:txBody>
+      </p:sp>
+      <p:sp>
+        <p:nvSpPr>
+          <p:cNvPr id="5" name="Rounded Rectangle 4"/>
+          <p:cNvSpPr/>
+          <p:nvPr/>
+        </p:nvSpPr>
+        <p:spPr>
+          <a:xfrm>
+            <a:off x="457200" y="1261872"/>
+            <a:ext cx="11277295" cy="1051560"/>
+          </a:xfrm>
+          <a:prstGeom prst="roundRect">
+            <a:avLst>
+              <a:gd name="adj" fmla="val 12000"/>
+            </a:avLst>
+          </a:prstGeom>
+          <a:solidFill>
+            <a:srgbClr val="E8F4FA"/>
+          </a:solidFill>
+          <a:ln>
+            <a:noFill/>
+          </a:ln>
+        </p:spPr>
+        <p:style>
+          <a:lnRef idx="1">
+            <a:schemeClr val="accent1"/>
+          </a:lnRef>
+          <a:fillRef idx="3">
+            <a:schemeClr val="accent1"/>
+          </a:fillRef>
+          <a:effectRef idx="2">
+            <a:schemeClr val="accent1"/>
+          </a:effectRef>
+          <a:fontRef idx="minor">
+            <a:schemeClr val="lt1"/>
+          </a:fontRef>
+        </p:style>
+        <p:txBody>
+          <a:bodyPr rtlCol="0" anchor="ctr"/>
+          <a:lstStyle/>
+          <a:p>
+            <a:pPr algn="ctr"/>
+          </a:p>
+        </p:txBody>
+      </p:sp>
+      <p:sp>
+        <p:nvSpPr>
+          <p:cNvPr id="6" name="Rectangle 5"/>
+          <p:cNvSpPr/>
+          <p:nvPr/>
+        </p:nvSpPr>
+        <p:spPr>
+          <a:xfrm>
+            <a:off x="457200" y="1261872"/>
+            <a:ext cx="128016" cy="1051560"/>
+          </a:xfrm>
+          <a:prstGeom prst="rect">
+            <a:avLst/>
+          </a:prstGeom>
+          <a:solidFill>
+            <a:srgbClr val="269CCB"/>
+          </a:solidFill>
+          <a:ln>
+            <a:noFill/>
+          </a:ln>
+        </p:spPr>
+        <p:style>
+          <a:lnRef idx="1">
+            <a:schemeClr val="accent1"/>
+          </a:lnRef>
+          <a:fillRef idx="3">
+            <a:schemeClr val="accent1"/>
+          </a:fillRef>
+          <a:effectRef idx="2">
+            <a:schemeClr val="accent1"/>
+          </a:effectRef>
+          <a:fontRef idx="minor">
+            <a:schemeClr val="lt1"/>
+          </a:fontRef>
+        </p:style>
+        <p:txBody>
+          <a:bodyPr rtlCol="0" anchor="ctr"/>
+          <a:lstStyle/>
+          <a:p>
+            <a:pPr algn="ctr"/>
+          </a:p>
+        </p:txBody>
+      </p:sp>
+      <p:sp>
+        <p:nvSpPr>
+          <p:cNvPr id="7" name="TextBox 6"/>
           <p:cNvSpPr txBox="1"/>
           <p:nvPr/>
         </p:nvSpPr>
         <p:spPr>
           <a:xfrm>
-            <a:off x="457200" y="1170432"/>
-            <a:ext cx="11277295" cy="5230368"/>
+            <a:off x="777240" y="1399031"/>
+            <a:ext cx="10774375" cy="822959"/>
           </a:xfrm>
           <a:prstGeom prst="rect">
             <a:avLst/>
@@ -5738,205 +4921,313 @@
           </a:bodyPr>
           <a:lstStyle/>
           <a:p>
+            <a:r>
+              <a:rPr sz="1200" b="1" i="0">
+                <a:solidFill>
+                  <a:srgbClr val="269CCB"/>
+                </a:solidFill>
+                <a:latin typeface="Calibri"/>
+              </a:rPr>
+              <a:t>Info</a:t>
+            </a:r>
+          </a:p>
+          <a:p>
             <a:pPr>
-              <a:spcAft>
-                <a:spcPts val="800"/>
-              </a:spcAft>
+              <a:spcBef>
+                <a:spcPts val="400"/>
+              </a:spcBef>
             </a:pPr>
             <a:r>
-              <a:rPr sz="1600" b="1" i="0">
+              <a:rPr sz="1400" b="0" i="0">
                 <a:solidFill>
                   <a:srgbClr val="333333"/>
                 </a:solidFill>
                 <a:latin typeface="Calibri"/>
               </a:rPr>
-              <a:t>1.</a:t>
-            </a:r>
-            <a:r>
-              <a:rPr sz="1600" b="0" i="0">
+              <a:t>Entregable: Ficha PI de 5 bloques + C4 Context en Mermaid renderizado en ExamLab (boceto previo en Excalidraw/draw.io)</a:t>
+            </a:r>
+          </a:p>
+        </p:txBody>
+      </p:sp>
+      <p:sp>
+        <p:nvSpPr>
+          <p:cNvPr id="8" name="Rounded Rectangle 7"/>
+          <p:cNvSpPr/>
+          <p:nvPr/>
+        </p:nvSpPr>
+        <p:spPr>
+          <a:xfrm>
+            <a:off x="457200" y="2478024"/>
+            <a:ext cx="11277295" cy="1051560"/>
+          </a:xfrm>
+          <a:prstGeom prst="roundRect">
+            <a:avLst>
+              <a:gd name="adj" fmla="val 12000"/>
+            </a:avLst>
+          </a:prstGeom>
+          <a:solidFill>
+            <a:srgbClr val="FFF8E1"/>
+          </a:solidFill>
+          <a:ln>
+            <a:noFill/>
+          </a:ln>
+        </p:spPr>
+        <p:style>
+          <a:lnRef idx="1">
+            <a:schemeClr val="accent1"/>
+          </a:lnRef>
+          <a:fillRef idx="3">
+            <a:schemeClr val="accent1"/>
+          </a:fillRef>
+          <a:effectRef idx="2">
+            <a:schemeClr val="accent1"/>
+          </a:effectRef>
+          <a:fontRef idx="minor">
+            <a:schemeClr val="lt1"/>
+          </a:fontRef>
+        </p:style>
+        <p:txBody>
+          <a:bodyPr rtlCol="0" anchor="ctr"/>
+          <a:lstStyle/>
+          <a:p>
+            <a:pPr algn="ctr"/>
+          </a:p>
+        </p:txBody>
+      </p:sp>
+      <p:sp>
+        <p:nvSpPr>
+          <p:cNvPr id="9" name="Rectangle 8"/>
+          <p:cNvSpPr/>
+          <p:nvPr/>
+        </p:nvSpPr>
+        <p:spPr>
+          <a:xfrm>
+            <a:off x="457200" y="2478024"/>
+            <a:ext cx="128016" cy="1051560"/>
+          </a:xfrm>
+          <a:prstGeom prst="rect">
+            <a:avLst/>
+          </a:prstGeom>
+          <a:solidFill>
+            <a:srgbClr val="FFD000"/>
+          </a:solidFill>
+          <a:ln>
+            <a:noFill/>
+          </a:ln>
+        </p:spPr>
+        <p:style>
+          <a:lnRef idx="1">
+            <a:schemeClr val="accent1"/>
+          </a:lnRef>
+          <a:fillRef idx="3">
+            <a:schemeClr val="accent1"/>
+          </a:fillRef>
+          <a:effectRef idx="2">
+            <a:schemeClr val="accent1"/>
+          </a:effectRef>
+          <a:fontRef idx="minor">
+            <a:schemeClr val="lt1"/>
+          </a:fontRef>
+        </p:style>
+        <p:txBody>
+          <a:bodyPr rtlCol="0" anchor="ctr"/>
+          <a:lstStyle/>
+          <a:p>
+            <a:pPr algn="ctr"/>
+          </a:p>
+        </p:txBody>
+      </p:sp>
+      <p:sp>
+        <p:nvSpPr>
+          <p:cNvPr id="10" name="TextBox 9"/>
+          <p:cNvSpPr txBox="1"/>
+          <p:nvPr/>
+        </p:nvSpPr>
+        <p:spPr>
+          <a:xfrm>
+            <a:off x="777240" y="2615184"/>
+            <a:ext cx="10774375" cy="822959"/>
+          </a:xfrm>
+          <a:prstGeom prst="rect">
+            <a:avLst/>
+          </a:prstGeom>
+          <a:noFill/>
+        </p:spPr>
+        <p:txBody>
+          <a:bodyPr wrap="square">
+            <a:spAutoFit/>
+          </a:bodyPr>
+          <a:lstStyle/>
+          <a:p>
+            <a:r>
+              <a:rPr sz="1200" b="1" i="0">
+                <a:solidFill>
+                  <a:srgbClr val="FFD000"/>
+                </a:solidFill>
+                <a:latin typeface="Calibri"/>
+              </a:rPr>
+              <a:t>Aclaración</a:t>
+            </a:r>
+          </a:p>
+          <a:p>
+            <a:pPr>
+              <a:spcBef>
+                <a:spcPts val="400"/>
+              </a:spcBef>
+            </a:pPr>
+            <a:r>
+              <a:rPr sz="1400" b="0" i="0">
                 <a:solidFill>
                   <a:srgbClr val="333333"/>
                 </a:solidFill>
                 <a:latin typeface="Calibri"/>
               </a:rPr>
-              <a:t> Paso 1: elija un dominio concreto entre AgendaU, BiblioLite, InventarioLab, TurnosClinica o EventosCampus (o uno propio del mismo tamano) y escriba el problema en exactamente 3 frases: quien sufre el problema, como se resuelve hoy sin CloudLite y una cifra medible del dolor (por ejemplo 40 correos por semana para cuadrar 12 asesorias), verificando que en ninguna de las 3 frases aparezca una expresion generica como app de la universidad o red social; el resultado queda en la seccion 1 Dominio y problema del informe del PI.</a:t>
+              <a:t>Subir evidencias al paquete CloudLite (Drive/repo) y a ExamLab (https://uniaj.examlab.workers.dev/) domingo 23:59.</a:t>
+            </a:r>
+          </a:p>
+        </p:txBody>
+      </p:sp>
+      <p:sp>
+        <p:nvSpPr>
+          <p:cNvPr id="11" name="Rounded Rectangle 10"/>
+          <p:cNvSpPr/>
+          <p:nvPr/>
+        </p:nvSpPr>
+        <p:spPr>
+          <a:xfrm>
+            <a:off x="457200" y="3694176"/>
+            <a:ext cx="11277295" cy="1051560"/>
+          </a:xfrm>
+          <a:prstGeom prst="roundRect">
+            <a:avLst>
+              <a:gd name="adj" fmla="val 12000"/>
+            </a:avLst>
+          </a:prstGeom>
+          <a:solidFill>
+            <a:srgbClr val="FBE4E4"/>
+          </a:solidFill>
+          <a:ln>
+            <a:noFill/>
+          </a:ln>
+        </p:spPr>
+        <p:style>
+          <a:lnRef idx="1">
+            <a:schemeClr val="accent1"/>
+          </a:lnRef>
+          <a:fillRef idx="3">
+            <a:schemeClr val="accent1"/>
+          </a:fillRef>
+          <a:effectRef idx="2">
+            <a:schemeClr val="accent1"/>
+          </a:effectRef>
+          <a:fontRef idx="minor">
+            <a:schemeClr val="lt1"/>
+          </a:fontRef>
+        </p:style>
+        <p:txBody>
+          <a:bodyPr rtlCol="0" anchor="ctr"/>
+          <a:lstStyle/>
+          <a:p>
+            <a:pPr algn="ctr"/>
+          </a:p>
+        </p:txBody>
+      </p:sp>
+      <p:sp>
+        <p:nvSpPr>
+          <p:cNvPr id="12" name="Rectangle 11"/>
+          <p:cNvSpPr/>
+          <p:nvPr/>
+        </p:nvSpPr>
+        <p:spPr>
+          <a:xfrm>
+            <a:off x="457200" y="3694176"/>
+            <a:ext cx="128016" cy="1051560"/>
+          </a:xfrm>
+          <a:prstGeom prst="rect">
+            <a:avLst/>
+          </a:prstGeom>
+          <a:solidFill>
+            <a:srgbClr val="A02030"/>
+          </a:solidFill>
+          <a:ln>
+            <a:noFill/>
+          </a:ln>
+        </p:spPr>
+        <p:style>
+          <a:lnRef idx="1">
+            <a:schemeClr val="accent1"/>
+          </a:lnRef>
+          <a:fillRef idx="3">
+            <a:schemeClr val="accent1"/>
+          </a:fillRef>
+          <a:effectRef idx="2">
+            <a:schemeClr val="accent1"/>
+          </a:effectRef>
+          <a:fontRef idx="minor">
+            <a:schemeClr val="lt1"/>
+          </a:fontRef>
+        </p:style>
+        <p:txBody>
+          <a:bodyPr rtlCol="0" anchor="ctr"/>
+          <a:lstStyle/>
+          <a:p>
+            <a:pPr algn="ctr"/>
+          </a:p>
+        </p:txBody>
+      </p:sp>
+      <p:sp>
+        <p:nvSpPr>
+          <p:cNvPr id="13" name="TextBox 12"/>
+          <p:cNvSpPr txBox="1"/>
+          <p:nvPr/>
+        </p:nvSpPr>
+        <p:spPr>
+          <a:xfrm>
+            <a:off x="777240" y="3831336"/>
+            <a:ext cx="10774375" cy="822959"/>
+          </a:xfrm>
+          <a:prstGeom prst="rect">
+            <a:avLst/>
+          </a:prstGeom>
+          <a:noFill/>
+        </p:spPr>
+        <p:txBody>
+          <a:bodyPr wrap="square">
+            <a:spAutoFit/>
+          </a:bodyPr>
+          <a:lstStyle/>
+          <a:p>
+            <a:r>
+              <a:rPr sz="1200" b="1" i="0">
+                <a:solidFill>
+                  <a:srgbClr val="A02030"/>
+                </a:solidFill>
+                <a:latin typeface="Calibri"/>
+              </a:rPr>
+              <a:t>Atención</a:t>
             </a:r>
           </a:p>
           <a:p>
             <a:pPr>
-              <a:spcAft>
-                <a:spcPts val="800"/>
-              </a:spcAft>
+              <a:spcBef>
+                <a:spcPts val="400"/>
+              </a:spcBef>
             </a:pPr>
             <a:r>
-              <a:rPr sz="1600" b="0" i="0">
+              <a:rPr sz="1400" b="0" i="0">
                 <a:solidFill>
                   <a:srgbClr val="333333"/>
                 </a:solidFill>
                 <a:latin typeface="Calibri"/>
               </a:rPr>
-              <a:t>–   </a:t>
-            </a:r>
-            <a:r>
-              <a:rPr sz="1600" b="1" i="0">
-                <a:solidFill>
-                  <a:srgbClr val="333333"/>
-                </a:solidFill>
-                <a:latin typeface="Calibri"/>
-              </a:rPr>
-              <a:t>2.</a:t>
-            </a:r>
-            <a:r>
-              <a:rPr sz="1600" b="0" i="0">
-                <a:solidFill>
-                  <a:srgbClr val="333333"/>
-                </a:solidFill>
-                <a:latin typeface="Calibri"/>
-              </a:rPr>
-              <a:t> Paso 2: liste exactamente 4 capacidades con la forma verbo mas objeto de negocio (reservar cita, publicar cupo, cancelar reserva, notificar recordatorio), 3 actores humanos con lo que espera cada uno, 2 o 3 sistemas externos con los que CloudLite intercambia informacion (por ejemplo proveedor de identidad, correo transaccional o pasarela de pagos) y 3 elementos de fuera de alcance, verificando que ninguna capacidad nombre tecnologia (nada de usar PostgreSQL ni desplegar en Docker) y que las 4 capacidades se lean como frases del negocio; queda en la seccion 1 del informe y se pega tal cual en la pregunta 1 de ExamLab.</a:t>
-            </a:r>
-          </a:p>
-          <a:p>
-            <a:pPr>
-              <a:spcAft>
-                <a:spcPts val="800"/>
-              </a:spcAft>
-            </a:pPr>
-            <a:r>
-              <a:rPr sz="1600" b="0" i="0">
-                <a:solidFill>
-                  <a:srgbClr val="333333"/>
-                </a:solidFill>
-                <a:latin typeface="Calibri"/>
-              </a:rPr>
-              <a:t>–   </a:t>
-            </a:r>
-            <a:r>
-              <a:rPr sz="1600" b="1" i="0">
-                <a:solidFill>
-                  <a:srgbClr val="333333"/>
-                </a:solidFill>
-                <a:latin typeface="Calibri"/>
-              </a:rPr>
-              <a:t>3.</a:t>
-            </a:r>
-            <a:r>
-              <a:rPr sz="1600" b="0" i="0">
-                <a:solidFill>
-                  <a:srgbClr val="333333"/>
-                </a:solidFill>
-                <a:latin typeface="Calibri"/>
-              </a:rPr>
-              <a:t> Paso 3: dibuje primero el boceto del C4 Context en Excalidraw o draw.io, que es donde se piensa el modelo, y despues pidale a una IA que lo traduzca a Mermaid («convierte este diagrama a Mermaid usando C4Context»); pegue ese codigo en la pregunta de tipo diagrama de ExamLab y verifique que renderice ahi mismo, con exactamente 1 System para CloudLite, 2 Person, 2 System_Ext y 5 relaciones etiquetadas con verbo de negocio y protocolo, verificando en el diagrama ya renderizado que no aparezca ninguna caja interna (ni base de datos ni API ni worker, eso es Clase 4) y que cada flecha se lea en voz alta como una frase completa.</a:t>
-            </a:r>
-          </a:p>
-          <a:p>
-            <a:pPr>
-              <a:spcAft>
-                <a:spcPts val="800"/>
-              </a:spcAft>
-            </a:pPr>
-            <a:r>
-              <a:rPr sz="1600" b="0" i="0">
-                <a:solidFill>
-                  <a:srgbClr val="333333"/>
-                </a:solidFill>
-                <a:latin typeface="Calibri"/>
-              </a:rPr>
-              <a:t>–   </a:t>
-            </a:r>
-            <a:r>
-              <a:rPr sz="1600" b="1" i="0">
-                <a:solidFill>
-                  <a:srgbClr val="333333"/>
-                </a:solidFill>
-                <a:latin typeface="Calibri"/>
-              </a:rPr>
-              <a:t>4.</a:t>
-            </a:r>
-            <a:r>
-              <a:rPr sz="1600" b="0" i="0">
-                <a:solidFill>
-                  <a:srgbClr val="333333"/>
-                </a:solidFill>
-                <a:latin typeface="Calibri"/>
-              </a:rPr>
-              <a:t> Paso 4: resuelva la tabla comparativa nube frente a on-premise en la pregunta 4, con los 4 criterios en este orden (inversion inicial, tiempo hasta la primera demo, quien opera el sistema operativo y los respaldos, y que pasa el dia del pico de su dominio) y maximo 2 lineas por celda, verificando que cada celda hable de SU dominio y no de teoria general; la estructura es la que se proyecto en clase, resuelta sobre AgendaU.</a:t>
-            </a:r>
-          </a:p>
-          <a:p>
-            <a:pPr>
-              <a:spcAft>
-                <a:spcPts val="800"/>
-              </a:spcAft>
-            </a:pPr>
-            <a:r>
-              <a:rPr sz="1600" b="0" i="0">
-                <a:solidFill>
-                  <a:srgbClr val="333333"/>
-                </a:solidFill>
-                <a:latin typeface="Calibri"/>
-              </a:rPr>
-              <a:t>–   </a:t>
-            </a:r>
-            <a:r>
-              <a:rPr sz="1600" b="1" i="0">
-                <a:solidFill>
-                  <a:srgbClr val="333333"/>
-                </a:solidFill>
-                <a:latin typeface="Calibri"/>
-              </a:rPr>
-              <a:t>5.</a:t>
-            </a:r>
-            <a:r>
-              <a:rPr sz="1600" b="0" i="0">
-                <a:solidFill>
-                  <a:srgbClr val="333333"/>
-                </a:solidFill>
-                <a:latin typeface="Calibri"/>
-              </a:rPr>
-              <a:t> Paso 5: cierre esa misma pregunta 4 con el veredicto de 2 frases: (a) que opcion elige para su CloudLite y (b) que riesgo concreto asume al elegirla, verificando que el riesgo este nombrado y no solo insinuado (por ejemplo dependencia del proveedor). Hoy se decide unicamente nube u on-premise: el modelo de servicio (IaaS, PaaS o SaaS) se decide en la Clase 2, y este veredicto es la entrada del ADR-001 de esa clase.</a:t>
-            </a:r>
-          </a:p>
-          <a:p>
-            <a:pPr>
-              <a:spcAft>
-                <a:spcPts val="800"/>
-              </a:spcAft>
-            </a:pPr>
-            <a:r>
-              <a:rPr sz="1600" b="0" i="0">
-                <a:solidFill>
-                  <a:srgbClr val="333333"/>
-                </a:solidFill>
-                <a:latin typeface="Calibri"/>
-              </a:rPr>
-              <a:t>–   </a:t>
-            </a:r>
-            <a:r>
-              <a:rPr sz="1600" b="1" i="0">
-                <a:solidFill>
-                  <a:srgbClr val="333333"/>
-                </a:solidFill>
-                <a:latin typeface="Calibri"/>
-              </a:rPr>
-              <a:t>6.</a:t>
-            </a:r>
-            <a:r>
-              <a:rPr sz="1600" b="0" i="0">
-                <a:solidFill>
-                  <a:srgbClr val="333333"/>
-                </a:solidFill>
-                <a:latin typeface="Calibri"/>
-              </a:rPr>
-              <a:t> Paso 6: suba a ExamLab (modulo Talleres) las 5 preguntas resueltas antes del domingo 23:59, verificando antes de enviar que la ficha de la pregunta 1, el diagrama renderizado de la pregunta 2 y el veredicto de la pregunta 4 usen exactamente los mismos nombres de actores y de sistemas externos; si no coinciden, no son el mismo sistema y las Clases 4, 7, 11 y 15 reutilizan esos nombres.</a:t>
-            </a:r>
-          </a:p>
-        </p:txBody>
-      </p:sp>
-      <p:sp>
-        <p:nvSpPr>
-          <p:cNvPr id="6" name="TextBox 5"/>
+              <a:t>Sin cloud de pago ni instalaciones obligatorias de hipervisores/Docker Desktop.</a:t>
+            </a:r>
+          </a:p>
+        </p:txBody>
+      </p:sp>
+      <p:sp>
+        <p:nvSpPr>
+          <p:cNvPr id="14" name="TextBox 13"/>
           <p:cNvSpPr txBox="1"/>
           <p:nvPr/>
         </p:nvSpPr>
@@ -6004,601 +5295,6 @@
         <p:spPr>
           <a:xfrm>
             <a:off x="0" y="0"/>
-            <a:ext cx="12191695" cy="960120"/>
-          </a:xfrm>
-          <a:prstGeom prst="rect">
-            <a:avLst/>
-          </a:prstGeom>
-          <a:solidFill>
-            <a:srgbClr val="095292"/>
-          </a:solidFill>
-          <a:ln>
-            <a:noFill/>
-          </a:ln>
-        </p:spPr>
-        <p:style>
-          <a:lnRef idx="1">
-            <a:schemeClr val="accent1"/>
-          </a:lnRef>
-          <a:fillRef idx="3">
-            <a:schemeClr val="accent1"/>
-          </a:fillRef>
-          <a:effectRef idx="2">
-            <a:schemeClr val="accent1"/>
-          </a:effectRef>
-          <a:fontRef idx="minor">
-            <a:schemeClr val="lt1"/>
-          </a:fontRef>
-        </p:style>
-        <p:txBody>
-          <a:bodyPr rtlCol="0" anchor="ctr"/>
-          <a:lstStyle/>
-          <a:p>
-            <a:pPr algn="ctr"/>
-          </a:p>
-        </p:txBody>
-      </p:sp>
-      <p:sp>
-        <p:nvSpPr>
-          <p:cNvPr id="3" name="Rectangle 2"/>
-          <p:cNvSpPr/>
-          <p:nvPr/>
-        </p:nvSpPr>
-        <p:spPr>
-          <a:xfrm>
-            <a:off x="0" y="960120"/>
-            <a:ext cx="12191695" cy="41148"/>
-          </a:xfrm>
-          <a:prstGeom prst="rect">
-            <a:avLst/>
-          </a:prstGeom>
-          <a:solidFill>
-            <a:srgbClr val="FFD000"/>
-          </a:solidFill>
-          <a:ln>
-            <a:noFill/>
-          </a:ln>
-        </p:spPr>
-        <p:style>
-          <a:lnRef idx="1">
-            <a:schemeClr val="accent1"/>
-          </a:lnRef>
-          <a:fillRef idx="3">
-            <a:schemeClr val="accent1"/>
-          </a:fillRef>
-          <a:effectRef idx="2">
-            <a:schemeClr val="accent1"/>
-          </a:effectRef>
-          <a:fontRef idx="minor">
-            <a:schemeClr val="lt1"/>
-          </a:fontRef>
-        </p:style>
-        <p:txBody>
-          <a:bodyPr rtlCol="0" anchor="ctr"/>
-          <a:lstStyle/>
-          <a:p>
-            <a:pPr algn="ctr"/>
-          </a:p>
-        </p:txBody>
-      </p:sp>
-      <p:sp>
-        <p:nvSpPr>
-          <p:cNvPr id="4" name="TextBox 3"/>
-          <p:cNvSpPr txBox="1"/>
-          <p:nvPr/>
-        </p:nvSpPr>
-        <p:spPr>
-          <a:xfrm>
-            <a:off x="457200" y="164592"/>
-            <a:ext cx="11277295" cy="502920"/>
-          </a:xfrm>
-          <a:prstGeom prst="rect">
-            <a:avLst/>
-          </a:prstGeom>
-          <a:noFill/>
-        </p:spPr>
-        <p:txBody>
-          <a:bodyPr wrap="square">
-            <a:spAutoFit/>
-          </a:bodyPr>
-          <a:lstStyle/>
-          <a:p>
-            <a:r>
-              <a:rPr sz="2600" b="1" i="0">
-                <a:solidFill>
-                  <a:srgbClr val="FFFFFF"/>
-                </a:solidFill>
-                <a:latin typeface="Calibri"/>
-              </a:rPr>
-              <a:t>Para continuar (PI)</a:t>
-            </a:r>
-          </a:p>
-        </p:txBody>
-      </p:sp>
-      <p:sp>
-        <p:nvSpPr>
-          <p:cNvPr id="5" name="Rounded Rectangle 4"/>
-          <p:cNvSpPr/>
-          <p:nvPr/>
-        </p:nvSpPr>
-        <p:spPr>
-          <a:xfrm>
-            <a:off x="457200" y="1261872"/>
-            <a:ext cx="11277295" cy="1051560"/>
-          </a:xfrm>
-          <a:prstGeom prst="roundRect">
-            <a:avLst>
-              <a:gd name="adj" fmla="val 12000"/>
-            </a:avLst>
-          </a:prstGeom>
-          <a:solidFill>
-            <a:srgbClr val="E8F4FA"/>
-          </a:solidFill>
-          <a:ln>
-            <a:noFill/>
-          </a:ln>
-        </p:spPr>
-        <p:style>
-          <a:lnRef idx="1">
-            <a:schemeClr val="accent1"/>
-          </a:lnRef>
-          <a:fillRef idx="3">
-            <a:schemeClr val="accent1"/>
-          </a:fillRef>
-          <a:effectRef idx="2">
-            <a:schemeClr val="accent1"/>
-          </a:effectRef>
-          <a:fontRef idx="minor">
-            <a:schemeClr val="lt1"/>
-          </a:fontRef>
-        </p:style>
-        <p:txBody>
-          <a:bodyPr rtlCol="0" anchor="ctr"/>
-          <a:lstStyle/>
-          <a:p>
-            <a:pPr algn="ctr"/>
-          </a:p>
-        </p:txBody>
-      </p:sp>
-      <p:sp>
-        <p:nvSpPr>
-          <p:cNvPr id="6" name="Rectangle 5"/>
-          <p:cNvSpPr/>
-          <p:nvPr/>
-        </p:nvSpPr>
-        <p:spPr>
-          <a:xfrm>
-            <a:off x="457200" y="1261872"/>
-            <a:ext cx="128016" cy="1051560"/>
-          </a:xfrm>
-          <a:prstGeom prst="rect">
-            <a:avLst/>
-          </a:prstGeom>
-          <a:solidFill>
-            <a:srgbClr val="269CCB"/>
-          </a:solidFill>
-          <a:ln>
-            <a:noFill/>
-          </a:ln>
-        </p:spPr>
-        <p:style>
-          <a:lnRef idx="1">
-            <a:schemeClr val="accent1"/>
-          </a:lnRef>
-          <a:fillRef idx="3">
-            <a:schemeClr val="accent1"/>
-          </a:fillRef>
-          <a:effectRef idx="2">
-            <a:schemeClr val="accent1"/>
-          </a:effectRef>
-          <a:fontRef idx="minor">
-            <a:schemeClr val="lt1"/>
-          </a:fontRef>
-        </p:style>
-        <p:txBody>
-          <a:bodyPr rtlCol="0" anchor="ctr"/>
-          <a:lstStyle/>
-          <a:p>
-            <a:pPr algn="ctr"/>
-          </a:p>
-        </p:txBody>
-      </p:sp>
-      <p:sp>
-        <p:nvSpPr>
-          <p:cNvPr id="7" name="TextBox 6"/>
-          <p:cNvSpPr txBox="1"/>
-          <p:nvPr/>
-        </p:nvSpPr>
-        <p:spPr>
-          <a:xfrm>
-            <a:off x="777240" y="1399031"/>
-            <a:ext cx="10774375" cy="822959"/>
-          </a:xfrm>
-          <a:prstGeom prst="rect">
-            <a:avLst/>
-          </a:prstGeom>
-          <a:noFill/>
-        </p:spPr>
-        <p:txBody>
-          <a:bodyPr wrap="square">
-            <a:spAutoFit/>
-          </a:bodyPr>
-          <a:lstStyle/>
-          <a:p>
-            <a:r>
-              <a:rPr sz="1200" b="1" i="0">
-                <a:solidFill>
-                  <a:srgbClr val="269CCB"/>
-                </a:solidFill>
-                <a:latin typeface="Calibri"/>
-              </a:rPr>
-              <a:t>Info</a:t>
-            </a:r>
-          </a:p>
-          <a:p>
-            <a:pPr>
-              <a:spcBef>
-                <a:spcPts val="400"/>
-              </a:spcBef>
-            </a:pPr>
-            <a:r>
-              <a:rPr sz="1400" b="0" i="0">
-                <a:solidFill>
-                  <a:srgbClr val="333333"/>
-                </a:solidFill>
-                <a:latin typeface="Calibri"/>
-              </a:rPr>
-              <a:t>Entregable: Ficha PI de 6 bloques + C4 Context en Mermaid renderizado en ExamLab (boceto previo en Excalidraw/draw.io)</a:t>
-            </a:r>
-          </a:p>
-        </p:txBody>
-      </p:sp>
-      <p:sp>
-        <p:nvSpPr>
-          <p:cNvPr id="8" name="Rounded Rectangle 7"/>
-          <p:cNvSpPr/>
-          <p:nvPr/>
-        </p:nvSpPr>
-        <p:spPr>
-          <a:xfrm>
-            <a:off x="457200" y="2478024"/>
-            <a:ext cx="11277295" cy="1051560"/>
-          </a:xfrm>
-          <a:prstGeom prst="roundRect">
-            <a:avLst>
-              <a:gd name="adj" fmla="val 12000"/>
-            </a:avLst>
-          </a:prstGeom>
-          <a:solidFill>
-            <a:srgbClr val="FFF8E1"/>
-          </a:solidFill>
-          <a:ln>
-            <a:noFill/>
-          </a:ln>
-        </p:spPr>
-        <p:style>
-          <a:lnRef idx="1">
-            <a:schemeClr val="accent1"/>
-          </a:lnRef>
-          <a:fillRef idx="3">
-            <a:schemeClr val="accent1"/>
-          </a:fillRef>
-          <a:effectRef idx="2">
-            <a:schemeClr val="accent1"/>
-          </a:effectRef>
-          <a:fontRef idx="minor">
-            <a:schemeClr val="lt1"/>
-          </a:fontRef>
-        </p:style>
-        <p:txBody>
-          <a:bodyPr rtlCol="0" anchor="ctr"/>
-          <a:lstStyle/>
-          <a:p>
-            <a:pPr algn="ctr"/>
-          </a:p>
-        </p:txBody>
-      </p:sp>
-      <p:sp>
-        <p:nvSpPr>
-          <p:cNvPr id="9" name="Rectangle 8"/>
-          <p:cNvSpPr/>
-          <p:nvPr/>
-        </p:nvSpPr>
-        <p:spPr>
-          <a:xfrm>
-            <a:off x="457200" y="2478024"/>
-            <a:ext cx="128016" cy="1051560"/>
-          </a:xfrm>
-          <a:prstGeom prst="rect">
-            <a:avLst/>
-          </a:prstGeom>
-          <a:solidFill>
-            <a:srgbClr val="FFD000"/>
-          </a:solidFill>
-          <a:ln>
-            <a:noFill/>
-          </a:ln>
-        </p:spPr>
-        <p:style>
-          <a:lnRef idx="1">
-            <a:schemeClr val="accent1"/>
-          </a:lnRef>
-          <a:fillRef idx="3">
-            <a:schemeClr val="accent1"/>
-          </a:fillRef>
-          <a:effectRef idx="2">
-            <a:schemeClr val="accent1"/>
-          </a:effectRef>
-          <a:fontRef idx="minor">
-            <a:schemeClr val="lt1"/>
-          </a:fontRef>
-        </p:style>
-        <p:txBody>
-          <a:bodyPr rtlCol="0" anchor="ctr"/>
-          <a:lstStyle/>
-          <a:p>
-            <a:pPr algn="ctr"/>
-          </a:p>
-        </p:txBody>
-      </p:sp>
-      <p:sp>
-        <p:nvSpPr>
-          <p:cNvPr id="10" name="TextBox 9"/>
-          <p:cNvSpPr txBox="1"/>
-          <p:nvPr/>
-        </p:nvSpPr>
-        <p:spPr>
-          <a:xfrm>
-            <a:off x="777240" y="2615184"/>
-            <a:ext cx="10774375" cy="822959"/>
-          </a:xfrm>
-          <a:prstGeom prst="rect">
-            <a:avLst/>
-          </a:prstGeom>
-          <a:noFill/>
-        </p:spPr>
-        <p:txBody>
-          <a:bodyPr wrap="square">
-            <a:spAutoFit/>
-          </a:bodyPr>
-          <a:lstStyle/>
-          <a:p>
-            <a:r>
-              <a:rPr sz="1200" b="1" i="0">
-                <a:solidFill>
-                  <a:srgbClr val="FFD000"/>
-                </a:solidFill>
-                <a:latin typeface="Calibri"/>
-              </a:rPr>
-              <a:t>Aclaración</a:t>
-            </a:r>
-          </a:p>
-          <a:p>
-            <a:pPr>
-              <a:spcBef>
-                <a:spcPts val="400"/>
-              </a:spcBef>
-            </a:pPr>
-            <a:r>
-              <a:rPr sz="1400" b="0" i="0">
-                <a:solidFill>
-                  <a:srgbClr val="333333"/>
-                </a:solidFill>
-                <a:latin typeface="Calibri"/>
-              </a:rPr>
-              <a:t>Subir evidencias al paquete CloudLite (Drive/repo) y a ExamLab (https://uniaj.examlab.workers.dev/) domingo 23:59.</a:t>
-            </a:r>
-          </a:p>
-        </p:txBody>
-      </p:sp>
-      <p:sp>
-        <p:nvSpPr>
-          <p:cNvPr id="11" name="Rounded Rectangle 10"/>
-          <p:cNvSpPr/>
-          <p:nvPr/>
-        </p:nvSpPr>
-        <p:spPr>
-          <a:xfrm>
-            <a:off x="457200" y="3694176"/>
-            <a:ext cx="11277295" cy="1051560"/>
-          </a:xfrm>
-          <a:prstGeom prst="roundRect">
-            <a:avLst>
-              <a:gd name="adj" fmla="val 12000"/>
-            </a:avLst>
-          </a:prstGeom>
-          <a:solidFill>
-            <a:srgbClr val="FBE4E4"/>
-          </a:solidFill>
-          <a:ln>
-            <a:noFill/>
-          </a:ln>
-        </p:spPr>
-        <p:style>
-          <a:lnRef idx="1">
-            <a:schemeClr val="accent1"/>
-          </a:lnRef>
-          <a:fillRef idx="3">
-            <a:schemeClr val="accent1"/>
-          </a:fillRef>
-          <a:effectRef idx="2">
-            <a:schemeClr val="accent1"/>
-          </a:effectRef>
-          <a:fontRef idx="minor">
-            <a:schemeClr val="lt1"/>
-          </a:fontRef>
-        </p:style>
-        <p:txBody>
-          <a:bodyPr rtlCol="0" anchor="ctr"/>
-          <a:lstStyle/>
-          <a:p>
-            <a:pPr algn="ctr"/>
-          </a:p>
-        </p:txBody>
-      </p:sp>
-      <p:sp>
-        <p:nvSpPr>
-          <p:cNvPr id="12" name="Rectangle 11"/>
-          <p:cNvSpPr/>
-          <p:nvPr/>
-        </p:nvSpPr>
-        <p:spPr>
-          <a:xfrm>
-            <a:off x="457200" y="3694176"/>
-            <a:ext cx="128016" cy="1051560"/>
-          </a:xfrm>
-          <a:prstGeom prst="rect">
-            <a:avLst/>
-          </a:prstGeom>
-          <a:solidFill>
-            <a:srgbClr val="A02030"/>
-          </a:solidFill>
-          <a:ln>
-            <a:noFill/>
-          </a:ln>
-        </p:spPr>
-        <p:style>
-          <a:lnRef idx="1">
-            <a:schemeClr val="accent1"/>
-          </a:lnRef>
-          <a:fillRef idx="3">
-            <a:schemeClr val="accent1"/>
-          </a:fillRef>
-          <a:effectRef idx="2">
-            <a:schemeClr val="accent1"/>
-          </a:effectRef>
-          <a:fontRef idx="minor">
-            <a:schemeClr val="lt1"/>
-          </a:fontRef>
-        </p:style>
-        <p:txBody>
-          <a:bodyPr rtlCol="0" anchor="ctr"/>
-          <a:lstStyle/>
-          <a:p>
-            <a:pPr algn="ctr"/>
-          </a:p>
-        </p:txBody>
-      </p:sp>
-      <p:sp>
-        <p:nvSpPr>
-          <p:cNvPr id="13" name="TextBox 12"/>
-          <p:cNvSpPr txBox="1"/>
-          <p:nvPr/>
-        </p:nvSpPr>
-        <p:spPr>
-          <a:xfrm>
-            <a:off x="777240" y="3831336"/>
-            <a:ext cx="10774375" cy="822959"/>
-          </a:xfrm>
-          <a:prstGeom prst="rect">
-            <a:avLst/>
-          </a:prstGeom>
-          <a:noFill/>
-        </p:spPr>
-        <p:txBody>
-          <a:bodyPr wrap="square">
-            <a:spAutoFit/>
-          </a:bodyPr>
-          <a:lstStyle/>
-          <a:p>
-            <a:r>
-              <a:rPr sz="1200" b="1" i="0">
-                <a:solidFill>
-                  <a:srgbClr val="A02030"/>
-                </a:solidFill>
-                <a:latin typeface="Calibri"/>
-              </a:rPr>
-              <a:t>Atención</a:t>
-            </a:r>
-          </a:p>
-          <a:p>
-            <a:pPr>
-              <a:spcBef>
-                <a:spcPts val="400"/>
-              </a:spcBef>
-            </a:pPr>
-            <a:r>
-              <a:rPr sz="1400" b="0" i="0">
-                <a:solidFill>
-                  <a:srgbClr val="333333"/>
-                </a:solidFill>
-                <a:latin typeface="Calibri"/>
-              </a:rPr>
-              <a:t>Sin cloud de pago ni instalaciones obligatorias de hipervisores/Docker Desktop.</a:t>
-            </a:r>
-          </a:p>
-        </p:txBody>
-      </p:sp>
-      <p:sp>
-        <p:nvSpPr>
-          <p:cNvPr id="14" name="TextBox 13"/>
-          <p:cNvSpPr txBox="1"/>
-          <p:nvPr/>
-        </p:nvSpPr>
-        <p:spPr>
-          <a:xfrm>
-            <a:off x="11185855" y="6473952"/>
-            <a:ext cx="640080" cy="274320"/>
-          </a:xfrm>
-          <a:prstGeom prst="rect">
-            <a:avLst/>
-          </a:prstGeom>
-          <a:noFill/>
-        </p:spPr>
-        <p:txBody>
-          <a:bodyPr wrap="square">
-            <a:spAutoFit/>
-          </a:bodyPr>
-          <a:lstStyle/>
-          <a:p>
-            <a:pPr algn="r"/>
-            <a:r>
-              <a:rPr sz="1100" b="0" i="0">
-                <a:solidFill>
-                  <a:srgbClr val="666666"/>
-                </a:solidFill>
-                <a:latin typeface="Calibri"/>
-              </a:rPr>
-              <a:t>13</a:t>
-            </a:r>
-          </a:p>
-        </p:txBody>
-      </p:sp>
-    </p:spTree>
-  </p:cSld>
-  <p:clrMapOvr>
-    <a:masterClrMapping/>
-  </p:clrMapOvr>
-</p:sld>
-</file>
-
-<file path=ppt/slides/slide14.xml><?xml version="1.0" encoding="utf-8"?>
-<p:sld xmlns:a="http://schemas.openxmlformats.org/drawingml/2006/main" xmlns:p="http://schemas.openxmlformats.org/presentationml/2006/main" xmlns:r="http://schemas.openxmlformats.org/officeDocument/2006/relationships">
-  <p:cSld>
-    <p:bg>
-      <p:bgPr>
-        <a:solidFill>
-          <a:srgbClr val="FFFFFF"/>
-        </a:solidFill>
-        <a:effectLst/>
-      </p:bgPr>
-    </p:bg>
-    <p:spTree>
-      <p:nvGrpSpPr>
-        <p:cNvPr id="1" name=""/>
-        <p:cNvGrpSpPr/>
-        <p:nvPr/>
-      </p:nvGrpSpPr>
-      <p:grpSpPr/>
-      <p:sp>
-        <p:nvSpPr>
-          <p:cNvPr id="2" name="Rectangle 1"/>
-          <p:cNvSpPr/>
-          <p:nvPr/>
-        </p:nvSpPr>
-        <p:spPr>
-          <a:xfrm>
-            <a:off x="0" y="0"/>
             <a:ext cx="12191695" cy="164592"/>
           </a:xfrm>
           <a:prstGeom prst="rect">
@@ -6740,7 +5436,7 @@
                 </a:solidFill>
                 <a:latin typeface="Calibri"/>
               </a:rPr>
-              <a:t>Evidencia: Ficha PI de 6 bloques + C4 Context en Mermaid renderizado en ExamLab (boceto previo en Excalidraw/draw.io)</a:t>
+              <a:t>Evidencia: Ficha PI de 5 bloques + C4 Context en Mermaid renderizado en ExamLab (boceto previo en Excalidraw/draw.io)</a:t>
             </a:r>
           </a:p>
           <a:p>
@@ -7357,7 +6053,7 @@
                 </a:solidFill>
                 <a:latin typeface="Calibri"/>
               </a:rPr>
-              <a:t>–   Distinguir nube vs on-prem y los bloques de una arquitectura cloud simple.</a:t>
+              <a:t>–   Cerrar el dominio del PI en una ficha de cinco bloques, con capacidades de negocio y no piezas tecnicas.</a:t>
             </a:r>
           </a:p>
           <a:p>
@@ -7629,7 +6325,7 @@
                 </a:solidFill>
                 <a:latin typeface="Calibri"/>
               </a:rPr>
-              <a:t> Ficha PI de 6 bloques + C4 Context en Mermaid renderizado en ExamLab (boceto previo en Excalidraw/draw.io)</a:t>
+              <a:t> Ficha PI de 5 bloques + C4 Context en Mermaid renderizado en ExamLab (boceto previo en Excalidraw/draw.io)</a:t>
             </a:r>
           </a:p>
           <a:p>
@@ -7704,7 +6400,7 @@
                 </a:solidFill>
                 <a:latin typeface="Calibri"/>
               </a:rPr>
-              <a:t>–   Ficha de 6 bloques: DOMINIO · PROBLEMA · CAPACIDADES · ACTORES · SISTEMAS EXTERNOS · FUERA DE ALCANCE.</a:t>
+              <a:t>–   Ficha de 5 bloques: DOMINIO · PROBLEMA · ACTORES (con sus sistemas externos) · CAPACIDADES · FUERA DE ALCANCE.</a:t>
             </a:r>
           </a:p>
           <a:p>
@@ -8223,397 +6919,21 @@
                 </a:solidFill>
                 <a:latin typeface="Calibri"/>
               </a:rPr>
-              <a:t>Nube vs on-premise para CloudLite</a:t>
-            </a:r>
-          </a:p>
-        </p:txBody>
-      </p:sp>
-      <p:graphicFrame>
-        <p:nvGraphicFramePr>
-          <p:cNvPr id="5" name="Table 4"/>
-          <p:cNvGraphicFramePr>
-            <a:graphicFrameLocks noGrp="1"/>
-          </p:cNvGraphicFramePr>
-          <p:nvPr/>
-        </p:nvGraphicFramePr>
-        <p:xfrm>
-          <a:off x="457200" y="1216152"/>
-          <a:ext cx="11704320" cy="1920240"/>
-        </p:xfrm>
-        <a:graphic>
-          <a:graphicData uri="http://schemas.openxmlformats.org/drawingml/2006/table">
-            <a:tbl>
-              <a:tblPr firstRow="1" bandRow="1">
-                <a:tableStyleId>{5C22544A-7EE6-4342-B048-85BDC9FD1C3A}</a:tableStyleId>
-              </a:tblPr>
-              <a:tblGrid>
-                <a:gridCol w="2377440"/>
-                <a:gridCol w="4663440"/>
-                <a:gridCol w="4663440"/>
-              </a:tblGrid>
-              <a:tr h="384048">
-                <a:tc>
-                  <a:txBody>
-                    <a:bodyPr/>
-                    <a:lstStyle/>
-                    <a:p>
-                      <a:r>
-                        <a:rPr sz="1200" b="1" i="0">
-                          <a:solidFill>
-                            <a:srgbClr val="FFFFFF"/>
-                          </a:solidFill>
-                          <a:latin typeface="Calibri"/>
-                        </a:rPr>
-                        <a:t>Criterio</a:t>
-                      </a:r>
-                    </a:p>
-                  </a:txBody>
-                  <a:tcPr>
-                    <a:solidFill>
-                      <a:srgbClr val="095292"/>
-                    </a:solidFill>
-                  </a:tcPr>
-                </a:tc>
-                <a:tc>
-                  <a:txBody>
-                    <a:bodyPr/>
-                    <a:lstStyle/>
-                    <a:p>
-                      <a:r>
-                        <a:rPr sz="1200" b="1" i="0">
-                          <a:solidFill>
-                            <a:srgbClr val="FFFFFF"/>
-                          </a:solidFill>
-                          <a:latin typeface="Calibri"/>
-                        </a:rPr>
-                        <a:t>On-premise en la UNIAJC</a:t>
-                      </a:r>
-                    </a:p>
-                  </a:txBody>
-                  <a:tcPr>
-                    <a:solidFill>
-                      <a:srgbClr val="095292"/>
-                    </a:solidFill>
-                  </a:tcPr>
-                </a:tc>
-                <a:tc>
-                  <a:txBody>
-                    <a:bodyPr/>
-                    <a:lstStyle/>
-                    <a:p>
-                      <a:r>
-                        <a:rPr sz="1200" b="1" i="0">
-                          <a:solidFill>
-                            <a:srgbClr val="FFFFFF"/>
-                          </a:solidFill>
-                          <a:latin typeface="Calibri"/>
-                        </a:rPr>
-                        <a:t>Nube</a:t>
-                      </a:r>
-                    </a:p>
-                  </a:txBody>
-                  <a:tcPr>
-                    <a:solidFill>
-                      <a:srgbClr val="095292"/>
-                    </a:solidFill>
-                  </a:tcPr>
-                </a:tc>
-              </a:tr>
-              <a:tr h="384048">
-                <a:tc>
-                  <a:txBody>
-                    <a:bodyPr/>
-                    <a:lstStyle/>
-                    <a:p>
-                      <a:r>
-                        <a:rPr sz="1100" b="1" i="0">
-                          <a:solidFill>
-                            <a:srgbClr val="333333"/>
-                          </a:solidFill>
-                          <a:latin typeface="Calibri"/>
-                        </a:rPr>
-                        <a:t>Inversión inicial</a:t>
-                      </a:r>
-                    </a:p>
-                  </a:txBody>
-                  <a:tcPr>
-                    <a:solidFill>
-                      <a:srgbClr val="FFFFFF"/>
-                    </a:solidFill>
-                  </a:tcPr>
-                </a:tc>
-                <a:tc>
-                  <a:txBody>
-                    <a:bodyPr/>
-                    <a:lstStyle/>
-                    <a:p>
-                      <a:r>
-                        <a:rPr sz="1100" b="0" i="0">
-                          <a:solidFill>
-                            <a:srgbClr val="333333"/>
-                          </a:solidFill>
-                          <a:latin typeface="Calibri"/>
-                        </a:rPr>
-                        <a:t>Comprar servidor, UPS y licencias antes de escribir una línea. Gasto de capital.</a:t>
-                      </a:r>
-                    </a:p>
-                  </a:txBody>
-                  <a:tcPr>
-                    <a:solidFill>
-                      <a:srgbClr val="FFFFFF"/>
-                    </a:solidFill>
-                  </a:tcPr>
-                </a:tc>
-                <a:tc>
-                  <a:txBody>
-                    <a:bodyPr/>
-                    <a:lstStyle/>
-                    <a:p>
-                      <a:r>
-                        <a:rPr sz="1100" b="0" i="0">
-                          <a:solidFill>
-                            <a:srgbClr val="333333"/>
-                          </a:solidFill>
-                          <a:latin typeface="Calibri"/>
-                        </a:rPr>
-                        <a:t>Casi cero para arrancar. Gasto operativo por lo que se consume.</a:t>
-                      </a:r>
-                    </a:p>
-                  </a:txBody>
-                  <a:tcPr>
-                    <a:solidFill>
-                      <a:srgbClr val="FFFFFF"/>
-                    </a:solidFill>
-                  </a:tcPr>
-                </a:tc>
-              </a:tr>
-              <a:tr h="384048">
-                <a:tc>
-                  <a:txBody>
-                    <a:bodyPr/>
-                    <a:lstStyle/>
-                    <a:p>
-                      <a:r>
-                        <a:rPr sz="1100" b="1" i="0">
-                          <a:solidFill>
-                            <a:srgbClr val="333333"/>
-                          </a:solidFill>
-                          <a:latin typeface="Calibri"/>
-                        </a:rPr>
-                        <a:t>Tiempo hasta la primera demo del PI</a:t>
-                      </a:r>
-                    </a:p>
-                  </a:txBody>
-                  <a:tcPr>
-                    <a:solidFill>
-                      <a:srgbClr val="F2F2F2"/>
-                    </a:solidFill>
-                  </a:tcPr>
-                </a:tc>
-                <a:tc>
-                  <a:txBody>
-                    <a:bodyPr/>
-                    <a:lstStyle/>
-                    <a:p>
-                      <a:r>
-                        <a:rPr sz="1100" b="0" i="0">
-                          <a:solidFill>
-                            <a:srgbClr val="333333"/>
-                          </a:solidFill>
-                          <a:latin typeface="Calibri"/>
-                        </a:rPr>
-                        <a:t>Semanas: cotizar, comprar, instalar y pedir permisos a TI.</a:t>
-                      </a:r>
-                    </a:p>
-                  </a:txBody>
-                  <a:tcPr>
-                    <a:solidFill>
-                      <a:srgbClr val="F2F2F2"/>
-                    </a:solidFill>
-                  </a:tcPr>
-                </a:tc>
-                <a:tc>
-                  <a:txBody>
-                    <a:bodyPr/>
-                    <a:lstStyle/>
-                    <a:p>
-                      <a:r>
-                        <a:rPr sz="1100" b="0" i="0">
-                          <a:solidFill>
-                            <a:srgbClr val="333333"/>
-                          </a:solidFill>
-                          <a:latin typeface="Calibri"/>
-                        </a:rPr>
-                        <a:t>Minutos: la capacidad se aprovisiona sin pedir permiso.</a:t>
-                      </a:r>
-                    </a:p>
-                  </a:txBody>
-                  <a:tcPr>
-                    <a:solidFill>
-                      <a:srgbClr val="F2F2F2"/>
-                    </a:solidFill>
-                  </a:tcPr>
-                </a:tc>
-              </a:tr>
-              <a:tr h="384048">
-                <a:tc>
-                  <a:txBody>
-                    <a:bodyPr/>
-                    <a:lstStyle/>
-                    <a:p>
-                      <a:r>
-                        <a:rPr sz="1100" b="1" i="0">
-                          <a:solidFill>
-                            <a:srgbClr val="333333"/>
-                          </a:solidFill>
-                          <a:latin typeface="Calibri"/>
-                        </a:rPr>
-                        <a:t>Quién opera SO, parches y respaldos</a:t>
-                      </a:r>
-                    </a:p>
-                  </a:txBody>
-                  <a:tcPr>
-                    <a:solidFill>
-                      <a:srgbClr val="FFFFFF"/>
-                    </a:solidFill>
-                  </a:tcPr>
-                </a:tc>
-                <a:tc>
-                  <a:txBody>
-                    <a:bodyPr/>
-                    <a:lstStyle/>
-                    <a:p>
-                      <a:r>
-                        <a:rPr sz="1100" b="0" i="0">
-                          <a:solidFill>
-                            <a:srgbClr val="333333"/>
-                          </a:solidFill>
-                          <a:latin typeface="Calibri"/>
-                        </a:rPr>
-                        <a:t>Usted o la oficina de TI de la universidad, todo el semestre.</a:t>
-                      </a:r>
-                    </a:p>
-                  </a:txBody>
-                  <a:tcPr>
-                    <a:solidFill>
-                      <a:srgbClr val="FFFFFF"/>
-                    </a:solidFill>
-                  </a:tcPr>
-                </a:tc>
-                <a:tc>
-                  <a:txBody>
-                    <a:bodyPr/>
-                    <a:lstStyle/>
-                    <a:p>
-                      <a:r>
-                        <a:rPr sz="1100" b="0" i="0">
-                          <a:solidFill>
-                            <a:srgbClr val="333333"/>
-                          </a:solidFill>
-                          <a:latin typeface="Calibri"/>
-                        </a:rPr>
-                        <a:t>Se reparte con el proveedor; cuánto, lo decide el modelo de servicio (Clase 2).</a:t>
-                      </a:r>
-                    </a:p>
-                  </a:txBody>
-                  <a:tcPr>
-                    <a:solidFill>
-                      <a:srgbClr val="FFFFFF"/>
-                    </a:solidFill>
-                  </a:tcPr>
-                </a:tc>
-              </a:tr>
-              <a:tr h="384048">
-                <a:tc>
-                  <a:txBody>
-                    <a:bodyPr/>
-                    <a:lstStyle/>
-                    <a:p>
-                      <a:r>
-                        <a:rPr sz="1100" b="1" i="0">
-                          <a:solidFill>
-                            <a:srgbClr val="333333"/>
-                          </a:solidFill>
-                          <a:latin typeface="Calibri"/>
-                        </a:rPr>
-                        <a:t>El día del pico</a:t>
-                      </a:r>
-                      <a:r>
-                        <a:rPr sz="1100" b="0" i="0">
-                          <a:solidFill>
-                            <a:srgbClr val="333333"/>
-                          </a:solidFill>
-                          <a:latin typeface="Calibri"/>
-                        </a:rPr>
-                        <a:t> (inicio de semestre)</a:t>
-                      </a:r>
-                    </a:p>
-                  </a:txBody>
-                  <a:tcPr>
-                    <a:solidFill>
-                      <a:srgbClr val="F2F2F2"/>
-                    </a:solidFill>
-                  </a:tcPr>
-                </a:tc>
-                <a:tc>
-                  <a:txBody>
-                    <a:bodyPr/>
-                    <a:lstStyle/>
-                    <a:p>
-                      <a:r>
-                        <a:rPr sz="1100" b="0" i="0">
-                          <a:solidFill>
-                            <a:srgbClr val="333333"/>
-                          </a:solidFill>
-                          <a:latin typeface="Calibri"/>
-                        </a:rPr>
-                        <a:t>La capacidad es fija: si se queda corta, AgendaU se cae y no hay nada que hacer ese día.</a:t>
-                      </a:r>
-                    </a:p>
-                  </a:txBody>
-                  <a:tcPr>
-                    <a:solidFill>
-                      <a:srgbClr val="F2F2F2"/>
-                    </a:solidFill>
-                  </a:tcPr>
-                </a:tc>
-                <a:tc>
-                  <a:txBody>
-                    <a:bodyPr/>
-                    <a:lstStyle/>
-                    <a:p>
-                      <a:r>
-                        <a:rPr sz="1100" b="0" i="0">
-                          <a:solidFill>
-                            <a:srgbClr val="333333"/>
-                          </a:solidFill>
-                          <a:latin typeface="Calibri"/>
-                        </a:rPr>
-                        <a:t>Elasticidad: sube mientras dura el pico y luego se devuelve.</a:t>
-                      </a:r>
-                    </a:p>
-                  </a:txBody>
-                  <a:tcPr>
-                    <a:solidFill>
-                      <a:srgbClr val="F2F2F2"/>
-                    </a:solidFill>
-                  </a:tcPr>
-                </a:tc>
-              </a:tr>
-            </a:tbl>
-          </a:graphicData>
-        </a:graphic>
-      </p:graphicFrame>
-      <p:sp>
-        <p:nvSpPr>
-          <p:cNvPr id="6" name="TextBox 5"/>
+              <a:t>CloudLite App — el hilo conductor</a:t>
+            </a:r>
+          </a:p>
+        </p:txBody>
+      </p:sp>
+      <p:sp>
+        <p:nvSpPr>
+          <p:cNvPr id="5" name="TextBox 4"/>
           <p:cNvSpPr txBox="1"/>
           <p:nvPr/>
         </p:nvSpPr>
         <p:spPr>
           <a:xfrm>
-            <a:off x="457200" y="3794760"/>
-            <a:ext cx="11277295" cy="457200"/>
+            <a:off x="457200" y="1170432"/>
+            <a:ext cx="11277295" cy="5230368"/>
           </a:xfrm>
           <a:prstGeom prst="rect">
             <a:avLst/>
@@ -8626,21 +6946,92 @@
           </a:bodyPr>
           <a:lstStyle/>
           <a:p>
-            <a:r>
-              <a:rPr sz="1100" b="0" i="1">
-                <a:solidFill>
-                  <a:srgbClr val="666666"/>
-                </a:solidFill>
-                <a:latin typeface="Calibri"/>
-              </a:rPr>
-              <a:t>Resuelta sobre el dominio de referencia AgendaU. Usted conserva los 4 criterios y rehace las celdas con SU dominio: es la pregunta 4 del taller. Hoy se decide nube u on-premise; el modelo de servicio (IaaS/PaaS/SaaS) es la Clase 2.</a:t>
-            </a:r>
-          </a:p>
-        </p:txBody>
-      </p:sp>
-      <p:sp>
-        <p:nvSpPr>
-          <p:cNvPr id="7" name="TextBox 6"/>
+            <a:pPr>
+              <a:spcAft>
+                <a:spcPts val="800"/>
+              </a:spcAft>
+            </a:pPr>
+            <a:r>
+              <a:rPr sz="1600" b="0" i="0">
+                <a:solidFill>
+                  <a:srgbClr val="333333"/>
+                </a:solidFill>
+                <a:latin typeface="Calibri"/>
+              </a:rPr>
+              <a:t>–   Aplicación web/API de un dominio realista (citas, academia, inventario liviano…).</a:t>
+            </a:r>
+          </a:p>
+          <a:p>
+            <a:pPr>
+              <a:spcAft>
+                <a:spcPts val="800"/>
+              </a:spcAft>
+            </a:pPr>
+            <a:r>
+              <a:rPr sz="1600" b="0" i="0">
+                <a:solidFill>
+                  <a:srgbClr val="333333"/>
+                </a:solidFill>
+                <a:latin typeface="Calibri"/>
+              </a:rPr>
+              <a:t>–   Entregables del semestre: diagramas + contenedor (lab) + CI/CD conceptual + informe.</a:t>
+            </a:r>
+          </a:p>
+          <a:p>
+            <a:pPr>
+              <a:spcAft>
+                <a:spcPts val="800"/>
+              </a:spcAft>
+            </a:pPr>
+            <a:r>
+              <a:rPr sz="1600" b="0" i="0">
+                <a:solidFill>
+                  <a:srgbClr val="333333"/>
+                </a:solidFill>
+                <a:latin typeface="Calibri"/>
+              </a:rPr>
+              <a:t>–   Hoy solo: </a:t>
+            </a:r>
+            <a:r>
+              <a:rPr sz="1600" b="1" i="0">
+                <a:solidFill>
+                  <a:srgbClr val="333333"/>
+                </a:solidFill>
+                <a:latin typeface="Calibri"/>
+              </a:rPr>
+              <a:t>problema + capacidades + boceto de contexto</a:t>
+            </a:r>
+            <a:r>
+              <a:rPr sz="1600" b="0" i="0">
+                <a:solidFill>
+                  <a:srgbClr val="333333"/>
+                </a:solidFill>
+                <a:latin typeface="Calibri"/>
+              </a:rPr>
+              <a:t>.</a:t>
+            </a:r>
+          </a:p>
+          <a:p>
+            <a:pPr>
+              <a:spcAft>
+                <a:spcPts val="800"/>
+              </a:spcAft>
+            </a:pPr>
+            <a:r>
+              <a:rPr sz="1600" b="0" i="0">
+                <a:solidFill>
+                  <a:srgbClr val="333333"/>
+                </a:solidFill>
+                <a:latin typeface="Calibri"/>
+              </a:rPr>
+              <a:t>–   Sin AWS/GCP/Oracle: draw.io, Killercoda, GitHub Actions.</a:t>
+            </a:r>
+          </a:p>
+        </p:txBody>
+      </p:sp>
+      <p:sp>
+        <p:nvSpPr>
+          <p:cNvPr id="6" name="TextBox 5"/>
           <p:cNvSpPr txBox="1"/>
           <p:nvPr/>
         </p:nvSpPr>
@@ -8814,7 +7205,7 @@
                 </a:solidFill>
                 <a:latin typeface="Calibri"/>
               </a:rPr>
-              <a:t>CloudLite App — el hilo conductor</a:t>
+              <a:t>De dominio a arquitectura (mini-método)</a:t>
             </a:r>
           </a:p>
         </p:txBody>
@@ -8853,7 +7244,7 @@
                 </a:solidFill>
                 <a:latin typeface="Calibri"/>
               </a:rPr>
-              <a:t>–   Aplicación web/API de un dominio realista (citas, academia, inventario liviano…).</a:t>
+              <a:t>–   1) Actor y problema. 2) Capacidades. 3) Contenedores lógicos. 4) Datos. 5) Riesgos.</a:t>
             </a:r>
           </a:p>
           <a:p>
@@ -8869,7 +7260,7 @@
                 </a:solidFill>
                 <a:latin typeface="Calibri"/>
               </a:rPr>
-              <a:t>–   Entregables del semestre: diagramas + contenedor (lab) + CI/CD conceptual + informe.</a:t>
+              <a:t>–   Ejemplo: *AgendaU* — estudiantes reservan tutoría; API + auth + agenda + notificaciones.</a:t>
             </a:r>
           </a:p>
           <a:p>
@@ -8885,7 +7276,7 @@
                 </a:solidFill>
                 <a:latin typeface="Calibri"/>
               </a:rPr>
-              <a:t>–   Hoy solo: </a:t>
+              <a:t>–   Pregunta de diseño: ¿qué es </a:t>
             </a:r>
             <a:r>
               <a:rPr sz="1600" b="1" i="0">
@@ -8894,7 +7285,7 @@
                 </a:solidFill>
                 <a:latin typeface="Calibri"/>
               </a:rPr>
-              <a:t>problema + capacidades + boceto de contexto</a:t>
+              <a:t>núcleo</a:t>
             </a:r>
             <a:r>
               <a:rPr sz="1600" b="0" i="0">
@@ -8903,7 +7294,7 @@
                 </a:solidFill>
                 <a:latin typeface="Calibri"/>
               </a:rPr>
-              <a:t>.</a:t>
+              <a:t> vs satélite?</a:t>
             </a:r>
           </a:p>
           <a:p>
@@ -8919,7 +7310,7 @@
                 </a:solidFill>
                 <a:latin typeface="Calibri"/>
               </a:rPr>
-              <a:t>–   Sin AWS/GCP/Oracle: draw.io, Killercoda, GitHub Actions.</a:t>
+              <a:t>–   Salida: diagrama C4 Context (sistema + actores externos).</a:t>
             </a:r>
           </a:p>
         </p:txBody>
@@ -8994,7 +7385,7 @@
         <p:spPr>
           <a:xfrm>
             <a:off x="0" y="0"/>
-            <a:ext cx="12191695" cy="960120"/>
+            <a:ext cx="12191695" cy="1170432"/>
           </a:xfrm>
           <a:prstGeom prst="rect">
             <a:avLst/>
@@ -9036,7 +7427,7 @@
         </p:nvSpPr>
         <p:spPr>
           <a:xfrm>
-            <a:off x="0" y="960120"/>
+            <a:off x="0" y="1170432"/>
             <a:ext cx="12191695" cy="41148"/>
           </a:xfrm>
           <a:prstGeom prst="rect">
@@ -9080,7 +7471,7 @@
         <p:spPr>
           <a:xfrm>
             <a:off x="457200" y="164592"/>
-            <a:ext cx="11277295" cy="502920"/>
+            <a:ext cx="11277295" cy="384048"/>
           </a:xfrm>
           <a:prstGeom prst="rect">
             <a:avLst/>
@@ -9100,7 +7491,7 @@
                 </a:solidFill>
                 <a:latin typeface="Calibri"/>
               </a:rPr>
-              <a:t>De dominio a arquitectura (mini-método)</a:t>
+              <a:t>Ejemplo de diagrama C4 — nivel Context</a:t>
             </a:r>
           </a:p>
         </p:txBody>
@@ -9113,8 +7504,8 @@
         </p:nvSpPr>
         <p:spPr>
           <a:xfrm>
-            <a:off x="457200" y="1170432"/>
-            <a:ext cx="11277295" cy="5230368"/>
+            <a:off x="457200" y="566928"/>
+            <a:ext cx="11277295" cy="411480"/>
           </a:xfrm>
           <a:prstGeom prst="rect">
             <a:avLst/>
@@ -9127,92 +7518,362 @@
           </a:bodyPr>
           <a:lstStyle/>
           <a:p>
-            <a:pPr>
-              <a:spcAft>
-                <a:spcPts val="800"/>
-              </a:spcAft>
-            </a:pPr>
-            <a:r>
-              <a:rPr sz="1600" b="0" i="0">
-                <a:solidFill>
-                  <a:srgbClr val="333333"/>
-                </a:solidFill>
-                <a:latin typeface="Calibri"/>
-              </a:rPr>
-              <a:t>–   1) Actor y problema. 2) Capacidades. 3) Contenedores lógicos. 4) Datos. 5) Riesgos.</a:t>
-            </a:r>
-          </a:p>
-          <a:p>
-            <a:pPr>
-              <a:spcAft>
-                <a:spcPts val="800"/>
-              </a:spcAft>
-            </a:pPr>
-            <a:r>
-              <a:rPr sz="1600" b="0" i="0">
-                <a:solidFill>
-                  <a:srgbClr val="333333"/>
-                </a:solidFill>
-                <a:latin typeface="Calibri"/>
-              </a:rPr>
-              <a:t>–   Ejemplo: *AgendaU* — estudiantes reservan tutoría; API + auth + agenda + notificaciones.</a:t>
-            </a:r>
-          </a:p>
-          <a:p>
-            <a:pPr>
-              <a:spcAft>
-                <a:spcPts val="800"/>
-              </a:spcAft>
-            </a:pPr>
-            <a:r>
-              <a:rPr sz="1600" b="0" i="0">
-                <a:solidFill>
-                  <a:srgbClr val="333333"/>
-                </a:solidFill>
-                <a:latin typeface="Calibri"/>
-              </a:rPr>
-              <a:t>–   Pregunta de diseño: ¿qué es </a:t>
-            </a:r>
-            <a:r>
-              <a:rPr sz="1600" b="1" i="0">
-                <a:solidFill>
-                  <a:srgbClr val="333333"/>
-                </a:solidFill>
-                <a:latin typeface="Calibri"/>
-              </a:rPr>
-              <a:t>núcleo</a:t>
-            </a:r>
-            <a:r>
-              <a:rPr sz="1600" b="0" i="0">
-                <a:solidFill>
-                  <a:srgbClr val="333333"/>
-                </a:solidFill>
-                <a:latin typeface="Calibri"/>
-              </a:rPr>
-              <a:t> vs satélite?</a:t>
-            </a:r>
-          </a:p>
-          <a:p>
-            <a:pPr>
-              <a:spcAft>
-                <a:spcPts val="800"/>
-              </a:spcAft>
-            </a:pPr>
-            <a:r>
-              <a:rPr sz="1600" b="0" i="0">
-                <a:solidFill>
-                  <a:srgbClr val="333333"/>
-                </a:solidFill>
-                <a:latin typeface="Calibri"/>
-              </a:rPr>
-              <a:t>–   Salida: diagrama C4 Context (sistema + actores externos).</a:t>
-            </a:r>
-          </a:p>
-        </p:txBody>
-      </p:sp>
-      <p:sp>
-        <p:nvSpPr>
-          <p:cNvPr id="6" name="TextBox 5"/>
+            <a:r>
+              <a:rPr sz="1400" b="0" i="0">
+                <a:solidFill>
+                  <a:srgbClr val="B8D8EE"/>
+                </a:solidFill>
+                <a:latin typeface="Calibri"/>
+              </a:rPr>
+              <a:t>Reemplacen actor / sistema / externo por su propio dominio CloudLite</a:t>
+            </a:r>
+          </a:p>
+        </p:txBody>
+      </p:sp>
+      <p:sp>
+        <p:nvSpPr>
+          <p:cNvPr id="6" name="Rounded Rectangle 5"/>
+          <p:cNvSpPr/>
+          <p:nvPr/>
+        </p:nvSpPr>
+        <p:spPr>
+          <a:xfrm>
+            <a:off x="822960" y="2743200"/>
+            <a:ext cx="2103120" cy="1097280"/>
+          </a:xfrm>
+          <a:prstGeom prst="roundRect">
+            <a:avLst>
+              <a:gd name="adj" fmla="val 12000"/>
+            </a:avLst>
+          </a:prstGeom>
+          <a:solidFill>
+            <a:srgbClr val="FFD000"/>
+          </a:solidFill>
+          <a:ln>
+            <a:noFill/>
+          </a:ln>
+        </p:spPr>
+        <p:style>
+          <a:lnRef idx="1">
+            <a:schemeClr val="accent1"/>
+          </a:lnRef>
+          <a:fillRef idx="3">
+            <a:schemeClr val="accent1"/>
+          </a:fillRef>
+          <a:effectRef idx="2">
+            <a:schemeClr val="accent1"/>
+          </a:effectRef>
+          <a:fontRef idx="minor">
+            <a:schemeClr val="lt1"/>
+          </a:fontRef>
+        </p:style>
+        <p:txBody>
+          <a:bodyPr rtlCol="0" anchor="ctr" wrap="square"/>
+          <a:lstStyle/>
+          <a:p>
+            <a:pPr algn="ctr"/>
+            <a:r>
+              <a:rPr sz="1300" b="1" i="0">
+                <a:solidFill>
+                  <a:srgbClr val="095292"/>
+                </a:solidFill>
+                <a:latin typeface="Calibri"/>
+              </a:rPr>
+              <a:t>Estudiante
+(actor)</a:t>
+            </a:r>
+          </a:p>
+        </p:txBody>
+      </p:sp>
+      <p:sp>
+        <p:nvSpPr>
+          <p:cNvPr id="7" name="Rounded Rectangle 6"/>
+          <p:cNvSpPr/>
+          <p:nvPr/>
+        </p:nvSpPr>
+        <p:spPr>
+          <a:xfrm>
+            <a:off x="4846320" y="2377440"/>
+            <a:ext cx="2834640" cy="1645920"/>
+          </a:xfrm>
+          <a:prstGeom prst="roundRect">
+            <a:avLst>
+              <a:gd name="adj" fmla="val 12000"/>
+            </a:avLst>
+          </a:prstGeom>
+          <a:solidFill>
+            <a:srgbClr val="095292"/>
+          </a:solidFill>
+          <a:ln>
+            <a:noFill/>
+          </a:ln>
+        </p:spPr>
+        <p:style>
+          <a:lnRef idx="1">
+            <a:schemeClr val="accent1"/>
+          </a:lnRef>
+          <a:fillRef idx="3">
+            <a:schemeClr val="accent1"/>
+          </a:fillRef>
+          <a:effectRef idx="2">
+            <a:schemeClr val="accent1"/>
+          </a:effectRef>
+          <a:fontRef idx="minor">
+            <a:schemeClr val="lt1"/>
+          </a:fontRef>
+        </p:style>
+        <p:txBody>
+          <a:bodyPr rtlCol="0" anchor="ctr" wrap="square"/>
+          <a:lstStyle/>
+          <a:p>
+            <a:pPr algn="ctr"/>
+            <a:r>
+              <a:rPr sz="1300" b="1" i="0">
+                <a:solidFill>
+                  <a:srgbClr val="FFFFFF"/>
+                </a:solidFill>
+                <a:latin typeface="Calibri"/>
+              </a:rPr>
+              <a:t>CloudLite App
+(el sistema = una sola caja)</a:t>
+            </a:r>
+          </a:p>
+        </p:txBody>
+      </p:sp>
+      <p:sp>
+        <p:nvSpPr>
+          <p:cNvPr id="8" name="Rounded Rectangle 7"/>
+          <p:cNvSpPr/>
+          <p:nvPr/>
+        </p:nvSpPr>
+        <p:spPr>
+          <a:xfrm>
+            <a:off x="9235440" y="2743200"/>
+            <a:ext cx="2286000" cy="1097280"/>
+          </a:xfrm>
+          <a:prstGeom prst="roundRect">
+            <a:avLst>
+              <a:gd name="adj" fmla="val 12000"/>
+            </a:avLst>
+          </a:prstGeom>
+          <a:solidFill>
+            <a:srgbClr val="269CCB"/>
+          </a:solidFill>
+          <a:ln>
+            <a:noFill/>
+          </a:ln>
+        </p:spPr>
+        <p:style>
+          <a:lnRef idx="1">
+            <a:schemeClr val="accent1"/>
+          </a:lnRef>
+          <a:fillRef idx="3">
+            <a:schemeClr val="accent1"/>
+          </a:fillRef>
+          <a:effectRef idx="2">
+            <a:schemeClr val="accent1"/>
+          </a:effectRef>
+          <a:fontRef idx="minor">
+            <a:schemeClr val="lt1"/>
+          </a:fontRef>
+        </p:style>
+        <p:txBody>
+          <a:bodyPr rtlCol="0" anchor="ctr" wrap="square"/>
+          <a:lstStyle/>
+          <a:p>
+            <a:pPr algn="ctr"/>
+            <a:r>
+              <a:rPr sz="1300" b="1" i="0">
+                <a:solidFill>
+                  <a:srgbClr val="FFFFFF"/>
+                </a:solidFill>
+                <a:latin typeface="Calibri"/>
+              </a:rPr>
+              <a:t>Sistema externo
+(ej. correo, auth)</a:t>
+            </a:r>
+          </a:p>
+        </p:txBody>
+      </p:sp>
+      <p:cxnSp>
+        <p:nvCxnSpPr>
+          <p:cNvPr id="9" name="Connector 8"/>
+          <p:cNvCxnSpPr/>
+          <p:nvPr/>
+        </p:nvCxnSpPr>
+        <p:spPr>
+          <a:xfrm flipV="1">
+            <a:off x="2926079" y="3200400"/>
+            <a:ext cx="1920241" cy="91440"/>
+          </a:xfrm>
+          <a:prstGeom prst="line">
+            <a:avLst/>
+          </a:prstGeom>
+          <a:ln w="22225">
+            <a:solidFill>
+              <a:srgbClr val="666666"/>
+            </a:solidFill>
+            <a:tailEnd type="triangle" w="med" len="med"/>
+          </a:ln>
+        </p:spPr>
+        <p:style>
+          <a:lnRef idx="2">
+            <a:schemeClr val="accent1"/>
+          </a:lnRef>
+          <a:fillRef idx="0">
+            <a:schemeClr val="accent1"/>
+          </a:fillRef>
+          <a:effectRef idx="1">
+            <a:schemeClr val="accent1"/>
+          </a:effectRef>
+          <a:fontRef idx="minor">
+            <a:schemeClr val="tx1"/>
+          </a:fontRef>
+        </p:style>
+      </p:cxnSp>
+      <p:sp>
+        <p:nvSpPr>
+          <p:cNvPr id="10" name="TextBox 9"/>
+          <p:cNvSpPr txBox="1"/>
+          <p:nvPr/>
+        </p:nvSpPr>
+        <p:spPr>
+          <a:xfrm>
+            <a:off x="3063240" y="3044951"/>
+            <a:ext cx="1645920" cy="320040"/>
+          </a:xfrm>
+          <a:prstGeom prst="rect">
+            <a:avLst/>
+          </a:prstGeom>
+          <a:noFill/>
+        </p:spPr>
+        <p:txBody>
+          <a:bodyPr wrap="square">
+            <a:spAutoFit/>
+          </a:bodyPr>
+          <a:lstStyle/>
+          <a:p>
+            <a:pPr algn="ctr"/>
+            <a:r>
+              <a:rPr sz="1000" b="0" i="1">
+                <a:solidFill>
+                  <a:srgbClr val="666666"/>
+                </a:solidFill>
+                <a:latin typeface="Calibri"/>
+              </a:rPr>
+              <a:t>usa</a:t>
+            </a:r>
+          </a:p>
+        </p:txBody>
+      </p:sp>
+      <p:cxnSp>
+        <p:nvCxnSpPr>
+          <p:cNvPr id="11" name="Connector 10"/>
+          <p:cNvCxnSpPr/>
+          <p:nvPr/>
+        </p:nvCxnSpPr>
+        <p:spPr>
+          <a:xfrm>
+            <a:off x="7680960" y="3200400"/>
+            <a:ext cx="1554480" cy="91440"/>
+          </a:xfrm>
+          <a:prstGeom prst="line">
+            <a:avLst/>
+          </a:prstGeom>
+          <a:ln w="22225">
+            <a:solidFill>
+              <a:srgbClr val="666666"/>
+            </a:solidFill>
+            <a:tailEnd type="triangle" w="med" len="med"/>
+          </a:ln>
+        </p:spPr>
+        <p:style>
+          <a:lnRef idx="2">
+            <a:schemeClr val="accent1"/>
+          </a:lnRef>
+          <a:fillRef idx="0">
+            <a:schemeClr val="accent1"/>
+          </a:fillRef>
+          <a:effectRef idx="1">
+            <a:schemeClr val="accent1"/>
+          </a:effectRef>
+          <a:fontRef idx="minor">
+            <a:schemeClr val="tx1"/>
+          </a:fontRef>
+        </p:style>
+      </p:cxnSp>
+      <p:sp>
+        <p:nvSpPr>
+          <p:cNvPr id="12" name="TextBox 11"/>
+          <p:cNvSpPr txBox="1"/>
+          <p:nvPr/>
+        </p:nvSpPr>
+        <p:spPr>
+          <a:xfrm>
+            <a:off x="7635240" y="3044951"/>
+            <a:ext cx="1645920" cy="320040"/>
+          </a:xfrm>
+          <a:prstGeom prst="rect">
+            <a:avLst/>
+          </a:prstGeom>
+          <a:noFill/>
+        </p:spPr>
+        <p:txBody>
+          <a:bodyPr wrap="square">
+            <a:spAutoFit/>
+          </a:bodyPr>
+          <a:lstStyle/>
+          <a:p>
+            <a:pPr algn="ctr"/>
+            <a:r>
+              <a:rPr sz="1000" b="0" i="1">
+                <a:solidFill>
+                  <a:srgbClr val="666666"/>
+                </a:solidFill>
+                <a:latin typeface="Calibri"/>
+              </a:rPr>
+              <a:t>notifica / consume</a:t>
+            </a:r>
+          </a:p>
+        </p:txBody>
+      </p:sp>
+      <p:sp>
+        <p:nvSpPr>
+          <p:cNvPr id="13" name="TextBox 12"/>
+          <p:cNvSpPr txBox="1"/>
+          <p:nvPr/>
+        </p:nvSpPr>
+        <p:spPr>
+          <a:xfrm>
+            <a:off x="457200" y="6263640"/>
+            <a:ext cx="11277295" cy="411480"/>
+          </a:xfrm>
+          <a:prstGeom prst="rect">
+            <a:avLst/>
+          </a:prstGeom>
+          <a:noFill/>
+        </p:spPr>
+        <p:txBody>
+          <a:bodyPr wrap="square">
+            <a:spAutoFit/>
+          </a:bodyPr>
+          <a:lstStyle/>
+          <a:p>
+            <a:r>
+              <a:rPr sz="1100" b="0" i="1">
+                <a:solidFill>
+                  <a:srgbClr val="666666"/>
+                </a:solidFill>
+                <a:latin typeface="Calibri"/>
+              </a:rPr>
+              <a:t>Nivel Context: el sistema es UNA caja (sin abrir por dentro). Actores a la izquierda, sistemas externos a la derecha. El interior se dibuja en Clase 4 (Containers).</a:t>
+            </a:r>
+          </a:p>
+        </p:txBody>
+      </p:sp>
+      <p:sp>
+        <p:nvSpPr>
+          <p:cNvPr id="14" name="TextBox 13"/>
           <p:cNvSpPr txBox="1"/>
           <p:nvPr/>
         </p:nvSpPr>
@@ -9386,7 +8047,7 @@
                 </a:solidFill>
                 <a:latin typeface="Calibri"/>
               </a:rPr>
-              <a:t>Ejemplo de diagrama C4 — nivel Context</a:t>
+              <a:t>Herramientas de hoy</a:t>
             </a:r>
           </a:p>
         </p:txBody>
@@ -9420,7 +8081,7 @@
                 </a:solidFill>
                 <a:latin typeface="Calibri"/>
               </a:rPr>
-              <a:t>Reemplacen actor / sistema / externo por su propio dominio CloudLite</a:t>
+              <a:t>Gratis · navegador o free tier · sin cuenta de pago</a:t>
             </a:r>
           </a:p>
         </p:txBody>
@@ -9433,13 +8094,99 @@
         </p:nvSpPr>
         <p:spPr>
           <a:xfrm>
-            <a:off x="822960" y="2743200"/>
-            <a:ext cx="2103120" cy="1097280"/>
+            <a:off x="457200" y="1591056"/>
+            <a:ext cx="3624986" cy="2299716"/>
           </a:xfrm>
           <a:prstGeom prst="roundRect">
             <a:avLst>
               <a:gd name="adj" fmla="val 12000"/>
             </a:avLst>
+          </a:prstGeom>
+          <a:solidFill>
+            <a:srgbClr val="F2F2F2"/>
+          </a:solidFill>
+          <a:ln>
+            <a:noFill/>
+          </a:ln>
+        </p:spPr>
+        <p:style>
+          <a:lnRef idx="1">
+            <a:schemeClr val="accent1"/>
+          </a:lnRef>
+          <a:fillRef idx="3">
+            <a:schemeClr val="accent1"/>
+          </a:fillRef>
+          <a:effectRef idx="2">
+            <a:schemeClr val="accent1"/>
+          </a:effectRef>
+          <a:fontRef idx="minor">
+            <a:schemeClr val="lt1"/>
+          </a:fontRef>
+        </p:style>
+        <p:txBody>
+          <a:bodyPr rtlCol="0" anchor="ctr"/>
+          <a:lstStyle/>
+          <a:p>
+            <a:pPr algn="ctr"/>
+          </a:p>
+        </p:txBody>
+      </p:sp>
+      <p:sp>
+        <p:nvSpPr>
+          <p:cNvPr id="7" name="Rectangle 6"/>
+          <p:cNvSpPr/>
+          <p:nvPr/>
+        </p:nvSpPr>
+        <p:spPr>
+          <a:xfrm>
+            <a:off x="457200" y="1591056"/>
+            <a:ext cx="3624986" cy="64008"/>
+          </a:xfrm>
+          <a:prstGeom prst="rect">
+            <a:avLst/>
+          </a:prstGeom>
+          <a:solidFill>
+            <a:srgbClr val="095292"/>
+          </a:solidFill>
+          <a:ln>
+            <a:noFill/>
+          </a:ln>
+        </p:spPr>
+        <p:style>
+          <a:lnRef idx="1">
+            <a:schemeClr val="accent1"/>
+          </a:lnRef>
+          <a:fillRef idx="3">
+            <a:schemeClr val="accent1"/>
+          </a:fillRef>
+          <a:effectRef idx="2">
+            <a:schemeClr val="accent1"/>
+          </a:effectRef>
+          <a:fontRef idx="minor">
+            <a:schemeClr val="lt1"/>
+          </a:fontRef>
+        </p:style>
+        <p:txBody>
+          <a:bodyPr rtlCol="0" anchor="ctr"/>
+          <a:lstStyle/>
+          <a:p>
+            <a:pPr algn="ctr"/>
+          </a:p>
+        </p:txBody>
+      </p:sp>
+      <p:sp>
+        <p:nvSpPr>
+          <p:cNvPr id="8" name="Rectangle 7"/>
+          <p:cNvSpPr/>
+          <p:nvPr/>
+        </p:nvSpPr>
+        <p:spPr>
+          <a:xfrm>
+            <a:off x="457200" y="1655064"/>
+            <a:ext cx="3624986" cy="27432"/>
+          </a:xfrm>
+          <a:prstGeom prst="rect">
+            <a:avLst/>
           </a:prstGeom>
           <a:solidFill>
             <a:srgbClr val="FFD000"/>
@@ -9463,10 +8210,58 @@
           </a:fontRef>
         </p:style>
         <p:txBody>
-          <a:bodyPr rtlCol="0" anchor="ctr" wrap="square"/>
+          <a:bodyPr rtlCol="0" anchor="ctr"/>
           <a:lstStyle/>
           <a:p>
             <a:pPr algn="ctr"/>
+          </a:p>
+        </p:txBody>
+      </p:sp>
+      <p:pic>
+        <p:nvPicPr>
+          <p:cNvPr id="9" name="Picture 8" descr="padlet.png"/>
+          <p:cNvPicPr>
+            <a:picLocks noChangeAspect="1"/>
+          </p:cNvPicPr>
+          <p:nvPr/>
+        </p:nvPicPr>
+        <p:blipFill>
+          <a:blip r:embed="rId2"/>
+          <a:stretch>
+            <a:fillRect/>
+          </a:stretch>
+        </p:blipFill>
+        <p:spPr>
+          <a:xfrm>
+            <a:off x="1659331" y="1847087"/>
+            <a:ext cx="1220724" cy="1220724"/>
+          </a:xfrm>
+          <a:prstGeom prst="rect">
+            <a:avLst/>
+          </a:prstGeom>
+        </p:spPr>
+      </p:pic>
+      <p:sp>
+        <p:nvSpPr>
+          <p:cNvPr id="10" name="TextBox 9"/>
+          <p:cNvSpPr txBox="1"/>
+          <p:nvPr/>
+        </p:nvSpPr>
+        <p:spPr>
+          <a:xfrm>
+            <a:off x="530352" y="3159251"/>
+            <a:ext cx="3478682" cy="621792"/>
+          </a:xfrm>
+          <a:prstGeom prst="rect">
+            <a:avLst/>
+          </a:prstGeom>
+          <a:noFill/>
+        </p:spPr>
+        <p:txBody>
+          <a:bodyPr wrap="square" anchor="t"/>
+          <a:lstStyle/>
+          <a:p>
+            <a:pPr algn="ctr"/>
             <a:r>
               <a:rPr sz="1300" b="1" i="0">
                 <a:solidFill>
@@ -9474,27 +8269,85 @@
                 </a:solidFill>
                 <a:latin typeface="Calibri"/>
               </a:rPr>
-              <a:t>Estudiante
-(actor)</a:t>
-            </a:r>
-          </a:p>
-        </p:txBody>
-      </p:sp>
-      <p:sp>
-        <p:nvSpPr>
-          <p:cNvPr id="7" name="Rounded Rectangle 6"/>
+              <a:t>Padlet</a:t>
+            </a:r>
+          </a:p>
+          <a:p>
+            <a:pPr algn="ctr">
+              <a:spcBef>
+                <a:spcPts val="200"/>
+              </a:spcBef>
+            </a:pPr>
+            <a:r>
+              <a:rPr sz="1000" b="0" i="0">
+                <a:solidFill>
+                  <a:srgbClr val="666666"/>
+                </a:solidFill>
+                <a:latin typeface="Calibri"/>
+              </a:rPr>
+              <a:t>Rompehielos</a:t>
+            </a:r>
+          </a:p>
+        </p:txBody>
+      </p:sp>
+      <p:sp>
+        <p:nvSpPr>
+          <p:cNvPr id="11" name="Rounded Rectangle 10"/>
           <p:cNvSpPr/>
           <p:nvPr/>
         </p:nvSpPr>
         <p:spPr>
           <a:xfrm>
-            <a:off x="4846320" y="2377440"/>
-            <a:ext cx="2834640" cy="1645920"/>
+            <a:off x="4283354" y="1591056"/>
+            <a:ext cx="3624986" cy="2299716"/>
           </a:xfrm>
           <a:prstGeom prst="roundRect">
             <a:avLst>
               <a:gd name="adj" fmla="val 12000"/>
             </a:avLst>
+          </a:prstGeom>
+          <a:solidFill>
+            <a:srgbClr val="F2F2F2"/>
+          </a:solidFill>
+          <a:ln>
+            <a:noFill/>
+          </a:ln>
+        </p:spPr>
+        <p:style>
+          <a:lnRef idx="1">
+            <a:schemeClr val="accent1"/>
+          </a:lnRef>
+          <a:fillRef idx="3">
+            <a:schemeClr val="accent1"/>
+          </a:fillRef>
+          <a:effectRef idx="2">
+            <a:schemeClr val="accent1"/>
+          </a:effectRef>
+          <a:fontRef idx="minor">
+            <a:schemeClr val="lt1"/>
+          </a:fontRef>
+        </p:style>
+        <p:txBody>
+          <a:bodyPr rtlCol="0" anchor="ctr"/>
+          <a:lstStyle/>
+          <a:p>
+            <a:pPr algn="ctr"/>
+          </a:p>
+        </p:txBody>
+      </p:sp>
+      <p:sp>
+        <p:nvSpPr>
+          <p:cNvPr id="12" name="Rectangle 11"/>
+          <p:cNvSpPr/>
+          <p:nvPr/>
+        </p:nvSpPr>
+        <p:spPr>
+          <a:xfrm>
+            <a:off x="4283354" y="1591056"/>
+            <a:ext cx="3624986" cy="64008"/>
+          </a:xfrm>
+          <a:prstGeom prst="rect">
+            <a:avLst/>
           </a:prstGeom>
           <a:solidFill>
             <a:srgbClr val="095292"/>
@@ -9518,41 +8371,29 @@
           </a:fontRef>
         </p:style>
         <p:txBody>
-          <a:bodyPr rtlCol="0" anchor="ctr" wrap="square"/>
+          <a:bodyPr rtlCol="0" anchor="ctr"/>
           <a:lstStyle/>
           <a:p>
             <a:pPr algn="ctr"/>
-            <a:r>
-              <a:rPr sz="1300" b="1" i="0">
-                <a:solidFill>
-                  <a:srgbClr val="FFFFFF"/>
-                </a:solidFill>
-                <a:latin typeface="Calibri"/>
-              </a:rPr>
-              <a:t>CloudLite App
-(el sistema = una sola caja)</a:t>
-            </a:r>
-          </a:p>
-        </p:txBody>
-      </p:sp>
-      <p:sp>
-        <p:nvSpPr>
-          <p:cNvPr id="8" name="Rounded Rectangle 7"/>
+          </a:p>
+        </p:txBody>
+      </p:sp>
+      <p:sp>
+        <p:nvSpPr>
+          <p:cNvPr id="13" name="Rectangle 12"/>
           <p:cNvSpPr/>
           <p:nvPr/>
         </p:nvSpPr>
         <p:spPr>
           <a:xfrm>
-            <a:off x="9235440" y="2743200"/>
-            <a:ext cx="2286000" cy="1097280"/>
-          </a:xfrm>
-          <a:prstGeom prst="roundRect">
-            <a:avLst>
-              <a:gd name="adj" fmla="val 12000"/>
-            </a:avLst>
+            <a:off x="4283354" y="1655064"/>
+            <a:ext cx="3624986" cy="27432"/>
+          </a:xfrm>
+          <a:prstGeom prst="rect">
+            <a:avLst/>
           </a:prstGeom>
           <a:solidFill>
-            <a:srgbClr val="269CCB"/>
+            <a:srgbClr val="FFD000"/>
           </a:solidFill>
           <a:ln>
             <a:noFill/>
@@ -9573,140 +8414,251 @@
           </a:fontRef>
         </p:style>
         <p:txBody>
-          <a:bodyPr rtlCol="0" anchor="ctr" wrap="square"/>
+          <a:bodyPr rtlCol="0" anchor="ctr"/>
           <a:lstStyle/>
           <a:p>
             <a:pPr algn="ctr"/>
+          </a:p>
+        </p:txBody>
+      </p:sp>
+      <p:pic>
+        <p:nvPicPr>
+          <p:cNvPr id="14" name="Picture 13" descr="excalidraw.png"/>
+          <p:cNvPicPr>
+            <a:picLocks noChangeAspect="1"/>
+          </p:cNvPicPr>
+          <p:nvPr/>
+        </p:nvPicPr>
+        <p:blipFill>
+          <a:blip r:embed="rId3"/>
+          <a:stretch>
+            <a:fillRect/>
+          </a:stretch>
+        </p:blipFill>
+        <p:spPr>
+          <a:xfrm>
+            <a:off x="5485485" y="1847087"/>
+            <a:ext cx="1220724" cy="1220724"/>
+          </a:xfrm>
+          <a:prstGeom prst="rect">
+            <a:avLst/>
+          </a:prstGeom>
+        </p:spPr>
+      </p:pic>
+      <p:sp>
+        <p:nvSpPr>
+          <p:cNvPr id="15" name="TextBox 14"/>
+          <p:cNvSpPr txBox="1"/>
+          <p:nvPr/>
+        </p:nvSpPr>
+        <p:spPr>
+          <a:xfrm>
+            <a:off x="4356506" y="3159251"/>
+            <a:ext cx="3478682" cy="621792"/>
+          </a:xfrm>
+          <a:prstGeom prst="rect">
+            <a:avLst/>
+          </a:prstGeom>
+          <a:noFill/>
+        </p:spPr>
+        <p:txBody>
+          <a:bodyPr wrap="square" anchor="t"/>
+          <a:lstStyle/>
+          <a:p>
+            <a:pPr algn="ctr"/>
             <a:r>
               <a:rPr sz="1300" b="1" i="0">
                 <a:solidFill>
-                  <a:srgbClr val="FFFFFF"/>
-                </a:solidFill>
-                <a:latin typeface="Calibri"/>
-              </a:rPr>
-              <a:t>Sistema externo
-(ej. correo, auth)</a:t>
-            </a:r>
-          </a:p>
-        </p:txBody>
-      </p:sp>
-      <p:cxnSp>
-        <p:nvCxnSpPr>
-          <p:cNvPr id="9" name="Connector 8"/>
-          <p:cNvCxnSpPr/>
-          <p:nvPr/>
-        </p:nvCxnSpPr>
-        <p:spPr>
-          <a:xfrm flipV="1">
-            <a:off x="2926079" y="3200400"/>
-            <a:ext cx="1920241" cy="91440"/>
-          </a:xfrm>
-          <a:prstGeom prst="line">
-            <a:avLst/>
-          </a:prstGeom>
-          <a:ln w="22225">
-            <a:solidFill>
-              <a:srgbClr val="666666"/>
-            </a:solidFill>
-            <a:tailEnd type="triangle" w="med" len="med"/>
+                  <a:srgbClr val="095292"/>
+                </a:solidFill>
+                <a:latin typeface="Calibri"/>
+              </a:rPr>
+              <a:t>Excalidraw</a:t>
+            </a:r>
+          </a:p>
+          <a:p>
+            <a:pPr algn="ctr">
+              <a:spcBef>
+                <a:spcPts val="200"/>
+              </a:spcBef>
+            </a:pPr>
+            <a:r>
+              <a:rPr sz="1000" b="0" i="0">
+                <a:solidFill>
+                  <a:srgbClr val="666666"/>
+                </a:solidFill>
+                <a:latin typeface="Calibri"/>
+              </a:rPr>
+              <a:t>Boceto rapido</a:t>
+            </a:r>
+          </a:p>
+        </p:txBody>
+      </p:sp>
+      <p:sp>
+        <p:nvSpPr>
+          <p:cNvPr id="16" name="Rounded Rectangle 15"/>
+          <p:cNvSpPr/>
+          <p:nvPr/>
+        </p:nvSpPr>
+        <p:spPr>
+          <a:xfrm>
+            <a:off x="8109508" y="1591056"/>
+            <a:ext cx="3624986" cy="2299716"/>
+          </a:xfrm>
+          <a:prstGeom prst="roundRect">
+            <a:avLst>
+              <a:gd name="adj" fmla="val 12000"/>
+            </a:avLst>
+          </a:prstGeom>
+          <a:solidFill>
+            <a:srgbClr val="F2F2F2"/>
+          </a:solidFill>
+          <a:ln>
+            <a:noFill/>
           </a:ln>
         </p:spPr>
         <p:style>
-          <a:lnRef idx="2">
+          <a:lnRef idx="1">
             <a:schemeClr val="accent1"/>
           </a:lnRef>
-          <a:fillRef idx="0">
+          <a:fillRef idx="3">
             <a:schemeClr val="accent1"/>
           </a:fillRef>
-          <a:effectRef idx="1">
+          <a:effectRef idx="2">
             <a:schemeClr val="accent1"/>
           </a:effectRef>
           <a:fontRef idx="minor">
-            <a:schemeClr val="tx1"/>
+            <a:schemeClr val="lt1"/>
           </a:fontRef>
         </p:style>
-      </p:cxnSp>
-      <p:sp>
-        <p:nvSpPr>
-          <p:cNvPr id="10" name="TextBox 9"/>
-          <p:cNvSpPr txBox="1"/>
-          <p:nvPr/>
-        </p:nvSpPr>
-        <p:spPr>
-          <a:xfrm>
-            <a:off x="3063240" y="3044951"/>
-            <a:ext cx="1645920" cy="320040"/>
-          </a:xfrm>
-          <a:prstGeom prst="rect">
-            <a:avLst/>
-          </a:prstGeom>
-          <a:noFill/>
-        </p:spPr>
-        <p:txBody>
-          <a:bodyPr wrap="square">
-            <a:spAutoFit/>
-          </a:bodyPr>
+        <p:txBody>
+          <a:bodyPr rtlCol="0" anchor="ctr"/>
           <a:lstStyle/>
           <a:p>
             <a:pPr algn="ctr"/>
-            <a:r>
-              <a:rPr sz="1000" b="0" i="1">
-                <a:solidFill>
-                  <a:srgbClr val="666666"/>
-                </a:solidFill>
-                <a:latin typeface="Calibri"/>
-              </a:rPr>
-              <a:t>usa</a:t>
-            </a:r>
-          </a:p>
-        </p:txBody>
-      </p:sp>
-      <p:cxnSp>
-        <p:nvCxnSpPr>
-          <p:cNvPr id="11" name="Connector 10"/>
-          <p:cNvCxnSpPr/>
-          <p:nvPr/>
-        </p:nvCxnSpPr>
-        <p:spPr>
-          <a:xfrm>
-            <a:off x="7680960" y="3200400"/>
-            <a:ext cx="1554480" cy="91440"/>
-          </a:xfrm>
-          <a:prstGeom prst="line">
-            <a:avLst/>
-          </a:prstGeom>
-          <a:ln w="22225">
-            <a:solidFill>
-              <a:srgbClr val="666666"/>
-            </a:solidFill>
-            <a:tailEnd type="triangle" w="med" len="med"/>
+          </a:p>
+        </p:txBody>
+      </p:sp>
+      <p:sp>
+        <p:nvSpPr>
+          <p:cNvPr id="17" name="Rectangle 16"/>
+          <p:cNvSpPr/>
+          <p:nvPr/>
+        </p:nvSpPr>
+        <p:spPr>
+          <a:xfrm>
+            <a:off x="8109508" y="1591056"/>
+            <a:ext cx="3624986" cy="64008"/>
+          </a:xfrm>
+          <a:prstGeom prst="rect">
+            <a:avLst/>
+          </a:prstGeom>
+          <a:solidFill>
+            <a:srgbClr val="095292"/>
+          </a:solidFill>
+          <a:ln>
+            <a:noFill/>
           </a:ln>
         </p:spPr>
         <p:style>
-          <a:lnRef idx="2">
+          <a:lnRef idx="1">
             <a:schemeClr val="accent1"/>
           </a:lnRef>
-          <a:fillRef idx="0">
+          <a:fillRef idx="3">
             <a:schemeClr val="accent1"/>
           </a:fillRef>
-          <a:effectRef idx="1">
+          <a:effectRef idx="2">
             <a:schemeClr val="accent1"/>
           </a:effectRef>
           <a:fontRef idx="minor">
-            <a:schemeClr val="tx1"/>
+            <a:schemeClr val="lt1"/>
           </a:fontRef>
         </p:style>
-      </p:cxnSp>
-      <p:sp>
-        <p:nvSpPr>
-          <p:cNvPr id="12" name="TextBox 11"/>
+        <p:txBody>
+          <a:bodyPr rtlCol="0" anchor="ctr"/>
+          <a:lstStyle/>
+          <a:p>
+            <a:pPr algn="ctr"/>
+          </a:p>
+        </p:txBody>
+      </p:sp>
+      <p:sp>
+        <p:nvSpPr>
+          <p:cNvPr id="18" name="Rectangle 17"/>
+          <p:cNvSpPr/>
+          <p:nvPr/>
+        </p:nvSpPr>
+        <p:spPr>
+          <a:xfrm>
+            <a:off x="8109508" y="1655064"/>
+            <a:ext cx="3624986" cy="27432"/>
+          </a:xfrm>
+          <a:prstGeom prst="rect">
+            <a:avLst/>
+          </a:prstGeom>
+          <a:solidFill>
+            <a:srgbClr val="FFD000"/>
+          </a:solidFill>
+          <a:ln>
+            <a:noFill/>
+          </a:ln>
+        </p:spPr>
+        <p:style>
+          <a:lnRef idx="1">
+            <a:schemeClr val="accent1"/>
+          </a:lnRef>
+          <a:fillRef idx="3">
+            <a:schemeClr val="accent1"/>
+          </a:fillRef>
+          <a:effectRef idx="2">
+            <a:schemeClr val="accent1"/>
+          </a:effectRef>
+          <a:fontRef idx="minor">
+            <a:schemeClr val="lt1"/>
+          </a:fontRef>
+        </p:style>
+        <p:txBody>
+          <a:bodyPr rtlCol="0" anchor="ctr"/>
+          <a:lstStyle/>
+          <a:p>
+            <a:pPr algn="ctr"/>
+          </a:p>
+        </p:txBody>
+      </p:sp>
+      <p:pic>
+        <p:nvPicPr>
+          <p:cNvPr id="19" name="Picture 18" descr="drawio.png"/>
+          <p:cNvPicPr>
+            <a:picLocks noChangeAspect="1"/>
+          </p:cNvPicPr>
+          <p:nvPr/>
+        </p:nvPicPr>
+        <p:blipFill>
+          <a:blip r:embed="rId4"/>
+          <a:stretch>
+            <a:fillRect/>
+          </a:stretch>
+        </p:blipFill>
+        <p:spPr>
+          <a:xfrm>
+            <a:off x="9311640" y="1847087"/>
+            <a:ext cx="1220724" cy="1220724"/>
+          </a:xfrm>
+          <a:prstGeom prst="rect">
+            <a:avLst/>
+          </a:prstGeom>
+        </p:spPr>
+      </p:pic>
+      <p:sp>
+        <p:nvSpPr>
+          <p:cNvPr id="20" name="TextBox 19"/>
           <p:cNvSpPr txBox="1"/>
           <p:nvPr/>
         </p:nvSpPr>
         <p:spPr>
           <a:xfrm>
-            <a:off x="7635240" y="3044951"/>
-            <a:ext cx="1645920" cy="320040"/>
+            <a:off x="8182660" y="3159251"/>
+            <a:ext cx="3478682" cy="621792"/>
           </a:xfrm>
           <a:prstGeom prst="rect">
             <a:avLst/>
@@ -9714,34 +8666,203 @@
           <a:noFill/>
         </p:spPr>
         <p:txBody>
-          <a:bodyPr wrap="square">
-            <a:spAutoFit/>
-          </a:bodyPr>
+          <a:bodyPr wrap="square" anchor="t"/>
           <a:lstStyle/>
           <a:p>
             <a:pPr algn="ctr"/>
             <a:r>
-              <a:rPr sz="1000" b="0" i="1">
+              <a:rPr sz="1300" b="1" i="0">
+                <a:solidFill>
+                  <a:srgbClr val="095292"/>
+                </a:solidFill>
+                <a:latin typeface="Calibri"/>
+              </a:rPr>
+              <a:t>draw.io</a:t>
+            </a:r>
+          </a:p>
+          <a:p>
+            <a:pPr algn="ctr">
+              <a:spcBef>
+                <a:spcPts val="200"/>
+              </a:spcBef>
+            </a:pPr>
+            <a:r>
+              <a:rPr sz="1000" b="0" i="0">
                 <a:solidFill>
                   <a:srgbClr val="666666"/>
                 </a:solidFill>
                 <a:latin typeface="Calibri"/>
               </a:rPr>
-              <a:t>notifica / consume</a:t>
-            </a:r>
-          </a:p>
-        </p:txBody>
-      </p:sp>
-      <p:sp>
-        <p:nvSpPr>
-          <p:cNvPr id="13" name="TextBox 12"/>
+              <a:t>C4 Context</a:t>
+            </a:r>
+          </a:p>
+        </p:txBody>
+      </p:sp>
+      <p:sp>
+        <p:nvSpPr>
+          <p:cNvPr id="21" name="Rounded Rectangle 20"/>
+          <p:cNvSpPr/>
+          <p:nvPr/>
+        </p:nvSpPr>
+        <p:spPr>
+          <a:xfrm>
+            <a:off x="2370277" y="4055364"/>
+            <a:ext cx="3624986" cy="2299716"/>
+          </a:xfrm>
+          <a:prstGeom prst="roundRect">
+            <a:avLst>
+              <a:gd name="adj" fmla="val 12000"/>
+            </a:avLst>
+          </a:prstGeom>
+          <a:solidFill>
+            <a:srgbClr val="F2F2F2"/>
+          </a:solidFill>
+          <a:ln>
+            <a:noFill/>
+          </a:ln>
+        </p:spPr>
+        <p:style>
+          <a:lnRef idx="1">
+            <a:schemeClr val="accent1"/>
+          </a:lnRef>
+          <a:fillRef idx="3">
+            <a:schemeClr val="accent1"/>
+          </a:fillRef>
+          <a:effectRef idx="2">
+            <a:schemeClr val="accent1"/>
+          </a:effectRef>
+          <a:fontRef idx="minor">
+            <a:schemeClr val="lt1"/>
+          </a:fontRef>
+        </p:style>
+        <p:txBody>
+          <a:bodyPr rtlCol="0" anchor="ctr"/>
+          <a:lstStyle/>
+          <a:p>
+            <a:pPr algn="ctr"/>
+          </a:p>
+        </p:txBody>
+      </p:sp>
+      <p:sp>
+        <p:nvSpPr>
+          <p:cNvPr id="22" name="Rectangle 21"/>
+          <p:cNvSpPr/>
+          <p:nvPr/>
+        </p:nvSpPr>
+        <p:spPr>
+          <a:xfrm>
+            <a:off x="2370277" y="4055364"/>
+            <a:ext cx="3624986" cy="64008"/>
+          </a:xfrm>
+          <a:prstGeom prst="rect">
+            <a:avLst/>
+          </a:prstGeom>
+          <a:solidFill>
+            <a:srgbClr val="095292"/>
+          </a:solidFill>
+          <a:ln>
+            <a:noFill/>
+          </a:ln>
+        </p:spPr>
+        <p:style>
+          <a:lnRef idx="1">
+            <a:schemeClr val="accent1"/>
+          </a:lnRef>
+          <a:fillRef idx="3">
+            <a:schemeClr val="accent1"/>
+          </a:fillRef>
+          <a:effectRef idx="2">
+            <a:schemeClr val="accent1"/>
+          </a:effectRef>
+          <a:fontRef idx="minor">
+            <a:schemeClr val="lt1"/>
+          </a:fontRef>
+        </p:style>
+        <p:txBody>
+          <a:bodyPr rtlCol="0" anchor="ctr"/>
+          <a:lstStyle/>
+          <a:p>
+            <a:pPr algn="ctr"/>
+          </a:p>
+        </p:txBody>
+      </p:sp>
+      <p:sp>
+        <p:nvSpPr>
+          <p:cNvPr id="23" name="Rectangle 22"/>
+          <p:cNvSpPr/>
+          <p:nvPr/>
+        </p:nvSpPr>
+        <p:spPr>
+          <a:xfrm>
+            <a:off x="2370277" y="4119372"/>
+            <a:ext cx="3624986" cy="27432"/>
+          </a:xfrm>
+          <a:prstGeom prst="rect">
+            <a:avLst/>
+          </a:prstGeom>
+          <a:solidFill>
+            <a:srgbClr val="FFD000"/>
+          </a:solidFill>
+          <a:ln>
+            <a:noFill/>
+          </a:ln>
+        </p:spPr>
+        <p:style>
+          <a:lnRef idx="1">
+            <a:schemeClr val="accent1"/>
+          </a:lnRef>
+          <a:fillRef idx="3">
+            <a:schemeClr val="accent1"/>
+          </a:fillRef>
+          <a:effectRef idx="2">
+            <a:schemeClr val="accent1"/>
+          </a:effectRef>
+          <a:fontRef idx="minor">
+            <a:schemeClr val="lt1"/>
+          </a:fontRef>
+        </p:style>
+        <p:txBody>
+          <a:bodyPr rtlCol="0" anchor="ctr"/>
+          <a:lstStyle/>
+          <a:p>
+            <a:pPr algn="ctr"/>
+          </a:p>
+        </p:txBody>
+      </p:sp>
+      <p:pic>
+        <p:nvPicPr>
+          <p:cNvPr id="24" name="Picture 23" descr="mermaid.png"/>
+          <p:cNvPicPr>
+            <a:picLocks noChangeAspect="1"/>
+          </p:cNvPicPr>
+          <p:nvPr/>
+        </p:nvPicPr>
+        <p:blipFill>
+          <a:blip r:embed="rId5"/>
+          <a:stretch>
+            <a:fillRect/>
+          </a:stretch>
+        </p:blipFill>
+        <p:spPr>
+          <a:xfrm>
+            <a:off x="3572408" y="4311396"/>
+            <a:ext cx="1220724" cy="1220724"/>
+          </a:xfrm>
+          <a:prstGeom prst="rect">
+            <a:avLst/>
+          </a:prstGeom>
+        </p:spPr>
+      </p:pic>
+      <p:sp>
+        <p:nvSpPr>
+          <p:cNvPr id="25" name="TextBox 24"/>
           <p:cNvSpPr txBox="1"/>
           <p:nvPr/>
         </p:nvSpPr>
         <p:spPr>
           <a:xfrm>
-            <a:off x="457200" y="6263640"/>
-            <a:ext cx="11277295" cy="411480"/>
+            <a:off x="2443429" y="5623560"/>
+            <a:ext cx="3478682" cy="621792"/>
           </a:xfrm>
           <a:prstGeom prst="rect">
             <a:avLst/>
@@ -9749,26 +8870,245 @@
           <a:noFill/>
         </p:spPr>
         <p:txBody>
-          <a:bodyPr wrap="square">
-            <a:spAutoFit/>
-          </a:bodyPr>
-          <a:lstStyle/>
-          <a:p>
-            <a:r>
-              <a:rPr sz="1100" b="0" i="1">
+          <a:bodyPr wrap="square" anchor="t"/>
+          <a:lstStyle/>
+          <a:p>
+            <a:pPr algn="ctr"/>
+            <a:r>
+              <a:rPr sz="1300" b="1" i="0">
+                <a:solidFill>
+                  <a:srgbClr val="095292"/>
+                </a:solidFill>
+                <a:latin typeface="Calibri"/>
+              </a:rPr>
+              <a:t>Mermaid</a:t>
+            </a:r>
+          </a:p>
+          <a:p>
+            <a:pPr algn="ctr">
+              <a:spcBef>
+                <a:spcPts val="200"/>
+              </a:spcBef>
+            </a:pPr>
+            <a:r>
+              <a:rPr sz="1000" b="0" i="0">
                 <a:solidFill>
                   <a:srgbClr val="666666"/>
                 </a:solidFill>
                 <a:latin typeface="Calibri"/>
               </a:rPr>
-              <a:t>Nivel Context: el sistema es UNA caja (sin abrir por dentro). Actores a la izquierda, sistemas externos a la derecha. El interior se dibuja en Clase 4 (Containers).</a:t>
-            </a:r>
-          </a:p>
-        </p:txBody>
-      </p:sp>
-      <p:sp>
-        <p:nvSpPr>
-          <p:cNvPr id="14" name="TextBox 13"/>
+              <a:t>Codigo del diagrama</a:t>
+            </a:r>
+          </a:p>
+        </p:txBody>
+      </p:sp>
+      <p:sp>
+        <p:nvSpPr>
+          <p:cNvPr id="26" name="Rounded Rectangle 25"/>
+          <p:cNvSpPr/>
+          <p:nvPr/>
+        </p:nvSpPr>
+        <p:spPr>
+          <a:xfrm>
+            <a:off x="6196431" y="4055364"/>
+            <a:ext cx="3624986" cy="2299716"/>
+          </a:xfrm>
+          <a:prstGeom prst="roundRect">
+            <a:avLst>
+              <a:gd name="adj" fmla="val 12000"/>
+            </a:avLst>
+          </a:prstGeom>
+          <a:solidFill>
+            <a:srgbClr val="F2F2F2"/>
+          </a:solidFill>
+          <a:ln>
+            <a:noFill/>
+          </a:ln>
+        </p:spPr>
+        <p:style>
+          <a:lnRef idx="1">
+            <a:schemeClr val="accent1"/>
+          </a:lnRef>
+          <a:fillRef idx="3">
+            <a:schemeClr val="accent1"/>
+          </a:fillRef>
+          <a:effectRef idx="2">
+            <a:schemeClr val="accent1"/>
+          </a:effectRef>
+          <a:fontRef idx="minor">
+            <a:schemeClr val="lt1"/>
+          </a:fontRef>
+        </p:style>
+        <p:txBody>
+          <a:bodyPr rtlCol="0" anchor="ctr"/>
+          <a:lstStyle/>
+          <a:p>
+            <a:pPr algn="ctr"/>
+          </a:p>
+        </p:txBody>
+      </p:sp>
+      <p:sp>
+        <p:nvSpPr>
+          <p:cNvPr id="27" name="Rectangle 26"/>
+          <p:cNvSpPr/>
+          <p:nvPr/>
+        </p:nvSpPr>
+        <p:spPr>
+          <a:xfrm>
+            <a:off x="6196431" y="4055364"/>
+            <a:ext cx="3624986" cy="64008"/>
+          </a:xfrm>
+          <a:prstGeom prst="rect">
+            <a:avLst/>
+          </a:prstGeom>
+          <a:solidFill>
+            <a:srgbClr val="095292"/>
+          </a:solidFill>
+          <a:ln>
+            <a:noFill/>
+          </a:ln>
+        </p:spPr>
+        <p:style>
+          <a:lnRef idx="1">
+            <a:schemeClr val="accent1"/>
+          </a:lnRef>
+          <a:fillRef idx="3">
+            <a:schemeClr val="accent1"/>
+          </a:fillRef>
+          <a:effectRef idx="2">
+            <a:schemeClr val="accent1"/>
+          </a:effectRef>
+          <a:fontRef idx="minor">
+            <a:schemeClr val="lt1"/>
+          </a:fontRef>
+        </p:style>
+        <p:txBody>
+          <a:bodyPr rtlCol="0" anchor="ctr"/>
+          <a:lstStyle/>
+          <a:p>
+            <a:pPr algn="ctr"/>
+          </a:p>
+        </p:txBody>
+      </p:sp>
+      <p:sp>
+        <p:nvSpPr>
+          <p:cNvPr id="28" name="Rectangle 27"/>
+          <p:cNvSpPr/>
+          <p:nvPr/>
+        </p:nvSpPr>
+        <p:spPr>
+          <a:xfrm>
+            <a:off x="6196431" y="4119372"/>
+            <a:ext cx="3624986" cy="27432"/>
+          </a:xfrm>
+          <a:prstGeom prst="rect">
+            <a:avLst/>
+          </a:prstGeom>
+          <a:solidFill>
+            <a:srgbClr val="FFD000"/>
+          </a:solidFill>
+          <a:ln>
+            <a:noFill/>
+          </a:ln>
+        </p:spPr>
+        <p:style>
+          <a:lnRef idx="1">
+            <a:schemeClr val="accent1"/>
+          </a:lnRef>
+          <a:fillRef idx="3">
+            <a:schemeClr val="accent1"/>
+          </a:fillRef>
+          <a:effectRef idx="2">
+            <a:schemeClr val="accent1"/>
+          </a:effectRef>
+          <a:fontRef idx="minor">
+            <a:schemeClr val="lt1"/>
+          </a:fontRef>
+        </p:style>
+        <p:txBody>
+          <a:bodyPr rtlCol="0" anchor="ctr"/>
+          <a:lstStyle/>
+          <a:p>
+            <a:pPr algn="ctr"/>
+          </a:p>
+        </p:txBody>
+      </p:sp>
+      <p:pic>
+        <p:nvPicPr>
+          <p:cNvPr id="29" name="Picture 28" descr="examlab.png"/>
+          <p:cNvPicPr>
+            <a:picLocks noChangeAspect="1"/>
+          </p:cNvPicPr>
+          <p:nvPr/>
+        </p:nvPicPr>
+        <p:blipFill>
+          <a:blip r:embed="rId6"/>
+          <a:stretch>
+            <a:fillRect/>
+          </a:stretch>
+        </p:blipFill>
+        <p:spPr>
+          <a:xfrm>
+            <a:off x="7398562" y="4311396"/>
+            <a:ext cx="1220724" cy="1220724"/>
+          </a:xfrm>
+          <a:prstGeom prst="rect">
+            <a:avLst/>
+          </a:prstGeom>
+        </p:spPr>
+      </p:pic>
+      <p:sp>
+        <p:nvSpPr>
+          <p:cNvPr id="30" name="TextBox 29"/>
+          <p:cNvSpPr txBox="1"/>
+          <p:nvPr/>
+        </p:nvSpPr>
+        <p:spPr>
+          <a:xfrm>
+            <a:off x="6269583" y="5623560"/>
+            <a:ext cx="3478682" cy="621792"/>
+          </a:xfrm>
+          <a:prstGeom prst="rect">
+            <a:avLst/>
+          </a:prstGeom>
+          <a:noFill/>
+        </p:spPr>
+        <p:txBody>
+          <a:bodyPr wrap="square" anchor="t"/>
+          <a:lstStyle/>
+          <a:p>
+            <a:pPr algn="ctr"/>
+            <a:r>
+              <a:rPr sz="1300" b="1" i="0">
+                <a:solidFill>
+                  <a:srgbClr val="095292"/>
+                </a:solidFill>
+                <a:latin typeface="Calibri"/>
+              </a:rPr>
+              <a:t>ExamLab</a:t>
+            </a:r>
+          </a:p>
+          <a:p>
+            <a:pPr algn="ctr">
+              <a:spcBef>
+                <a:spcPts val="200"/>
+              </a:spcBef>
+            </a:pPr>
+            <a:r>
+              <a:rPr sz="1000" b="0" i="0">
+                <a:solidFill>
+                  <a:srgbClr val="666666"/>
+                </a:solidFill>
+                <a:latin typeface="Calibri"/>
+              </a:rPr>
+              <a:t>Donde se entrega</a:t>
+            </a:r>
+          </a:p>
+        </p:txBody>
+      </p:sp>
+      <p:sp>
+        <p:nvSpPr>
+          <p:cNvPr id="31" name="TextBox 30"/>
           <p:cNvSpPr txBox="1"/>
           <p:nvPr/>
         </p:nvSpPr>

--- a/Arquitectura de Sistemas Computacionales/Clases/Clase 1 - Introduccion a arquitecturas cloud/Presentacion.pptx
+++ b/Arquitectura de Sistemas Computacionales/Clases/Clase 1 - Introduccion a arquitecturas cloud/Presentacion.pptx
@@ -4591,7 +4591,7 @@
                 </a:solidFill>
                 <a:latin typeface="Calibri"/>
               </a:rPr>
-              <a:t> Paso 3: dibuje primero el boceto del C4 Context en Excalidraw o draw.io, que es donde se piensa el modelo, y despues pidale a una IA que lo traduzca a Mermaid («convierta este diagrama a Mermaid usando C4Context»); peguelo en la pregunta 3 y verifique en el diagrama ya renderizado que el sistema sea UNA sola caja, que no aparezca ninguna caja interna (eso es la pregunta 9) y que cada flecha lleve verbo y protocolo.</a:t>
+              <a:t> Paso 3: dibuje primero el boceto del C4 Context en Excalidraw o draw.io, que es donde se piensa el modelo, y despues pidale a una IA que lo traduzca a Mermaid («convierta este diagrama a Mermaid usando C4Context»); peguelo en la pregunta 3 y verifique en el diagrama ya renderizado que el sistema sea UNA sola caja, que no aparezca ninguna caja interna (eso es la pregunta 13) y que cada flecha lleve verbo y protocolo.</a:t>
             </a:r>
           </a:p>
           <a:p>
@@ -4625,7 +4625,7 @@
                 </a:solidFill>
                 <a:latin typeface="Calibri"/>
               </a:rPr>
-              <a:t> Paso 4: antes de cerrar la sesion, revise que los nombres de actores y de sistemas externos sean EXACTAMENTE los mismos en la ficha y en el diagrama; si no coinciden, no son el mismo sistema, y las preguntas 9 a 11 de esta actividad reutilizan esos nombres. Las preguntas 4 a 11 se resuelven en las Clases 2, 3 y 4: la actividad se entrega completa al cierre del Corte 1, no hoy.</a:t>
+              <a:t> Paso 4: elija en la pregunta 4 dos atributos de calidad de los cuatro del curso, escriba por que pesan en SU dominio y como los mediria con un numero y una unidad, y cierre diciendo cual sacrificaria y que gana a cambio; revise ademas que los nombres de actores y de sistemas externos sean EXACTAMENTE los mismos en la ficha y en el diagrama, porque las preguntas 12 a 15 los reutilizan. Las preguntas 5 a 15 se resuelven en las Clases 2, 3 y 4: la actividad se entrega completa al cierre del Corte 1, no hoy.</a:t>
             </a:r>
           </a:p>
         </p:txBody>

--- a/Arquitectura de Sistemas Computacionales/Clases/Clase 1 - Introduccion a arquitecturas cloud/Presentacion.pptx
+++ b/Arquitectura de Sistemas Computacionales/Clases/Clase 1 - Introduccion a arquitecturas cloud/Presentacion.pptx
@@ -4508,7 +4508,7 @@
               </a:spcAft>
             </a:pPr>
             <a:r>
-              <a:rPr sz="1600" b="1" i="0">
+              <a:rPr sz="1800" b="1" i="0">
                 <a:solidFill>
                   <a:srgbClr val="333333"/>
                 </a:solidFill>
@@ -4517,7 +4517,7 @@
               <a:t>1.</a:t>
             </a:r>
             <a:r>
-              <a:rPr sz="1600" b="0" i="0">
+              <a:rPr sz="1800" b="0" i="0">
                 <a:solidFill>
                   <a:srgbClr val="333333"/>
                 </a:solidFill>
@@ -4533,7 +4533,7 @@
               </a:spcAft>
             </a:pPr>
             <a:r>
-              <a:rPr sz="1600" b="0" i="0">
+              <a:rPr sz="1800" b="0" i="0">
                 <a:solidFill>
                   <a:srgbClr val="333333"/>
                 </a:solidFill>
@@ -4542,7 +4542,7 @@
               <a:t>–   </a:t>
             </a:r>
             <a:r>
-              <a:rPr sz="1600" b="1" i="0">
+              <a:rPr sz="1800" b="1" i="0">
                 <a:solidFill>
                   <a:srgbClr val="333333"/>
                 </a:solidFill>
@@ -4551,7 +4551,7 @@
               <a:t>2.</a:t>
             </a:r>
             <a:r>
-              <a:rPr sz="1600" b="0" i="0">
+              <a:rPr sz="1800" b="0" i="0">
                 <a:solidFill>
                   <a:srgbClr val="333333"/>
                 </a:solidFill>
@@ -4567,7 +4567,7 @@
               </a:spcAft>
             </a:pPr>
             <a:r>
-              <a:rPr sz="1600" b="0" i="0">
+              <a:rPr sz="1800" b="0" i="0">
                 <a:solidFill>
                   <a:srgbClr val="333333"/>
                 </a:solidFill>
@@ -4576,7 +4576,7 @@
               <a:t>–   </a:t>
             </a:r>
             <a:r>
-              <a:rPr sz="1600" b="1" i="0">
+              <a:rPr sz="1800" b="1" i="0">
                 <a:solidFill>
                   <a:srgbClr val="333333"/>
                 </a:solidFill>
@@ -4585,7 +4585,7 @@
               <a:t>3.</a:t>
             </a:r>
             <a:r>
-              <a:rPr sz="1600" b="0" i="0">
+              <a:rPr sz="1800" b="0" i="0">
                 <a:solidFill>
                   <a:srgbClr val="333333"/>
                 </a:solidFill>
@@ -4601,7 +4601,7 @@
               </a:spcAft>
             </a:pPr>
             <a:r>
-              <a:rPr sz="1600" b="0" i="0">
+              <a:rPr sz="1800" b="0" i="0">
                 <a:solidFill>
                   <a:srgbClr val="333333"/>
                 </a:solidFill>
@@ -4610,7 +4610,7 @@
               <a:t>–   </a:t>
             </a:r>
             <a:r>
-              <a:rPr sz="1600" b="1" i="0">
+              <a:rPr sz="1800" b="1" i="0">
                 <a:solidFill>
                   <a:srgbClr val="333333"/>
                 </a:solidFill>
@@ -4619,7 +4619,7 @@
               <a:t>4.</a:t>
             </a:r>
             <a:r>
-              <a:rPr sz="1600" b="0" i="0">
+              <a:rPr sz="1800" b="0" i="0">
                 <a:solidFill>
                   <a:srgbClr val="333333"/>
                 </a:solidFill>
@@ -5666,7 +5666,7 @@
               </a:spcAft>
             </a:pPr>
             <a:r>
-              <a:rPr sz="1600" b="0" i="0">
+              <a:rPr sz="2000" b="0" i="0">
                 <a:solidFill>
                   <a:srgbClr val="333333"/>
                 </a:solidFill>
@@ -5675,7 +5675,7 @@
               <a:t>–   </a:t>
             </a:r>
             <a:r>
-              <a:rPr sz="1600" b="1" i="0">
+              <a:rPr sz="2000" b="1" i="0">
                 <a:solidFill>
                   <a:srgbClr val="333333"/>
                 </a:solidFill>
@@ -5684,7 +5684,7 @@
               <a:t>0–10</a:t>
             </a:r>
             <a:r>
-              <a:rPr sz="1600" b="0" i="0">
+              <a:rPr sz="2000" b="0" i="0">
                 <a:solidFill>
                   <a:srgbClr val="333333"/>
                 </a:solidFill>
@@ -5700,7 +5700,7 @@
               </a:spcAft>
             </a:pPr>
             <a:r>
-              <a:rPr sz="1600" b="1" i="0">
+              <a:rPr sz="2000" b="1" i="0">
                 <a:solidFill>
                   <a:srgbClr val="333333"/>
                 </a:solidFill>
@@ -5709,7 +5709,7 @@
               <a:t>10–40</a:t>
             </a:r>
             <a:r>
-              <a:rPr sz="1600" b="0" i="0">
+              <a:rPr sz="2000" b="0" i="0">
                 <a:solidFill>
                   <a:srgbClr val="333333"/>
                 </a:solidFill>
@@ -5725,7 +5725,7 @@
               </a:spcAft>
             </a:pPr>
             <a:r>
-              <a:rPr sz="1600" b="0" i="0">
+              <a:rPr sz="2000" b="0" i="0">
                 <a:solidFill>
                   <a:srgbClr val="333333"/>
                 </a:solidFill>
@@ -5734,7 +5734,7 @@
               <a:t>–   </a:t>
             </a:r>
             <a:r>
-              <a:rPr sz="1600" b="1" i="0">
+              <a:rPr sz="2000" b="1" i="0">
                 <a:solidFill>
                   <a:srgbClr val="333333"/>
                 </a:solidFill>
@@ -5743,7 +5743,7 @@
               <a:t>40–100</a:t>
             </a:r>
             <a:r>
-              <a:rPr sz="1600" b="0" i="0">
+              <a:rPr sz="2000" b="0" i="0">
                 <a:solidFill>
                   <a:srgbClr val="333333"/>
                 </a:solidFill>
@@ -5759,7 +5759,7 @@
               </a:spcAft>
             </a:pPr>
             <a:r>
-              <a:rPr sz="1600" b="1" i="0">
+              <a:rPr sz="2000" b="1" i="0">
                 <a:solidFill>
                   <a:srgbClr val="333333"/>
                 </a:solidFill>
@@ -5768,7 +5768,7 @@
               <a:t>100–115</a:t>
             </a:r>
             <a:r>
-              <a:rPr sz="1600" b="0" i="0">
+              <a:rPr sz="2000" b="0" i="0">
                 <a:solidFill>
                   <a:srgbClr val="333333"/>
                 </a:solidFill>
@@ -5784,7 +5784,7 @@
               </a:spcAft>
             </a:pPr>
             <a:r>
-              <a:rPr sz="1600" b="1" i="0">
+              <a:rPr sz="2000" b="1" i="0">
                 <a:solidFill>
                   <a:srgbClr val="333333"/>
                 </a:solidFill>
@@ -5793,7 +5793,7 @@
               <a:t>115–120</a:t>
             </a:r>
             <a:r>
-              <a:rPr sz="1600" b="0" i="0">
+              <a:rPr sz="2000" b="0" i="0">
                 <a:solidFill>
                   <a:srgbClr val="333333"/>
                 </a:solidFill>
@@ -6013,7 +6013,7 @@
               </a:spcAft>
             </a:pPr>
             <a:r>
-              <a:rPr sz="1600" b="0" i="0">
+              <a:rPr sz="2000" b="0" i="0">
                 <a:solidFill>
                   <a:srgbClr val="333333"/>
                 </a:solidFill>
@@ -6022,7 +6022,7 @@
               <a:t>–   Ubicar el curso como diseño de arquitecturas cloud al servicio del </a:t>
             </a:r>
             <a:r>
-              <a:rPr sz="1600" b="1" i="0">
+              <a:rPr sz="2000" b="1" i="0">
                 <a:solidFill>
                   <a:srgbClr val="333333"/>
                 </a:solidFill>
@@ -6031,7 +6031,7 @@
               <a:t>PI CloudLite App</a:t>
             </a:r>
             <a:r>
-              <a:rPr sz="1600" b="0" i="0">
+              <a:rPr sz="2000" b="0" i="0">
                 <a:solidFill>
                   <a:srgbClr val="333333"/>
                 </a:solidFill>
@@ -6047,7 +6047,7 @@
               </a:spcAft>
             </a:pPr>
             <a:r>
-              <a:rPr sz="1600" b="0" i="0">
+              <a:rPr sz="2000" b="0" i="0">
                 <a:solidFill>
                   <a:srgbClr val="333333"/>
                 </a:solidFill>
@@ -6063,7 +6063,7 @@
               </a:spcAft>
             </a:pPr>
             <a:r>
-              <a:rPr sz="1600" b="0" i="0">
+              <a:rPr sz="2000" b="0" i="0">
                 <a:solidFill>
                   <a:srgbClr val="333333"/>
                 </a:solidFill>
@@ -6072,7 +6072,7 @@
               <a:t>–   Dejar el </a:t>
             </a:r>
             <a:r>
-              <a:rPr sz="1600" b="1" i="0">
+              <a:rPr sz="2000" b="1" i="0">
                 <a:solidFill>
                   <a:srgbClr val="333333"/>
                 </a:solidFill>
@@ -6081,7 +6081,7 @@
               <a:t>dominio y alcance</a:t>
             </a:r>
             <a:r>
-              <a:rPr sz="1600" b="0" i="0">
+              <a:rPr sz="2000" b="0" i="0">
                 <a:solidFill>
                   <a:srgbClr val="333333"/>
                 </a:solidFill>
@@ -6301,7 +6301,7 @@
               </a:spcAft>
             </a:pPr>
             <a:r>
-              <a:rPr sz="1600" b="0" i="0">
+              <a:rPr sz="2000" b="0" i="0">
                 <a:solidFill>
                   <a:srgbClr val="333333"/>
                 </a:solidFill>
@@ -6310,7 +6310,7 @@
               <a:t>–   </a:t>
             </a:r>
             <a:r>
-              <a:rPr sz="1600" b="1" i="0">
+              <a:rPr sz="2000" b="1" i="0">
                 <a:solidFill>
                   <a:srgbClr val="333333"/>
                 </a:solidFill>
@@ -6319,7 +6319,7 @@
               <a:t>Entregable:</a:t>
             </a:r>
             <a:r>
-              <a:rPr sz="1600" b="0" i="0">
+              <a:rPr sz="2000" b="0" i="0">
                 <a:solidFill>
                   <a:srgbClr val="333333"/>
                 </a:solidFill>
@@ -6335,7 +6335,7 @@
               </a:spcAft>
             </a:pPr>
             <a:r>
-              <a:rPr sz="1600" b="0" i="0">
+              <a:rPr sz="2000" b="0" i="0">
                 <a:solidFill>
                   <a:srgbClr val="333333"/>
                 </a:solidFill>
@@ -6344,7 +6344,7 @@
               <a:t>–   Herramienta: </a:t>
             </a:r>
             <a:r>
-              <a:rPr sz="1600" b="1" i="0">
+              <a:rPr sz="2000" b="1" i="0">
                 <a:solidFill>
                   <a:srgbClr val="333333"/>
                 </a:solidFill>
@@ -6360,7 +6360,7 @@
               </a:spcAft>
             </a:pPr>
             <a:r>
-              <a:rPr sz="1600" b="0" i="0">
+              <a:rPr sz="2000" b="0" i="0">
                 <a:solidFill>
                   <a:srgbClr val="333333"/>
                 </a:solidFill>
@@ -6369,7 +6369,7 @@
               <a:t>–   Todo lo que construyan hoy entra al </a:t>
             </a:r>
             <a:r>
-              <a:rPr sz="1600" b="1" i="0">
+              <a:rPr sz="2000" b="1" i="0">
                 <a:solidFill>
                   <a:srgbClr val="333333"/>
                 </a:solidFill>
@@ -6378,7 +6378,7 @@
               <a:t>informe/repo del PI</a:t>
             </a:r>
             <a:r>
-              <a:rPr sz="1600" b="0" i="0">
+              <a:rPr sz="2000" b="0" i="0">
                 <a:solidFill>
                   <a:srgbClr val="333333"/>
                 </a:solidFill>
@@ -6394,7 +6394,7 @@
               </a:spcAft>
             </a:pPr>
             <a:r>
-              <a:rPr sz="1600" b="0" i="0">
+              <a:rPr sz="2000" b="0" i="0">
                 <a:solidFill>
                   <a:srgbClr val="333333"/>
                 </a:solidFill>
@@ -6410,7 +6410,7 @@
               </a:spcAft>
             </a:pPr>
             <a:r>
-              <a:rPr sz="1600" b="0" i="0">
+              <a:rPr sz="2000" b="0" i="0">
                 <a:solidFill>
                   <a:srgbClr val="333333"/>
                 </a:solidFill>
@@ -6630,7 +6630,7 @@
               </a:spcAft>
             </a:pPr>
             <a:r>
-              <a:rPr sz="1600" b="0" i="0">
+              <a:rPr sz="2000" b="0" i="0">
                 <a:solidFill>
                   <a:srgbClr val="333333"/>
                 </a:solidFill>
@@ -6639,7 +6639,7 @@
               <a:t>–   </a:t>
             </a:r>
             <a:r>
-              <a:rPr sz="1600" b="1" i="0">
+              <a:rPr sz="2000" b="1" i="0">
                 <a:solidFill>
                   <a:srgbClr val="333333"/>
                 </a:solidFill>
@@ -6648,7 +6648,7 @@
               <a:t>Arquitectura</a:t>
             </a:r>
             <a:r>
-              <a:rPr sz="1600" b="0" i="0">
+              <a:rPr sz="2000" b="0" i="0">
                 <a:solidFill>
                   <a:srgbClr val="333333"/>
                 </a:solidFill>
@@ -6664,7 +6664,7 @@
               </a:spcAft>
             </a:pPr>
             <a:r>
-              <a:rPr sz="1600" b="0" i="0">
+              <a:rPr sz="2000" b="0" i="0">
                 <a:solidFill>
                   <a:srgbClr val="333333"/>
                 </a:solidFill>
@@ -6673,7 +6673,7 @@
               <a:t>–   Cloud: recursos </a:t>
             </a:r>
             <a:r>
-              <a:rPr sz="1600" b="1" i="0">
+              <a:rPr sz="2000" b="1" i="0">
                 <a:solidFill>
                   <a:srgbClr val="333333"/>
                 </a:solidFill>
@@ -6682,7 +6682,7 @@
               <a:t>bajo demanda</a:t>
             </a:r>
             <a:r>
-              <a:rPr sz="1600" b="0" i="0">
+              <a:rPr sz="2000" b="0" i="0">
                 <a:solidFill>
                   <a:srgbClr val="333333"/>
                 </a:solidFill>
@@ -6698,7 +6698,7 @@
               </a:spcAft>
             </a:pPr>
             <a:r>
-              <a:rPr sz="1600" b="0" i="0">
+              <a:rPr sz="2000" b="0" i="0">
                 <a:solidFill>
                   <a:srgbClr val="333333"/>
                 </a:solidFill>
@@ -6707,7 +6707,7 @@
               <a:t>–   Para CloudLite App: no «comprar servidores»; </a:t>
             </a:r>
             <a:r>
-              <a:rPr sz="1600" b="1" i="0">
+              <a:rPr sz="2000" b="1" i="0">
                 <a:solidFill>
                   <a:srgbClr val="333333"/>
                 </a:solidFill>
@@ -6716,7 +6716,7 @@
               <a:t>diseñar</a:t>
             </a:r>
             <a:r>
-              <a:rPr sz="1600" b="0" i="0">
+              <a:rPr sz="2000" b="0" i="0">
                 <a:solidFill>
                   <a:srgbClr val="333333"/>
                 </a:solidFill>
@@ -6732,7 +6732,7 @@
               </a:spcAft>
             </a:pPr>
             <a:r>
-              <a:rPr sz="1600" b="0" i="0">
+              <a:rPr sz="2000" b="0" i="0">
                 <a:solidFill>
                   <a:srgbClr val="333333"/>
                 </a:solidFill>
@@ -6952,7 +6952,7 @@
               </a:spcAft>
             </a:pPr>
             <a:r>
-              <a:rPr sz="1600" b="0" i="0">
+              <a:rPr sz="2000" b="0" i="0">
                 <a:solidFill>
                   <a:srgbClr val="333333"/>
                 </a:solidFill>
@@ -6968,7 +6968,7 @@
               </a:spcAft>
             </a:pPr>
             <a:r>
-              <a:rPr sz="1600" b="0" i="0">
+              <a:rPr sz="2000" b="0" i="0">
                 <a:solidFill>
                   <a:srgbClr val="333333"/>
                 </a:solidFill>
@@ -6984,7 +6984,7 @@
               </a:spcAft>
             </a:pPr>
             <a:r>
-              <a:rPr sz="1600" b="0" i="0">
+              <a:rPr sz="2000" b="0" i="0">
                 <a:solidFill>
                   <a:srgbClr val="333333"/>
                 </a:solidFill>
@@ -6993,7 +6993,7 @@
               <a:t>–   Hoy solo: </a:t>
             </a:r>
             <a:r>
-              <a:rPr sz="1600" b="1" i="0">
+              <a:rPr sz="2000" b="1" i="0">
                 <a:solidFill>
                   <a:srgbClr val="333333"/>
                 </a:solidFill>
@@ -7002,7 +7002,7 @@
               <a:t>problema + capacidades + boceto de contexto</a:t>
             </a:r>
             <a:r>
-              <a:rPr sz="1600" b="0" i="0">
+              <a:rPr sz="2000" b="0" i="0">
                 <a:solidFill>
                   <a:srgbClr val="333333"/>
                 </a:solidFill>
@@ -7018,7 +7018,7 @@
               </a:spcAft>
             </a:pPr>
             <a:r>
-              <a:rPr sz="1600" b="0" i="0">
+              <a:rPr sz="2000" b="0" i="0">
                 <a:solidFill>
                   <a:srgbClr val="333333"/>
                 </a:solidFill>
@@ -7238,7 +7238,7 @@
               </a:spcAft>
             </a:pPr>
             <a:r>
-              <a:rPr sz="1600" b="0" i="0">
+              <a:rPr sz="2000" b="0" i="0">
                 <a:solidFill>
                   <a:srgbClr val="333333"/>
                 </a:solidFill>
@@ -7254,7 +7254,7 @@
               </a:spcAft>
             </a:pPr>
             <a:r>
-              <a:rPr sz="1600" b="0" i="0">
+              <a:rPr sz="2000" b="0" i="0">
                 <a:solidFill>
                   <a:srgbClr val="333333"/>
                 </a:solidFill>
@@ -7270,7 +7270,7 @@
               </a:spcAft>
             </a:pPr>
             <a:r>
-              <a:rPr sz="1600" b="0" i="0">
+              <a:rPr sz="2000" b="0" i="0">
                 <a:solidFill>
                   <a:srgbClr val="333333"/>
                 </a:solidFill>
@@ -7279,7 +7279,7 @@
               <a:t>–   Pregunta de diseño: ¿qué es </a:t>
             </a:r>
             <a:r>
-              <a:rPr sz="1600" b="1" i="0">
+              <a:rPr sz="2000" b="1" i="0">
                 <a:solidFill>
                   <a:srgbClr val="333333"/>
                 </a:solidFill>
@@ -7288,7 +7288,7 @@
               <a:t>núcleo</a:t>
             </a:r>
             <a:r>
-              <a:rPr sz="1600" b="0" i="0">
+              <a:rPr sz="2000" b="0" i="0">
                 <a:solidFill>
                   <a:srgbClr val="333333"/>
                 </a:solidFill>
@@ -7304,7 +7304,7 @@
               </a:spcAft>
             </a:pPr>
             <a:r>
-              <a:rPr sz="1600" b="0" i="0">
+              <a:rPr sz="2000" b="0" i="0">
                 <a:solidFill>
                   <a:srgbClr val="333333"/>
                 </a:solidFill>

--- a/Arquitectura de Sistemas Computacionales/Clases/Clase 1 - Introduccion a arquitecturas cloud/Presentacion.pptx
+++ b/Arquitectura de Sistemas Computacionales/Clases/Clase 1 - Introduccion a arquitecturas cloud/Presentacion.pptx
@@ -3576,7 +3576,7 @@
                 </a:solidFill>
                 <a:latin typeface="Calibri"/>
               </a:rPr>
-              <a:t>Del boceto a ExamLab (diagrama)</a:t>
+              <a:t>Del boceto a la plataforma del curso (diagrama)</a:t>
             </a:r>
           </a:p>
         </p:txBody>
@@ -3610,7 +3610,7 @@
                 </a:solidFill>
                 <a:latin typeface="Calibri"/>
               </a:rPr>
-              <a:t>El diagrama se entrega como código Mermaid dentro de ExamLab, no como imagen</a:t>
+              <a:t>El diagrama se entrega como código Mermaid dentro de la plataforma del curso, no como imagen</a:t>
             </a:r>
           </a:p>
         </p:txBody>
@@ -4107,7 +4107,7 @@
                 </a:solidFill>
                 <a:latin typeface="Calibri"/>
               </a:rPr>
-              <a:t>Pega y renderiza en ExamLab</a:t>
+              <a:t>Pega y renderiza en la plataforma del curso</a:t>
             </a:r>
           </a:p>
           <a:p>
@@ -4123,7 +4123,7 @@
                 </a:solidFill>
                 <a:latin typeface="Calibri"/>
               </a:rPr>
-              <a:t>Pega ese codigo en la caja de texto de la pregunta y mira como lo dibuja la plataforma. Si no renderiza, corrige ahi mismo: lo que se califica es el diagrama renderizado dentro de ExamLab.</a:t>
+              <a:t>Pega ese codigo en la caja de texto de la pregunta y mira como lo dibuja la plataforma. Si no renderiza, corrige ahi mismo: lo que se califica es el diagrama renderizado dentro de la plataforma del curso.</a:t>
             </a:r>
           </a:p>
         </p:txBody>
@@ -4944,7 +4944,7 @@
                 </a:solidFill>
                 <a:latin typeface="Calibri"/>
               </a:rPr>
-              <a:t>Entregable: Ficha PI de 5 bloques + C4 Context en Mermaid renderizado en ExamLab (boceto previo en Excalidraw/draw.io)</a:t>
+              <a:t>Entregable: Ficha PI de 5 bloques + C4 Context en Mermaid renderizado en la plataforma del curso (boceto previo en Excalidraw/draw.io)</a:t>
             </a:r>
           </a:p>
         </p:txBody>
@@ -5082,7 +5082,7 @@
                 </a:solidFill>
                 <a:latin typeface="Calibri"/>
               </a:rPr>
-              <a:t>Subir evidencias al paquete CloudLite (Drive/repo) y a ExamLab (https://uniaj.examlab.workers.dev/) domingo 23:59.</a:t>
+              <a:t>Subir evidencias al paquete CloudLite (Drive/repo) y a la plataforma del curso en la fecha que indique el docente.</a:t>
             </a:r>
           </a:p>
         </p:txBody>
@@ -5436,7 +5436,7 @@
                 </a:solidFill>
                 <a:latin typeface="Calibri"/>
               </a:rPr>
-              <a:t>Evidencia: Ficha PI de 5 bloques + C4 Context en Mermaid renderizado en ExamLab (boceto previo en Excalidraw/draw.io)</a:t>
+              <a:t>Evidencia: Ficha PI de 5 bloques + C4 Context en Mermaid renderizado en la plataforma del curso (boceto previo en Excalidraw/draw.io)</a:t>
             </a:r>
           </a:p>
           <a:p>
@@ -5799,7 +5799,7 @@
                 </a:solidFill>
                 <a:latin typeface="Calibri"/>
               </a:rPr>
-              <a:t> Cierre: criterio de éxito + plazo domingo 23:59.</a:t>
+              <a:t> Cierre: criterio de éxito + plazo en la fecha que indique el docente.</a:t>
             </a:r>
           </a:p>
         </p:txBody>
@@ -6325,7 +6325,7 @@
                 </a:solidFill>
                 <a:latin typeface="Calibri"/>
               </a:rPr>
-              <a:t> Ficha PI de 5 bloques + C4 Context en Mermaid renderizado en ExamLab (boceto previo en Excalidraw/draw.io)</a:t>
+              <a:t> Ficha PI de 5 bloques + C4 Context en Mermaid renderizado en la plataforma del curso (boceto previo en Excalidraw/draw.io)</a:t>
             </a:r>
           </a:p>
           <a:p>
@@ -9085,7 +9085,7 @@
                 </a:solidFill>
                 <a:latin typeface="Calibri"/>
               </a:rPr>
-              <a:t>ExamLab</a:t>
+              <a:t>la plataforma del curso</a:t>
             </a:r>
           </a:p>
           <a:p>

--- a/Arquitectura de Sistemas Computacionales/Clases/Clase 1 - Introduccion a arquitecturas cloud/Presentacion.pptx
+++ b/Arquitectura de Sistemas Computacionales/Clases/Clase 1 - Introduccion a arquitecturas cloud/Presentacion.pptx
@@ -3470,7 +3470,7 @@
         <p:spPr>
           <a:xfrm>
             <a:off x="0" y="0"/>
-            <a:ext cx="12191695" cy="1170432"/>
+            <a:ext cx="12191695" cy="960120"/>
           </a:xfrm>
           <a:prstGeom prst="rect">
             <a:avLst/>
@@ -3512,7 +3512,7 @@
         </p:nvSpPr>
         <p:spPr>
           <a:xfrm>
-            <a:off x="0" y="1170432"/>
+            <a:off x="0" y="960120"/>
             <a:ext cx="12191695" cy="41148"/>
           </a:xfrm>
           <a:prstGeom prst="rect">
@@ -3556,7 +3556,7 @@
         <p:spPr>
           <a:xfrm>
             <a:off x="457200" y="164592"/>
-            <a:ext cx="11277295" cy="384048"/>
+            <a:ext cx="11277295" cy="502920"/>
           </a:xfrm>
           <a:prstGeom prst="rect">
             <a:avLst/>
@@ -3576,7 +3576,7 @@
                 </a:solidFill>
                 <a:latin typeface="Calibri"/>
               </a:rPr>
-              <a:t>Del boceto a la plataforma del curso (diagrama)</a:t>
+              <a:t>PI CloudLite — entregable de hoy</a:t>
             </a:r>
           </a:p>
         </p:txBody>
@@ -3589,8 +3589,8 @@
         </p:nvSpPr>
         <p:spPr>
           <a:xfrm>
-            <a:off x="457200" y="566928"/>
-            <a:ext cx="11277295" cy="411480"/>
+            <a:off x="457200" y="1170432"/>
+            <a:ext cx="11277295" cy="5230368"/>
           </a:xfrm>
           <a:prstGeom prst="rect">
             <a:avLst/>
@@ -3603,705 +3603,135 @@
           </a:bodyPr>
           <a:lstStyle/>
           <a:p>
-            <a:r>
-              <a:rPr sz="1400" b="0" i="0">
-                <a:solidFill>
-                  <a:srgbClr val="B8D8EE"/>
-                </a:solidFill>
-                <a:latin typeface="Calibri"/>
-              </a:rPr>
-              <a:t>El diagrama se entrega como código Mermaid dentro de la plataforma del curso, no como imagen</a:t>
-            </a:r>
-          </a:p>
-        </p:txBody>
-      </p:sp>
-      <p:sp>
-        <p:nvSpPr>
-          <p:cNvPr id="6" name="Rounded Rectangle 5"/>
-          <p:cNvSpPr/>
-          <p:nvPr/>
-        </p:nvSpPr>
-        <p:spPr>
-          <a:xfrm>
-            <a:off x="457200" y="1659636"/>
-            <a:ext cx="11277295" cy="1051560"/>
-          </a:xfrm>
-          <a:prstGeom prst="roundRect">
-            <a:avLst>
-              <a:gd name="adj" fmla="val 12000"/>
-            </a:avLst>
-          </a:prstGeom>
-          <a:solidFill>
-            <a:srgbClr val="F2F2F2"/>
-          </a:solidFill>
-          <a:ln>
-            <a:noFill/>
-          </a:ln>
-        </p:spPr>
-        <p:style>
-          <a:lnRef idx="1">
-            <a:schemeClr val="accent1"/>
-          </a:lnRef>
-          <a:fillRef idx="3">
-            <a:schemeClr val="accent1"/>
-          </a:fillRef>
-          <a:effectRef idx="2">
-            <a:schemeClr val="accent1"/>
-          </a:effectRef>
-          <a:fontRef idx="minor">
-            <a:schemeClr val="lt1"/>
-          </a:fontRef>
-        </p:style>
-        <p:txBody>
-          <a:bodyPr rtlCol="0" anchor="ctr"/>
-          <a:lstStyle/>
-          <a:p>
-            <a:pPr algn="ctr"/>
-          </a:p>
-        </p:txBody>
-      </p:sp>
-      <p:sp>
-        <p:nvSpPr>
-          <p:cNvPr id="7" name="Rounded Rectangle 6"/>
-          <p:cNvSpPr/>
-          <p:nvPr/>
-        </p:nvSpPr>
-        <p:spPr>
-          <a:xfrm>
-            <a:off x="594360" y="1965960"/>
-            <a:ext cx="438912" cy="438912"/>
-          </a:xfrm>
-          <a:prstGeom prst="roundRect">
-            <a:avLst>
-              <a:gd name="adj" fmla="val 12000"/>
-            </a:avLst>
-          </a:prstGeom>
-          <a:solidFill>
-            <a:srgbClr val="095292"/>
-          </a:solidFill>
-          <a:ln>
-            <a:noFill/>
-          </a:ln>
-        </p:spPr>
-        <p:style>
-          <a:lnRef idx="1">
-            <a:schemeClr val="accent1"/>
-          </a:lnRef>
-          <a:fillRef idx="3">
-            <a:schemeClr val="accent1"/>
-          </a:fillRef>
-          <a:effectRef idx="2">
-            <a:schemeClr val="accent1"/>
-          </a:effectRef>
-          <a:fontRef idx="minor">
-            <a:schemeClr val="lt1"/>
-          </a:fontRef>
-        </p:style>
-        <p:txBody>
-          <a:bodyPr rtlCol="0" anchor="ctr"/>
-          <a:lstStyle/>
-          <a:p>
-            <a:pPr algn="ctr"/>
-          </a:p>
-        </p:txBody>
-      </p:sp>
-      <p:sp>
-        <p:nvSpPr>
-          <p:cNvPr id="8" name="TextBox 7"/>
-          <p:cNvSpPr txBox="1"/>
-          <p:nvPr/>
-        </p:nvSpPr>
-        <p:spPr>
-          <a:xfrm>
-            <a:off x="594360" y="1965960"/>
-            <a:ext cx="438912" cy="438912"/>
-          </a:xfrm>
-          <a:prstGeom prst="rect">
-            <a:avLst/>
-          </a:prstGeom>
-          <a:noFill/>
-        </p:spPr>
-        <p:txBody>
-          <a:bodyPr wrap="square" anchor="ctr"/>
-          <a:lstStyle/>
-          <a:p>
-            <a:pPr algn="ctr"/>
-            <a:r>
-              <a:rPr sz="1600" b="1" i="0">
-                <a:solidFill>
-                  <a:srgbClr val="FFFFFF"/>
-                </a:solidFill>
-                <a:latin typeface="Calibri"/>
-              </a:rPr>
-              <a:t>1</a:t>
-            </a:r>
-          </a:p>
-        </p:txBody>
-      </p:sp>
-      <p:sp>
-        <p:nvSpPr>
-          <p:cNvPr id="9" name="TextBox 8"/>
-          <p:cNvSpPr txBox="1"/>
-          <p:nvPr/>
-        </p:nvSpPr>
-        <p:spPr>
-          <a:xfrm>
-            <a:off x="1188720" y="1751076"/>
-            <a:ext cx="10271455" cy="886968"/>
-          </a:xfrm>
-          <a:prstGeom prst="rect">
-            <a:avLst/>
-          </a:prstGeom>
-          <a:noFill/>
-        </p:spPr>
-        <p:txBody>
-          <a:bodyPr wrap="square" anchor="ctr"/>
-          <a:lstStyle/>
-          <a:p>
-            <a:r>
-              <a:rPr sz="1500" b="1" i="0">
-                <a:solidFill>
-                  <a:srgbClr val="095292"/>
-                </a:solidFill>
-                <a:latin typeface="Calibri"/>
-              </a:rPr>
-              <a:t>Disena visual</a:t>
-            </a:r>
-          </a:p>
-          <a:p>
             <a:pPr>
-              <a:spcBef>
-                <a:spcPts val="200"/>
-              </a:spcBef>
+              <a:spcAft>
+                <a:spcPts val="800"/>
+              </a:spcAft>
             </a:pPr>
             <a:r>
-              <a:rPr sz="1300" b="0" i="0">
+              <a:rPr sz="2000" b="0" i="0">
                 <a:solidFill>
                   <a:srgbClr val="333333"/>
                 </a:solidFill>
                 <a:latin typeface="Calibri"/>
               </a:rPr>
-              <a:t>Dibuja el diagrama como quieras en Excalidraw o draw.io: es mas rapido arrastrar cajas que escribir codigo, y ahi es donde piensas el modelo.</a:t>
-            </a:r>
-          </a:p>
-        </p:txBody>
-      </p:sp>
-      <p:sp>
-        <p:nvSpPr>
-          <p:cNvPr id="10" name="Rounded Rectangle 9"/>
-          <p:cNvSpPr/>
-          <p:nvPr/>
-        </p:nvSpPr>
-        <p:spPr>
-          <a:xfrm>
-            <a:off x="457200" y="2802636"/>
-            <a:ext cx="11277295" cy="1051560"/>
-          </a:xfrm>
-          <a:prstGeom prst="roundRect">
-            <a:avLst>
-              <a:gd name="adj" fmla="val 12000"/>
-            </a:avLst>
-          </a:prstGeom>
-          <a:solidFill>
-            <a:srgbClr val="E8F4FA"/>
-          </a:solidFill>
-          <a:ln>
-            <a:noFill/>
-          </a:ln>
-        </p:spPr>
-        <p:style>
-          <a:lnRef idx="1">
-            <a:schemeClr val="accent1"/>
-          </a:lnRef>
-          <a:fillRef idx="3">
-            <a:schemeClr val="accent1"/>
-          </a:fillRef>
-          <a:effectRef idx="2">
-            <a:schemeClr val="accent1"/>
-          </a:effectRef>
-          <a:fontRef idx="minor">
-            <a:schemeClr val="lt1"/>
-          </a:fontRef>
-        </p:style>
-        <p:txBody>
-          <a:bodyPr rtlCol="0" anchor="ctr"/>
-          <a:lstStyle/>
-          <a:p>
-            <a:pPr algn="ctr"/>
-          </a:p>
-        </p:txBody>
-      </p:sp>
-      <p:sp>
-        <p:nvSpPr>
-          <p:cNvPr id="11" name="Rounded Rectangle 10"/>
-          <p:cNvSpPr/>
-          <p:nvPr/>
-        </p:nvSpPr>
-        <p:spPr>
-          <a:xfrm>
-            <a:off x="594360" y="3108960"/>
-            <a:ext cx="438912" cy="438912"/>
-          </a:xfrm>
-          <a:prstGeom prst="roundRect">
-            <a:avLst>
-              <a:gd name="adj" fmla="val 12000"/>
-            </a:avLst>
-          </a:prstGeom>
-          <a:solidFill>
-            <a:srgbClr val="095292"/>
-          </a:solidFill>
-          <a:ln>
-            <a:noFill/>
-          </a:ln>
-        </p:spPr>
-        <p:style>
-          <a:lnRef idx="1">
-            <a:schemeClr val="accent1"/>
-          </a:lnRef>
-          <a:fillRef idx="3">
-            <a:schemeClr val="accent1"/>
-          </a:fillRef>
-          <a:effectRef idx="2">
-            <a:schemeClr val="accent1"/>
-          </a:effectRef>
-          <a:fontRef idx="minor">
-            <a:schemeClr val="lt1"/>
-          </a:fontRef>
-        </p:style>
-        <p:txBody>
-          <a:bodyPr rtlCol="0" anchor="ctr"/>
-          <a:lstStyle/>
-          <a:p>
-            <a:pPr algn="ctr"/>
-          </a:p>
-        </p:txBody>
-      </p:sp>
-      <p:sp>
-        <p:nvSpPr>
-          <p:cNvPr id="12" name="TextBox 11"/>
-          <p:cNvSpPr txBox="1"/>
-          <p:nvPr/>
-        </p:nvSpPr>
-        <p:spPr>
-          <a:xfrm>
-            <a:off x="594360" y="3108960"/>
-            <a:ext cx="438912" cy="438912"/>
-          </a:xfrm>
-          <a:prstGeom prst="rect">
-            <a:avLst/>
-          </a:prstGeom>
-          <a:noFill/>
-        </p:spPr>
-        <p:txBody>
-          <a:bodyPr wrap="square" anchor="ctr"/>
-          <a:lstStyle/>
-          <a:p>
-            <a:pPr algn="ctr"/>
-            <a:r>
-              <a:rPr sz="1600" b="1" i="0">
-                <a:solidFill>
-                  <a:srgbClr val="FFFFFF"/>
-                </a:solidFill>
-                <a:latin typeface="Calibri"/>
-              </a:rPr>
-              <a:t>2</a:t>
-            </a:r>
-          </a:p>
-        </p:txBody>
-      </p:sp>
-      <p:sp>
-        <p:nvSpPr>
-          <p:cNvPr id="13" name="TextBox 12"/>
-          <p:cNvSpPr txBox="1"/>
-          <p:nvPr/>
-        </p:nvSpPr>
-        <p:spPr>
-          <a:xfrm>
-            <a:off x="1188720" y="2894076"/>
-            <a:ext cx="10271455" cy="886968"/>
-          </a:xfrm>
-          <a:prstGeom prst="rect">
-            <a:avLst/>
-          </a:prstGeom>
-          <a:noFill/>
-        </p:spPr>
-        <p:txBody>
-          <a:bodyPr wrap="square" anchor="ctr"/>
-          <a:lstStyle/>
-          <a:p>
-            <a:r>
-              <a:rPr sz="1500" b="1" i="0">
-                <a:solidFill>
-                  <a:srgbClr val="095292"/>
-                </a:solidFill>
-                <a:latin typeface="Calibri"/>
-              </a:rPr>
-              <a:t>Traduce con IA</a:t>
+              <a:t>–   </a:t>
+            </a:r>
+            <a:r>
+              <a:rPr sz="2000" b="1" i="0">
+                <a:solidFill>
+                  <a:srgbClr val="333333"/>
+                </a:solidFill>
+                <a:latin typeface="Calibri"/>
+              </a:rPr>
+              <a:t>Entregable:</a:t>
+            </a:r>
+            <a:r>
+              <a:rPr sz="2000" b="0" i="0">
+                <a:solidFill>
+                  <a:srgbClr val="333333"/>
+                </a:solidFill>
+                <a:latin typeface="Calibri"/>
+              </a:rPr>
+              <a:t> Ficha PI de 5 bloques + C4 Context en Mermaid renderizado en la plataforma del curso (boceto previo en Excalidraw/draw.io)</a:t>
             </a:r>
           </a:p>
           <a:p>
             <a:pPr>
-              <a:spcBef>
-                <a:spcPts val="200"/>
-              </a:spcBef>
+              <a:spcAft>
+                <a:spcPts val="800"/>
+              </a:spcAft>
             </a:pPr>
             <a:r>
-              <a:rPr sz="1300" b="0" i="0">
+              <a:rPr sz="2000" b="0" i="0">
                 <a:solidFill>
                   <a:srgbClr val="333333"/>
                 </a:solidFill>
                 <a:latin typeface="Calibri"/>
               </a:rPr>
-              <a:t>Copia o describe tu boceto a una IA y pidele el codigo Mermaid: «convierte este diagrama a Mermaid usando C4Context». Revisa el resultado: la IA acierta la sintaxis, no tu modelo.</a:t>
-            </a:r>
-          </a:p>
-        </p:txBody>
-      </p:sp>
-      <p:sp>
-        <p:nvSpPr>
-          <p:cNvPr id="14" name="Rounded Rectangle 13"/>
-          <p:cNvSpPr/>
-          <p:nvPr/>
-        </p:nvSpPr>
-        <p:spPr>
-          <a:xfrm>
-            <a:off x="457200" y="3945636"/>
-            <a:ext cx="11277295" cy="1051560"/>
-          </a:xfrm>
-          <a:prstGeom prst="roundRect">
-            <a:avLst>
-              <a:gd name="adj" fmla="val 12000"/>
-            </a:avLst>
-          </a:prstGeom>
-          <a:solidFill>
-            <a:srgbClr val="F2F2F2"/>
-          </a:solidFill>
-          <a:ln>
-            <a:noFill/>
-          </a:ln>
-        </p:spPr>
-        <p:style>
-          <a:lnRef idx="1">
-            <a:schemeClr val="accent1"/>
-          </a:lnRef>
-          <a:fillRef idx="3">
-            <a:schemeClr val="accent1"/>
-          </a:fillRef>
-          <a:effectRef idx="2">
-            <a:schemeClr val="accent1"/>
-          </a:effectRef>
-          <a:fontRef idx="minor">
-            <a:schemeClr val="lt1"/>
-          </a:fontRef>
-        </p:style>
-        <p:txBody>
-          <a:bodyPr rtlCol="0" anchor="ctr"/>
-          <a:lstStyle/>
-          <a:p>
-            <a:pPr algn="ctr"/>
-          </a:p>
-        </p:txBody>
-      </p:sp>
-      <p:sp>
-        <p:nvSpPr>
-          <p:cNvPr id="15" name="Rounded Rectangle 14"/>
-          <p:cNvSpPr/>
-          <p:nvPr/>
-        </p:nvSpPr>
-        <p:spPr>
-          <a:xfrm>
-            <a:off x="594360" y="4251960"/>
-            <a:ext cx="438912" cy="438912"/>
-          </a:xfrm>
-          <a:prstGeom prst="roundRect">
-            <a:avLst>
-              <a:gd name="adj" fmla="val 12000"/>
-            </a:avLst>
-          </a:prstGeom>
-          <a:solidFill>
-            <a:srgbClr val="095292"/>
-          </a:solidFill>
-          <a:ln>
-            <a:noFill/>
-          </a:ln>
-        </p:spPr>
-        <p:style>
-          <a:lnRef idx="1">
-            <a:schemeClr val="accent1"/>
-          </a:lnRef>
-          <a:fillRef idx="3">
-            <a:schemeClr val="accent1"/>
-          </a:fillRef>
-          <a:effectRef idx="2">
-            <a:schemeClr val="accent1"/>
-          </a:effectRef>
-          <a:fontRef idx="minor">
-            <a:schemeClr val="lt1"/>
-          </a:fontRef>
-        </p:style>
-        <p:txBody>
-          <a:bodyPr rtlCol="0" anchor="ctr"/>
-          <a:lstStyle/>
-          <a:p>
-            <a:pPr algn="ctr"/>
-          </a:p>
-        </p:txBody>
-      </p:sp>
-      <p:sp>
-        <p:nvSpPr>
-          <p:cNvPr id="16" name="TextBox 15"/>
-          <p:cNvSpPr txBox="1"/>
-          <p:nvPr/>
-        </p:nvSpPr>
-        <p:spPr>
-          <a:xfrm>
-            <a:off x="594360" y="4251960"/>
-            <a:ext cx="438912" cy="438912"/>
-          </a:xfrm>
-          <a:prstGeom prst="rect">
-            <a:avLst/>
-          </a:prstGeom>
-          <a:noFill/>
-        </p:spPr>
-        <p:txBody>
-          <a:bodyPr wrap="square" anchor="ctr"/>
-          <a:lstStyle/>
-          <a:p>
-            <a:pPr algn="ctr"/>
-            <a:r>
-              <a:rPr sz="1600" b="1" i="0">
-                <a:solidFill>
-                  <a:srgbClr val="FFFFFF"/>
-                </a:solidFill>
-                <a:latin typeface="Calibri"/>
-              </a:rPr>
-              <a:t>3</a:t>
-            </a:r>
-          </a:p>
-        </p:txBody>
-      </p:sp>
-      <p:sp>
-        <p:nvSpPr>
-          <p:cNvPr id="17" name="TextBox 16"/>
-          <p:cNvSpPr txBox="1"/>
-          <p:nvPr/>
-        </p:nvSpPr>
-        <p:spPr>
-          <a:xfrm>
-            <a:off x="1188720" y="4037076"/>
-            <a:ext cx="10271455" cy="886968"/>
-          </a:xfrm>
-          <a:prstGeom prst="rect">
-            <a:avLst/>
-          </a:prstGeom>
-          <a:noFill/>
-        </p:spPr>
-        <p:txBody>
-          <a:bodyPr wrap="square" anchor="ctr"/>
-          <a:lstStyle/>
-          <a:p>
-            <a:r>
-              <a:rPr sz="1500" b="1" i="0">
-                <a:solidFill>
-                  <a:srgbClr val="095292"/>
-                </a:solidFill>
-                <a:latin typeface="Calibri"/>
-              </a:rPr>
-              <a:t>Pega y renderiza en la plataforma del curso</a:t>
+              <a:t>–   Herramienta: </a:t>
+            </a:r>
+            <a:r>
+              <a:rPr sz="2000" b="1" i="0">
+                <a:solidFill>
+                  <a:srgbClr val="333333"/>
+                </a:solidFill>
+                <a:latin typeface="Calibri"/>
+              </a:rPr>
+              <a:t>Padlet · Excalidraw / draw.io</a:t>
             </a:r>
           </a:p>
           <a:p>
             <a:pPr>
-              <a:spcBef>
-                <a:spcPts val="200"/>
-              </a:spcBef>
+              <a:spcAft>
+                <a:spcPts val="800"/>
+              </a:spcAft>
             </a:pPr>
             <a:r>
-              <a:rPr sz="1300" b="0" i="0">
+              <a:rPr sz="2000" b="0" i="0">
                 <a:solidFill>
                   <a:srgbClr val="333333"/>
                 </a:solidFill>
                 <a:latin typeface="Calibri"/>
               </a:rPr>
-              <a:t>Pega ese codigo en la caja de texto de la pregunta y mira como lo dibuja la plataforma. Si no renderiza, corrige ahi mismo: lo que se califica es el diagrama renderizado dentro de la plataforma del curso.</a:t>
-            </a:r>
-          </a:p>
-        </p:txBody>
-      </p:sp>
-      <p:sp>
-        <p:nvSpPr>
-          <p:cNvPr id="18" name="Rounded Rectangle 17"/>
-          <p:cNvSpPr/>
-          <p:nvPr/>
-        </p:nvSpPr>
-        <p:spPr>
-          <a:xfrm>
-            <a:off x="457200" y="5088636"/>
-            <a:ext cx="11277295" cy="1051560"/>
-          </a:xfrm>
-          <a:prstGeom prst="roundRect">
-            <a:avLst>
-              <a:gd name="adj" fmla="val 12000"/>
-            </a:avLst>
-          </a:prstGeom>
-          <a:solidFill>
-            <a:srgbClr val="E8F4FA"/>
-          </a:solidFill>
-          <a:ln>
-            <a:noFill/>
-          </a:ln>
-        </p:spPr>
-        <p:style>
-          <a:lnRef idx="1">
-            <a:schemeClr val="accent1"/>
-          </a:lnRef>
-          <a:fillRef idx="3">
-            <a:schemeClr val="accent1"/>
-          </a:fillRef>
-          <a:effectRef idx="2">
-            <a:schemeClr val="accent1"/>
-          </a:effectRef>
-          <a:fontRef idx="minor">
-            <a:schemeClr val="lt1"/>
-          </a:fontRef>
-        </p:style>
-        <p:txBody>
-          <a:bodyPr rtlCol="0" anchor="ctr"/>
-          <a:lstStyle/>
-          <a:p>
-            <a:pPr algn="ctr"/>
-          </a:p>
-        </p:txBody>
-      </p:sp>
-      <p:sp>
-        <p:nvSpPr>
-          <p:cNvPr id="19" name="Rounded Rectangle 18"/>
-          <p:cNvSpPr/>
-          <p:nvPr/>
-        </p:nvSpPr>
-        <p:spPr>
-          <a:xfrm>
-            <a:off x="594360" y="5394960"/>
-            <a:ext cx="438912" cy="438912"/>
-          </a:xfrm>
-          <a:prstGeom prst="roundRect">
-            <a:avLst>
-              <a:gd name="adj" fmla="val 12000"/>
-            </a:avLst>
-          </a:prstGeom>
-          <a:solidFill>
-            <a:srgbClr val="095292"/>
-          </a:solidFill>
-          <a:ln>
-            <a:noFill/>
-          </a:ln>
-        </p:spPr>
-        <p:style>
-          <a:lnRef idx="1">
-            <a:schemeClr val="accent1"/>
-          </a:lnRef>
-          <a:fillRef idx="3">
-            <a:schemeClr val="accent1"/>
-          </a:fillRef>
-          <a:effectRef idx="2">
-            <a:schemeClr val="accent1"/>
-          </a:effectRef>
-          <a:fontRef idx="minor">
-            <a:schemeClr val="lt1"/>
-          </a:fontRef>
-        </p:style>
-        <p:txBody>
-          <a:bodyPr rtlCol="0" anchor="ctr"/>
-          <a:lstStyle/>
-          <a:p>
-            <a:pPr algn="ctr"/>
-          </a:p>
-        </p:txBody>
-      </p:sp>
-      <p:sp>
-        <p:nvSpPr>
-          <p:cNvPr id="20" name="TextBox 19"/>
-          <p:cNvSpPr txBox="1"/>
-          <p:nvPr/>
-        </p:nvSpPr>
-        <p:spPr>
-          <a:xfrm>
-            <a:off x="594360" y="5394960"/>
-            <a:ext cx="438912" cy="438912"/>
-          </a:xfrm>
-          <a:prstGeom prst="rect">
-            <a:avLst/>
-          </a:prstGeom>
-          <a:noFill/>
-        </p:spPr>
-        <p:txBody>
-          <a:bodyPr wrap="square" anchor="ctr"/>
-          <a:lstStyle/>
-          <a:p>
-            <a:pPr algn="ctr"/>
-            <a:r>
-              <a:rPr sz="1600" b="1" i="0">
-                <a:solidFill>
-                  <a:srgbClr val="FFFFFF"/>
-                </a:solidFill>
-                <a:latin typeface="Calibri"/>
-              </a:rPr>
-              <a:t>4</a:t>
-            </a:r>
-          </a:p>
-        </p:txBody>
-      </p:sp>
-      <p:sp>
-        <p:nvSpPr>
-          <p:cNvPr id="21" name="TextBox 20"/>
-          <p:cNvSpPr txBox="1"/>
-          <p:nvPr/>
-        </p:nvSpPr>
-        <p:spPr>
-          <a:xfrm>
-            <a:off x="1188720" y="5180076"/>
-            <a:ext cx="10271455" cy="886968"/>
-          </a:xfrm>
-          <a:prstGeom prst="rect">
-            <a:avLst/>
-          </a:prstGeom>
-          <a:noFill/>
-        </p:spPr>
-        <p:txBody>
-          <a:bodyPr wrap="square" anchor="ctr"/>
-          <a:lstStyle/>
-          <a:p>
-            <a:r>
-              <a:rPr sz="1500" b="1" i="0">
-                <a:solidFill>
-                  <a:srgbClr val="095292"/>
-                </a:solidFill>
-                <a:latin typeface="Calibri"/>
-              </a:rPr>
-              <a:t>Guarda el PNG para tu PI</a:t>
+              <a:t>–   Todo lo que construyan hoy entra al </a:t>
+            </a:r>
+            <a:r>
+              <a:rPr sz="2000" b="1" i="0">
+                <a:solidFill>
+                  <a:srgbClr val="333333"/>
+                </a:solidFill>
+                <a:latin typeface="Calibri"/>
+              </a:rPr>
+              <a:t>informe/repo del PI</a:t>
+            </a:r>
+            <a:r>
+              <a:rPr sz="2000" b="0" i="0">
+                <a:solidFill>
+                  <a:srgbClr val="333333"/>
+                </a:solidFill>
+                <a:latin typeface="Calibri"/>
+              </a:rPr>
+              <a:t> (no es lab suelto).</a:t>
             </a:r>
           </a:p>
           <a:p>
             <a:pPr>
-              <a:spcBef>
-                <a:spcPts val="200"/>
-              </a:spcBef>
+              <a:spcAft>
+                <a:spcPts val="800"/>
+              </a:spcAft>
             </a:pPr>
             <a:r>
-              <a:rPr sz="1300" b="0" i="0">
+              <a:rPr sz="2000" b="0" i="0">
                 <a:solidFill>
                   <a:srgbClr val="333333"/>
                 </a:solidFill>
                 <a:latin typeface="Calibri"/>
               </a:rPr>
-              <a:t>Exporta tambien la imagen a la carpeta de tu Proyecto Integrador. Esa copia es para tu informe; no reemplaza la respuesta en la plataforma.</a:t>
-            </a:r>
-          </a:p>
-        </p:txBody>
-      </p:sp>
-      <p:sp>
-        <p:nvSpPr>
-          <p:cNvPr id="22" name="TextBox 21"/>
+              <a:t>–   Ficha de 5 bloques: DOMINIO · PROBLEMA · ACTORES (con sus sistemas externos) · CAPACIDADES · FUERA DE ALCANCE.</a:t>
+            </a:r>
+          </a:p>
+          <a:p>
+            <a:pPr>
+              <a:spcAft>
+                <a:spcPts val="800"/>
+              </a:spcAft>
+            </a:pPr>
+            <a:r>
+              <a:rPr sz="2000" b="0" i="0">
+                <a:solidFill>
+                  <a:srgbClr val="333333"/>
+                </a:solidFill>
+                <a:latin typeface="Calibri"/>
+              </a:rPr>
+              <a:t>–   Actividad individual: cada estudiante define su propio dominio CloudLite.</a:t>
+            </a:r>
+          </a:p>
+        </p:txBody>
+      </p:sp>
+      <p:sp>
+        <p:nvSpPr>
+          <p:cNvPr id="6" name="TextBox 5"/>
           <p:cNvSpPr txBox="1"/>
           <p:nvPr/>
         </p:nvSpPr>
@@ -4475,7 +3905,7 @@
                 </a:solidFill>
                 <a:latin typeface="Calibri"/>
               </a:rPr>
-              <a:t>Taller PI (paso a paso)</a:t>
+              <a:t>Manos a la obra (paso a paso)</a:t>
             </a:r>
           </a:p>
         </p:txBody>
@@ -5749,7 +5179,7 @@
                 </a:solidFill>
                 <a:latin typeface="Calibri"/>
               </a:rPr>
-              <a:t> Taller guiado PI (demo en vivo + avance individual).</a:t>
+              <a:t> Trabajo guiado del PI (demo en vivo + avance individual).</a:t>
             </a:r>
           </a:p>
           <a:p>
@@ -6268,7 +5698,7 @@
                 </a:solidFill>
                 <a:latin typeface="Calibri"/>
               </a:rPr>
-              <a:t>PI CloudLite — entregable de hoy</a:t>
+              <a:t>Qué es arquitectura cloud (mapa mental)</a:t>
             </a:r>
           </a:p>
         </p:txBody>
@@ -6316,7 +5746,7 @@
                 </a:solidFill>
                 <a:latin typeface="Calibri"/>
               </a:rPr>
-              <a:t>Entregable:</a:t>
+              <a:t>Arquitectura</a:t>
             </a:r>
             <a:r>
               <a:rPr sz="2000" b="0" i="0">
@@ -6325,7 +5755,7 @@
                 </a:solidFill>
                 <a:latin typeface="Calibri"/>
               </a:rPr>
-              <a:t> Ficha PI de 5 bloques + C4 Context en Mermaid renderizado en la plataforma del curso (boceto previo en Excalidraw/draw.io)</a:t>
+              <a:t> = componentes + relaciones + despliegue + calidad (seguridad, escala, costo).</a:t>
             </a:r>
           </a:p>
           <a:p>
@@ -6341,7 +5771,7 @@
                 </a:solidFill>
                 <a:latin typeface="Calibri"/>
               </a:rPr>
-              <a:t>–   Herramienta: </a:t>
+              <a:t>–   Cloud: recursos </a:t>
             </a:r>
             <a:r>
               <a:rPr sz="2000" b="1" i="0">
@@ -6350,7 +5780,16 @@
                 </a:solidFill>
                 <a:latin typeface="Calibri"/>
               </a:rPr>
-              <a:t>Padlet · Excalidraw / draw.io</a:t>
+              <a:t>bajo demanda</a:t>
+            </a:r>
+            <a:r>
+              <a:rPr sz="2000" b="0" i="0">
+                <a:solidFill>
+                  <a:srgbClr val="333333"/>
+                </a:solidFill>
+                <a:latin typeface="Calibri"/>
+              </a:rPr>
+              <a:t>, multi-tenant, API/automatización.</a:t>
             </a:r>
           </a:p>
           <a:p>
@@ -6366,7 +5805,7 @@
                 </a:solidFill>
                 <a:latin typeface="Calibri"/>
               </a:rPr>
-              <a:t>–   Todo lo que construyan hoy entra al </a:t>
+              <a:t>–   Para CloudLite App: no «comprar servidores»; </a:t>
             </a:r>
             <a:r>
               <a:rPr sz="2000" b="1" i="0">
@@ -6375,7 +5814,7 @@
                 </a:solidFill>
                 <a:latin typeface="Calibri"/>
               </a:rPr>
-              <a:t>informe/repo del PI</a:t>
+              <a:t>diseñar</a:t>
             </a:r>
             <a:r>
               <a:rPr sz="2000" b="0" i="0">
@@ -6384,7 +5823,7 @@
                 </a:solidFill>
                 <a:latin typeface="Calibri"/>
               </a:rPr>
-              <a:t> (no es lab suelto).</a:t>
+              <a:t> capas y simular en labs gratis.</a:t>
             </a:r>
           </a:p>
           <a:p>
@@ -6400,23 +5839,7 @@
                 </a:solidFill>
                 <a:latin typeface="Calibri"/>
               </a:rPr>
-              <a:t>–   Ficha de 5 bloques: DOMINIO · PROBLEMA · ACTORES (con sus sistemas externos) · CAPACIDADES · FUERA DE ALCANCE.</a:t>
-            </a:r>
-          </a:p>
-          <a:p>
-            <a:pPr>
-              <a:spcAft>
-                <a:spcPts val="800"/>
-              </a:spcAft>
-            </a:pPr>
-            <a:r>
-              <a:rPr sz="2000" b="0" i="0">
-                <a:solidFill>
-                  <a:srgbClr val="333333"/>
-                </a:solidFill>
-                <a:latin typeface="Calibri"/>
-              </a:rPr>
-              <a:t>–   Actividad individual: cada estudiante define su propio dominio CloudLite.</a:t>
+              <a:t>–   Bloques tipicos: cliente → API → lógica → datos → observabilidad.</a:t>
             </a:r>
           </a:p>
         </p:txBody>
@@ -6597,7 +6020,7 @@
                 </a:solidFill>
                 <a:latin typeface="Calibri"/>
               </a:rPr>
-              <a:t>Qué es arquitectura cloud (mapa mental)</a:t>
+              <a:t>CloudLite App — el hilo conductor</a:t>
             </a:r>
           </a:p>
         </p:txBody>
@@ -6636,25 +6059,7 @@
                 </a:solidFill>
                 <a:latin typeface="Calibri"/>
               </a:rPr>
-              <a:t>–   </a:t>
-            </a:r>
-            <a:r>
-              <a:rPr sz="2000" b="1" i="0">
-                <a:solidFill>
-                  <a:srgbClr val="333333"/>
-                </a:solidFill>
-                <a:latin typeface="Calibri"/>
-              </a:rPr>
-              <a:t>Arquitectura</a:t>
-            </a:r>
-            <a:r>
-              <a:rPr sz="2000" b="0" i="0">
-                <a:solidFill>
-                  <a:srgbClr val="333333"/>
-                </a:solidFill>
-                <a:latin typeface="Calibri"/>
-              </a:rPr>
-              <a:t> = componentes + relaciones + despliegue + calidad (seguridad, escala, costo).</a:t>
+              <a:t>–   Aplicación web/API de un dominio realista (citas, academia, inventario liviano…).</a:t>
             </a:r>
           </a:p>
           <a:p>
@@ -6670,25 +6075,7 @@
                 </a:solidFill>
                 <a:latin typeface="Calibri"/>
               </a:rPr>
-              <a:t>–   Cloud: recursos </a:t>
-            </a:r>
-            <a:r>
-              <a:rPr sz="2000" b="1" i="0">
-                <a:solidFill>
-                  <a:srgbClr val="333333"/>
-                </a:solidFill>
-                <a:latin typeface="Calibri"/>
-              </a:rPr>
-              <a:t>bajo demanda</a:t>
-            </a:r>
-            <a:r>
-              <a:rPr sz="2000" b="0" i="0">
-                <a:solidFill>
-                  <a:srgbClr val="333333"/>
-                </a:solidFill>
-                <a:latin typeface="Calibri"/>
-              </a:rPr>
-              <a:t>, multi-tenant, API/automatización.</a:t>
+              <a:t>–   Entregables del semestre: diagramas + contenedor (lab) + CI/CD conceptual + informe.</a:t>
             </a:r>
           </a:p>
           <a:p>
@@ -6704,7 +6091,7 @@
                 </a:solidFill>
                 <a:latin typeface="Calibri"/>
               </a:rPr>
-              <a:t>–   Para CloudLite App: no «comprar servidores»; </a:t>
+              <a:t>–   Hoy solo: </a:t>
             </a:r>
             <a:r>
               <a:rPr sz="2000" b="1" i="0">
@@ -6713,7 +6100,7 @@
                 </a:solidFill>
                 <a:latin typeface="Calibri"/>
               </a:rPr>
-              <a:t>diseñar</a:t>
+              <a:t>problema + capacidades + boceto de contexto</a:t>
             </a:r>
             <a:r>
               <a:rPr sz="2000" b="0" i="0">
@@ -6722,7 +6109,7 @@
                 </a:solidFill>
                 <a:latin typeface="Calibri"/>
               </a:rPr>
-              <a:t> capas y simular en labs gratis.</a:t>
+              <a:t>.</a:t>
             </a:r>
           </a:p>
           <a:p>
@@ -6738,7 +6125,7 @@
                 </a:solidFill>
                 <a:latin typeface="Calibri"/>
               </a:rPr>
-              <a:t>–   Bloques tipicos: cliente → API → lógica → datos → observabilidad.</a:t>
+              <a:t>–   Sin AWS/GCP/Oracle: draw.io, Killercoda, GitHub Actions.</a:t>
             </a:r>
           </a:p>
         </p:txBody>
@@ -6919,7 +6306,7 @@
                 </a:solidFill>
                 <a:latin typeface="Calibri"/>
               </a:rPr>
-              <a:t>CloudLite App — el hilo conductor</a:t>
+              <a:t>De dominio a arquitectura (mini-método)</a:t>
             </a:r>
           </a:p>
         </p:txBody>
@@ -6958,7 +6345,7 @@
                 </a:solidFill>
                 <a:latin typeface="Calibri"/>
               </a:rPr>
-              <a:t>–   Aplicación web/API de un dominio realista (citas, academia, inventario liviano…).</a:t>
+              <a:t>–   1) Actor y problema. 2) Capacidades. 3) Contenedores lógicos. 4) Datos. 5) Riesgos.</a:t>
             </a:r>
           </a:p>
           <a:p>
@@ -6974,7 +6361,7 @@
                 </a:solidFill>
                 <a:latin typeface="Calibri"/>
               </a:rPr>
-              <a:t>–   Entregables del semestre: diagramas + contenedor (lab) + CI/CD conceptual + informe.</a:t>
+              <a:t>–   Ejemplo: *AgendaU* — estudiantes reservan tutoría; API + auth + agenda + notificaciones.</a:t>
             </a:r>
           </a:p>
           <a:p>
@@ -6990,7 +6377,7 @@
                 </a:solidFill>
                 <a:latin typeface="Calibri"/>
               </a:rPr>
-              <a:t>–   Hoy solo: </a:t>
+              <a:t>–   Pregunta de diseño: ¿qué es </a:t>
             </a:r>
             <a:r>
               <a:rPr sz="2000" b="1" i="0">
@@ -6999,7 +6386,7 @@
                 </a:solidFill>
                 <a:latin typeface="Calibri"/>
               </a:rPr>
-              <a:t>problema + capacidades + boceto de contexto</a:t>
+              <a:t>núcleo</a:t>
             </a:r>
             <a:r>
               <a:rPr sz="2000" b="0" i="0">
@@ -7008,7 +6395,7 @@
                 </a:solidFill>
                 <a:latin typeface="Calibri"/>
               </a:rPr>
-              <a:t>.</a:t>
+              <a:t> vs satélite?</a:t>
             </a:r>
           </a:p>
           <a:p>
@@ -7024,7 +6411,7 @@
                 </a:solidFill>
                 <a:latin typeface="Calibri"/>
               </a:rPr>
-              <a:t>–   Sin AWS/GCP/Oracle: draw.io, Killercoda, GitHub Actions.</a:t>
+              <a:t>–   Salida: diagrama C4 Context (sistema + actores externos).</a:t>
             </a:r>
           </a:p>
         </p:txBody>
@@ -7099,7 +6486,7 @@
         <p:spPr>
           <a:xfrm>
             <a:off x="0" y="0"/>
-            <a:ext cx="12191695" cy="960120"/>
+            <a:ext cx="12191695" cy="1170432"/>
           </a:xfrm>
           <a:prstGeom prst="rect">
             <a:avLst/>
@@ -7141,7 +6528,7 @@
         </p:nvSpPr>
         <p:spPr>
           <a:xfrm>
-            <a:off x="0" y="960120"/>
+            <a:off x="0" y="1170432"/>
             <a:ext cx="12191695" cy="41148"/>
           </a:xfrm>
           <a:prstGeom prst="rect">
@@ -7185,7 +6572,7 @@
         <p:spPr>
           <a:xfrm>
             <a:off x="457200" y="164592"/>
-            <a:ext cx="11277295" cy="502920"/>
+            <a:ext cx="11277295" cy="384048"/>
           </a:xfrm>
           <a:prstGeom prst="rect">
             <a:avLst/>
@@ -7205,7 +6592,7 @@
                 </a:solidFill>
                 <a:latin typeface="Calibri"/>
               </a:rPr>
-              <a:t>De dominio a arquitectura (mini-método)</a:t>
+              <a:t>Ejemplo de diagrama C4 — nivel Context</a:t>
             </a:r>
           </a:p>
         </p:txBody>
@@ -7218,8 +6605,8 @@
         </p:nvSpPr>
         <p:spPr>
           <a:xfrm>
-            <a:off x="457200" y="1170432"/>
-            <a:ext cx="11277295" cy="5230368"/>
+            <a:off x="457200" y="566928"/>
+            <a:ext cx="11277295" cy="411480"/>
           </a:xfrm>
           <a:prstGeom prst="rect">
             <a:avLst/>
@@ -7232,92 +6619,362 @@
           </a:bodyPr>
           <a:lstStyle/>
           <a:p>
-            <a:pPr>
-              <a:spcAft>
-                <a:spcPts val="800"/>
-              </a:spcAft>
-            </a:pPr>
-            <a:r>
-              <a:rPr sz="2000" b="0" i="0">
-                <a:solidFill>
-                  <a:srgbClr val="333333"/>
-                </a:solidFill>
-                <a:latin typeface="Calibri"/>
-              </a:rPr>
-              <a:t>–   1) Actor y problema. 2) Capacidades. 3) Contenedores lógicos. 4) Datos. 5) Riesgos.</a:t>
-            </a:r>
-          </a:p>
-          <a:p>
-            <a:pPr>
-              <a:spcAft>
-                <a:spcPts val="800"/>
-              </a:spcAft>
-            </a:pPr>
-            <a:r>
-              <a:rPr sz="2000" b="0" i="0">
-                <a:solidFill>
-                  <a:srgbClr val="333333"/>
-                </a:solidFill>
-                <a:latin typeface="Calibri"/>
-              </a:rPr>
-              <a:t>–   Ejemplo: *AgendaU* — estudiantes reservan tutoría; API + auth + agenda + notificaciones.</a:t>
-            </a:r>
-          </a:p>
-          <a:p>
-            <a:pPr>
-              <a:spcAft>
-                <a:spcPts val="800"/>
-              </a:spcAft>
-            </a:pPr>
-            <a:r>
-              <a:rPr sz="2000" b="0" i="0">
-                <a:solidFill>
-                  <a:srgbClr val="333333"/>
-                </a:solidFill>
-                <a:latin typeface="Calibri"/>
-              </a:rPr>
-              <a:t>–   Pregunta de diseño: ¿qué es </a:t>
-            </a:r>
-            <a:r>
-              <a:rPr sz="2000" b="1" i="0">
-                <a:solidFill>
-                  <a:srgbClr val="333333"/>
-                </a:solidFill>
-                <a:latin typeface="Calibri"/>
-              </a:rPr>
-              <a:t>núcleo</a:t>
-            </a:r>
-            <a:r>
-              <a:rPr sz="2000" b="0" i="0">
-                <a:solidFill>
-                  <a:srgbClr val="333333"/>
-                </a:solidFill>
-                <a:latin typeface="Calibri"/>
-              </a:rPr>
-              <a:t> vs satélite?</a:t>
-            </a:r>
-          </a:p>
-          <a:p>
-            <a:pPr>
-              <a:spcAft>
-                <a:spcPts val="800"/>
-              </a:spcAft>
-            </a:pPr>
-            <a:r>
-              <a:rPr sz="2000" b="0" i="0">
-                <a:solidFill>
-                  <a:srgbClr val="333333"/>
-                </a:solidFill>
-                <a:latin typeface="Calibri"/>
-              </a:rPr>
-              <a:t>–   Salida: diagrama C4 Context (sistema + actores externos).</a:t>
-            </a:r>
-          </a:p>
-        </p:txBody>
-      </p:sp>
-      <p:sp>
-        <p:nvSpPr>
-          <p:cNvPr id="6" name="TextBox 5"/>
+            <a:r>
+              <a:rPr sz="1400" b="0" i="0">
+                <a:solidFill>
+                  <a:srgbClr val="B8D8EE"/>
+                </a:solidFill>
+                <a:latin typeface="Calibri"/>
+              </a:rPr>
+              <a:t>Reemplacen actor / sistema / externo por su propio dominio CloudLite</a:t>
+            </a:r>
+          </a:p>
+        </p:txBody>
+      </p:sp>
+      <p:sp>
+        <p:nvSpPr>
+          <p:cNvPr id="6" name="Rounded Rectangle 5"/>
+          <p:cNvSpPr/>
+          <p:nvPr/>
+        </p:nvSpPr>
+        <p:spPr>
+          <a:xfrm>
+            <a:off x="822960" y="2743200"/>
+            <a:ext cx="2103120" cy="1097280"/>
+          </a:xfrm>
+          <a:prstGeom prst="roundRect">
+            <a:avLst>
+              <a:gd name="adj" fmla="val 12000"/>
+            </a:avLst>
+          </a:prstGeom>
+          <a:solidFill>
+            <a:srgbClr val="FFD000"/>
+          </a:solidFill>
+          <a:ln>
+            <a:noFill/>
+          </a:ln>
+        </p:spPr>
+        <p:style>
+          <a:lnRef idx="1">
+            <a:schemeClr val="accent1"/>
+          </a:lnRef>
+          <a:fillRef idx="3">
+            <a:schemeClr val="accent1"/>
+          </a:fillRef>
+          <a:effectRef idx="2">
+            <a:schemeClr val="accent1"/>
+          </a:effectRef>
+          <a:fontRef idx="minor">
+            <a:schemeClr val="lt1"/>
+          </a:fontRef>
+        </p:style>
+        <p:txBody>
+          <a:bodyPr rtlCol="0" anchor="ctr" wrap="square"/>
+          <a:lstStyle/>
+          <a:p>
+            <a:pPr algn="ctr"/>
+            <a:r>
+              <a:rPr sz="1300" b="1" i="0">
+                <a:solidFill>
+                  <a:srgbClr val="095292"/>
+                </a:solidFill>
+                <a:latin typeface="Calibri"/>
+              </a:rPr>
+              <a:t>Estudiante
+(actor)</a:t>
+            </a:r>
+          </a:p>
+        </p:txBody>
+      </p:sp>
+      <p:sp>
+        <p:nvSpPr>
+          <p:cNvPr id="7" name="Rounded Rectangle 6"/>
+          <p:cNvSpPr/>
+          <p:nvPr/>
+        </p:nvSpPr>
+        <p:spPr>
+          <a:xfrm>
+            <a:off x="4846320" y="2377440"/>
+            <a:ext cx="2834640" cy="1645920"/>
+          </a:xfrm>
+          <a:prstGeom prst="roundRect">
+            <a:avLst>
+              <a:gd name="adj" fmla="val 12000"/>
+            </a:avLst>
+          </a:prstGeom>
+          <a:solidFill>
+            <a:srgbClr val="095292"/>
+          </a:solidFill>
+          <a:ln>
+            <a:noFill/>
+          </a:ln>
+        </p:spPr>
+        <p:style>
+          <a:lnRef idx="1">
+            <a:schemeClr val="accent1"/>
+          </a:lnRef>
+          <a:fillRef idx="3">
+            <a:schemeClr val="accent1"/>
+          </a:fillRef>
+          <a:effectRef idx="2">
+            <a:schemeClr val="accent1"/>
+          </a:effectRef>
+          <a:fontRef idx="minor">
+            <a:schemeClr val="lt1"/>
+          </a:fontRef>
+        </p:style>
+        <p:txBody>
+          <a:bodyPr rtlCol="0" anchor="ctr" wrap="square"/>
+          <a:lstStyle/>
+          <a:p>
+            <a:pPr algn="ctr"/>
+            <a:r>
+              <a:rPr sz="1300" b="1" i="0">
+                <a:solidFill>
+                  <a:srgbClr val="FFFFFF"/>
+                </a:solidFill>
+                <a:latin typeface="Calibri"/>
+              </a:rPr>
+              <a:t>CloudLite App
+(el sistema = una sola caja)</a:t>
+            </a:r>
+          </a:p>
+        </p:txBody>
+      </p:sp>
+      <p:sp>
+        <p:nvSpPr>
+          <p:cNvPr id="8" name="Rounded Rectangle 7"/>
+          <p:cNvSpPr/>
+          <p:nvPr/>
+        </p:nvSpPr>
+        <p:spPr>
+          <a:xfrm>
+            <a:off x="9235440" y="2743200"/>
+            <a:ext cx="2286000" cy="1097280"/>
+          </a:xfrm>
+          <a:prstGeom prst="roundRect">
+            <a:avLst>
+              <a:gd name="adj" fmla="val 12000"/>
+            </a:avLst>
+          </a:prstGeom>
+          <a:solidFill>
+            <a:srgbClr val="269CCB"/>
+          </a:solidFill>
+          <a:ln>
+            <a:noFill/>
+          </a:ln>
+        </p:spPr>
+        <p:style>
+          <a:lnRef idx="1">
+            <a:schemeClr val="accent1"/>
+          </a:lnRef>
+          <a:fillRef idx="3">
+            <a:schemeClr val="accent1"/>
+          </a:fillRef>
+          <a:effectRef idx="2">
+            <a:schemeClr val="accent1"/>
+          </a:effectRef>
+          <a:fontRef idx="minor">
+            <a:schemeClr val="lt1"/>
+          </a:fontRef>
+        </p:style>
+        <p:txBody>
+          <a:bodyPr rtlCol="0" anchor="ctr" wrap="square"/>
+          <a:lstStyle/>
+          <a:p>
+            <a:pPr algn="ctr"/>
+            <a:r>
+              <a:rPr sz="1300" b="1" i="0">
+                <a:solidFill>
+                  <a:srgbClr val="FFFFFF"/>
+                </a:solidFill>
+                <a:latin typeface="Calibri"/>
+              </a:rPr>
+              <a:t>Sistema externo
+(ej. correo, auth)</a:t>
+            </a:r>
+          </a:p>
+        </p:txBody>
+      </p:sp>
+      <p:cxnSp>
+        <p:nvCxnSpPr>
+          <p:cNvPr id="9" name="Connector 8"/>
+          <p:cNvCxnSpPr/>
+          <p:nvPr/>
+        </p:nvCxnSpPr>
+        <p:spPr>
+          <a:xfrm flipV="1">
+            <a:off x="2926079" y="3200400"/>
+            <a:ext cx="1920241" cy="91440"/>
+          </a:xfrm>
+          <a:prstGeom prst="line">
+            <a:avLst/>
+          </a:prstGeom>
+          <a:ln w="22225">
+            <a:solidFill>
+              <a:srgbClr val="666666"/>
+            </a:solidFill>
+            <a:tailEnd type="triangle" w="med" len="med"/>
+          </a:ln>
+        </p:spPr>
+        <p:style>
+          <a:lnRef idx="2">
+            <a:schemeClr val="accent1"/>
+          </a:lnRef>
+          <a:fillRef idx="0">
+            <a:schemeClr val="accent1"/>
+          </a:fillRef>
+          <a:effectRef idx="1">
+            <a:schemeClr val="accent1"/>
+          </a:effectRef>
+          <a:fontRef idx="minor">
+            <a:schemeClr val="tx1"/>
+          </a:fontRef>
+        </p:style>
+      </p:cxnSp>
+      <p:sp>
+        <p:nvSpPr>
+          <p:cNvPr id="10" name="TextBox 9"/>
+          <p:cNvSpPr txBox="1"/>
+          <p:nvPr/>
+        </p:nvSpPr>
+        <p:spPr>
+          <a:xfrm>
+            <a:off x="3063240" y="3044951"/>
+            <a:ext cx="1645920" cy="320040"/>
+          </a:xfrm>
+          <a:prstGeom prst="rect">
+            <a:avLst/>
+          </a:prstGeom>
+          <a:noFill/>
+        </p:spPr>
+        <p:txBody>
+          <a:bodyPr wrap="square">
+            <a:spAutoFit/>
+          </a:bodyPr>
+          <a:lstStyle/>
+          <a:p>
+            <a:pPr algn="ctr"/>
+            <a:r>
+              <a:rPr sz="1000" b="0" i="1">
+                <a:solidFill>
+                  <a:srgbClr val="666666"/>
+                </a:solidFill>
+                <a:latin typeface="Calibri"/>
+              </a:rPr>
+              <a:t>usa</a:t>
+            </a:r>
+          </a:p>
+        </p:txBody>
+      </p:sp>
+      <p:cxnSp>
+        <p:nvCxnSpPr>
+          <p:cNvPr id="11" name="Connector 10"/>
+          <p:cNvCxnSpPr/>
+          <p:nvPr/>
+        </p:nvCxnSpPr>
+        <p:spPr>
+          <a:xfrm>
+            <a:off x="7680960" y="3200400"/>
+            <a:ext cx="1554480" cy="91440"/>
+          </a:xfrm>
+          <a:prstGeom prst="line">
+            <a:avLst/>
+          </a:prstGeom>
+          <a:ln w="22225">
+            <a:solidFill>
+              <a:srgbClr val="666666"/>
+            </a:solidFill>
+            <a:tailEnd type="triangle" w="med" len="med"/>
+          </a:ln>
+        </p:spPr>
+        <p:style>
+          <a:lnRef idx="2">
+            <a:schemeClr val="accent1"/>
+          </a:lnRef>
+          <a:fillRef idx="0">
+            <a:schemeClr val="accent1"/>
+          </a:fillRef>
+          <a:effectRef idx="1">
+            <a:schemeClr val="accent1"/>
+          </a:effectRef>
+          <a:fontRef idx="minor">
+            <a:schemeClr val="tx1"/>
+          </a:fontRef>
+        </p:style>
+      </p:cxnSp>
+      <p:sp>
+        <p:nvSpPr>
+          <p:cNvPr id="12" name="TextBox 11"/>
+          <p:cNvSpPr txBox="1"/>
+          <p:nvPr/>
+        </p:nvSpPr>
+        <p:spPr>
+          <a:xfrm>
+            <a:off x="7635240" y="3044951"/>
+            <a:ext cx="1645920" cy="320040"/>
+          </a:xfrm>
+          <a:prstGeom prst="rect">
+            <a:avLst/>
+          </a:prstGeom>
+          <a:noFill/>
+        </p:spPr>
+        <p:txBody>
+          <a:bodyPr wrap="square">
+            <a:spAutoFit/>
+          </a:bodyPr>
+          <a:lstStyle/>
+          <a:p>
+            <a:pPr algn="ctr"/>
+            <a:r>
+              <a:rPr sz="1000" b="0" i="1">
+                <a:solidFill>
+                  <a:srgbClr val="666666"/>
+                </a:solidFill>
+                <a:latin typeface="Calibri"/>
+              </a:rPr>
+              <a:t>notifica / consume</a:t>
+            </a:r>
+          </a:p>
+        </p:txBody>
+      </p:sp>
+      <p:sp>
+        <p:nvSpPr>
+          <p:cNvPr id="13" name="TextBox 12"/>
+          <p:cNvSpPr txBox="1"/>
+          <p:nvPr/>
+        </p:nvSpPr>
+        <p:spPr>
+          <a:xfrm>
+            <a:off x="457200" y="6263640"/>
+            <a:ext cx="11277295" cy="411480"/>
+          </a:xfrm>
+          <a:prstGeom prst="rect">
+            <a:avLst/>
+          </a:prstGeom>
+          <a:noFill/>
+        </p:spPr>
+        <p:txBody>
+          <a:bodyPr wrap="square">
+            <a:spAutoFit/>
+          </a:bodyPr>
+          <a:lstStyle/>
+          <a:p>
+            <a:r>
+              <a:rPr sz="1100" b="0" i="1">
+                <a:solidFill>
+                  <a:srgbClr val="666666"/>
+                </a:solidFill>
+                <a:latin typeface="Calibri"/>
+              </a:rPr>
+              <a:t>Nivel Context: el sistema es UNA caja (sin abrir por dentro). Actores a la izquierda, sistemas externos a la derecha. El interior se dibuja en Clase 4 (Containers).</a:t>
+            </a:r>
+          </a:p>
+        </p:txBody>
+      </p:sp>
+      <p:sp>
+        <p:nvSpPr>
+          <p:cNvPr id="14" name="TextBox 13"/>
           <p:cNvSpPr txBox="1"/>
           <p:nvPr/>
         </p:nvSpPr>
@@ -7491,7 +7148,7 @@
                 </a:solidFill>
                 <a:latin typeface="Calibri"/>
               </a:rPr>
-              <a:t>Ejemplo de diagrama C4 — nivel Context</a:t>
+              <a:t>Herramientas de hoy</a:t>
             </a:r>
           </a:p>
         </p:txBody>
@@ -7525,7 +7182,7 @@
                 </a:solidFill>
                 <a:latin typeface="Calibri"/>
               </a:rPr>
-              <a:t>Reemplacen actor / sistema / externo por su propio dominio CloudLite</a:t>
+              <a:t>Gratis · navegador o free tier · sin cuenta de pago</a:t>
             </a:r>
           </a:p>
         </p:txBody>
@@ -7538,13 +7195,99 @@
         </p:nvSpPr>
         <p:spPr>
           <a:xfrm>
-            <a:off x="822960" y="2743200"/>
-            <a:ext cx="2103120" cy="1097280"/>
+            <a:off x="457200" y="1591056"/>
+            <a:ext cx="3624986" cy="2299716"/>
           </a:xfrm>
           <a:prstGeom prst="roundRect">
             <a:avLst>
               <a:gd name="adj" fmla="val 12000"/>
             </a:avLst>
+          </a:prstGeom>
+          <a:solidFill>
+            <a:srgbClr val="F2F2F2"/>
+          </a:solidFill>
+          <a:ln>
+            <a:noFill/>
+          </a:ln>
+        </p:spPr>
+        <p:style>
+          <a:lnRef idx="1">
+            <a:schemeClr val="accent1"/>
+          </a:lnRef>
+          <a:fillRef idx="3">
+            <a:schemeClr val="accent1"/>
+          </a:fillRef>
+          <a:effectRef idx="2">
+            <a:schemeClr val="accent1"/>
+          </a:effectRef>
+          <a:fontRef idx="minor">
+            <a:schemeClr val="lt1"/>
+          </a:fontRef>
+        </p:style>
+        <p:txBody>
+          <a:bodyPr rtlCol="0" anchor="ctr"/>
+          <a:lstStyle/>
+          <a:p>
+            <a:pPr algn="ctr"/>
+          </a:p>
+        </p:txBody>
+      </p:sp>
+      <p:sp>
+        <p:nvSpPr>
+          <p:cNvPr id="7" name="Rectangle 6"/>
+          <p:cNvSpPr/>
+          <p:nvPr/>
+        </p:nvSpPr>
+        <p:spPr>
+          <a:xfrm>
+            <a:off x="457200" y="1591056"/>
+            <a:ext cx="3624986" cy="64008"/>
+          </a:xfrm>
+          <a:prstGeom prst="rect">
+            <a:avLst/>
+          </a:prstGeom>
+          <a:solidFill>
+            <a:srgbClr val="095292"/>
+          </a:solidFill>
+          <a:ln>
+            <a:noFill/>
+          </a:ln>
+        </p:spPr>
+        <p:style>
+          <a:lnRef idx="1">
+            <a:schemeClr val="accent1"/>
+          </a:lnRef>
+          <a:fillRef idx="3">
+            <a:schemeClr val="accent1"/>
+          </a:fillRef>
+          <a:effectRef idx="2">
+            <a:schemeClr val="accent1"/>
+          </a:effectRef>
+          <a:fontRef idx="minor">
+            <a:schemeClr val="lt1"/>
+          </a:fontRef>
+        </p:style>
+        <p:txBody>
+          <a:bodyPr rtlCol="0" anchor="ctr"/>
+          <a:lstStyle/>
+          <a:p>
+            <a:pPr algn="ctr"/>
+          </a:p>
+        </p:txBody>
+      </p:sp>
+      <p:sp>
+        <p:nvSpPr>
+          <p:cNvPr id="8" name="Rectangle 7"/>
+          <p:cNvSpPr/>
+          <p:nvPr/>
+        </p:nvSpPr>
+        <p:spPr>
+          <a:xfrm>
+            <a:off x="457200" y="1655064"/>
+            <a:ext cx="3624986" cy="27432"/>
+          </a:xfrm>
+          <a:prstGeom prst="rect">
+            <a:avLst/>
           </a:prstGeom>
           <a:solidFill>
             <a:srgbClr val="FFD000"/>
@@ -7568,10 +7311,58 @@
           </a:fontRef>
         </p:style>
         <p:txBody>
-          <a:bodyPr rtlCol="0" anchor="ctr" wrap="square"/>
+          <a:bodyPr rtlCol="0" anchor="ctr"/>
           <a:lstStyle/>
           <a:p>
             <a:pPr algn="ctr"/>
+          </a:p>
+        </p:txBody>
+      </p:sp>
+      <p:pic>
+        <p:nvPicPr>
+          <p:cNvPr id="9" name="Picture 8" descr="padlet.png"/>
+          <p:cNvPicPr>
+            <a:picLocks noChangeAspect="1"/>
+          </p:cNvPicPr>
+          <p:nvPr/>
+        </p:nvPicPr>
+        <p:blipFill>
+          <a:blip r:embed="rId2"/>
+          <a:stretch>
+            <a:fillRect/>
+          </a:stretch>
+        </p:blipFill>
+        <p:spPr>
+          <a:xfrm>
+            <a:off x="1659331" y="1847087"/>
+            <a:ext cx="1220724" cy="1220724"/>
+          </a:xfrm>
+          <a:prstGeom prst="rect">
+            <a:avLst/>
+          </a:prstGeom>
+        </p:spPr>
+      </p:pic>
+      <p:sp>
+        <p:nvSpPr>
+          <p:cNvPr id="10" name="TextBox 9"/>
+          <p:cNvSpPr txBox="1"/>
+          <p:nvPr/>
+        </p:nvSpPr>
+        <p:spPr>
+          <a:xfrm>
+            <a:off x="530352" y="3159251"/>
+            <a:ext cx="3478682" cy="621792"/>
+          </a:xfrm>
+          <a:prstGeom prst="rect">
+            <a:avLst/>
+          </a:prstGeom>
+          <a:noFill/>
+        </p:spPr>
+        <p:txBody>
+          <a:bodyPr wrap="square" anchor="t"/>
+          <a:lstStyle/>
+          <a:p>
+            <a:pPr algn="ctr"/>
             <a:r>
               <a:rPr sz="1300" b="1" i="0">
                 <a:solidFill>
@@ -7579,27 +7370,85 @@
                 </a:solidFill>
                 <a:latin typeface="Calibri"/>
               </a:rPr>
-              <a:t>Estudiante
-(actor)</a:t>
-            </a:r>
-          </a:p>
-        </p:txBody>
-      </p:sp>
-      <p:sp>
-        <p:nvSpPr>
-          <p:cNvPr id="7" name="Rounded Rectangle 6"/>
+              <a:t>Padlet</a:t>
+            </a:r>
+          </a:p>
+          <a:p>
+            <a:pPr algn="ctr">
+              <a:spcBef>
+                <a:spcPts val="200"/>
+              </a:spcBef>
+            </a:pPr>
+            <a:r>
+              <a:rPr sz="1000" b="0" i="0">
+                <a:solidFill>
+                  <a:srgbClr val="666666"/>
+                </a:solidFill>
+                <a:latin typeface="Calibri"/>
+              </a:rPr>
+              <a:t>Rompehielos</a:t>
+            </a:r>
+          </a:p>
+        </p:txBody>
+      </p:sp>
+      <p:sp>
+        <p:nvSpPr>
+          <p:cNvPr id="11" name="Rounded Rectangle 10"/>
           <p:cNvSpPr/>
           <p:nvPr/>
         </p:nvSpPr>
         <p:spPr>
           <a:xfrm>
-            <a:off x="4846320" y="2377440"/>
-            <a:ext cx="2834640" cy="1645920"/>
+            <a:off x="4283354" y="1591056"/>
+            <a:ext cx="3624986" cy="2299716"/>
           </a:xfrm>
           <a:prstGeom prst="roundRect">
             <a:avLst>
               <a:gd name="adj" fmla="val 12000"/>
             </a:avLst>
+          </a:prstGeom>
+          <a:solidFill>
+            <a:srgbClr val="F2F2F2"/>
+          </a:solidFill>
+          <a:ln>
+            <a:noFill/>
+          </a:ln>
+        </p:spPr>
+        <p:style>
+          <a:lnRef idx="1">
+            <a:schemeClr val="accent1"/>
+          </a:lnRef>
+          <a:fillRef idx="3">
+            <a:schemeClr val="accent1"/>
+          </a:fillRef>
+          <a:effectRef idx="2">
+            <a:schemeClr val="accent1"/>
+          </a:effectRef>
+          <a:fontRef idx="minor">
+            <a:schemeClr val="lt1"/>
+          </a:fontRef>
+        </p:style>
+        <p:txBody>
+          <a:bodyPr rtlCol="0" anchor="ctr"/>
+          <a:lstStyle/>
+          <a:p>
+            <a:pPr algn="ctr"/>
+          </a:p>
+        </p:txBody>
+      </p:sp>
+      <p:sp>
+        <p:nvSpPr>
+          <p:cNvPr id="12" name="Rectangle 11"/>
+          <p:cNvSpPr/>
+          <p:nvPr/>
+        </p:nvSpPr>
+        <p:spPr>
+          <a:xfrm>
+            <a:off x="4283354" y="1591056"/>
+            <a:ext cx="3624986" cy="64008"/>
+          </a:xfrm>
+          <a:prstGeom prst="rect">
+            <a:avLst/>
           </a:prstGeom>
           <a:solidFill>
             <a:srgbClr val="095292"/>
@@ -7623,41 +7472,29 @@
           </a:fontRef>
         </p:style>
         <p:txBody>
-          <a:bodyPr rtlCol="0" anchor="ctr" wrap="square"/>
+          <a:bodyPr rtlCol="0" anchor="ctr"/>
           <a:lstStyle/>
           <a:p>
             <a:pPr algn="ctr"/>
-            <a:r>
-              <a:rPr sz="1300" b="1" i="0">
-                <a:solidFill>
-                  <a:srgbClr val="FFFFFF"/>
-                </a:solidFill>
-                <a:latin typeface="Calibri"/>
-              </a:rPr>
-              <a:t>CloudLite App
-(el sistema = una sola caja)</a:t>
-            </a:r>
-          </a:p>
-        </p:txBody>
-      </p:sp>
-      <p:sp>
-        <p:nvSpPr>
-          <p:cNvPr id="8" name="Rounded Rectangle 7"/>
+          </a:p>
+        </p:txBody>
+      </p:sp>
+      <p:sp>
+        <p:nvSpPr>
+          <p:cNvPr id="13" name="Rectangle 12"/>
           <p:cNvSpPr/>
           <p:nvPr/>
         </p:nvSpPr>
         <p:spPr>
           <a:xfrm>
-            <a:off x="9235440" y="2743200"/>
-            <a:ext cx="2286000" cy="1097280"/>
-          </a:xfrm>
-          <a:prstGeom prst="roundRect">
-            <a:avLst>
-              <a:gd name="adj" fmla="val 12000"/>
-            </a:avLst>
+            <a:off x="4283354" y="1655064"/>
+            <a:ext cx="3624986" cy="27432"/>
+          </a:xfrm>
+          <a:prstGeom prst="rect">
+            <a:avLst/>
           </a:prstGeom>
           <a:solidFill>
-            <a:srgbClr val="269CCB"/>
+            <a:srgbClr val="FFD000"/>
           </a:solidFill>
           <a:ln>
             <a:noFill/>
@@ -7678,140 +7515,251 @@
           </a:fontRef>
         </p:style>
         <p:txBody>
-          <a:bodyPr rtlCol="0" anchor="ctr" wrap="square"/>
+          <a:bodyPr rtlCol="0" anchor="ctr"/>
           <a:lstStyle/>
           <a:p>
             <a:pPr algn="ctr"/>
+          </a:p>
+        </p:txBody>
+      </p:sp>
+      <p:pic>
+        <p:nvPicPr>
+          <p:cNvPr id="14" name="Picture 13" descr="excalidraw.png"/>
+          <p:cNvPicPr>
+            <a:picLocks noChangeAspect="1"/>
+          </p:cNvPicPr>
+          <p:nvPr/>
+        </p:nvPicPr>
+        <p:blipFill>
+          <a:blip r:embed="rId3"/>
+          <a:stretch>
+            <a:fillRect/>
+          </a:stretch>
+        </p:blipFill>
+        <p:spPr>
+          <a:xfrm>
+            <a:off x="5485485" y="1847087"/>
+            <a:ext cx="1220724" cy="1220724"/>
+          </a:xfrm>
+          <a:prstGeom prst="rect">
+            <a:avLst/>
+          </a:prstGeom>
+        </p:spPr>
+      </p:pic>
+      <p:sp>
+        <p:nvSpPr>
+          <p:cNvPr id="15" name="TextBox 14"/>
+          <p:cNvSpPr txBox="1"/>
+          <p:nvPr/>
+        </p:nvSpPr>
+        <p:spPr>
+          <a:xfrm>
+            <a:off x="4356506" y="3159251"/>
+            <a:ext cx="3478682" cy="621792"/>
+          </a:xfrm>
+          <a:prstGeom prst="rect">
+            <a:avLst/>
+          </a:prstGeom>
+          <a:noFill/>
+        </p:spPr>
+        <p:txBody>
+          <a:bodyPr wrap="square" anchor="t"/>
+          <a:lstStyle/>
+          <a:p>
+            <a:pPr algn="ctr"/>
             <a:r>
               <a:rPr sz="1300" b="1" i="0">
                 <a:solidFill>
-                  <a:srgbClr val="FFFFFF"/>
-                </a:solidFill>
-                <a:latin typeface="Calibri"/>
-              </a:rPr>
-              <a:t>Sistema externo
-(ej. correo, auth)</a:t>
-            </a:r>
-          </a:p>
-        </p:txBody>
-      </p:sp>
-      <p:cxnSp>
-        <p:nvCxnSpPr>
-          <p:cNvPr id="9" name="Connector 8"/>
-          <p:cNvCxnSpPr/>
-          <p:nvPr/>
-        </p:nvCxnSpPr>
-        <p:spPr>
-          <a:xfrm flipV="1">
-            <a:off x="2926079" y="3200400"/>
-            <a:ext cx="1920241" cy="91440"/>
-          </a:xfrm>
-          <a:prstGeom prst="line">
-            <a:avLst/>
-          </a:prstGeom>
-          <a:ln w="22225">
-            <a:solidFill>
-              <a:srgbClr val="666666"/>
-            </a:solidFill>
-            <a:tailEnd type="triangle" w="med" len="med"/>
+                  <a:srgbClr val="095292"/>
+                </a:solidFill>
+                <a:latin typeface="Calibri"/>
+              </a:rPr>
+              <a:t>Excalidraw</a:t>
+            </a:r>
+          </a:p>
+          <a:p>
+            <a:pPr algn="ctr">
+              <a:spcBef>
+                <a:spcPts val="200"/>
+              </a:spcBef>
+            </a:pPr>
+            <a:r>
+              <a:rPr sz="1000" b="0" i="0">
+                <a:solidFill>
+                  <a:srgbClr val="666666"/>
+                </a:solidFill>
+                <a:latin typeface="Calibri"/>
+              </a:rPr>
+              <a:t>Boceto rapido</a:t>
+            </a:r>
+          </a:p>
+        </p:txBody>
+      </p:sp>
+      <p:sp>
+        <p:nvSpPr>
+          <p:cNvPr id="16" name="Rounded Rectangle 15"/>
+          <p:cNvSpPr/>
+          <p:nvPr/>
+        </p:nvSpPr>
+        <p:spPr>
+          <a:xfrm>
+            <a:off x="8109508" y="1591056"/>
+            <a:ext cx="3624986" cy="2299716"/>
+          </a:xfrm>
+          <a:prstGeom prst="roundRect">
+            <a:avLst>
+              <a:gd name="adj" fmla="val 12000"/>
+            </a:avLst>
+          </a:prstGeom>
+          <a:solidFill>
+            <a:srgbClr val="F2F2F2"/>
+          </a:solidFill>
+          <a:ln>
+            <a:noFill/>
           </a:ln>
         </p:spPr>
         <p:style>
-          <a:lnRef idx="2">
+          <a:lnRef idx="1">
             <a:schemeClr val="accent1"/>
           </a:lnRef>
-          <a:fillRef idx="0">
+          <a:fillRef idx="3">
             <a:schemeClr val="accent1"/>
           </a:fillRef>
-          <a:effectRef idx="1">
+          <a:effectRef idx="2">
             <a:schemeClr val="accent1"/>
           </a:effectRef>
           <a:fontRef idx="minor">
-            <a:schemeClr val="tx1"/>
+            <a:schemeClr val="lt1"/>
           </a:fontRef>
         </p:style>
-      </p:cxnSp>
-      <p:sp>
-        <p:nvSpPr>
-          <p:cNvPr id="10" name="TextBox 9"/>
-          <p:cNvSpPr txBox="1"/>
-          <p:nvPr/>
-        </p:nvSpPr>
-        <p:spPr>
-          <a:xfrm>
-            <a:off x="3063240" y="3044951"/>
-            <a:ext cx="1645920" cy="320040"/>
-          </a:xfrm>
-          <a:prstGeom prst="rect">
-            <a:avLst/>
-          </a:prstGeom>
-          <a:noFill/>
-        </p:spPr>
-        <p:txBody>
-          <a:bodyPr wrap="square">
-            <a:spAutoFit/>
-          </a:bodyPr>
+        <p:txBody>
+          <a:bodyPr rtlCol="0" anchor="ctr"/>
           <a:lstStyle/>
           <a:p>
             <a:pPr algn="ctr"/>
-            <a:r>
-              <a:rPr sz="1000" b="0" i="1">
-                <a:solidFill>
-                  <a:srgbClr val="666666"/>
-                </a:solidFill>
-                <a:latin typeface="Calibri"/>
-              </a:rPr>
-              <a:t>usa</a:t>
-            </a:r>
-          </a:p>
-        </p:txBody>
-      </p:sp>
-      <p:cxnSp>
-        <p:nvCxnSpPr>
-          <p:cNvPr id="11" name="Connector 10"/>
-          <p:cNvCxnSpPr/>
-          <p:nvPr/>
-        </p:nvCxnSpPr>
-        <p:spPr>
-          <a:xfrm>
-            <a:off x="7680960" y="3200400"/>
-            <a:ext cx="1554480" cy="91440"/>
-          </a:xfrm>
-          <a:prstGeom prst="line">
-            <a:avLst/>
-          </a:prstGeom>
-          <a:ln w="22225">
-            <a:solidFill>
-              <a:srgbClr val="666666"/>
-            </a:solidFill>
-            <a:tailEnd type="triangle" w="med" len="med"/>
+          </a:p>
+        </p:txBody>
+      </p:sp>
+      <p:sp>
+        <p:nvSpPr>
+          <p:cNvPr id="17" name="Rectangle 16"/>
+          <p:cNvSpPr/>
+          <p:nvPr/>
+        </p:nvSpPr>
+        <p:spPr>
+          <a:xfrm>
+            <a:off x="8109508" y="1591056"/>
+            <a:ext cx="3624986" cy="64008"/>
+          </a:xfrm>
+          <a:prstGeom prst="rect">
+            <a:avLst/>
+          </a:prstGeom>
+          <a:solidFill>
+            <a:srgbClr val="095292"/>
+          </a:solidFill>
+          <a:ln>
+            <a:noFill/>
           </a:ln>
         </p:spPr>
         <p:style>
-          <a:lnRef idx="2">
+          <a:lnRef idx="1">
             <a:schemeClr val="accent1"/>
           </a:lnRef>
-          <a:fillRef idx="0">
+          <a:fillRef idx="3">
             <a:schemeClr val="accent1"/>
           </a:fillRef>
-          <a:effectRef idx="1">
+          <a:effectRef idx="2">
             <a:schemeClr val="accent1"/>
           </a:effectRef>
           <a:fontRef idx="minor">
-            <a:schemeClr val="tx1"/>
+            <a:schemeClr val="lt1"/>
           </a:fontRef>
         </p:style>
-      </p:cxnSp>
-      <p:sp>
-        <p:nvSpPr>
-          <p:cNvPr id="12" name="TextBox 11"/>
+        <p:txBody>
+          <a:bodyPr rtlCol="0" anchor="ctr"/>
+          <a:lstStyle/>
+          <a:p>
+            <a:pPr algn="ctr"/>
+          </a:p>
+        </p:txBody>
+      </p:sp>
+      <p:sp>
+        <p:nvSpPr>
+          <p:cNvPr id="18" name="Rectangle 17"/>
+          <p:cNvSpPr/>
+          <p:nvPr/>
+        </p:nvSpPr>
+        <p:spPr>
+          <a:xfrm>
+            <a:off x="8109508" y="1655064"/>
+            <a:ext cx="3624986" cy="27432"/>
+          </a:xfrm>
+          <a:prstGeom prst="rect">
+            <a:avLst/>
+          </a:prstGeom>
+          <a:solidFill>
+            <a:srgbClr val="FFD000"/>
+          </a:solidFill>
+          <a:ln>
+            <a:noFill/>
+          </a:ln>
+        </p:spPr>
+        <p:style>
+          <a:lnRef idx="1">
+            <a:schemeClr val="accent1"/>
+          </a:lnRef>
+          <a:fillRef idx="3">
+            <a:schemeClr val="accent1"/>
+          </a:fillRef>
+          <a:effectRef idx="2">
+            <a:schemeClr val="accent1"/>
+          </a:effectRef>
+          <a:fontRef idx="minor">
+            <a:schemeClr val="lt1"/>
+          </a:fontRef>
+        </p:style>
+        <p:txBody>
+          <a:bodyPr rtlCol="0" anchor="ctr"/>
+          <a:lstStyle/>
+          <a:p>
+            <a:pPr algn="ctr"/>
+          </a:p>
+        </p:txBody>
+      </p:sp>
+      <p:pic>
+        <p:nvPicPr>
+          <p:cNvPr id="19" name="Picture 18" descr="drawio.png"/>
+          <p:cNvPicPr>
+            <a:picLocks noChangeAspect="1"/>
+          </p:cNvPicPr>
+          <p:nvPr/>
+        </p:nvPicPr>
+        <p:blipFill>
+          <a:blip r:embed="rId4"/>
+          <a:stretch>
+            <a:fillRect/>
+          </a:stretch>
+        </p:blipFill>
+        <p:spPr>
+          <a:xfrm>
+            <a:off x="9311640" y="1847087"/>
+            <a:ext cx="1220724" cy="1220724"/>
+          </a:xfrm>
+          <a:prstGeom prst="rect">
+            <a:avLst/>
+          </a:prstGeom>
+        </p:spPr>
+      </p:pic>
+      <p:sp>
+        <p:nvSpPr>
+          <p:cNvPr id="20" name="TextBox 19"/>
           <p:cNvSpPr txBox="1"/>
           <p:nvPr/>
         </p:nvSpPr>
         <p:spPr>
           <a:xfrm>
-            <a:off x="7635240" y="3044951"/>
-            <a:ext cx="1645920" cy="320040"/>
+            <a:off x="8182660" y="3159251"/>
+            <a:ext cx="3478682" cy="621792"/>
           </a:xfrm>
           <a:prstGeom prst="rect">
             <a:avLst/>
@@ -7819,34 +7767,203 @@
           <a:noFill/>
         </p:spPr>
         <p:txBody>
-          <a:bodyPr wrap="square">
-            <a:spAutoFit/>
-          </a:bodyPr>
+          <a:bodyPr wrap="square" anchor="t"/>
           <a:lstStyle/>
           <a:p>
             <a:pPr algn="ctr"/>
             <a:r>
-              <a:rPr sz="1000" b="0" i="1">
+              <a:rPr sz="1300" b="1" i="0">
+                <a:solidFill>
+                  <a:srgbClr val="095292"/>
+                </a:solidFill>
+                <a:latin typeface="Calibri"/>
+              </a:rPr>
+              <a:t>draw.io</a:t>
+            </a:r>
+          </a:p>
+          <a:p>
+            <a:pPr algn="ctr">
+              <a:spcBef>
+                <a:spcPts val="200"/>
+              </a:spcBef>
+            </a:pPr>
+            <a:r>
+              <a:rPr sz="1000" b="0" i="0">
                 <a:solidFill>
                   <a:srgbClr val="666666"/>
                 </a:solidFill>
                 <a:latin typeface="Calibri"/>
               </a:rPr>
-              <a:t>notifica / consume</a:t>
-            </a:r>
-          </a:p>
-        </p:txBody>
-      </p:sp>
-      <p:sp>
-        <p:nvSpPr>
-          <p:cNvPr id="13" name="TextBox 12"/>
+              <a:t>C4 Context</a:t>
+            </a:r>
+          </a:p>
+        </p:txBody>
+      </p:sp>
+      <p:sp>
+        <p:nvSpPr>
+          <p:cNvPr id="21" name="Rounded Rectangle 20"/>
+          <p:cNvSpPr/>
+          <p:nvPr/>
+        </p:nvSpPr>
+        <p:spPr>
+          <a:xfrm>
+            <a:off x="2370277" y="4055364"/>
+            <a:ext cx="3624986" cy="2299716"/>
+          </a:xfrm>
+          <a:prstGeom prst="roundRect">
+            <a:avLst>
+              <a:gd name="adj" fmla="val 12000"/>
+            </a:avLst>
+          </a:prstGeom>
+          <a:solidFill>
+            <a:srgbClr val="F2F2F2"/>
+          </a:solidFill>
+          <a:ln>
+            <a:noFill/>
+          </a:ln>
+        </p:spPr>
+        <p:style>
+          <a:lnRef idx="1">
+            <a:schemeClr val="accent1"/>
+          </a:lnRef>
+          <a:fillRef idx="3">
+            <a:schemeClr val="accent1"/>
+          </a:fillRef>
+          <a:effectRef idx="2">
+            <a:schemeClr val="accent1"/>
+          </a:effectRef>
+          <a:fontRef idx="minor">
+            <a:schemeClr val="lt1"/>
+          </a:fontRef>
+        </p:style>
+        <p:txBody>
+          <a:bodyPr rtlCol="0" anchor="ctr"/>
+          <a:lstStyle/>
+          <a:p>
+            <a:pPr algn="ctr"/>
+          </a:p>
+        </p:txBody>
+      </p:sp>
+      <p:sp>
+        <p:nvSpPr>
+          <p:cNvPr id="22" name="Rectangle 21"/>
+          <p:cNvSpPr/>
+          <p:nvPr/>
+        </p:nvSpPr>
+        <p:spPr>
+          <a:xfrm>
+            <a:off x="2370277" y="4055364"/>
+            <a:ext cx="3624986" cy="64008"/>
+          </a:xfrm>
+          <a:prstGeom prst="rect">
+            <a:avLst/>
+          </a:prstGeom>
+          <a:solidFill>
+            <a:srgbClr val="095292"/>
+          </a:solidFill>
+          <a:ln>
+            <a:noFill/>
+          </a:ln>
+        </p:spPr>
+        <p:style>
+          <a:lnRef idx="1">
+            <a:schemeClr val="accent1"/>
+          </a:lnRef>
+          <a:fillRef idx="3">
+            <a:schemeClr val="accent1"/>
+          </a:fillRef>
+          <a:effectRef idx="2">
+            <a:schemeClr val="accent1"/>
+          </a:effectRef>
+          <a:fontRef idx="minor">
+            <a:schemeClr val="lt1"/>
+          </a:fontRef>
+        </p:style>
+        <p:txBody>
+          <a:bodyPr rtlCol="0" anchor="ctr"/>
+          <a:lstStyle/>
+          <a:p>
+            <a:pPr algn="ctr"/>
+          </a:p>
+        </p:txBody>
+      </p:sp>
+      <p:sp>
+        <p:nvSpPr>
+          <p:cNvPr id="23" name="Rectangle 22"/>
+          <p:cNvSpPr/>
+          <p:nvPr/>
+        </p:nvSpPr>
+        <p:spPr>
+          <a:xfrm>
+            <a:off x="2370277" y="4119372"/>
+            <a:ext cx="3624986" cy="27432"/>
+          </a:xfrm>
+          <a:prstGeom prst="rect">
+            <a:avLst/>
+          </a:prstGeom>
+          <a:solidFill>
+            <a:srgbClr val="FFD000"/>
+          </a:solidFill>
+          <a:ln>
+            <a:noFill/>
+          </a:ln>
+        </p:spPr>
+        <p:style>
+          <a:lnRef idx="1">
+            <a:schemeClr val="accent1"/>
+          </a:lnRef>
+          <a:fillRef idx="3">
+            <a:schemeClr val="accent1"/>
+          </a:fillRef>
+          <a:effectRef idx="2">
+            <a:schemeClr val="accent1"/>
+          </a:effectRef>
+          <a:fontRef idx="minor">
+            <a:schemeClr val="lt1"/>
+          </a:fontRef>
+        </p:style>
+        <p:txBody>
+          <a:bodyPr rtlCol="0" anchor="ctr"/>
+          <a:lstStyle/>
+          <a:p>
+            <a:pPr algn="ctr"/>
+          </a:p>
+        </p:txBody>
+      </p:sp>
+      <p:pic>
+        <p:nvPicPr>
+          <p:cNvPr id="24" name="Picture 23" descr="mermaid.png"/>
+          <p:cNvPicPr>
+            <a:picLocks noChangeAspect="1"/>
+          </p:cNvPicPr>
+          <p:nvPr/>
+        </p:nvPicPr>
+        <p:blipFill>
+          <a:blip r:embed="rId5"/>
+          <a:stretch>
+            <a:fillRect/>
+          </a:stretch>
+        </p:blipFill>
+        <p:spPr>
+          <a:xfrm>
+            <a:off x="3572408" y="4311396"/>
+            <a:ext cx="1220724" cy="1220724"/>
+          </a:xfrm>
+          <a:prstGeom prst="rect">
+            <a:avLst/>
+          </a:prstGeom>
+        </p:spPr>
+      </p:pic>
+      <p:sp>
+        <p:nvSpPr>
+          <p:cNvPr id="25" name="TextBox 24"/>
           <p:cNvSpPr txBox="1"/>
           <p:nvPr/>
         </p:nvSpPr>
         <p:spPr>
           <a:xfrm>
-            <a:off x="457200" y="6263640"/>
-            <a:ext cx="11277295" cy="411480"/>
+            <a:off x="2443429" y="5623560"/>
+            <a:ext cx="3478682" cy="621792"/>
           </a:xfrm>
           <a:prstGeom prst="rect">
             <a:avLst/>
@@ -7854,26 +7971,245 @@
           <a:noFill/>
         </p:spPr>
         <p:txBody>
-          <a:bodyPr wrap="square">
-            <a:spAutoFit/>
-          </a:bodyPr>
-          <a:lstStyle/>
-          <a:p>
-            <a:r>
-              <a:rPr sz="1100" b="0" i="1">
+          <a:bodyPr wrap="square" anchor="t"/>
+          <a:lstStyle/>
+          <a:p>
+            <a:pPr algn="ctr"/>
+            <a:r>
+              <a:rPr sz="1300" b="1" i="0">
+                <a:solidFill>
+                  <a:srgbClr val="095292"/>
+                </a:solidFill>
+                <a:latin typeface="Calibri"/>
+              </a:rPr>
+              <a:t>Mermaid</a:t>
+            </a:r>
+          </a:p>
+          <a:p>
+            <a:pPr algn="ctr">
+              <a:spcBef>
+                <a:spcPts val="200"/>
+              </a:spcBef>
+            </a:pPr>
+            <a:r>
+              <a:rPr sz="1000" b="0" i="0">
                 <a:solidFill>
                   <a:srgbClr val="666666"/>
                 </a:solidFill>
                 <a:latin typeface="Calibri"/>
               </a:rPr>
-              <a:t>Nivel Context: el sistema es UNA caja (sin abrir por dentro). Actores a la izquierda, sistemas externos a la derecha. El interior se dibuja en Clase 4 (Containers).</a:t>
-            </a:r>
-          </a:p>
-        </p:txBody>
-      </p:sp>
-      <p:sp>
-        <p:nvSpPr>
-          <p:cNvPr id="14" name="TextBox 13"/>
+              <a:t>Codigo del diagrama</a:t>
+            </a:r>
+          </a:p>
+        </p:txBody>
+      </p:sp>
+      <p:sp>
+        <p:nvSpPr>
+          <p:cNvPr id="26" name="Rounded Rectangle 25"/>
+          <p:cNvSpPr/>
+          <p:nvPr/>
+        </p:nvSpPr>
+        <p:spPr>
+          <a:xfrm>
+            <a:off x="6196431" y="4055364"/>
+            <a:ext cx="3624986" cy="2299716"/>
+          </a:xfrm>
+          <a:prstGeom prst="roundRect">
+            <a:avLst>
+              <a:gd name="adj" fmla="val 12000"/>
+            </a:avLst>
+          </a:prstGeom>
+          <a:solidFill>
+            <a:srgbClr val="F2F2F2"/>
+          </a:solidFill>
+          <a:ln>
+            <a:noFill/>
+          </a:ln>
+        </p:spPr>
+        <p:style>
+          <a:lnRef idx="1">
+            <a:schemeClr val="accent1"/>
+          </a:lnRef>
+          <a:fillRef idx="3">
+            <a:schemeClr val="accent1"/>
+          </a:fillRef>
+          <a:effectRef idx="2">
+            <a:schemeClr val="accent1"/>
+          </a:effectRef>
+          <a:fontRef idx="minor">
+            <a:schemeClr val="lt1"/>
+          </a:fontRef>
+        </p:style>
+        <p:txBody>
+          <a:bodyPr rtlCol="0" anchor="ctr"/>
+          <a:lstStyle/>
+          <a:p>
+            <a:pPr algn="ctr"/>
+          </a:p>
+        </p:txBody>
+      </p:sp>
+      <p:sp>
+        <p:nvSpPr>
+          <p:cNvPr id="27" name="Rectangle 26"/>
+          <p:cNvSpPr/>
+          <p:nvPr/>
+        </p:nvSpPr>
+        <p:spPr>
+          <a:xfrm>
+            <a:off x="6196431" y="4055364"/>
+            <a:ext cx="3624986" cy="64008"/>
+          </a:xfrm>
+          <a:prstGeom prst="rect">
+            <a:avLst/>
+          </a:prstGeom>
+          <a:solidFill>
+            <a:srgbClr val="095292"/>
+          </a:solidFill>
+          <a:ln>
+            <a:noFill/>
+          </a:ln>
+        </p:spPr>
+        <p:style>
+          <a:lnRef idx="1">
+            <a:schemeClr val="accent1"/>
+          </a:lnRef>
+          <a:fillRef idx="3">
+            <a:schemeClr val="accent1"/>
+          </a:fillRef>
+          <a:effectRef idx="2">
+            <a:schemeClr val="accent1"/>
+          </a:effectRef>
+          <a:fontRef idx="minor">
+            <a:schemeClr val="lt1"/>
+          </a:fontRef>
+        </p:style>
+        <p:txBody>
+          <a:bodyPr rtlCol="0" anchor="ctr"/>
+          <a:lstStyle/>
+          <a:p>
+            <a:pPr algn="ctr"/>
+          </a:p>
+        </p:txBody>
+      </p:sp>
+      <p:sp>
+        <p:nvSpPr>
+          <p:cNvPr id="28" name="Rectangle 27"/>
+          <p:cNvSpPr/>
+          <p:nvPr/>
+        </p:nvSpPr>
+        <p:spPr>
+          <a:xfrm>
+            <a:off x="6196431" y="4119372"/>
+            <a:ext cx="3624986" cy="27432"/>
+          </a:xfrm>
+          <a:prstGeom prst="rect">
+            <a:avLst/>
+          </a:prstGeom>
+          <a:solidFill>
+            <a:srgbClr val="FFD000"/>
+          </a:solidFill>
+          <a:ln>
+            <a:noFill/>
+          </a:ln>
+        </p:spPr>
+        <p:style>
+          <a:lnRef idx="1">
+            <a:schemeClr val="accent1"/>
+          </a:lnRef>
+          <a:fillRef idx="3">
+            <a:schemeClr val="accent1"/>
+          </a:fillRef>
+          <a:effectRef idx="2">
+            <a:schemeClr val="accent1"/>
+          </a:effectRef>
+          <a:fontRef idx="minor">
+            <a:schemeClr val="lt1"/>
+          </a:fontRef>
+        </p:style>
+        <p:txBody>
+          <a:bodyPr rtlCol="0" anchor="ctr"/>
+          <a:lstStyle/>
+          <a:p>
+            <a:pPr algn="ctr"/>
+          </a:p>
+        </p:txBody>
+      </p:sp>
+      <p:pic>
+        <p:nvPicPr>
+          <p:cNvPr id="29" name="Picture 28" descr="examlab.png"/>
+          <p:cNvPicPr>
+            <a:picLocks noChangeAspect="1"/>
+          </p:cNvPicPr>
+          <p:nvPr/>
+        </p:nvPicPr>
+        <p:blipFill>
+          <a:blip r:embed="rId6"/>
+          <a:stretch>
+            <a:fillRect/>
+          </a:stretch>
+        </p:blipFill>
+        <p:spPr>
+          <a:xfrm>
+            <a:off x="7398562" y="4311396"/>
+            <a:ext cx="1220724" cy="1220724"/>
+          </a:xfrm>
+          <a:prstGeom prst="rect">
+            <a:avLst/>
+          </a:prstGeom>
+        </p:spPr>
+      </p:pic>
+      <p:sp>
+        <p:nvSpPr>
+          <p:cNvPr id="30" name="TextBox 29"/>
+          <p:cNvSpPr txBox="1"/>
+          <p:nvPr/>
+        </p:nvSpPr>
+        <p:spPr>
+          <a:xfrm>
+            <a:off x="6269583" y="5623560"/>
+            <a:ext cx="3478682" cy="621792"/>
+          </a:xfrm>
+          <a:prstGeom prst="rect">
+            <a:avLst/>
+          </a:prstGeom>
+          <a:noFill/>
+        </p:spPr>
+        <p:txBody>
+          <a:bodyPr wrap="square" anchor="t"/>
+          <a:lstStyle/>
+          <a:p>
+            <a:pPr algn="ctr"/>
+            <a:r>
+              <a:rPr sz="1300" b="1" i="0">
+                <a:solidFill>
+                  <a:srgbClr val="095292"/>
+                </a:solidFill>
+                <a:latin typeface="Calibri"/>
+              </a:rPr>
+              <a:t>la plataforma del curso</a:t>
+            </a:r>
+          </a:p>
+          <a:p>
+            <a:pPr algn="ctr">
+              <a:spcBef>
+                <a:spcPts val="200"/>
+              </a:spcBef>
+            </a:pPr>
+            <a:r>
+              <a:rPr sz="1000" b="0" i="0">
+                <a:solidFill>
+                  <a:srgbClr val="666666"/>
+                </a:solidFill>
+                <a:latin typeface="Calibri"/>
+              </a:rPr>
+              <a:t>Donde se entrega</a:t>
+            </a:r>
+          </a:p>
+        </p:txBody>
+      </p:sp>
+      <p:sp>
+        <p:nvSpPr>
+          <p:cNvPr id="31" name="TextBox 30"/>
           <p:cNvSpPr txBox="1"/>
           <p:nvPr/>
         </p:nvSpPr>
@@ -8047,7 +8383,7 @@
                 </a:solidFill>
                 <a:latin typeface="Calibri"/>
               </a:rPr>
-              <a:t>Herramientas de hoy</a:t>
+              <a:t>Del boceto a la plataforma del curso (diagrama)</a:t>
             </a:r>
           </a:p>
         </p:txBody>
@@ -8081,7 +8417,7 @@
                 </a:solidFill>
                 <a:latin typeface="Calibri"/>
               </a:rPr>
-              <a:t>Gratis · navegador o free tier · sin cuenta de pago</a:t>
+              <a:t>El diagrama se entrega como código Mermaid dentro de la plataforma del curso, no como imagen</a:t>
             </a:r>
           </a:p>
         </p:txBody>
@@ -8094,8 +8430,8 @@
         </p:nvSpPr>
         <p:spPr>
           <a:xfrm>
-            <a:off x="457200" y="1591056"/>
-            <a:ext cx="3624986" cy="2299716"/>
+            <a:off x="457200" y="1659636"/>
+            <a:ext cx="11277295" cy="1051560"/>
           </a:xfrm>
           <a:prstGeom prst="roundRect">
             <a:avLst>
@@ -8133,17 +8469,19 @@
       </p:sp>
       <p:sp>
         <p:nvSpPr>
-          <p:cNvPr id="7" name="Rectangle 6"/>
+          <p:cNvPr id="7" name="Rounded Rectangle 6"/>
           <p:cNvSpPr/>
           <p:nvPr/>
         </p:nvSpPr>
         <p:spPr>
           <a:xfrm>
-            <a:off x="457200" y="1591056"/>
-            <a:ext cx="3624986" cy="64008"/>
-          </a:xfrm>
-          <a:prstGeom prst="rect">
-            <a:avLst/>
+            <a:off x="594360" y="1965960"/>
+            <a:ext cx="438912" cy="438912"/>
+          </a:xfrm>
+          <a:prstGeom prst="roundRect">
+            <a:avLst>
+              <a:gd name="adj" fmla="val 12000"/>
+            </a:avLst>
           </a:prstGeom>
           <a:solidFill>
             <a:srgbClr val="095292"/>
@@ -8176,20 +8514,103 @@
       </p:sp>
       <p:sp>
         <p:nvSpPr>
-          <p:cNvPr id="8" name="Rectangle 7"/>
+          <p:cNvPr id="8" name="TextBox 7"/>
+          <p:cNvSpPr txBox="1"/>
+          <p:nvPr/>
+        </p:nvSpPr>
+        <p:spPr>
+          <a:xfrm>
+            <a:off x="594360" y="1965960"/>
+            <a:ext cx="438912" cy="438912"/>
+          </a:xfrm>
+          <a:prstGeom prst="rect">
+            <a:avLst/>
+          </a:prstGeom>
+          <a:noFill/>
+        </p:spPr>
+        <p:txBody>
+          <a:bodyPr wrap="square" anchor="ctr"/>
+          <a:lstStyle/>
+          <a:p>
+            <a:pPr algn="ctr"/>
+            <a:r>
+              <a:rPr sz="1600" b="1" i="0">
+                <a:solidFill>
+                  <a:srgbClr val="FFFFFF"/>
+                </a:solidFill>
+                <a:latin typeface="Calibri"/>
+              </a:rPr>
+              <a:t>1</a:t>
+            </a:r>
+          </a:p>
+        </p:txBody>
+      </p:sp>
+      <p:sp>
+        <p:nvSpPr>
+          <p:cNvPr id="9" name="TextBox 8"/>
+          <p:cNvSpPr txBox="1"/>
+          <p:nvPr/>
+        </p:nvSpPr>
+        <p:spPr>
+          <a:xfrm>
+            <a:off x="1188720" y="1751076"/>
+            <a:ext cx="10271455" cy="886968"/>
+          </a:xfrm>
+          <a:prstGeom prst="rect">
+            <a:avLst/>
+          </a:prstGeom>
+          <a:noFill/>
+        </p:spPr>
+        <p:txBody>
+          <a:bodyPr wrap="square" anchor="ctr"/>
+          <a:lstStyle/>
+          <a:p>
+            <a:r>
+              <a:rPr sz="1500" b="1" i="0">
+                <a:solidFill>
+                  <a:srgbClr val="095292"/>
+                </a:solidFill>
+                <a:latin typeface="Calibri"/>
+              </a:rPr>
+              <a:t>Disena visual</a:t>
+            </a:r>
+          </a:p>
+          <a:p>
+            <a:pPr>
+              <a:spcBef>
+                <a:spcPts val="200"/>
+              </a:spcBef>
+            </a:pPr>
+            <a:r>
+              <a:rPr sz="1300" b="0" i="0">
+                <a:solidFill>
+                  <a:srgbClr val="333333"/>
+                </a:solidFill>
+                <a:latin typeface="Calibri"/>
+              </a:rPr>
+              <a:t>Dibuja el diagrama como quieras en Excalidraw o draw.io: es mas rapido arrastrar cajas que escribir codigo, y ahi es donde piensas el modelo.</a:t>
+            </a:r>
+          </a:p>
+        </p:txBody>
+      </p:sp>
+      <p:sp>
+        <p:nvSpPr>
+          <p:cNvPr id="10" name="Rounded Rectangle 9"/>
           <p:cNvSpPr/>
           <p:nvPr/>
         </p:nvSpPr>
         <p:spPr>
           <a:xfrm>
-            <a:off x="457200" y="1655064"/>
-            <a:ext cx="3624986" cy="27432"/>
-          </a:xfrm>
-          <a:prstGeom prst="rect">
-            <a:avLst/>
+            <a:off x="457200" y="2802636"/>
+            <a:ext cx="11277295" cy="1051560"/>
+          </a:xfrm>
+          <a:prstGeom prst="roundRect">
+            <a:avLst>
+              <a:gd name="adj" fmla="val 12000"/>
+            </a:avLst>
           </a:prstGeom>
           <a:solidFill>
-            <a:srgbClr val="FFD000"/>
+            <a:srgbClr val="E8F4FA"/>
           </a:solidFill>
           <a:ln>
             <a:noFill/>
@@ -8217,40 +8638,61 @@
           </a:p>
         </p:txBody>
       </p:sp>
-      <p:pic>
-        <p:nvPicPr>
-          <p:cNvPr id="9" name="Picture 8" descr="padlet.png"/>
-          <p:cNvPicPr>
-            <a:picLocks noChangeAspect="1"/>
-          </p:cNvPicPr>
-          <p:nvPr/>
-        </p:nvPicPr>
-        <p:blipFill>
-          <a:blip r:embed="rId2"/>
-          <a:stretch>
-            <a:fillRect/>
-          </a:stretch>
-        </p:blipFill>
-        <p:spPr>
-          <a:xfrm>
-            <a:off x="1659331" y="1847087"/>
-            <a:ext cx="1220724" cy="1220724"/>
-          </a:xfrm>
-          <a:prstGeom prst="rect">
-            <a:avLst/>
-          </a:prstGeom>
-        </p:spPr>
-      </p:pic>
-      <p:sp>
-        <p:nvSpPr>
-          <p:cNvPr id="10" name="TextBox 9"/>
+      <p:sp>
+        <p:nvSpPr>
+          <p:cNvPr id="11" name="Rounded Rectangle 10"/>
+          <p:cNvSpPr/>
+          <p:nvPr/>
+        </p:nvSpPr>
+        <p:spPr>
+          <a:xfrm>
+            <a:off x="594360" y="3108960"/>
+            <a:ext cx="438912" cy="438912"/>
+          </a:xfrm>
+          <a:prstGeom prst="roundRect">
+            <a:avLst>
+              <a:gd name="adj" fmla="val 12000"/>
+            </a:avLst>
+          </a:prstGeom>
+          <a:solidFill>
+            <a:srgbClr val="095292"/>
+          </a:solidFill>
+          <a:ln>
+            <a:noFill/>
+          </a:ln>
+        </p:spPr>
+        <p:style>
+          <a:lnRef idx="1">
+            <a:schemeClr val="accent1"/>
+          </a:lnRef>
+          <a:fillRef idx="3">
+            <a:schemeClr val="accent1"/>
+          </a:fillRef>
+          <a:effectRef idx="2">
+            <a:schemeClr val="accent1"/>
+          </a:effectRef>
+          <a:fontRef idx="minor">
+            <a:schemeClr val="lt1"/>
+          </a:fontRef>
+        </p:style>
+        <p:txBody>
+          <a:bodyPr rtlCol="0" anchor="ctr"/>
+          <a:lstStyle/>
+          <a:p>
+            <a:pPr algn="ctr"/>
+          </a:p>
+        </p:txBody>
+      </p:sp>
+      <p:sp>
+        <p:nvSpPr>
+          <p:cNvPr id="12" name="TextBox 11"/>
           <p:cNvSpPr txBox="1"/>
           <p:nvPr/>
         </p:nvSpPr>
         <p:spPr>
           <a:xfrm>
-            <a:off x="530352" y="3159251"/>
-            <a:ext cx="3478682" cy="621792"/>
+            <a:off x="594360" y="3108960"/>
+            <a:ext cx="438912" cy="438912"/>
           </a:xfrm>
           <a:prstGeom prst="rect">
             <a:avLst/>
@@ -8258,48 +8700,80 @@
           <a:noFill/>
         </p:spPr>
         <p:txBody>
-          <a:bodyPr wrap="square" anchor="t"/>
+          <a:bodyPr wrap="square" anchor="ctr"/>
           <a:lstStyle/>
           <a:p>
             <a:pPr algn="ctr"/>
             <a:r>
-              <a:rPr sz="1300" b="1" i="0">
+              <a:rPr sz="1600" b="1" i="0">
+                <a:solidFill>
+                  <a:srgbClr val="FFFFFF"/>
+                </a:solidFill>
+                <a:latin typeface="Calibri"/>
+              </a:rPr>
+              <a:t>2</a:t>
+            </a:r>
+          </a:p>
+        </p:txBody>
+      </p:sp>
+      <p:sp>
+        <p:nvSpPr>
+          <p:cNvPr id="13" name="TextBox 12"/>
+          <p:cNvSpPr txBox="1"/>
+          <p:nvPr/>
+        </p:nvSpPr>
+        <p:spPr>
+          <a:xfrm>
+            <a:off x="1188720" y="2894076"/>
+            <a:ext cx="10271455" cy="886968"/>
+          </a:xfrm>
+          <a:prstGeom prst="rect">
+            <a:avLst/>
+          </a:prstGeom>
+          <a:noFill/>
+        </p:spPr>
+        <p:txBody>
+          <a:bodyPr wrap="square" anchor="ctr"/>
+          <a:lstStyle/>
+          <a:p>
+            <a:r>
+              <a:rPr sz="1500" b="1" i="0">
                 <a:solidFill>
                   <a:srgbClr val="095292"/>
                 </a:solidFill>
                 <a:latin typeface="Calibri"/>
               </a:rPr>
-              <a:t>Padlet</a:t>
-            </a:r>
-          </a:p>
-          <a:p>
-            <a:pPr algn="ctr">
+              <a:t>Traduce con IA</a:t>
+            </a:r>
+          </a:p>
+          <a:p>
+            <a:pPr>
               <a:spcBef>
                 <a:spcPts val="200"/>
               </a:spcBef>
             </a:pPr>
             <a:r>
-              <a:rPr sz="1000" b="0" i="0">
-                <a:solidFill>
-                  <a:srgbClr val="666666"/>
-                </a:solidFill>
-                <a:latin typeface="Calibri"/>
-              </a:rPr>
-              <a:t>Rompehielos</a:t>
-            </a:r>
-          </a:p>
-        </p:txBody>
-      </p:sp>
-      <p:sp>
-        <p:nvSpPr>
-          <p:cNvPr id="11" name="Rounded Rectangle 10"/>
+              <a:rPr sz="1300" b="0" i="0">
+                <a:solidFill>
+                  <a:srgbClr val="333333"/>
+                </a:solidFill>
+                <a:latin typeface="Calibri"/>
+              </a:rPr>
+              <a:t>Copia o describe tu boceto a una IA y pidele el codigo Mermaid: «convierte este diagrama a Mermaid usando C4Context». Revisa el resultado: la IA acierta la sintaxis, no tu modelo.</a:t>
+            </a:r>
+          </a:p>
+        </p:txBody>
+      </p:sp>
+      <p:sp>
+        <p:nvSpPr>
+          <p:cNvPr id="14" name="Rounded Rectangle 13"/>
           <p:cNvSpPr/>
           <p:nvPr/>
         </p:nvSpPr>
         <p:spPr>
           <a:xfrm>
-            <a:off x="4283354" y="1591056"/>
-            <a:ext cx="3624986" cy="2299716"/>
+            <a:off x="457200" y="3945636"/>
+            <a:ext cx="11277295" cy="1051560"/>
           </a:xfrm>
           <a:prstGeom prst="roundRect">
             <a:avLst>
@@ -8337,17 +8811,19 @@
       </p:sp>
       <p:sp>
         <p:nvSpPr>
-          <p:cNvPr id="12" name="Rectangle 11"/>
+          <p:cNvPr id="15" name="Rounded Rectangle 14"/>
           <p:cNvSpPr/>
           <p:nvPr/>
         </p:nvSpPr>
         <p:spPr>
           <a:xfrm>
-            <a:off x="4283354" y="1591056"/>
-            <a:ext cx="3624986" cy="64008"/>
-          </a:xfrm>
-          <a:prstGeom prst="rect">
-            <a:avLst/>
+            <a:off x="594360" y="4251960"/>
+            <a:ext cx="438912" cy="438912"/>
+          </a:xfrm>
+          <a:prstGeom prst="roundRect">
+            <a:avLst>
+              <a:gd name="adj" fmla="val 12000"/>
+            </a:avLst>
           </a:prstGeom>
           <a:solidFill>
             <a:srgbClr val="095292"/>
@@ -8380,20 +8856,103 @@
       </p:sp>
       <p:sp>
         <p:nvSpPr>
-          <p:cNvPr id="13" name="Rectangle 12"/>
+          <p:cNvPr id="16" name="TextBox 15"/>
+          <p:cNvSpPr txBox="1"/>
+          <p:nvPr/>
+        </p:nvSpPr>
+        <p:spPr>
+          <a:xfrm>
+            <a:off x="594360" y="4251960"/>
+            <a:ext cx="438912" cy="438912"/>
+          </a:xfrm>
+          <a:prstGeom prst="rect">
+            <a:avLst/>
+          </a:prstGeom>
+          <a:noFill/>
+        </p:spPr>
+        <p:txBody>
+          <a:bodyPr wrap="square" anchor="ctr"/>
+          <a:lstStyle/>
+          <a:p>
+            <a:pPr algn="ctr"/>
+            <a:r>
+              <a:rPr sz="1600" b="1" i="0">
+                <a:solidFill>
+                  <a:srgbClr val="FFFFFF"/>
+                </a:solidFill>
+                <a:latin typeface="Calibri"/>
+              </a:rPr>
+              <a:t>3</a:t>
+            </a:r>
+          </a:p>
+        </p:txBody>
+      </p:sp>
+      <p:sp>
+        <p:nvSpPr>
+          <p:cNvPr id="17" name="TextBox 16"/>
+          <p:cNvSpPr txBox="1"/>
+          <p:nvPr/>
+        </p:nvSpPr>
+        <p:spPr>
+          <a:xfrm>
+            <a:off x="1188720" y="4037076"/>
+            <a:ext cx="10271455" cy="886968"/>
+          </a:xfrm>
+          <a:prstGeom prst="rect">
+            <a:avLst/>
+          </a:prstGeom>
+          <a:noFill/>
+        </p:spPr>
+        <p:txBody>
+          <a:bodyPr wrap="square" anchor="ctr"/>
+          <a:lstStyle/>
+          <a:p>
+            <a:r>
+              <a:rPr sz="1500" b="1" i="0">
+                <a:solidFill>
+                  <a:srgbClr val="095292"/>
+                </a:solidFill>
+                <a:latin typeface="Calibri"/>
+              </a:rPr>
+              <a:t>Pega y renderiza en la plataforma del curso</a:t>
+            </a:r>
+          </a:p>
+          <a:p>
+            <a:pPr>
+              <a:spcBef>
+                <a:spcPts val="200"/>
+              </a:spcBef>
+            </a:pPr>
+            <a:r>
+              <a:rPr sz="1300" b="0" i="0">
+                <a:solidFill>
+                  <a:srgbClr val="333333"/>
+                </a:solidFill>
+                <a:latin typeface="Calibri"/>
+              </a:rPr>
+              <a:t>Pega ese codigo en la caja de texto de la pregunta y mira como lo dibuja la plataforma. Si no renderiza, corrige ahi mismo: lo que se califica es el diagrama renderizado dentro de la plataforma del curso.</a:t>
+            </a:r>
+          </a:p>
+        </p:txBody>
+      </p:sp>
+      <p:sp>
+        <p:nvSpPr>
+          <p:cNvPr id="18" name="Rounded Rectangle 17"/>
           <p:cNvSpPr/>
           <p:nvPr/>
         </p:nvSpPr>
         <p:spPr>
           <a:xfrm>
-            <a:off x="4283354" y="1655064"/>
-            <a:ext cx="3624986" cy="27432"/>
-          </a:xfrm>
-          <a:prstGeom prst="rect">
-            <a:avLst/>
+            <a:off x="457200" y="5088636"/>
+            <a:ext cx="11277295" cy="1051560"/>
+          </a:xfrm>
+          <a:prstGeom prst="roundRect">
+            <a:avLst>
+              <a:gd name="adj" fmla="val 12000"/>
+            </a:avLst>
           </a:prstGeom>
           <a:solidFill>
-            <a:srgbClr val="FFD000"/>
+            <a:srgbClr val="E8F4FA"/>
           </a:solidFill>
           <a:ln>
             <a:noFill/>
@@ -8421,137 +8980,21 @@
           </a:p>
         </p:txBody>
       </p:sp>
-      <p:pic>
-        <p:nvPicPr>
-          <p:cNvPr id="14" name="Picture 13" descr="excalidraw.png"/>
-          <p:cNvPicPr>
-            <a:picLocks noChangeAspect="1"/>
-          </p:cNvPicPr>
-          <p:nvPr/>
-        </p:nvPicPr>
-        <p:blipFill>
-          <a:blip r:embed="rId3"/>
-          <a:stretch>
-            <a:fillRect/>
-          </a:stretch>
-        </p:blipFill>
-        <p:spPr>
-          <a:xfrm>
-            <a:off x="5485485" y="1847087"/>
-            <a:ext cx="1220724" cy="1220724"/>
-          </a:xfrm>
-          <a:prstGeom prst="rect">
-            <a:avLst/>
-          </a:prstGeom>
-        </p:spPr>
-      </p:pic>
-      <p:sp>
-        <p:nvSpPr>
-          <p:cNvPr id="15" name="TextBox 14"/>
-          <p:cNvSpPr txBox="1"/>
-          <p:nvPr/>
-        </p:nvSpPr>
-        <p:spPr>
-          <a:xfrm>
-            <a:off x="4356506" y="3159251"/>
-            <a:ext cx="3478682" cy="621792"/>
-          </a:xfrm>
-          <a:prstGeom prst="rect">
-            <a:avLst/>
-          </a:prstGeom>
-          <a:noFill/>
-        </p:spPr>
-        <p:txBody>
-          <a:bodyPr wrap="square" anchor="t"/>
-          <a:lstStyle/>
-          <a:p>
-            <a:pPr algn="ctr"/>
-            <a:r>
-              <a:rPr sz="1300" b="1" i="0">
-                <a:solidFill>
-                  <a:srgbClr val="095292"/>
-                </a:solidFill>
-                <a:latin typeface="Calibri"/>
-              </a:rPr>
-              <a:t>Excalidraw</a:t>
-            </a:r>
-          </a:p>
-          <a:p>
-            <a:pPr algn="ctr">
-              <a:spcBef>
-                <a:spcPts val="200"/>
-              </a:spcBef>
-            </a:pPr>
-            <a:r>
-              <a:rPr sz="1000" b="0" i="0">
-                <a:solidFill>
-                  <a:srgbClr val="666666"/>
-                </a:solidFill>
-                <a:latin typeface="Calibri"/>
-              </a:rPr>
-              <a:t>Boceto rapido</a:t>
-            </a:r>
-          </a:p>
-        </p:txBody>
-      </p:sp>
-      <p:sp>
-        <p:nvSpPr>
-          <p:cNvPr id="16" name="Rounded Rectangle 15"/>
+      <p:sp>
+        <p:nvSpPr>
+          <p:cNvPr id="19" name="Rounded Rectangle 18"/>
           <p:cNvSpPr/>
           <p:nvPr/>
         </p:nvSpPr>
         <p:spPr>
           <a:xfrm>
-            <a:off x="8109508" y="1591056"/>
-            <a:ext cx="3624986" cy="2299716"/>
+            <a:off x="594360" y="5394960"/>
+            <a:ext cx="438912" cy="438912"/>
           </a:xfrm>
           <a:prstGeom prst="roundRect">
             <a:avLst>
               <a:gd name="adj" fmla="val 12000"/>
             </a:avLst>
-          </a:prstGeom>
-          <a:solidFill>
-            <a:srgbClr val="F2F2F2"/>
-          </a:solidFill>
-          <a:ln>
-            <a:noFill/>
-          </a:ln>
-        </p:spPr>
-        <p:style>
-          <a:lnRef idx="1">
-            <a:schemeClr val="accent1"/>
-          </a:lnRef>
-          <a:fillRef idx="3">
-            <a:schemeClr val="accent1"/>
-          </a:fillRef>
-          <a:effectRef idx="2">
-            <a:schemeClr val="accent1"/>
-          </a:effectRef>
-          <a:fontRef idx="minor">
-            <a:schemeClr val="lt1"/>
-          </a:fontRef>
-        </p:style>
-        <p:txBody>
-          <a:bodyPr rtlCol="0" anchor="ctr"/>
-          <a:lstStyle/>
-          <a:p>
-            <a:pPr algn="ctr"/>
-          </a:p>
-        </p:txBody>
-      </p:sp>
-      <p:sp>
-        <p:nvSpPr>
-          <p:cNvPr id="17" name="Rectangle 16"/>
-          <p:cNvSpPr/>
-          <p:nvPr/>
-        </p:nvSpPr>
-        <p:spPr>
-          <a:xfrm>
-            <a:off x="8109508" y="1591056"/>
-            <a:ext cx="3624986" cy="64008"/>
-          </a:xfrm>
-          <a:prstGeom prst="rect">
-            <a:avLst/>
           </a:prstGeom>
           <a:solidFill>
             <a:srgbClr val="095292"/>
@@ -8584,81 +9027,14 @@
       </p:sp>
       <p:sp>
         <p:nvSpPr>
-          <p:cNvPr id="18" name="Rectangle 17"/>
-          <p:cNvSpPr/>
-          <p:nvPr/>
-        </p:nvSpPr>
-        <p:spPr>
-          <a:xfrm>
-            <a:off x="8109508" y="1655064"/>
-            <a:ext cx="3624986" cy="27432"/>
-          </a:xfrm>
-          <a:prstGeom prst="rect">
-            <a:avLst/>
-          </a:prstGeom>
-          <a:solidFill>
-            <a:srgbClr val="FFD000"/>
-          </a:solidFill>
-          <a:ln>
-            <a:noFill/>
-          </a:ln>
-        </p:spPr>
-        <p:style>
-          <a:lnRef idx="1">
-            <a:schemeClr val="accent1"/>
-          </a:lnRef>
-          <a:fillRef idx="3">
-            <a:schemeClr val="accent1"/>
-          </a:fillRef>
-          <a:effectRef idx="2">
-            <a:schemeClr val="accent1"/>
-          </a:effectRef>
-          <a:fontRef idx="minor">
-            <a:schemeClr val="lt1"/>
-          </a:fontRef>
-        </p:style>
-        <p:txBody>
-          <a:bodyPr rtlCol="0" anchor="ctr"/>
-          <a:lstStyle/>
-          <a:p>
-            <a:pPr algn="ctr"/>
-          </a:p>
-        </p:txBody>
-      </p:sp>
-      <p:pic>
-        <p:nvPicPr>
-          <p:cNvPr id="19" name="Picture 18" descr="drawio.png"/>
-          <p:cNvPicPr>
-            <a:picLocks noChangeAspect="1"/>
-          </p:cNvPicPr>
-          <p:nvPr/>
-        </p:nvPicPr>
-        <p:blipFill>
-          <a:blip r:embed="rId4"/>
-          <a:stretch>
-            <a:fillRect/>
-          </a:stretch>
-        </p:blipFill>
-        <p:spPr>
-          <a:xfrm>
-            <a:off x="9311640" y="1847087"/>
-            <a:ext cx="1220724" cy="1220724"/>
-          </a:xfrm>
-          <a:prstGeom prst="rect">
-            <a:avLst/>
-          </a:prstGeom>
-        </p:spPr>
-      </p:pic>
-      <p:sp>
-        <p:nvSpPr>
           <p:cNvPr id="20" name="TextBox 19"/>
           <p:cNvSpPr txBox="1"/>
           <p:nvPr/>
         </p:nvSpPr>
         <p:spPr>
           <a:xfrm>
-            <a:off x="8182660" y="3159251"/>
-            <a:ext cx="3478682" cy="621792"/>
+            <a:off x="594360" y="5394960"/>
+            <a:ext cx="438912" cy="438912"/>
           </a:xfrm>
           <a:prstGeom prst="rect">
             <a:avLst/>
@@ -8666,449 +9042,73 @@
           <a:noFill/>
         </p:spPr>
         <p:txBody>
-          <a:bodyPr wrap="square" anchor="t"/>
+          <a:bodyPr wrap="square" anchor="ctr"/>
           <a:lstStyle/>
           <a:p>
             <a:pPr algn="ctr"/>
             <a:r>
-              <a:rPr sz="1300" b="1" i="0">
+              <a:rPr sz="1600" b="1" i="0">
+                <a:solidFill>
+                  <a:srgbClr val="FFFFFF"/>
+                </a:solidFill>
+                <a:latin typeface="Calibri"/>
+              </a:rPr>
+              <a:t>4</a:t>
+            </a:r>
+          </a:p>
+        </p:txBody>
+      </p:sp>
+      <p:sp>
+        <p:nvSpPr>
+          <p:cNvPr id="21" name="TextBox 20"/>
+          <p:cNvSpPr txBox="1"/>
+          <p:nvPr/>
+        </p:nvSpPr>
+        <p:spPr>
+          <a:xfrm>
+            <a:off x="1188720" y="5180076"/>
+            <a:ext cx="10271455" cy="886968"/>
+          </a:xfrm>
+          <a:prstGeom prst="rect">
+            <a:avLst/>
+          </a:prstGeom>
+          <a:noFill/>
+        </p:spPr>
+        <p:txBody>
+          <a:bodyPr wrap="square" anchor="ctr"/>
+          <a:lstStyle/>
+          <a:p>
+            <a:r>
+              <a:rPr sz="1500" b="1" i="0">
                 <a:solidFill>
                   <a:srgbClr val="095292"/>
                 </a:solidFill>
                 <a:latin typeface="Calibri"/>
               </a:rPr>
-              <a:t>draw.io</a:t>
-            </a:r>
-          </a:p>
-          <a:p>
-            <a:pPr algn="ctr">
+              <a:t>Guarda el PNG para tu PI</a:t>
+            </a:r>
+          </a:p>
+          <a:p>
+            <a:pPr>
               <a:spcBef>
                 <a:spcPts val="200"/>
               </a:spcBef>
             </a:pPr>
             <a:r>
-              <a:rPr sz="1000" b="0" i="0">
-                <a:solidFill>
-                  <a:srgbClr val="666666"/>
-                </a:solidFill>
-                <a:latin typeface="Calibri"/>
-              </a:rPr>
-              <a:t>C4 Context</a:t>
-            </a:r>
-          </a:p>
-        </p:txBody>
-      </p:sp>
-      <p:sp>
-        <p:nvSpPr>
-          <p:cNvPr id="21" name="Rounded Rectangle 20"/>
-          <p:cNvSpPr/>
-          <p:nvPr/>
-        </p:nvSpPr>
-        <p:spPr>
-          <a:xfrm>
-            <a:off x="2370277" y="4055364"/>
-            <a:ext cx="3624986" cy="2299716"/>
-          </a:xfrm>
-          <a:prstGeom prst="roundRect">
-            <a:avLst>
-              <a:gd name="adj" fmla="val 12000"/>
-            </a:avLst>
-          </a:prstGeom>
-          <a:solidFill>
-            <a:srgbClr val="F2F2F2"/>
-          </a:solidFill>
-          <a:ln>
-            <a:noFill/>
-          </a:ln>
-        </p:spPr>
-        <p:style>
-          <a:lnRef idx="1">
-            <a:schemeClr val="accent1"/>
-          </a:lnRef>
-          <a:fillRef idx="3">
-            <a:schemeClr val="accent1"/>
-          </a:fillRef>
-          <a:effectRef idx="2">
-            <a:schemeClr val="accent1"/>
-          </a:effectRef>
-          <a:fontRef idx="minor">
-            <a:schemeClr val="lt1"/>
-          </a:fontRef>
-        </p:style>
-        <p:txBody>
-          <a:bodyPr rtlCol="0" anchor="ctr"/>
-          <a:lstStyle/>
-          <a:p>
-            <a:pPr algn="ctr"/>
-          </a:p>
-        </p:txBody>
-      </p:sp>
-      <p:sp>
-        <p:nvSpPr>
-          <p:cNvPr id="22" name="Rectangle 21"/>
-          <p:cNvSpPr/>
-          <p:nvPr/>
-        </p:nvSpPr>
-        <p:spPr>
-          <a:xfrm>
-            <a:off x="2370277" y="4055364"/>
-            <a:ext cx="3624986" cy="64008"/>
-          </a:xfrm>
-          <a:prstGeom prst="rect">
-            <a:avLst/>
-          </a:prstGeom>
-          <a:solidFill>
-            <a:srgbClr val="095292"/>
-          </a:solidFill>
-          <a:ln>
-            <a:noFill/>
-          </a:ln>
-        </p:spPr>
-        <p:style>
-          <a:lnRef idx="1">
-            <a:schemeClr val="accent1"/>
-          </a:lnRef>
-          <a:fillRef idx="3">
-            <a:schemeClr val="accent1"/>
-          </a:fillRef>
-          <a:effectRef idx="2">
-            <a:schemeClr val="accent1"/>
-          </a:effectRef>
-          <a:fontRef idx="minor">
-            <a:schemeClr val="lt1"/>
-          </a:fontRef>
-        </p:style>
-        <p:txBody>
-          <a:bodyPr rtlCol="0" anchor="ctr"/>
-          <a:lstStyle/>
-          <a:p>
-            <a:pPr algn="ctr"/>
-          </a:p>
-        </p:txBody>
-      </p:sp>
-      <p:sp>
-        <p:nvSpPr>
-          <p:cNvPr id="23" name="Rectangle 22"/>
-          <p:cNvSpPr/>
-          <p:nvPr/>
-        </p:nvSpPr>
-        <p:spPr>
-          <a:xfrm>
-            <a:off x="2370277" y="4119372"/>
-            <a:ext cx="3624986" cy="27432"/>
-          </a:xfrm>
-          <a:prstGeom prst="rect">
-            <a:avLst/>
-          </a:prstGeom>
-          <a:solidFill>
-            <a:srgbClr val="FFD000"/>
-          </a:solidFill>
-          <a:ln>
-            <a:noFill/>
-          </a:ln>
-        </p:spPr>
-        <p:style>
-          <a:lnRef idx="1">
-            <a:schemeClr val="accent1"/>
-          </a:lnRef>
-          <a:fillRef idx="3">
-            <a:schemeClr val="accent1"/>
-          </a:fillRef>
-          <a:effectRef idx="2">
-            <a:schemeClr val="accent1"/>
-          </a:effectRef>
-          <a:fontRef idx="minor">
-            <a:schemeClr val="lt1"/>
-          </a:fontRef>
-        </p:style>
-        <p:txBody>
-          <a:bodyPr rtlCol="0" anchor="ctr"/>
-          <a:lstStyle/>
-          <a:p>
-            <a:pPr algn="ctr"/>
-          </a:p>
-        </p:txBody>
-      </p:sp>
-      <p:pic>
-        <p:nvPicPr>
-          <p:cNvPr id="24" name="Picture 23" descr="mermaid.png"/>
-          <p:cNvPicPr>
-            <a:picLocks noChangeAspect="1"/>
-          </p:cNvPicPr>
-          <p:nvPr/>
-        </p:nvPicPr>
-        <p:blipFill>
-          <a:blip r:embed="rId5"/>
-          <a:stretch>
-            <a:fillRect/>
-          </a:stretch>
-        </p:blipFill>
-        <p:spPr>
-          <a:xfrm>
-            <a:off x="3572408" y="4311396"/>
-            <a:ext cx="1220724" cy="1220724"/>
-          </a:xfrm>
-          <a:prstGeom prst="rect">
-            <a:avLst/>
-          </a:prstGeom>
-        </p:spPr>
-      </p:pic>
-      <p:sp>
-        <p:nvSpPr>
-          <p:cNvPr id="25" name="TextBox 24"/>
-          <p:cNvSpPr txBox="1"/>
-          <p:nvPr/>
-        </p:nvSpPr>
-        <p:spPr>
-          <a:xfrm>
-            <a:off x="2443429" y="5623560"/>
-            <a:ext cx="3478682" cy="621792"/>
-          </a:xfrm>
-          <a:prstGeom prst="rect">
-            <a:avLst/>
-          </a:prstGeom>
-          <a:noFill/>
-        </p:spPr>
-        <p:txBody>
-          <a:bodyPr wrap="square" anchor="t"/>
-          <a:lstStyle/>
-          <a:p>
-            <a:pPr algn="ctr"/>
-            <a:r>
-              <a:rPr sz="1300" b="1" i="0">
-                <a:solidFill>
-                  <a:srgbClr val="095292"/>
-                </a:solidFill>
-                <a:latin typeface="Calibri"/>
-              </a:rPr>
-              <a:t>Mermaid</a:t>
-            </a:r>
-          </a:p>
-          <a:p>
-            <a:pPr algn="ctr">
-              <a:spcBef>
-                <a:spcPts val="200"/>
-              </a:spcBef>
-            </a:pPr>
-            <a:r>
-              <a:rPr sz="1000" b="0" i="0">
-                <a:solidFill>
-                  <a:srgbClr val="666666"/>
-                </a:solidFill>
-                <a:latin typeface="Calibri"/>
-              </a:rPr>
-              <a:t>Codigo del diagrama</a:t>
-            </a:r>
-          </a:p>
-        </p:txBody>
-      </p:sp>
-      <p:sp>
-        <p:nvSpPr>
-          <p:cNvPr id="26" name="Rounded Rectangle 25"/>
-          <p:cNvSpPr/>
-          <p:nvPr/>
-        </p:nvSpPr>
-        <p:spPr>
-          <a:xfrm>
-            <a:off x="6196431" y="4055364"/>
-            <a:ext cx="3624986" cy="2299716"/>
-          </a:xfrm>
-          <a:prstGeom prst="roundRect">
-            <a:avLst>
-              <a:gd name="adj" fmla="val 12000"/>
-            </a:avLst>
-          </a:prstGeom>
-          <a:solidFill>
-            <a:srgbClr val="F2F2F2"/>
-          </a:solidFill>
-          <a:ln>
-            <a:noFill/>
-          </a:ln>
-        </p:spPr>
-        <p:style>
-          <a:lnRef idx="1">
-            <a:schemeClr val="accent1"/>
-          </a:lnRef>
-          <a:fillRef idx="3">
-            <a:schemeClr val="accent1"/>
-          </a:fillRef>
-          <a:effectRef idx="2">
-            <a:schemeClr val="accent1"/>
-          </a:effectRef>
-          <a:fontRef idx="minor">
-            <a:schemeClr val="lt1"/>
-          </a:fontRef>
-        </p:style>
-        <p:txBody>
-          <a:bodyPr rtlCol="0" anchor="ctr"/>
-          <a:lstStyle/>
-          <a:p>
-            <a:pPr algn="ctr"/>
-          </a:p>
-        </p:txBody>
-      </p:sp>
-      <p:sp>
-        <p:nvSpPr>
-          <p:cNvPr id="27" name="Rectangle 26"/>
-          <p:cNvSpPr/>
-          <p:nvPr/>
-        </p:nvSpPr>
-        <p:spPr>
-          <a:xfrm>
-            <a:off x="6196431" y="4055364"/>
-            <a:ext cx="3624986" cy="64008"/>
-          </a:xfrm>
-          <a:prstGeom prst="rect">
-            <a:avLst/>
-          </a:prstGeom>
-          <a:solidFill>
-            <a:srgbClr val="095292"/>
-          </a:solidFill>
-          <a:ln>
-            <a:noFill/>
-          </a:ln>
-        </p:spPr>
-        <p:style>
-          <a:lnRef idx="1">
-            <a:schemeClr val="accent1"/>
-          </a:lnRef>
-          <a:fillRef idx="3">
-            <a:schemeClr val="accent1"/>
-          </a:fillRef>
-          <a:effectRef idx="2">
-            <a:schemeClr val="accent1"/>
-          </a:effectRef>
-          <a:fontRef idx="minor">
-            <a:schemeClr val="lt1"/>
-          </a:fontRef>
-        </p:style>
-        <p:txBody>
-          <a:bodyPr rtlCol="0" anchor="ctr"/>
-          <a:lstStyle/>
-          <a:p>
-            <a:pPr algn="ctr"/>
-          </a:p>
-        </p:txBody>
-      </p:sp>
-      <p:sp>
-        <p:nvSpPr>
-          <p:cNvPr id="28" name="Rectangle 27"/>
-          <p:cNvSpPr/>
-          <p:nvPr/>
-        </p:nvSpPr>
-        <p:spPr>
-          <a:xfrm>
-            <a:off x="6196431" y="4119372"/>
-            <a:ext cx="3624986" cy="27432"/>
-          </a:xfrm>
-          <a:prstGeom prst="rect">
-            <a:avLst/>
-          </a:prstGeom>
-          <a:solidFill>
-            <a:srgbClr val="FFD000"/>
-          </a:solidFill>
-          <a:ln>
-            <a:noFill/>
-          </a:ln>
-        </p:spPr>
-        <p:style>
-          <a:lnRef idx="1">
-            <a:schemeClr val="accent1"/>
-          </a:lnRef>
-          <a:fillRef idx="3">
-            <a:schemeClr val="accent1"/>
-          </a:fillRef>
-          <a:effectRef idx="2">
-            <a:schemeClr val="accent1"/>
-          </a:effectRef>
-          <a:fontRef idx="minor">
-            <a:schemeClr val="lt1"/>
-          </a:fontRef>
-        </p:style>
-        <p:txBody>
-          <a:bodyPr rtlCol="0" anchor="ctr"/>
-          <a:lstStyle/>
-          <a:p>
-            <a:pPr algn="ctr"/>
-          </a:p>
-        </p:txBody>
-      </p:sp>
-      <p:pic>
-        <p:nvPicPr>
-          <p:cNvPr id="29" name="Picture 28" descr="examlab.png"/>
-          <p:cNvPicPr>
-            <a:picLocks noChangeAspect="1"/>
-          </p:cNvPicPr>
-          <p:nvPr/>
-        </p:nvPicPr>
-        <p:blipFill>
-          <a:blip r:embed="rId6"/>
-          <a:stretch>
-            <a:fillRect/>
-          </a:stretch>
-        </p:blipFill>
-        <p:spPr>
-          <a:xfrm>
-            <a:off x="7398562" y="4311396"/>
-            <a:ext cx="1220724" cy="1220724"/>
-          </a:xfrm>
-          <a:prstGeom prst="rect">
-            <a:avLst/>
-          </a:prstGeom>
-        </p:spPr>
-      </p:pic>
-      <p:sp>
-        <p:nvSpPr>
-          <p:cNvPr id="30" name="TextBox 29"/>
-          <p:cNvSpPr txBox="1"/>
-          <p:nvPr/>
-        </p:nvSpPr>
-        <p:spPr>
-          <a:xfrm>
-            <a:off x="6269583" y="5623560"/>
-            <a:ext cx="3478682" cy="621792"/>
-          </a:xfrm>
-          <a:prstGeom prst="rect">
-            <a:avLst/>
-          </a:prstGeom>
-          <a:noFill/>
-        </p:spPr>
-        <p:txBody>
-          <a:bodyPr wrap="square" anchor="t"/>
-          <a:lstStyle/>
-          <a:p>
-            <a:pPr algn="ctr"/>
-            <a:r>
-              <a:rPr sz="1300" b="1" i="0">
-                <a:solidFill>
-                  <a:srgbClr val="095292"/>
-                </a:solidFill>
-                <a:latin typeface="Calibri"/>
-              </a:rPr>
-              <a:t>la plataforma del curso</a:t>
-            </a:r>
-          </a:p>
-          <a:p>
-            <a:pPr algn="ctr">
-              <a:spcBef>
-                <a:spcPts val="200"/>
-              </a:spcBef>
-            </a:pPr>
-            <a:r>
-              <a:rPr sz="1000" b="0" i="0">
-                <a:solidFill>
-                  <a:srgbClr val="666666"/>
-                </a:solidFill>
-                <a:latin typeface="Calibri"/>
-              </a:rPr>
-              <a:t>Donde se entrega</a:t>
-            </a:r>
-          </a:p>
-        </p:txBody>
-      </p:sp>
-      <p:sp>
-        <p:nvSpPr>
-          <p:cNvPr id="31" name="TextBox 30"/>
+              <a:rPr sz="1300" b="0" i="0">
+                <a:solidFill>
+                  <a:srgbClr val="333333"/>
+                </a:solidFill>
+                <a:latin typeface="Calibri"/>
+              </a:rPr>
+              <a:t>Exporta tambien la imagen a la carpeta de tu Proyecto Integrador. Esa copia es para tu informe; no reemplaza la respuesta en la plataforma.</a:t>
+            </a:r>
+          </a:p>
+        </p:txBody>
+      </p:sp>
+      <p:sp>
+        <p:nvSpPr>
+          <p:cNvPr id="22" name="TextBox 21"/>
           <p:cNvSpPr txBox="1"/>
           <p:nvPr/>
         </p:nvSpPr>
